--- a/assets/images/adventures/silentspire-manor/interior/layout.pptx
+++ b/assets/images/adventures/silentspire-manor/interior/layout.pptx
@@ -243,7 +243,7 @@
           <a:p>
             <a:fld id="{30771F8C-44C0-4AB0-AC89-AD39347F46BF}" type="datetimeFigureOut">
               <a:rPr lang="en-US" smtClean="0"/>
-              <a:t>7/18/2026</a:t>
+              <a:t>7/20/2026</a:t>
             </a:fld>
             <a:endParaRPr lang="en-US"/>
           </a:p>
@@ -413,7 +413,7 @@
           <a:p>
             <a:fld id="{30771F8C-44C0-4AB0-AC89-AD39347F46BF}" type="datetimeFigureOut">
               <a:rPr lang="en-US" smtClean="0"/>
-              <a:t>7/18/2026</a:t>
+              <a:t>7/20/2026</a:t>
             </a:fld>
             <a:endParaRPr lang="en-US"/>
           </a:p>
@@ -593,7 +593,7 @@
           <a:p>
             <a:fld id="{30771F8C-44C0-4AB0-AC89-AD39347F46BF}" type="datetimeFigureOut">
               <a:rPr lang="en-US" smtClean="0"/>
-              <a:t>7/18/2026</a:t>
+              <a:t>7/20/2026</a:t>
             </a:fld>
             <a:endParaRPr lang="en-US"/>
           </a:p>
@@ -763,7 +763,7 @@
           <a:p>
             <a:fld id="{30771F8C-44C0-4AB0-AC89-AD39347F46BF}" type="datetimeFigureOut">
               <a:rPr lang="en-US" smtClean="0"/>
-              <a:t>7/18/2026</a:t>
+              <a:t>7/20/2026</a:t>
             </a:fld>
             <a:endParaRPr lang="en-US"/>
           </a:p>
@@ -1009,7 +1009,7 @@
           <a:p>
             <a:fld id="{30771F8C-44C0-4AB0-AC89-AD39347F46BF}" type="datetimeFigureOut">
               <a:rPr lang="en-US" smtClean="0"/>
-              <a:t>7/18/2026</a:t>
+              <a:t>7/20/2026</a:t>
             </a:fld>
             <a:endParaRPr lang="en-US"/>
           </a:p>
@@ -1241,7 +1241,7 @@
           <a:p>
             <a:fld id="{30771F8C-44C0-4AB0-AC89-AD39347F46BF}" type="datetimeFigureOut">
               <a:rPr lang="en-US" smtClean="0"/>
-              <a:t>7/18/2026</a:t>
+              <a:t>7/20/2026</a:t>
             </a:fld>
             <a:endParaRPr lang="en-US"/>
           </a:p>
@@ -1608,7 +1608,7 @@
           <a:p>
             <a:fld id="{30771F8C-44C0-4AB0-AC89-AD39347F46BF}" type="datetimeFigureOut">
               <a:rPr lang="en-US" smtClean="0"/>
-              <a:t>7/18/2026</a:t>
+              <a:t>7/20/2026</a:t>
             </a:fld>
             <a:endParaRPr lang="en-US"/>
           </a:p>
@@ -1726,7 +1726,7 @@
           <a:p>
             <a:fld id="{30771F8C-44C0-4AB0-AC89-AD39347F46BF}" type="datetimeFigureOut">
               <a:rPr lang="en-US" smtClean="0"/>
-              <a:t>7/18/2026</a:t>
+              <a:t>7/20/2026</a:t>
             </a:fld>
             <a:endParaRPr lang="en-US"/>
           </a:p>
@@ -1821,7 +1821,7 @@
           <a:p>
             <a:fld id="{30771F8C-44C0-4AB0-AC89-AD39347F46BF}" type="datetimeFigureOut">
               <a:rPr lang="en-US" smtClean="0"/>
-              <a:t>7/18/2026</a:t>
+              <a:t>7/20/2026</a:t>
             </a:fld>
             <a:endParaRPr lang="en-US"/>
           </a:p>
@@ -2098,7 +2098,7 @@
           <a:p>
             <a:fld id="{30771F8C-44C0-4AB0-AC89-AD39347F46BF}" type="datetimeFigureOut">
               <a:rPr lang="en-US" smtClean="0"/>
-              <a:t>7/18/2026</a:t>
+              <a:t>7/20/2026</a:t>
             </a:fld>
             <a:endParaRPr lang="en-US"/>
           </a:p>
@@ -2355,7 +2355,7 @@
           <a:p>
             <a:fld id="{30771F8C-44C0-4AB0-AC89-AD39347F46BF}" type="datetimeFigureOut">
               <a:rPr lang="en-US" smtClean="0"/>
-              <a:t>7/18/2026</a:t>
+              <a:t>7/20/2026</a:t>
             </a:fld>
             <a:endParaRPr lang="en-US"/>
           </a:p>
@@ -2568,7 +2568,7 @@
           <a:p>
             <a:fld id="{30771F8C-44C0-4AB0-AC89-AD39347F46BF}" type="datetimeFigureOut">
               <a:rPr lang="en-US" smtClean="0"/>
-              <a:t>7/18/2026</a:t>
+              <a:t>7/20/2026</a:t>
             </a:fld>
             <a:endParaRPr lang="en-US"/>
           </a:p>
@@ -3030,7 +3030,7 @@
         </p:nvSpPr>
         <p:spPr>
           <a:xfrm>
-            <a:off x="210889" y="244760"/>
+            <a:off x="209889" y="245553"/>
             <a:ext cx="8652116" cy="4660330"/>
           </a:xfrm>
           <a:prstGeom prst="rect">
@@ -3076,8 +3076,8 @@
         </p:nvSpPr>
         <p:spPr>
           <a:xfrm>
-            <a:off x="3979217" y="4898740"/>
-            <a:ext cx="1185566" cy="244760"/>
+            <a:off x="3979217" y="4904432"/>
+            <a:ext cx="1185566" cy="239068"/>
           </a:xfrm>
           <a:prstGeom prst="rect">
             <a:avLst/>
@@ -4343,8 +4343,8 @@
         </p:nvSpPr>
         <p:spPr>
           <a:xfrm>
-            <a:off x="245942" y="1475356"/>
-            <a:ext cx="403466" cy="47740"/>
+            <a:off x="206032" y="1767459"/>
+            <a:ext cx="189863" cy="45719"/>
           </a:xfrm>
           <a:prstGeom prst="rect">
             <a:avLst/>
@@ -4389,8 +4389,8 @@
         </p:nvSpPr>
         <p:spPr>
           <a:xfrm>
-            <a:off x="1158634" y="1475356"/>
-            <a:ext cx="403466" cy="47740"/>
+            <a:off x="854236" y="1765439"/>
+            <a:ext cx="707864" cy="45719"/>
           </a:xfrm>
           <a:prstGeom prst="rect">
             <a:avLst/>
@@ -4435,7 +4435,7 @@
         </p:nvSpPr>
         <p:spPr>
           <a:xfrm rot="16200000">
-            <a:off x="407497" y="1244613"/>
+            <a:off x="117411" y="1534696"/>
             <a:ext cx="509226" cy="47741"/>
           </a:xfrm>
           <a:prstGeom prst="rect">
@@ -4481,7 +4481,7 @@
         </p:nvSpPr>
         <p:spPr>
           <a:xfrm>
-            <a:off x="149179" y="1013870"/>
+            <a:off x="-153516" y="1303953"/>
             <a:ext cx="1000458" cy="1000458"/>
           </a:xfrm>
           <a:prstGeom prst="arc">
@@ -4578,53 +4578,13 @@
       </p:sp>
       <p:sp>
         <p:nvSpPr>
-          <p:cNvPr id="62" name="TextBox 61"/>
-          <p:cNvSpPr txBox="1"/>
-          <p:nvPr/>
-        </p:nvSpPr>
-        <p:spPr>
-          <a:xfrm>
-            <a:off x="408251" y="396408"/>
-            <a:ext cx="944299" cy="461665"/>
-          </a:xfrm>
-          <a:prstGeom prst="rect">
-            <a:avLst/>
-          </a:prstGeom>
-          <a:noFill/>
-        </p:spPr>
-        <p:txBody>
-          <a:bodyPr wrap="square" rtlCol="0">
-            <a:spAutoFit/>
-          </a:bodyPr>
-          <a:lstStyle/>
-          <a:p>
-            <a:r>
-              <a:rPr lang="ro-RO" sz="1200" dirty="0" smtClean="0">
-                <a:solidFill>
-                  <a:srgbClr val="492207"/>
-                </a:solidFill>
-                <a:latin typeface="Libre Baskerville" panose="02000000000000000000" pitchFamily="2" charset="0"/>
-              </a:rPr>
-              <a:t>Small Bedroom</a:t>
-            </a:r>
-            <a:endParaRPr lang="en-US" sz="1200" dirty="0">
-              <a:solidFill>
-                <a:srgbClr val="492207"/>
-              </a:solidFill>
-              <a:latin typeface="Libre Baskerville" panose="02000000000000000000" pitchFamily="2" charset="0"/>
-            </a:endParaRPr>
-          </a:p>
-        </p:txBody>
-      </p:sp>
-      <p:sp>
-        <p:nvSpPr>
           <p:cNvPr id="63" name="TextBox 62"/>
           <p:cNvSpPr txBox="1"/>
           <p:nvPr/>
         </p:nvSpPr>
         <p:spPr>
           <a:xfrm>
-            <a:off x="2025013" y="488740"/>
+            <a:off x="395895" y="911753"/>
             <a:ext cx="944299" cy="276999"/>
           </a:xfrm>
           <a:prstGeom prst="rect">
@@ -6781,7 +6741,7 @@
         <p:grpSpPr>
           <a:xfrm>
             <a:off x="206032" y="4260850"/>
-            <a:ext cx="1323707" cy="644240"/>
+            <a:ext cx="943605" cy="644240"/>
             <a:chOff x="206032" y="4254500"/>
             <a:chExt cx="1323707" cy="644240"/>
           </a:xfrm>
@@ -7186,8 +7146,8 @@
         </p:nvSpPr>
         <p:spPr>
           <a:xfrm>
-            <a:off x="1995631" y="4495992"/>
-            <a:ext cx="1310397" cy="376299"/>
+            <a:off x="1394232" y="3919206"/>
+            <a:ext cx="2350915" cy="723912"/>
           </a:xfrm>
           <a:prstGeom prst="rect">
             <a:avLst/>
@@ -7227,7 +7187,7 @@
                 </a:solidFill>
                 <a:latin typeface="Libre Baskerville" panose="02000000000000000000" pitchFamily="2" charset="0"/>
               </a:rPr>
-              <a:t>Bookcase</a:t>
+              <a:t>Dining Table</a:t>
             </a:r>
             <a:endParaRPr lang="en-US" dirty="0">
               <a:solidFill>
@@ -7860,8 +7820,8 @@
         </p:nvGrpSpPr>
         <p:grpSpPr>
           <a:xfrm>
-            <a:off x="2873773" y="858073"/>
-            <a:ext cx="367513" cy="2287396"/>
+            <a:off x="1327762" y="687030"/>
+            <a:ext cx="229766" cy="717513"/>
             <a:chOff x="2873773" y="858073"/>
             <a:chExt cx="367513" cy="2710004"/>
           </a:xfrm>
@@ -7920,8 +7880,8 @@
           </p:nvSpPr>
           <p:spPr>
             <a:xfrm>
-              <a:off x="3062651" y="858073"/>
-              <a:ext cx="178635" cy="2710004"/>
+              <a:off x="3096246" y="858073"/>
+              <a:ext cx="145040" cy="2710004"/>
             </a:xfrm>
             <a:prstGeom prst="rect">
               <a:avLst/>
@@ -8105,7 +8065,7 @@
         <p:spPr>
           <a:xfrm>
             <a:off x="6933610" y="4634492"/>
-            <a:ext cx="45719" cy="253976"/>
+            <a:ext cx="45719" cy="270598"/>
           </a:xfrm>
           <a:prstGeom prst="rect">
             <a:avLst/>
@@ -8150,8 +8110,8 @@
         </p:nvGrpSpPr>
         <p:grpSpPr>
           <a:xfrm>
-            <a:off x="2836912" y="3174001"/>
-            <a:ext cx="377756" cy="377756"/>
+            <a:off x="1244401" y="1442365"/>
+            <a:ext cx="281090" cy="281090"/>
             <a:chOff x="2836912" y="3174001"/>
             <a:chExt cx="377756" cy="377756"/>
           </a:xfrm>
@@ -8173,7 +8133,7 @@
             <a:solidFill>
               <a:srgbClr val="492207"/>
             </a:solidFill>
-            <a:ln>
+            <a:ln w="57150">
               <a:solidFill>
                 <a:srgbClr val="000000">
                   <a:alpha val="30196"/>
@@ -9399,7 +9359,7 @@
         </p:nvGrpSpPr>
         <p:grpSpPr>
           <a:xfrm rot="5400000">
-            <a:off x="5749308" y="382235"/>
+            <a:off x="5743002" y="389378"/>
             <a:ext cx="1323707" cy="1030308"/>
             <a:chOff x="206032" y="4254498"/>
             <a:chExt cx="1323707" cy="644242"/>
@@ -9797,6 +9757,3389 @@
           </p:txBody>
         </p:sp>
       </p:grpSp>
+      <p:sp>
+        <p:nvSpPr>
+          <p:cNvPr id="180" name="Rectangle 179"/>
+          <p:cNvSpPr/>
+          <p:nvPr/>
+        </p:nvSpPr>
+        <p:spPr>
+          <a:xfrm>
+            <a:off x="234347" y="268747"/>
+            <a:ext cx="1089273" cy="376299"/>
+          </a:xfrm>
+          <a:prstGeom prst="rect">
+            <a:avLst/>
+          </a:prstGeom>
+          <a:solidFill>
+            <a:srgbClr val="7F7F7F"/>
+          </a:solidFill>
+          <a:ln>
+            <a:noFill/>
+          </a:ln>
+        </p:spPr>
+        <p:style>
+          <a:lnRef idx="2">
+            <a:schemeClr val="accent1">
+              <a:shade val="50000"/>
+            </a:schemeClr>
+          </a:lnRef>
+          <a:fillRef idx="1">
+            <a:schemeClr val="accent1"/>
+          </a:fillRef>
+          <a:effectRef idx="0">
+            <a:schemeClr val="accent1"/>
+          </a:effectRef>
+          <a:fontRef idx="minor">
+            <a:schemeClr val="lt1"/>
+          </a:fontRef>
+        </p:style>
+        <p:txBody>
+          <a:bodyPr rtlCol="0" anchor="ctr"/>
+          <a:lstStyle/>
+          <a:p>
+            <a:pPr algn="ctr"/>
+            <a:r>
+              <a:rPr lang="ro-RO" dirty="0" smtClean="0">
+                <a:solidFill>
+                  <a:schemeClr val="bg1">
+                    <a:lumMod val="65000"/>
+                  </a:schemeClr>
+                </a:solidFill>
+                <a:latin typeface="Libre Baskerville" panose="02000000000000000000" pitchFamily="2" charset="0"/>
+              </a:rPr>
+              <a:t>Hearth</a:t>
+            </a:r>
+            <a:endParaRPr lang="en-US" dirty="0">
+              <a:solidFill>
+                <a:schemeClr val="bg1">
+                  <a:lumMod val="65000"/>
+                </a:schemeClr>
+              </a:solidFill>
+              <a:latin typeface="Libre Baskerville" panose="02000000000000000000" pitchFamily="2" charset="0"/>
+            </a:endParaRPr>
+          </a:p>
+        </p:txBody>
+      </p:sp>
+      <p:sp>
+        <p:nvSpPr>
+          <p:cNvPr id="182" name="Rectangle 181"/>
+          <p:cNvSpPr/>
+          <p:nvPr/>
+        </p:nvSpPr>
+        <p:spPr>
+          <a:xfrm flipH="1">
+            <a:off x="2861180" y="344364"/>
+            <a:ext cx="49402" cy="100860"/>
+          </a:xfrm>
+          <a:prstGeom prst="rect">
+            <a:avLst/>
+          </a:prstGeom>
+          <a:solidFill>
+            <a:srgbClr val="492207"/>
+          </a:solidFill>
+          <a:ln>
+            <a:noFill/>
+          </a:ln>
+        </p:spPr>
+        <p:style>
+          <a:lnRef idx="2">
+            <a:schemeClr val="accent1">
+              <a:shade val="50000"/>
+            </a:schemeClr>
+          </a:lnRef>
+          <a:fillRef idx="1">
+            <a:schemeClr val="accent1"/>
+          </a:fillRef>
+          <a:effectRef idx="0">
+            <a:schemeClr val="accent1"/>
+          </a:effectRef>
+          <a:fontRef idx="minor">
+            <a:schemeClr val="lt1"/>
+          </a:fontRef>
+        </p:style>
+        <p:txBody>
+          <a:bodyPr rtlCol="0" anchor="ctr"/>
+          <a:lstStyle/>
+          <a:p>
+            <a:pPr algn="ctr"/>
+            <a:endParaRPr lang="en-US"/>
+          </a:p>
+        </p:txBody>
+      </p:sp>
+      <p:grpSp>
+        <p:nvGrpSpPr>
+          <p:cNvPr id="2" name="Group 1"/>
+          <p:cNvGrpSpPr/>
+          <p:nvPr/>
+        </p:nvGrpSpPr>
+        <p:grpSpPr>
+          <a:xfrm>
+            <a:off x="1600288" y="435595"/>
+            <a:ext cx="1310397" cy="231807"/>
+            <a:chOff x="1600288" y="435595"/>
+            <a:chExt cx="1310397" cy="231807"/>
+          </a:xfrm>
+        </p:grpSpPr>
+        <p:sp>
+          <p:nvSpPr>
+            <p:cNvPr id="181" name="Rectangle 180"/>
+            <p:cNvSpPr/>
+            <p:nvPr/>
+          </p:nvSpPr>
+          <p:spPr>
+            <a:xfrm>
+              <a:off x="1600288" y="435595"/>
+              <a:ext cx="1310397" cy="231807"/>
+            </a:xfrm>
+            <a:prstGeom prst="rect">
+              <a:avLst/>
+            </a:prstGeom>
+            <a:solidFill>
+              <a:srgbClr val="492207"/>
+            </a:solidFill>
+            <a:ln>
+              <a:noFill/>
+            </a:ln>
+          </p:spPr>
+          <p:style>
+            <a:lnRef idx="2">
+              <a:schemeClr val="accent1">
+                <a:shade val="50000"/>
+              </a:schemeClr>
+            </a:lnRef>
+            <a:fillRef idx="1">
+              <a:schemeClr val="accent1"/>
+            </a:fillRef>
+            <a:effectRef idx="0">
+              <a:schemeClr val="accent1"/>
+            </a:effectRef>
+            <a:fontRef idx="minor">
+              <a:schemeClr val="lt1"/>
+            </a:fontRef>
+          </p:style>
+          <p:txBody>
+            <a:bodyPr rtlCol="0" anchor="ctr"/>
+            <a:lstStyle/>
+            <a:p>
+              <a:pPr algn="ctr"/>
+              <a:r>
+                <a:rPr lang="ro-RO" dirty="0" smtClean="0">
+                  <a:solidFill>
+                    <a:srgbClr val="622E0A"/>
+                  </a:solidFill>
+                  <a:latin typeface="Libre Baskerville" panose="02000000000000000000" pitchFamily="2" charset="0"/>
+                </a:rPr>
+                <a:t>Bar</a:t>
+              </a:r>
+              <a:endParaRPr lang="en-US" dirty="0">
+                <a:solidFill>
+                  <a:srgbClr val="622E0A"/>
+                </a:solidFill>
+                <a:latin typeface="Libre Baskerville" panose="02000000000000000000" pitchFamily="2" charset="0"/>
+              </a:endParaRPr>
+            </a:p>
+          </p:txBody>
+        </p:sp>
+        <p:sp>
+          <p:nvSpPr>
+            <p:cNvPr id="183" name="Rectangle 182"/>
+            <p:cNvSpPr/>
+            <p:nvPr/>
+          </p:nvSpPr>
+          <p:spPr>
+            <a:xfrm>
+              <a:off x="1630117" y="581981"/>
+              <a:ext cx="1274745" cy="85421"/>
+            </a:xfrm>
+            <a:prstGeom prst="rect">
+              <a:avLst/>
+            </a:prstGeom>
+            <a:solidFill>
+              <a:srgbClr val="000000">
+                <a:alpha val="20000"/>
+              </a:srgbClr>
+            </a:solidFill>
+            <a:ln>
+              <a:noFill/>
+            </a:ln>
+          </p:spPr>
+          <p:style>
+            <a:lnRef idx="2">
+              <a:schemeClr val="accent1">
+                <a:shade val="50000"/>
+              </a:schemeClr>
+            </a:lnRef>
+            <a:fillRef idx="1">
+              <a:schemeClr val="accent1"/>
+            </a:fillRef>
+            <a:effectRef idx="0">
+              <a:schemeClr val="accent1"/>
+            </a:effectRef>
+            <a:fontRef idx="minor">
+              <a:schemeClr val="lt1"/>
+            </a:fontRef>
+          </p:style>
+          <p:txBody>
+            <a:bodyPr rtlCol="0" anchor="ctr"/>
+            <a:lstStyle/>
+            <a:p>
+              <a:pPr algn="ctr"/>
+              <a:endParaRPr lang="en-US" dirty="0"/>
+            </a:p>
+          </p:txBody>
+        </p:sp>
+      </p:grpSp>
+      <p:sp>
+        <p:nvSpPr>
+          <p:cNvPr id="196" name="Oval 195"/>
+          <p:cNvSpPr/>
+          <p:nvPr/>
+        </p:nvSpPr>
+        <p:spPr>
+          <a:xfrm>
+            <a:off x="1714817" y="710441"/>
+            <a:ext cx="109410" cy="109410"/>
+          </a:xfrm>
+          <a:prstGeom prst="ellipse">
+            <a:avLst/>
+          </a:prstGeom>
+          <a:solidFill>
+            <a:srgbClr val="492207"/>
+          </a:solidFill>
+          <a:ln w="57150">
+            <a:solidFill>
+              <a:srgbClr val="000000">
+                <a:alpha val="30196"/>
+              </a:srgbClr>
+            </a:solidFill>
+          </a:ln>
+        </p:spPr>
+        <p:style>
+          <a:lnRef idx="2">
+            <a:schemeClr val="accent1">
+              <a:shade val="50000"/>
+            </a:schemeClr>
+          </a:lnRef>
+          <a:fillRef idx="1">
+            <a:schemeClr val="accent1"/>
+          </a:fillRef>
+          <a:effectRef idx="0">
+            <a:schemeClr val="accent1"/>
+          </a:effectRef>
+          <a:fontRef idx="minor">
+            <a:schemeClr val="lt1"/>
+          </a:fontRef>
+        </p:style>
+        <p:txBody>
+          <a:bodyPr rtlCol="0" anchor="ctr"/>
+          <a:lstStyle/>
+          <a:p>
+            <a:pPr algn="ctr"/>
+            <a:endParaRPr lang="en-US" dirty="0"/>
+          </a:p>
+        </p:txBody>
+      </p:sp>
+      <p:sp>
+        <p:nvSpPr>
+          <p:cNvPr id="198" name="Oval 197"/>
+          <p:cNvSpPr/>
+          <p:nvPr/>
+        </p:nvSpPr>
+        <p:spPr>
+          <a:xfrm>
+            <a:off x="1910019" y="694876"/>
+            <a:ext cx="109410" cy="109410"/>
+          </a:xfrm>
+          <a:prstGeom prst="ellipse">
+            <a:avLst/>
+          </a:prstGeom>
+          <a:solidFill>
+            <a:srgbClr val="492207"/>
+          </a:solidFill>
+          <a:ln w="57150">
+            <a:solidFill>
+              <a:srgbClr val="000000">
+                <a:alpha val="30196"/>
+              </a:srgbClr>
+            </a:solidFill>
+          </a:ln>
+        </p:spPr>
+        <p:style>
+          <a:lnRef idx="2">
+            <a:schemeClr val="accent1">
+              <a:shade val="50000"/>
+            </a:schemeClr>
+          </a:lnRef>
+          <a:fillRef idx="1">
+            <a:schemeClr val="accent1"/>
+          </a:fillRef>
+          <a:effectRef idx="0">
+            <a:schemeClr val="accent1"/>
+          </a:effectRef>
+          <a:fontRef idx="minor">
+            <a:schemeClr val="lt1"/>
+          </a:fontRef>
+        </p:style>
+        <p:txBody>
+          <a:bodyPr rtlCol="0" anchor="ctr"/>
+          <a:lstStyle/>
+          <a:p>
+            <a:pPr algn="ctr"/>
+            <a:endParaRPr lang="en-US" dirty="0"/>
+          </a:p>
+        </p:txBody>
+      </p:sp>
+      <p:sp>
+        <p:nvSpPr>
+          <p:cNvPr id="199" name="Oval 198"/>
+          <p:cNvSpPr/>
+          <p:nvPr/>
+        </p:nvSpPr>
+        <p:spPr>
+          <a:xfrm>
+            <a:off x="2086776" y="741415"/>
+            <a:ext cx="109410" cy="109410"/>
+          </a:xfrm>
+          <a:prstGeom prst="ellipse">
+            <a:avLst/>
+          </a:prstGeom>
+          <a:solidFill>
+            <a:srgbClr val="492207"/>
+          </a:solidFill>
+          <a:ln w="57150">
+            <a:solidFill>
+              <a:srgbClr val="000000">
+                <a:alpha val="30196"/>
+              </a:srgbClr>
+            </a:solidFill>
+          </a:ln>
+        </p:spPr>
+        <p:style>
+          <a:lnRef idx="2">
+            <a:schemeClr val="accent1">
+              <a:shade val="50000"/>
+            </a:schemeClr>
+          </a:lnRef>
+          <a:fillRef idx="1">
+            <a:schemeClr val="accent1"/>
+          </a:fillRef>
+          <a:effectRef idx="0">
+            <a:schemeClr val="accent1"/>
+          </a:effectRef>
+          <a:fontRef idx="minor">
+            <a:schemeClr val="lt1"/>
+          </a:fontRef>
+        </p:style>
+        <p:txBody>
+          <a:bodyPr rtlCol="0" anchor="ctr"/>
+          <a:lstStyle/>
+          <a:p>
+            <a:pPr algn="ctr"/>
+            <a:endParaRPr lang="en-US" dirty="0"/>
+          </a:p>
+        </p:txBody>
+      </p:sp>
+      <p:sp>
+        <p:nvSpPr>
+          <p:cNvPr id="200" name="Oval 199"/>
+          <p:cNvSpPr/>
+          <p:nvPr/>
+        </p:nvSpPr>
+        <p:spPr>
+          <a:xfrm>
+            <a:off x="2262193" y="710441"/>
+            <a:ext cx="109410" cy="109410"/>
+          </a:xfrm>
+          <a:prstGeom prst="ellipse">
+            <a:avLst/>
+          </a:prstGeom>
+          <a:solidFill>
+            <a:srgbClr val="492207"/>
+          </a:solidFill>
+          <a:ln w="57150">
+            <a:solidFill>
+              <a:srgbClr val="000000">
+                <a:alpha val="30196"/>
+              </a:srgbClr>
+            </a:solidFill>
+          </a:ln>
+        </p:spPr>
+        <p:style>
+          <a:lnRef idx="2">
+            <a:schemeClr val="accent1">
+              <a:shade val="50000"/>
+            </a:schemeClr>
+          </a:lnRef>
+          <a:fillRef idx="1">
+            <a:schemeClr val="accent1"/>
+          </a:fillRef>
+          <a:effectRef idx="0">
+            <a:schemeClr val="accent1"/>
+          </a:effectRef>
+          <a:fontRef idx="minor">
+            <a:schemeClr val="lt1"/>
+          </a:fontRef>
+        </p:style>
+        <p:txBody>
+          <a:bodyPr rtlCol="0" anchor="ctr"/>
+          <a:lstStyle/>
+          <a:p>
+            <a:pPr algn="ctr"/>
+            <a:endParaRPr lang="en-US" dirty="0"/>
+          </a:p>
+        </p:txBody>
+      </p:sp>
+      <p:sp>
+        <p:nvSpPr>
+          <p:cNvPr id="201" name="Oval 200"/>
+          <p:cNvSpPr/>
+          <p:nvPr/>
+        </p:nvSpPr>
+        <p:spPr>
+          <a:xfrm>
+            <a:off x="2455026" y="710441"/>
+            <a:ext cx="109410" cy="109410"/>
+          </a:xfrm>
+          <a:prstGeom prst="ellipse">
+            <a:avLst/>
+          </a:prstGeom>
+          <a:solidFill>
+            <a:srgbClr val="492207"/>
+          </a:solidFill>
+          <a:ln w="57150">
+            <a:solidFill>
+              <a:srgbClr val="000000">
+                <a:alpha val="30196"/>
+              </a:srgbClr>
+            </a:solidFill>
+          </a:ln>
+        </p:spPr>
+        <p:style>
+          <a:lnRef idx="2">
+            <a:schemeClr val="accent1">
+              <a:shade val="50000"/>
+            </a:schemeClr>
+          </a:lnRef>
+          <a:fillRef idx="1">
+            <a:schemeClr val="accent1"/>
+          </a:fillRef>
+          <a:effectRef idx="0">
+            <a:schemeClr val="accent1"/>
+          </a:effectRef>
+          <a:fontRef idx="minor">
+            <a:schemeClr val="lt1"/>
+          </a:fontRef>
+        </p:style>
+        <p:txBody>
+          <a:bodyPr rtlCol="0" anchor="ctr"/>
+          <a:lstStyle/>
+          <a:p>
+            <a:pPr algn="ctr"/>
+            <a:endParaRPr lang="en-US" dirty="0"/>
+          </a:p>
+        </p:txBody>
+      </p:sp>
+      <p:sp>
+        <p:nvSpPr>
+          <p:cNvPr id="202" name="Oval 201"/>
+          <p:cNvSpPr/>
+          <p:nvPr/>
+        </p:nvSpPr>
+        <p:spPr>
+          <a:xfrm>
+            <a:off x="2654606" y="710441"/>
+            <a:ext cx="109410" cy="109410"/>
+          </a:xfrm>
+          <a:prstGeom prst="ellipse">
+            <a:avLst/>
+          </a:prstGeom>
+          <a:solidFill>
+            <a:srgbClr val="492207"/>
+          </a:solidFill>
+          <a:ln w="57150">
+            <a:solidFill>
+              <a:srgbClr val="000000">
+                <a:alpha val="30196"/>
+              </a:srgbClr>
+            </a:solidFill>
+          </a:ln>
+        </p:spPr>
+        <p:style>
+          <a:lnRef idx="2">
+            <a:schemeClr val="accent1">
+              <a:shade val="50000"/>
+            </a:schemeClr>
+          </a:lnRef>
+          <a:fillRef idx="1">
+            <a:schemeClr val="accent1"/>
+          </a:fillRef>
+          <a:effectRef idx="0">
+            <a:schemeClr val="accent1"/>
+          </a:effectRef>
+          <a:fontRef idx="minor">
+            <a:schemeClr val="lt1"/>
+          </a:fontRef>
+        </p:style>
+        <p:txBody>
+          <a:bodyPr rtlCol="0" anchor="ctr"/>
+          <a:lstStyle/>
+          <a:p>
+            <a:pPr algn="ctr"/>
+            <a:endParaRPr lang="en-US" dirty="0"/>
+          </a:p>
+        </p:txBody>
+      </p:sp>
+      <p:grpSp>
+        <p:nvGrpSpPr>
+          <p:cNvPr id="12" name="Group 11"/>
+          <p:cNvGrpSpPr/>
+          <p:nvPr/>
+        </p:nvGrpSpPr>
+        <p:grpSpPr>
+          <a:xfrm>
+            <a:off x="2853072" y="1420610"/>
+            <a:ext cx="375115" cy="784067"/>
+            <a:chOff x="2840255" y="1727778"/>
+            <a:chExt cx="375115" cy="784067"/>
+          </a:xfrm>
+        </p:grpSpPr>
+        <p:sp>
+          <p:nvSpPr>
+            <p:cNvPr id="3" name="Rounded Rectangle 2"/>
+            <p:cNvSpPr/>
+            <p:nvPr/>
+          </p:nvSpPr>
+          <p:spPr>
+            <a:xfrm>
+              <a:off x="2840255" y="1727778"/>
+              <a:ext cx="375115" cy="784067"/>
+            </a:xfrm>
+            <a:prstGeom prst="roundRect">
+              <a:avLst/>
+            </a:prstGeom>
+            <a:solidFill>
+              <a:srgbClr val="7E0000"/>
+            </a:solidFill>
+            <a:ln>
+              <a:noFill/>
+            </a:ln>
+          </p:spPr>
+          <p:style>
+            <a:lnRef idx="2">
+              <a:schemeClr val="accent1">
+                <a:shade val="50000"/>
+              </a:schemeClr>
+            </a:lnRef>
+            <a:fillRef idx="1">
+              <a:schemeClr val="accent1"/>
+            </a:fillRef>
+            <a:effectRef idx="0">
+              <a:schemeClr val="accent1"/>
+            </a:effectRef>
+            <a:fontRef idx="minor">
+              <a:schemeClr val="lt1"/>
+            </a:fontRef>
+          </p:style>
+          <p:txBody>
+            <a:bodyPr rtlCol="0" anchor="ctr"/>
+            <a:lstStyle/>
+            <a:p>
+              <a:pPr algn="ctr"/>
+              <a:endParaRPr lang="en-US"/>
+            </a:p>
+          </p:txBody>
+        </p:sp>
+        <p:sp>
+          <p:nvSpPr>
+            <p:cNvPr id="203" name="Rounded Rectangle 202"/>
+            <p:cNvSpPr/>
+            <p:nvPr/>
+          </p:nvSpPr>
+          <p:spPr>
+            <a:xfrm>
+              <a:off x="3005234" y="1790663"/>
+              <a:ext cx="169472" cy="317138"/>
+            </a:xfrm>
+            <a:prstGeom prst="roundRect">
+              <a:avLst/>
+            </a:prstGeom>
+            <a:solidFill>
+              <a:srgbClr val="000000">
+                <a:alpha val="30196"/>
+              </a:srgbClr>
+            </a:solidFill>
+            <a:ln>
+              <a:noFill/>
+            </a:ln>
+          </p:spPr>
+          <p:style>
+            <a:lnRef idx="2">
+              <a:schemeClr val="accent1">
+                <a:shade val="50000"/>
+              </a:schemeClr>
+            </a:lnRef>
+            <a:fillRef idx="1">
+              <a:schemeClr val="accent1"/>
+            </a:fillRef>
+            <a:effectRef idx="0">
+              <a:schemeClr val="accent1"/>
+            </a:effectRef>
+            <a:fontRef idx="minor">
+              <a:schemeClr val="lt1"/>
+            </a:fontRef>
+          </p:style>
+          <p:txBody>
+            <a:bodyPr rtlCol="0" anchor="ctr"/>
+            <a:lstStyle/>
+            <a:p>
+              <a:pPr algn="ctr"/>
+              <a:endParaRPr lang="en-US"/>
+            </a:p>
+          </p:txBody>
+        </p:sp>
+        <p:sp>
+          <p:nvSpPr>
+            <p:cNvPr id="205" name="Rounded Rectangle 204"/>
+            <p:cNvSpPr/>
+            <p:nvPr/>
+          </p:nvSpPr>
+          <p:spPr>
+            <a:xfrm>
+              <a:off x="3005234" y="2126935"/>
+              <a:ext cx="169472" cy="317138"/>
+            </a:xfrm>
+            <a:prstGeom prst="roundRect">
+              <a:avLst/>
+            </a:prstGeom>
+            <a:solidFill>
+              <a:srgbClr val="000000">
+                <a:alpha val="30196"/>
+              </a:srgbClr>
+            </a:solidFill>
+            <a:ln>
+              <a:noFill/>
+            </a:ln>
+          </p:spPr>
+          <p:style>
+            <a:lnRef idx="2">
+              <a:schemeClr val="accent1">
+                <a:shade val="50000"/>
+              </a:schemeClr>
+            </a:lnRef>
+            <a:fillRef idx="1">
+              <a:schemeClr val="accent1"/>
+            </a:fillRef>
+            <a:effectRef idx="0">
+              <a:schemeClr val="accent1"/>
+            </a:effectRef>
+            <a:fontRef idx="minor">
+              <a:schemeClr val="lt1"/>
+            </a:fontRef>
+          </p:style>
+          <p:txBody>
+            <a:bodyPr rtlCol="0" anchor="ctr"/>
+            <a:lstStyle/>
+            <a:p>
+              <a:pPr algn="ctr"/>
+              <a:endParaRPr lang="en-US"/>
+            </a:p>
+          </p:txBody>
+        </p:sp>
+        <p:sp>
+          <p:nvSpPr>
+            <p:cNvPr id="206" name="Rounded Rectangle 205"/>
+            <p:cNvSpPr/>
+            <p:nvPr/>
+          </p:nvSpPr>
+          <p:spPr>
+            <a:xfrm>
+              <a:off x="2876197" y="2455912"/>
+              <a:ext cx="311241" cy="45719"/>
+            </a:xfrm>
+            <a:prstGeom prst="roundRect">
+              <a:avLst/>
+            </a:prstGeom>
+            <a:solidFill>
+              <a:srgbClr val="000000">
+                <a:alpha val="30196"/>
+              </a:srgbClr>
+            </a:solidFill>
+            <a:ln>
+              <a:noFill/>
+            </a:ln>
+          </p:spPr>
+          <p:style>
+            <a:lnRef idx="2">
+              <a:schemeClr val="accent1">
+                <a:shade val="50000"/>
+              </a:schemeClr>
+            </a:lnRef>
+            <a:fillRef idx="1">
+              <a:schemeClr val="accent1"/>
+            </a:fillRef>
+            <a:effectRef idx="0">
+              <a:schemeClr val="accent1"/>
+            </a:effectRef>
+            <a:fontRef idx="minor">
+              <a:schemeClr val="lt1"/>
+            </a:fontRef>
+          </p:style>
+          <p:txBody>
+            <a:bodyPr rtlCol="0" anchor="ctr"/>
+            <a:lstStyle/>
+            <a:p>
+              <a:pPr algn="ctr"/>
+              <a:endParaRPr lang="en-US"/>
+            </a:p>
+          </p:txBody>
+        </p:sp>
+        <p:sp>
+          <p:nvSpPr>
+            <p:cNvPr id="207" name="Rounded Rectangle 206"/>
+            <p:cNvSpPr/>
+            <p:nvPr/>
+          </p:nvSpPr>
+          <p:spPr>
+            <a:xfrm>
+              <a:off x="2869623" y="1736815"/>
+              <a:ext cx="311241" cy="45719"/>
+            </a:xfrm>
+            <a:prstGeom prst="roundRect">
+              <a:avLst/>
+            </a:prstGeom>
+            <a:solidFill>
+              <a:srgbClr val="000000">
+                <a:alpha val="30196"/>
+              </a:srgbClr>
+            </a:solidFill>
+            <a:ln>
+              <a:noFill/>
+            </a:ln>
+          </p:spPr>
+          <p:style>
+            <a:lnRef idx="2">
+              <a:schemeClr val="accent1">
+                <a:shade val="50000"/>
+              </a:schemeClr>
+            </a:lnRef>
+            <a:fillRef idx="1">
+              <a:schemeClr val="accent1"/>
+            </a:fillRef>
+            <a:effectRef idx="0">
+              <a:schemeClr val="accent1"/>
+            </a:effectRef>
+            <a:fontRef idx="minor">
+              <a:schemeClr val="lt1"/>
+            </a:fontRef>
+          </p:style>
+          <p:txBody>
+            <a:bodyPr rtlCol="0" anchor="ctr"/>
+            <a:lstStyle/>
+            <a:p>
+              <a:pPr algn="ctr"/>
+              <a:endParaRPr lang="en-US"/>
+            </a:p>
+          </p:txBody>
+        </p:sp>
+      </p:grpSp>
+      <p:grpSp>
+        <p:nvGrpSpPr>
+          <p:cNvPr id="208" name="Group 207"/>
+          <p:cNvGrpSpPr/>
+          <p:nvPr/>
+        </p:nvGrpSpPr>
+        <p:grpSpPr>
+          <a:xfrm>
+            <a:off x="2840770" y="2252136"/>
+            <a:ext cx="375115" cy="784067"/>
+            <a:chOff x="2840255" y="1727778"/>
+            <a:chExt cx="375115" cy="784067"/>
+          </a:xfrm>
+        </p:grpSpPr>
+        <p:sp>
+          <p:nvSpPr>
+            <p:cNvPr id="209" name="Rounded Rectangle 208"/>
+            <p:cNvSpPr/>
+            <p:nvPr/>
+          </p:nvSpPr>
+          <p:spPr>
+            <a:xfrm>
+              <a:off x="2840255" y="1727778"/>
+              <a:ext cx="375115" cy="784067"/>
+            </a:xfrm>
+            <a:prstGeom prst="roundRect">
+              <a:avLst/>
+            </a:prstGeom>
+            <a:solidFill>
+              <a:srgbClr val="7E0000"/>
+            </a:solidFill>
+            <a:ln>
+              <a:noFill/>
+            </a:ln>
+          </p:spPr>
+          <p:style>
+            <a:lnRef idx="2">
+              <a:schemeClr val="accent1">
+                <a:shade val="50000"/>
+              </a:schemeClr>
+            </a:lnRef>
+            <a:fillRef idx="1">
+              <a:schemeClr val="accent1"/>
+            </a:fillRef>
+            <a:effectRef idx="0">
+              <a:schemeClr val="accent1"/>
+            </a:effectRef>
+            <a:fontRef idx="minor">
+              <a:schemeClr val="lt1"/>
+            </a:fontRef>
+          </p:style>
+          <p:txBody>
+            <a:bodyPr rtlCol="0" anchor="ctr"/>
+            <a:lstStyle/>
+            <a:p>
+              <a:pPr algn="ctr"/>
+              <a:endParaRPr lang="en-US"/>
+            </a:p>
+          </p:txBody>
+        </p:sp>
+        <p:sp>
+          <p:nvSpPr>
+            <p:cNvPr id="210" name="Rounded Rectangle 209"/>
+            <p:cNvSpPr/>
+            <p:nvPr/>
+          </p:nvSpPr>
+          <p:spPr>
+            <a:xfrm>
+              <a:off x="3005234" y="1790663"/>
+              <a:ext cx="169472" cy="317138"/>
+            </a:xfrm>
+            <a:prstGeom prst="roundRect">
+              <a:avLst/>
+            </a:prstGeom>
+            <a:solidFill>
+              <a:srgbClr val="000000">
+                <a:alpha val="30196"/>
+              </a:srgbClr>
+            </a:solidFill>
+            <a:ln>
+              <a:noFill/>
+            </a:ln>
+          </p:spPr>
+          <p:style>
+            <a:lnRef idx="2">
+              <a:schemeClr val="accent1">
+                <a:shade val="50000"/>
+              </a:schemeClr>
+            </a:lnRef>
+            <a:fillRef idx="1">
+              <a:schemeClr val="accent1"/>
+            </a:fillRef>
+            <a:effectRef idx="0">
+              <a:schemeClr val="accent1"/>
+            </a:effectRef>
+            <a:fontRef idx="minor">
+              <a:schemeClr val="lt1"/>
+            </a:fontRef>
+          </p:style>
+          <p:txBody>
+            <a:bodyPr rtlCol="0" anchor="ctr"/>
+            <a:lstStyle/>
+            <a:p>
+              <a:pPr algn="ctr"/>
+              <a:endParaRPr lang="en-US"/>
+            </a:p>
+          </p:txBody>
+        </p:sp>
+        <p:sp>
+          <p:nvSpPr>
+            <p:cNvPr id="211" name="Rounded Rectangle 210"/>
+            <p:cNvSpPr/>
+            <p:nvPr/>
+          </p:nvSpPr>
+          <p:spPr>
+            <a:xfrm>
+              <a:off x="3005234" y="2126935"/>
+              <a:ext cx="169472" cy="317138"/>
+            </a:xfrm>
+            <a:prstGeom prst="roundRect">
+              <a:avLst/>
+            </a:prstGeom>
+            <a:solidFill>
+              <a:srgbClr val="000000">
+                <a:alpha val="30196"/>
+              </a:srgbClr>
+            </a:solidFill>
+            <a:ln>
+              <a:noFill/>
+            </a:ln>
+          </p:spPr>
+          <p:style>
+            <a:lnRef idx="2">
+              <a:schemeClr val="accent1">
+                <a:shade val="50000"/>
+              </a:schemeClr>
+            </a:lnRef>
+            <a:fillRef idx="1">
+              <a:schemeClr val="accent1"/>
+            </a:fillRef>
+            <a:effectRef idx="0">
+              <a:schemeClr val="accent1"/>
+            </a:effectRef>
+            <a:fontRef idx="minor">
+              <a:schemeClr val="lt1"/>
+            </a:fontRef>
+          </p:style>
+          <p:txBody>
+            <a:bodyPr rtlCol="0" anchor="ctr"/>
+            <a:lstStyle/>
+            <a:p>
+              <a:pPr algn="ctr"/>
+              <a:endParaRPr lang="en-US"/>
+            </a:p>
+          </p:txBody>
+        </p:sp>
+        <p:sp>
+          <p:nvSpPr>
+            <p:cNvPr id="212" name="Rounded Rectangle 211"/>
+            <p:cNvSpPr/>
+            <p:nvPr/>
+          </p:nvSpPr>
+          <p:spPr>
+            <a:xfrm>
+              <a:off x="2876197" y="2455912"/>
+              <a:ext cx="311241" cy="45719"/>
+            </a:xfrm>
+            <a:prstGeom prst="roundRect">
+              <a:avLst/>
+            </a:prstGeom>
+            <a:solidFill>
+              <a:srgbClr val="000000">
+                <a:alpha val="30196"/>
+              </a:srgbClr>
+            </a:solidFill>
+            <a:ln>
+              <a:noFill/>
+            </a:ln>
+          </p:spPr>
+          <p:style>
+            <a:lnRef idx="2">
+              <a:schemeClr val="accent1">
+                <a:shade val="50000"/>
+              </a:schemeClr>
+            </a:lnRef>
+            <a:fillRef idx="1">
+              <a:schemeClr val="accent1"/>
+            </a:fillRef>
+            <a:effectRef idx="0">
+              <a:schemeClr val="accent1"/>
+            </a:effectRef>
+            <a:fontRef idx="minor">
+              <a:schemeClr val="lt1"/>
+            </a:fontRef>
+          </p:style>
+          <p:txBody>
+            <a:bodyPr rtlCol="0" anchor="ctr"/>
+            <a:lstStyle/>
+            <a:p>
+              <a:pPr algn="ctr"/>
+              <a:endParaRPr lang="en-US"/>
+            </a:p>
+          </p:txBody>
+        </p:sp>
+        <p:sp>
+          <p:nvSpPr>
+            <p:cNvPr id="213" name="Rounded Rectangle 212"/>
+            <p:cNvSpPr/>
+            <p:nvPr/>
+          </p:nvSpPr>
+          <p:spPr>
+            <a:xfrm>
+              <a:off x="2869623" y="1736815"/>
+              <a:ext cx="311241" cy="45719"/>
+            </a:xfrm>
+            <a:prstGeom prst="roundRect">
+              <a:avLst/>
+            </a:prstGeom>
+            <a:solidFill>
+              <a:srgbClr val="000000">
+                <a:alpha val="30196"/>
+              </a:srgbClr>
+            </a:solidFill>
+            <a:ln>
+              <a:noFill/>
+            </a:ln>
+          </p:spPr>
+          <p:style>
+            <a:lnRef idx="2">
+              <a:schemeClr val="accent1">
+                <a:shade val="50000"/>
+              </a:schemeClr>
+            </a:lnRef>
+            <a:fillRef idx="1">
+              <a:schemeClr val="accent1"/>
+            </a:fillRef>
+            <a:effectRef idx="0">
+              <a:schemeClr val="accent1"/>
+            </a:effectRef>
+            <a:fontRef idx="minor">
+              <a:schemeClr val="lt1"/>
+            </a:fontRef>
+          </p:style>
+          <p:txBody>
+            <a:bodyPr rtlCol="0" anchor="ctr"/>
+            <a:lstStyle/>
+            <a:p>
+              <a:pPr algn="ctr"/>
+              <a:endParaRPr lang="en-US"/>
+            </a:p>
+          </p:txBody>
+        </p:sp>
+      </p:grpSp>
+      <p:sp>
+        <p:nvSpPr>
+          <p:cNvPr id="214" name="Rectangle 213"/>
+          <p:cNvSpPr/>
+          <p:nvPr/>
+        </p:nvSpPr>
+        <p:spPr>
+          <a:xfrm>
+            <a:off x="2889014" y="1019237"/>
+            <a:ext cx="314907" cy="376299"/>
+          </a:xfrm>
+          <a:prstGeom prst="rect">
+            <a:avLst/>
+          </a:prstGeom>
+          <a:solidFill>
+            <a:srgbClr val="492207"/>
+          </a:solidFill>
+          <a:ln>
+            <a:noFill/>
+          </a:ln>
+        </p:spPr>
+        <p:style>
+          <a:lnRef idx="2">
+            <a:schemeClr val="accent1">
+              <a:shade val="50000"/>
+            </a:schemeClr>
+          </a:lnRef>
+          <a:fillRef idx="1">
+            <a:schemeClr val="accent1"/>
+          </a:fillRef>
+          <a:effectRef idx="0">
+            <a:schemeClr val="accent1"/>
+          </a:effectRef>
+          <a:fontRef idx="minor">
+            <a:schemeClr val="lt1"/>
+          </a:fontRef>
+        </p:style>
+        <p:txBody>
+          <a:bodyPr rtlCol="0" anchor="ctr"/>
+          <a:lstStyle/>
+          <a:p>
+            <a:pPr algn="ctr"/>
+            <a:endParaRPr lang="en-US" dirty="0"/>
+          </a:p>
+        </p:txBody>
+      </p:sp>
+      <p:grpSp>
+        <p:nvGrpSpPr>
+          <p:cNvPr id="216" name="Group 215"/>
+          <p:cNvGrpSpPr/>
+          <p:nvPr/>
+        </p:nvGrpSpPr>
+        <p:grpSpPr>
+          <a:xfrm>
+            <a:off x="2885213" y="3207137"/>
+            <a:ext cx="281090" cy="281090"/>
+            <a:chOff x="2836912" y="3174001"/>
+            <a:chExt cx="377756" cy="377756"/>
+          </a:xfrm>
+        </p:grpSpPr>
+        <p:sp>
+          <p:nvSpPr>
+            <p:cNvPr id="217" name="Oval 216"/>
+            <p:cNvSpPr/>
+            <p:nvPr/>
+          </p:nvSpPr>
+          <p:spPr>
+            <a:xfrm>
+              <a:off x="2836912" y="3174001"/>
+              <a:ext cx="377756" cy="377756"/>
+            </a:xfrm>
+            <a:prstGeom prst="ellipse">
+              <a:avLst/>
+            </a:prstGeom>
+            <a:solidFill>
+              <a:srgbClr val="492207"/>
+            </a:solidFill>
+            <a:ln w="57150">
+              <a:solidFill>
+                <a:srgbClr val="000000">
+                  <a:alpha val="30196"/>
+                </a:srgbClr>
+              </a:solidFill>
+            </a:ln>
+          </p:spPr>
+          <p:style>
+            <a:lnRef idx="2">
+              <a:schemeClr val="accent1">
+                <a:shade val="50000"/>
+              </a:schemeClr>
+            </a:lnRef>
+            <a:fillRef idx="1">
+              <a:schemeClr val="accent1"/>
+            </a:fillRef>
+            <a:effectRef idx="0">
+              <a:schemeClr val="accent1"/>
+            </a:effectRef>
+            <a:fontRef idx="minor">
+              <a:schemeClr val="lt1"/>
+            </a:fontRef>
+          </p:style>
+          <p:txBody>
+            <a:bodyPr rtlCol="0" anchor="ctr"/>
+            <a:lstStyle/>
+            <a:p>
+              <a:pPr algn="ctr"/>
+              <a:endParaRPr lang="en-US" dirty="0"/>
+            </a:p>
+          </p:txBody>
+        </p:sp>
+        <p:sp>
+          <p:nvSpPr>
+            <p:cNvPr id="218" name="Oval 217"/>
+            <p:cNvSpPr/>
+            <p:nvPr/>
+          </p:nvSpPr>
+          <p:spPr>
+            <a:xfrm>
+              <a:off x="2924781" y="3280114"/>
+              <a:ext cx="45720" cy="45720"/>
+            </a:xfrm>
+            <a:prstGeom prst="ellipse">
+              <a:avLst/>
+            </a:prstGeom>
+            <a:solidFill>
+              <a:srgbClr val="000000">
+                <a:alpha val="40000"/>
+              </a:srgbClr>
+            </a:solidFill>
+            <a:ln>
+              <a:noFill/>
+            </a:ln>
+          </p:spPr>
+          <p:style>
+            <a:lnRef idx="2">
+              <a:schemeClr val="accent1">
+                <a:shade val="50000"/>
+              </a:schemeClr>
+            </a:lnRef>
+            <a:fillRef idx="1">
+              <a:schemeClr val="accent1"/>
+            </a:fillRef>
+            <a:effectRef idx="0">
+              <a:schemeClr val="accent1"/>
+            </a:effectRef>
+            <a:fontRef idx="minor">
+              <a:schemeClr val="lt1"/>
+            </a:fontRef>
+          </p:style>
+          <p:txBody>
+            <a:bodyPr rtlCol="0" anchor="ctr"/>
+            <a:lstStyle/>
+            <a:p>
+              <a:pPr algn="ctr"/>
+              <a:endParaRPr lang="en-US" dirty="0"/>
+            </a:p>
+          </p:txBody>
+        </p:sp>
+      </p:grpSp>
+      <p:grpSp>
+        <p:nvGrpSpPr>
+          <p:cNvPr id="219" name="Group 218"/>
+          <p:cNvGrpSpPr/>
+          <p:nvPr/>
+        </p:nvGrpSpPr>
+        <p:grpSpPr>
+          <a:xfrm rot="5400000">
+            <a:off x="2953336" y="1084844"/>
+            <a:ext cx="180369" cy="137161"/>
+            <a:chOff x="3490632" y="2669890"/>
+            <a:chExt cx="180369" cy="137161"/>
+          </a:xfrm>
+        </p:grpSpPr>
+        <p:sp>
+          <p:nvSpPr>
+            <p:cNvPr id="220" name="Oval 219"/>
+            <p:cNvSpPr/>
+            <p:nvPr/>
+          </p:nvSpPr>
+          <p:spPr>
+            <a:xfrm>
+              <a:off x="3502310" y="2669890"/>
+              <a:ext cx="45720" cy="45720"/>
+            </a:xfrm>
+            <a:prstGeom prst="ellipse">
+              <a:avLst/>
+            </a:prstGeom>
+            <a:solidFill>
+              <a:srgbClr val="FFC000"/>
+            </a:solidFill>
+            <a:ln w="28575">
+              <a:solidFill>
+                <a:schemeClr val="accent4">
+                  <a:lumMod val="20000"/>
+                  <a:lumOff val="80000"/>
+                </a:schemeClr>
+              </a:solidFill>
+            </a:ln>
+          </p:spPr>
+          <p:style>
+            <a:lnRef idx="2">
+              <a:schemeClr val="accent1">
+                <a:shade val="50000"/>
+              </a:schemeClr>
+            </a:lnRef>
+            <a:fillRef idx="1">
+              <a:schemeClr val="accent1"/>
+            </a:fillRef>
+            <a:effectRef idx="0">
+              <a:schemeClr val="accent1"/>
+            </a:effectRef>
+            <a:fontRef idx="minor">
+              <a:schemeClr val="lt1"/>
+            </a:fontRef>
+          </p:style>
+          <p:txBody>
+            <a:bodyPr rtlCol="0" anchor="ctr"/>
+            <a:lstStyle/>
+            <a:p>
+              <a:pPr algn="ctr"/>
+              <a:endParaRPr lang="en-US"/>
+            </a:p>
+          </p:txBody>
+        </p:sp>
+        <p:sp>
+          <p:nvSpPr>
+            <p:cNvPr id="221" name="Oval 220"/>
+            <p:cNvSpPr/>
+            <p:nvPr/>
+          </p:nvSpPr>
+          <p:spPr>
+            <a:xfrm>
+              <a:off x="3586801" y="2696370"/>
+              <a:ext cx="84200" cy="84200"/>
+            </a:xfrm>
+            <a:prstGeom prst="ellipse">
+              <a:avLst/>
+            </a:prstGeom>
+            <a:solidFill>
+              <a:srgbClr val="FFC000"/>
+            </a:solidFill>
+            <a:ln w="57150">
+              <a:solidFill>
+                <a:schemeClr val="accent4">
+                  <a:lumMod val="20000"/>
+                  <a:lumOff val="80000"/>
+                </a:schemeClr>
+              </a:solidFill>
+            </a:ln>
+          </p:spPr>
+          <p:style>
+            <a:lnRef idx="2">
+              <a:schemeClr val="accent1">
+                <a:shade val="50000"/>
+              </a:schemeClr>
+            </a:lnRef>
+            <a:fillRef idx="1">
+              <a:schemeClr val="accent1"/>
+            </a:fillRef>
+            <a:effectRef idx="0">
+              <a:schemeClr val="accent1"/>
+            </a:effectRef>
+            <a:fontRef idx="minor">
+              <a:schemeClr val="lt1"/>
+            </a:fontRef>
+          </p:style>
+          <p:txBody>
+            <a:bodyPr rtlCol="0" anchor="ctr"/>
+            <a:lstStyle/>
+            <a:p>
+              <a:pPr algn="ctr"/>
+              <a:endParaRPr lang="en-US"/>
+            </a:p>
+          </p:txBody>
+        </p:sp>
+        <p:sp>
+          <p:nvSpPr>
+            <p:cNvPr id="224" name="Oval 223"/>
+            <p:cNvSpPr/>
+            <p:nvPr/>
+          </p:nvSpPr>
+          <p:spPr>
+            <a:xfrm>
+              <a:off x="3490632" y="2761331"/>
+              <a:ext cx="45720" cy="45720"/>
+            </a:xfrm>
+            <a:prstGeom prst="ellipse">
+              <a:avLst/>
+            </a:prstGeom>
+            <a:solidFill>
+              <a:srgbClr val="FFC000"/>
+            </a:solidFill>
+            <a:ln w="28575">
+              <a:solidFill>
+                <a:schemeClr val="accent4">
+                  <a:lumMod val="20000"/>
+                  <a:lumOff val="80000"/>
+                </a:schemeClr>
+              </a:solidFill>
+            </a:ln>
+          </p:spPr>
+          <p:style>
+            <a:lnRef idx="2">
+              <a:schemeClr val="accent1">
+                <a:shade val="50000"/>
+              </a:schemeClr>
+            </a:lnRef>
+            <a:fillRef idx="1">
+              <a:schemeClr val="accent1"/>
+            </a:fillRef>
+            <a:effectRef idx="0">
+              <a:schemeClr val="accent1"/>
+            </a:effectRef>
+            <a:fontRef idx="minor">
+              <a:schemeClr val="lt1"/>
+            </a:fontRef>
+          </p:style>
+          <p:txBody>
+            <a:bodyPr rtlCol="0" anchor="ctr"/>
+            <a:lstStyle/>
+            <a:p>
+              <a:pPr algn="ctr"/>
+              <a:endParaRPr lang="en-US"/>
+            </a:p>
+          </p:txBody>
+        </p:sp>
+      </p:grpSp>
+      <p:sp>
+        <p:nvSpPr>
+          <p:cNvPr id="232" name="Rectangle 231"/>
+          <p:cNvSpPr/>
+          <p:nvPr/>
+        </p:nvSpPr>
+        <p:spPr>
+          <a:xfrm>
+            <a:off x="1613890" y="247472"/>
+            <a:ext cx="1249671" cy="68429"/>
+          </a:xfrm>
+          <a:prstGeom prst="rect">
+            <a:avLst/>
+          </a:prstGeom>
+          <a:solidFill>
+            <a:srgbClr val="000000">
+              <a:alpha val="20000"/>
+            </a:srgbClr>
+          </a:solidFill>
+          <a:ln>
+            <a:noFill/>
+          </a:ln>
+        </p:spPr>
+        <p:style>
+          <a:lnRef idx="2">
+            <a:schemeClr val="accent1">
+              <a:shade val="50000"/>
+            </a:schemeClr>
+          </a:lnRef>
+          <a:fillRef idx="1">
+            <a:schemeClr val="accent1"/>
+          </a:fillRef>
+          <a:effectRef idx="0">
+            <a:schemeClr val="accent1"/>
+          </a:effectRef>
+          <a:fontRef idx="minor">
+            <a:schemeClr val="lt1"/>
+          </a:fontRef>
+        </p:style>
+        <p:txBody>
+          <a:bodyPr rtlCol="0" anchor="ctr"/>
+          <a:lstStyle/>
+          <a:p>
+            <a:pPr algn="ctr"/>
+            <a:endParaRPr lang="en-US" dirty="0"/>
+          </a:p>
+        </p:txBody>
+      </p:sp>
+      <p:grpSp>
+        <p:nvGrpSpPr>
+          <p:cNvPr id="233" name="Group 232"/>
+          <p:cNvGrpSpPr/>
+          <p:nvPr/>
+        </p:nvGrpSpPr>
+        <p:grpSpPr>
+          <a:xfrm rot="16200000">
+            <a:off x="1845781" y="889468"/>
+            <a:ext cx="721628" cy="949770"/>
+            <a:chOff x="4045394" y="3424269"/>
+            <a:chExt cx="1053212" cy="1386183"/>
+          </a:xfrm>
+        </p:grpSpPr>
+        <p:grpSp>
+          <p:nvGrpSpPr>
+            <p:cNvPr id="234" name="Group 233"/>
+            <p:cNvGrpSpPr/>
+            <p:nvPr/>
+          </p:nvGrpSpPr>
+          <p:grpSpPr>
+            <a:xfrm>
+              <a:off x="4045394" y="3424269"/>
+              <a:ext cx="1053212" cy="1386183"/>
+              <a:chOff x="4045394" y="3424269"/>
+              <a:chExt cx="1053212" cy="1386183"/>
+            </a:xfrm>
+          </p:grpSpPr>
+          <p:grpSp>
+            <p:nvGrpSpPr>
+              <p:cNvPr id="237" name="Group 236"/>
+              <p:cNvGrpSpPr/>
+              <p:nvPr/>
+            </p:nvGrpSpPr>
+            <p:grpSpPr>
+              <a:xfrm>
+                <a:off x="4045394" y="3424269"/>
+                <a:ext cx="1053212" cy="1386183"/>
+                <a:chOff x="4045394" y="3424269"/>
+                <a:chExt cx="1053212" cy="1386183"/>
+              </a:xfrm>
+            </p:grpSpPr>
+            <p:grpSp>
+              <p:nvGrpSpPr>
+                <p:cNvPr id="247" name="Group 246"/>
+                <p:cNvGrpSpPr/>
+                <p:nvPr/>
+              </p:nvGrpSpPr>
+              <p:grpSpPr>
+                <a:xfrm>
+                  <a:off x="4045394" y="3424269"/>
+                  <a:ext cx="1053212" cy="1386183"/>
+                  <a:chOff x="4045394" y="3424269"/>
+                  <a:chExt cx="1053212" cy="1386183"/>
+                </a:xfrm>
+              </p:grpSpPr>
+              <p:grpSp>
+                <p:nvGrpSpPr>
+                  <p:cNvPr id="252" name="Group 251"/>
+                  <p:cNvGrpSpPr/>
+                  <p:nvPr/>
+                </p:nvGrpSpPr>
+                <p:grpSpPr>
+                  <a:xfrm>
+                    <a:off x="4045394" y="3424269"/>
+                    <a:ext cx="1053212" cy="1386183"/>
+                    <a:chOff x="4045394" y="3424269"/>
+                    <a:chExt cx="1053212" cy="1386183"/>
+                  </a:xfrm>
+                </p:grpSpPr>
+                <p:grpSp>
+                  <p:nvGrpSpPr>
+                    <p:cNvPr id="254" name="Group 253"/>
+                    <p:cNvGrpSpPr/>
+                    <p:nvPr/>
+                  </p:nvGrpSpPr>
+                  <p:grpSpPr>
+                    <a:xfrm>
+                      <a:off x="4045394" y="3424269"/>
+                      <a:ext cx="1053212" cy="1386183"/>
+                      <a:chOff x="4045394" y="3424269"/>
+                      <a:chExt cx="1053212" cy="1386183"/>
+                    </a:xfrm>
+                  </p:grpSpPr>
+                  <p:sp>
+                    <p:nvSpPr>
+                      <p:cNvPr id="257" name="Rectangle 256"/>
+                      <p:cNvSpPr/>
+                      <p:nvPr/>
+                    </p:nvSpPr>
+                    <p:spPr>
+                      <a:xfrm>
+                        <a:off x="4045394" y="3424269"/>
+                        <a:ext cx="1053212" cy="1386183"/>
+                      </a:xfrm>
+                      <a:prstGeom prst="rect">
+                        <a:avLst/>
+                      </a:prstGeom>
+                      <a:solidFill>
+                        <a:srgbClr val="600000"/>
+                      </a:solidFill>
+                      <a:ln>
+                        <a:noFill/>
+                      </a:ln>
+                    </p:spPr>
+                    <p:style>
+                      <a:lnRef idx="2">
+                        <a:schemeClr val="accent1">
+                          <a:shade val="50000"/>
+                        </a:schemeClr>
+                      </a:lnRef>
+                      <a:fillRef idx="1">
+                        <a:schemeClr val="accent1"/>
+                      </a:fillRef>
+                      <a:effectRef idx="0">
+                        <a:schemeClr val="accent1"/>
+                      </a:effectRef>
+                      <a:fontRef idx="minor">
+                        <a:schemeClr val="lt1"/>
+                      </a:fontRef>
+                    </p:style>
+                    <p:txBody>
+                      <a:bodyPr rtlCol="0" anchor="ctr"/>
+                      <a:lstStyle/>
+                      <a:p>
+                        <a:pPr algn="ctr"/>
+                        <a:endParaRPr lang="en-US"/>
+                      </a:p>
+                    </p:txBody>
+                  </p:sp>
+                  <p:sp>
+                    <p:nvSpPr>
+                      <p:cNvPr id="258" name="Rectangle 257"/>
+                      <p:cNvSpPr/>
+                      <p:nvPr/>
+                    </p:nvSpPr>
+                    <p:spPr>
+                      <a:xfrm>
+                        <a:off x="4095844" y="3479800"/>
+                        <a:ext cx="941858" cy="1260988"/>
+                      </a:xfrm>
+                      <a:prstGeom prst="rect">
+                        <a:avLst/>
+                      </a:prstGeom>
+                      <a:solidFill>
+                        <a:srgbClr val="7E0000"/>
+                      </a:solidFill>
+                      <a:ln>
+                        <a:noFill/>
+                      </a:ln>
+                    </p:spPr>
+                    <p:style>
+                      <a:lnRef idx="2">
+                        <a:schemeClr val="accent1">
+                          <a:shade val="50000"/>
+                        </a:schemeClr>
+                      </a:lnRef>
+                      <a:fillRef idx="1">
+                        <a:schemeClr val="accent1"/>
+                      </a:fillRef>
+                      <a:effectRef idx="0">
+                        <a:schemeClr val="accent1"/>
+                      </a:effectRef>
+                      <a:fontRef idx="minor">
+                        <a:schemeClr val="lt1"/>
+                      </a:fontRef>
+                    </p:style>
+                    <p:txBody>
+                      <a:bodyPr rtlCol="0" anchor="ctr"/>
+                      <a:lstStyle/>
+                      <a:p>
+                        <a:pPr algn="ctr"/>
+                        <a:endParaRPr lang="en-US"/>
+                      </a:p>
+                    </p:txBody>
+                  </p:sp>
+                </p:grpSp>
+                <p:sp>
+                  <p:nvSpPr>
+                    <p:cNvPr id="255" name="Flowchart: Decision 254"/>
+                    <p:cNvSpPr/>
+                    <p:nvPr/>
+                  </p:nvSpPr>
+                  <p:spPr>
+                    <a:xfrm>
+                      <a:off x="4277638" y="3632294"/>
+                      <a:ext cx="557750" cy="956000"/>
+                    </a:xfrm>
+                    <a:prstGeom prst="flowChartDecision">
+                      <a:avLst/>
+                    </a:prstGeom>
+                    <a:solidFill>
+                      <a:srgbClr val="600000"/>
+                    </a:solidFill>
+                    <a:ln>
+                      <a:noFill/>
+                    </a:ln>
+                  </p:spPr>
+                  <p:style>
+                    <a:lnRef idx="2">
+                      <a:schemeClr val="accent1">
+                        <a:shade val="50000"/>
+                      </a:schemeClr>
+                    </a:lnRef>
+                    <a:fillRef idx="1">
+                      <a:schemeClr val="accent1"/>
+                    </a:fillRef>
+                    <a:effectRef idx="0">
+                      <a:schemeClr val="accent1"/>
+                    </a:effectRef>
+                    <a:fontRef idx="minor">
+                      <a:schemeClr val="lt1"/>
+                    </a:fontRef>
+                  </p:style>
+                  <p:txBody>
+                    <a:bodyPr rtlCol="0" anchor="ctr"/>
+                    <a:lstStyle/>
+                    <a:p>
+                      <a:pPr algn="ctr"/>
+                      <a:endParaRPr lang="en-US"/>
+                    </a:p>
+                  </p:txBody>
+                </p:sp>
+                <p:sp>
+                  <p:nvSpPr>
+                    <p:cNvPr id="256" name="Flowchart: Decision 255"/>
+                    <p:cNvSpPr/>
+                    <p:nvPr/>
+                  </p:nvSpPr>
+                  <p:spPr>
+                    <a:xfrm>
+                      <a:off x="4332148" y="3721100"/>
+                      <a:ext cx="454128" cy="778388"/>
+                    </a:xfrm>
+                    <a:prstGeom prst="flowChartDecision">
+                      <a:avLst/>
+                    </a:prstGeom>
+                    <a:solidFill>
+                      <a:srgbClr val="A40000"/>
+                    </a:solidFill>
+                    <a:ln>
+                      <a:noFill/>
+                    </a:ln>
+                  </p:spPr>
+                  <p:style>
+                    <a:lnRef idx="2">
+                      <a:schemeClr val="accent1">
+                        <a:shade val="50000"/>
+                      </a:schemeClr>
+                    </a:lnRef>
+                    <a:fillRef idx="1">
+                      <a:schemeClr val="accent1"/>
+                    </a:fillRef>
+                    <a:effectRef idx="0">
+                      <a:schemeClr val="accent1"/>
+                    </a:effectRef>
+                    <a:fontRef idx="minor">
+                      <a:schemeClr val="lt1"/>
+                    </a:fontRef>
+                  </p:style>
+                  <p:txBody>
+                    <a:bodyPr rtlCol="0" anchor="ctr"/>
+                    <a:lstStyle/>
+                    <a:p>
+                      <a:pPr algn="ctr"/>
+                      <a:endParaRPr lang="en-US"/>
+                    </a:p>
+                  </p:txBody>
+                </p:sp>
+              </p:grpSp>
+              <p:sp>
+                <p:nvSpPr>
+                  <p:cNvPr id="253" name="Decagon 252"/>
+                  <p:cNvSpPr/>
+                  <p:nvPr/>
+                </p:nvSpPr>
+                <p:spPr>
+                  <a:xfrm>
+                    <a:off x="4410389" y="3960576"/>
+                    <a:ext cx="303176" cy="299436"/>
+                  </a:xfrm>
+                  <a:prstGeom prst="decagon">
+                    <a:avLst/>
+                  </a:prstGeom>
+                  <a:solidFill>
+                    <a:srgbClr val="7F6000">
+                      <a:alpha val="69804"/>
+                    </a:srgbClr>
+                  </a:solidFill>
+                  <a:ln>
+                    <a:noFill/>
+                  </a:ln>
+                </p:spPr>
+                <p:style>
+                  <a:lnRef idx="2">
+                    <a:schemeClr val="accent1">
+                      <a:shade val="50000"/>
+                    </a:schemeClr>
+                  </a:lnRef>
+                  <a:fillRef idx="1">
+                    <a:schemeClr val="accent1"/>
+                  </a:fillRef>
+                  <a:effectRef idx="0">
+                    <a:schemeClr val="accent1"/>
+                  </a:effectRef>
+                  <a:fontRef idx="minor">
+                    <a:schemeClr val="lt1"/>
+                  </a:fontRef>
+                </p:style>
+                <p:txBody>
+                  <a:bodyPr rtlCol="0" anchor="ctr"/>
+                  <a:lstStyle/>
+                  <a:p>
+                    <a:pPr algn="ctr"/>
+                    <a:endParaRPr lang="en-US"/>
+                  </a:p>
+                </p:txBody>
+              </p:sp>
+            </p:grpSp>
+            <p:sp>
+              <p:nvSpPr>
+                <p:cNvPr id="248" name="L-Shape 247"/>
+                <p:cNvSpPr/>
+                <p:nvPr/>
+              </p:nvSpPr>
+              <p:spPr>
+                <a:xfrm>
+                  <a:off x="4095844" y="4480254"/>
+                  <a:ext cx="260534" cy="260534"/>
+                </a:xfrm>
+                <a:prstGeom prst="corner">
+                  <a:avLst/>
+                </a:prstGeom>
+                <a:solidFill>
+                  <a:srgbClr val="7F6000">
+                    <a:alpha val="69804"/>
+                  </a:srgbClr>
+                </a:solidFill>
+                <a:ln>
+                  <a:noFill/>
+                </a:ln>
+              </p:spPr>
+              <p:style>
+                <a:lnRef idx="2">
+                  <a:schemeClr val="accent1">
+                    <a:shade val="50000"/>
+                  </a:schemeClr>
+                </a:lnRef>
+                <a:fillRef idx="1">
+                  <a:schemeClr val="accent1"/>
+                </a:fillRef>
+                <a:effectRef idx="0">
+                  <a:schemeClr val="accent1"/>
+                </a:effectRef>
+                <a:fontRef idx="minor">
+                  <a:schemeClr val="lt1"/>
+                </a:fontRef>
+              </p:style>
+              <p:txBody>
+                <a:bodyPr rtlCol="0" anchor="ctr"/>
+                <a:lstStyle/>
+                <a:p>
+                  <a:pPr algn="ctr"/>
+                  <a:endParaRPr lang="en-US"/>
+                </a:p>
+              </p:txBody>
+            </p:sp>
+            <p:sp>
+              <p:nvSpPr>
+                <p:cNvPr id="249" name="L-Shape 248"/>
+                <p:cNvSpPr/>
+                <p:nvPr/>
+              </p:nvSpPr>
+              <p:spPr>
+                <a:xfrm rot="16200000">
+                  <a:off x="4772311" y="4480254"/>
+                  <a:ext cx="260534" cy="260534"/>
+                </a:xfrm>
+                <a:prstGeom prst="corner">
+                  <a:avLst/>
+                </a:prstGeom>
+                <a:solidFill>
+                  <a:srgbClr val="7F6000">
+                    <a:alpha val="69804"/>
+                  </a:srgbClr>
+                </a:solidFill>
+                <a:ln>
+                  <a:noFill/>
+                </a:ln>
+              </p:spPr>
+              <p:style>
+                <a:lnRef idx="2">
+                  <a:schemeClr val="accent1">
+                    <a:shade val="50000"/>
+                  </a:schemeClr>
+                </a:lnRef>
+                <a:fillRef idx="1">
+                  <a:schemeClr val="accent1"/>
+                </a:fillRef>
+                <a:effectRef idx="0">
+                  <a:schemeClr val="accent1"/>
+                </a:effectRef>
+                <a:fontRef idx="minor">
+                  <a:schemeClr val="lt1"/>
+                </a:fontRef>
+              </p:style>
+              <p:txBody>
+                <a:bodyPr rtlCol="0" anchor="ctr"/>
+                <a:lstStyle/>
+                <a:p>
+                  <a:pPr algn="ctr"/>
+                  <a:endParaRPr lang="en-US"/>
+                </a:p>
+              </p:txBody>
+            </p:sp>
+            <p:sp>
+              <p:nvSpPr>
+                <p:cNvPr id="250" name="L-Shape 249"/>
+                <p:cNvSpPr/>
+                <p:nvPr/>
+              </p:nvSpPr>
+              <p:spPr>
+                <a:xfrm rot="10800000">
+                  <a:off x="4779138" y="3476808"/>
+                  <a:ext cx="260534" cy="260534"/>
+                </a:xfrm>
+                <a:prstGeom prst="corner">
+                  <a:avLst/>
+                </a:prstGeom>
+                <a:solidFill>
+                  <a:srgbClr val="7F6000">
+                    <a:alpha val="69804"/>
+                  </a:srgbClr>
+                </a:solidFill>
+                <a:ln>
+                  <a:noFill/>
+                </a:ln>
+              </p:spPr>
+              <p:style>
+                <a:lnRef idx="2">
+                  <a:schemeClr val="accent1">
+                    <a:shade val="50000"/>
+                  </a:schemeClr>
+                </a:lnRef>
+                <a:fillRef idx="1">
+                  <a:schemeClr val="accent1"/>
+                </a:fillRef>
+                <a:effectRef idx="0">
+                  <a:schemeClr val="accent1"/>
+                </a:effectRef>
+                <a:fontRef idx="minor">
+                  <a:schemeClr val="lt1"/>
+                </a:fontRef>
+              </p:style>
+              <p:txBody>
+                <a:bodyPr rtlCol="0" anchor="ctr"/>
+                <a:lstStyle/>
+                <a:p>
+                  <a:pPr algn="ctr"/>
+                  <a:endParaRPr lang="en-US"/>
+                </a:p>
+              </p:txBody>
+            </p:sp>
+            <p:sp>
+              <p:nvSpPr>
+                <p:cNvPr id="251" name="L-Shape 250"/>
+                <p:cNvSpPr/>
+                <p:nvPr/>
+              </p:nvSpPr>
+              <p:spPr>
+                <a:xfrm rot="5400000">
+                  <a:off x="4102671" y="3476808"/>
+                  <a:ext cx="260534" cy="260534"/>
+                </a:xfrm>
+                <a:prstGeom prst="corner">
+                  <a:avLst/>
+                </a:prstGeom>
+                <a:solidFill>
+                  <a:srgbClr val="7F6000">
+                    <a:alpha val="69804"/>
+                  </a:srgbClr>
+                </a:solidFill>
+                <a:ln>
+                  <a:noFill/>
+                </a:ln>
+              </p:spPr>
+              <p:style>
+                <a:lnRef idx="2">
+                  <a:schemeClr val="accent1">
+                    <a:shade val="50000"/>
+                  </a:schemeClr>
+                </a:lnRef>
+                <a:fillRef idx="1">
+                  <a:schemeClr val="accent1"/>
+                </a:fillRef>
+                <a:effectRef idx="0">
+                  <a:schemeClr val="accent1"/>
+                </a:effectRef>
+                <a:fontRef idx="minor">
+                  <a:schemeClr val="lt1"/>
+                </a:fontRef>
+              </p:style>
+              <p:txBody>
+                <a:bodyPr rtlCol="0" anchor="ctr"/>
+                <a:lstStyle/>
+                <a:p>
+                  <a:pPr algn="ctr"/>
+                  <a:endParaRPr lang="en-US"/>
+                </a:p>
+              </p:txBody>
+            </p:sp>
+          </p:grpSp>
+          <p:sp>
+            <p:nvSpPr>
+              <p:cNvPr id="238" name="Oval 237"/>
+              <p:cNvSpPr/>
+              <p:nvPr/>
+            </p:nvSpPr>
+            <p:spPr>
+              <a:xfrm>
+                <a:off x="4471372" y="4023010"/>
+                <a:ext cx="179806" cy="179806"/>
+              </a:xfrm>
+              <a:prstGeom prst="ellipse">
+                <a:avLst/>
+              </a:prstGeom>
+              <a:solidFill>
+                <a:srgbClr val="000000">
+                  <a:alpha val="30196"/>
+                </a:srgbClr>
+              </a:solidFill>
+              <a:ln>
+                <a:noFill/>
+              </a:ln>
+            </p:spPr>
+            <p:style>
+              <a:lnRef idx="2">
+                <a:schemeClr val="accent1">
+                  <a:shade val="50000"/>
+                </a:schemeClr>
+              </a:lnRef>
+              <a:fillRef idx="1">
+                <a:schemeClr val="accent1"/>
+              </a:fillRef>
+              <a:effectRef idx="0">
+                <a:schemeClr val="accent1"/>
+              </a:effectRef>
+              <a:fontRef idx="minor">
+                <a:schemeClr val="lt1"/>
+              </a:fontRef>
+            </p:style>
+            <p:txBody>
+              <a:bodyPr rtlCol="0" anchor="ctr"/>
+              <a:lstStyle/>
+              <a:p>
+                <a:pPr algn="ctr"/>
+                <a:endParaRPr lang="en-US"/>
+              </a:p>
+            </p:txBody>
+          </p:sp>
+          <p:sp>
+            <p:nvSpPr>
+              <p:cNvPr id="239" name="Oval 238"/>
+              <p:cNvSpPr/>
+              <p:nvPr/>
+            </p:nvSpPr>
+            <p:spPr>
+              <a:xfrm>
+                <a:off x="4819502" y="3529691"/>
+                <a:ext cx="179806" cy="179806"/>
+              </a:xfrm>
+              <a:prstGeom prst="ellipse">
+                <a:avLst/>
+              </a:prstGeom>
+              <a:solidFill>
+                <a:srgbClr val="000000">
+                  <a:alpha val="30196"/>
+                </a:srgbClr>
+              </a:solidFill>
+              <a:ln>
+                <a:noFill/>
+              </a:ln>
+            </p:spPr>
+            <p:style>
+              <a:lnRef idx="2">
+                <a:schemeClr val="accent1">
+                  <a:shade val="50000"/>
+                </a:schemeClr>
+              </a:lnRef>
+              <a:fillRef idx="1">
+                <a:schemeClr val="accent1"/>
+              </a:fillRef>
+              <a:effectRef idx="0">
+                <a:schemeClr val="accent1"/>
+              </a:effectRef>
+              <a:fontRef idx="minor">
+                <a:schemeClr val="lt1"/>
+              </a:fontRef>
+            </p:style>
+            <p:txBody>
+              <a:bodyPr rtlCol="0" anchor="ctr"/>
+              <a:lstStyle/>
+              <a:p>
+                <a:pPr algn="ctr"/>
+                <a:endParaRPr lang="en-US"/>
+              </a:p>
+            </p:txBody>
+          </p:sp>
+          <p:sp>
+            <p:nvSpPr>
+              <p:cNvPr id="240" name="Oval 239"/>
+              <p:cNvSpPr/>
+              <p:nvPr/>
+            </p:nvSpPr>
+            <p:spPr>
+              <a:xfrm>
+                <a:off x="4152342" y="3520073"/>
+                <a:ext cx="179806" cy="179806"/>
+              </a:xfrm>
+              <a:prstGeom prst="ellipse">
+                <a:avLst/>
+              </a:prstGeom>
+              <a:solidFill>
+                <a:srgbClr val="000000">
+                  <a:alpha val="30196"/>
+                </a:srgbClr>
+              </a:solidFill>
+              <a:ln>
+                <a:noFill/>
+              </a:ln>
+            </p:spPr>
+            <p:style>
+              <a:lnRef idx="2">
+                <a:schemeClr val="accent1">
+                  <a:shade val="50000"/>
+                </a:schemeClr>
+              </a:lnRef>
+              <a:fillRef idx="1">
+                <a:schemeClr val="accent1"/>
+              </a:fillRef>
+              <a:effectRef idx="0">
+                <a:schemeClr val="accent1"/>
+              </a:effectRef>
+              <a:fontRef idx="minor">
+                <a:schemeClr val="lt1"/>
+              </a:fontRef>
+            </p:style>
+            <p:txBody>
+              <a:bodyPr rtlCol="0" anchor="ctr"/>
+              <a:lstStyle/>
+              <a:p>
+                <a:pPr algn="ctr"/>
+                <a:endParaRPr lang="en-US"/>
+              </a:p>
+            </p:txBody>
+          </p:sp>
+          <p:sp>
+            <p:nvSpPr>
+              <p:cNvPr id="241" name="Oval 240"/>
+              <p:cNvSpPr/>
+              <p:nvPr/>
+            </p:nvSpPr>
+            <p:spPr>
+              <a:xfrm>
+                <a:off x="4809764" y="4521289"/>
+                <a:ext cx="179806" cy="179806"/>
+              </a:xfrm>
+              <a:prstGeom prst="ellipse">
+                <a:avLst/>
+              </a:prstGeom>
+              <a:solidFill>
+                <a:srgbClr val="000000">
+                  <a:alpha val="30196"/>
+                </a:srgbClr>
+              </a:solidFill>
+              <a:ln>
+                <a:noFill/>
+              </a:ln>
+            </p:spPr>
+            <p:style>
+              <a:lnRef idx="2">
+                <a:schemeClr val="accent1">
+                  <a:shade val="50000"/>
+                </a:schemeClr>
+              </a:lnRef>
+              <a:fillRef idx="1">
+                <a:schemeClr val="accent1"/>
+              </a:fillRef>
+              <a:effectRef idx="0">
+                <a:schemeClr val="accent1"/>
+              </a:effectRef>
+              <a:fontRef idx="minor">
+                <a:schemeClr val="lt1"/>
+              </a:fontRef>
+            </p:style>
+            <p:txBody>
+              <a:bodyPr rtlCol="0" anchor="ctr"/>
+              <a:lstStyle/>
+              <a:p>
+                <a:pPr algn="ctr"/>
+                <a:endParaRPr lang="en-US"/>
+              </a:p>
+            </p:txBody>
+          </p:sp>
+          <p:sp>
+            <p:nvSpPr>
+              <p:cNvPr id="242" name="Oval 241"/>
+              <p:cNvSpPr/>
+              <p:nvPr/>
+            </p:nvSpPr>
+            <p:spPr>
+              <a:xfrm>
+                <a:off x="4142604" y="4511671"/>
+                <a:ext cx="179806" cy="179806"/>
+              </a:xfrm>
+              <a:prstGeom prst="ellipse">
+                <a:avLst/>
+              </a:prstGeom>
+              <a:solidFill>
+                <a:srgbClr val="000000">
+                  <a:alpha val="30196"/>
+                </a:srgbClr>
+              </a:solidFill>
+              <a:ln>
+                <a:noFill/>
+              </a:ln>
+            </p:spPr>
+            <p:style>
+              <a:lnRef idx="2">
+                <a:schemeClr val="accent1">
+                  <a:shade val="50000"/>
+                </a:schemeClr>
+              </a:lnRef>
+              <a:fillRef idx="1">
+                <a:schemeClr val="accent1"/>
+              </a:fillRef>
+              <a:effectRef idx="0">
+                <a:schemeClr val="accent1"/>
+              </a:effectRef>
+              <a:fontRef idx="minor">
+                <a:schemeClr val="lt1"/>
+              </a:fontRef>
+            </p:style>
+            <p:txBody>
+              <a:bodyPr rtlCol="0" anchor="ctr"/>
+              <a:lstStyle/>
+              <a:p>
+                <a:pPr algn="ctr"/>
+                <a:endParaRPr lang="en-US"/>
+              </a:p>
+            </p:txBody>
+          </p:sp>
+          <p:sp>
+            <p:nvSpPr>
+              <p:cNvPr id="243" name="Oval 242"/>
+              <p:cNvSpPr/>
+              <p:nvPr/>
+            </p:nvSpPr>
+            <p:spPr>
+              <a:xfrm>
+                <a:off x="4286102" y="3783596"/>
+                <a:ext cx="103054" cy="103054"/>
+              </a:xfrm>
+              <a:prstGeom prst="ellipse">
+                <a:avLst/>
+              </a:prstGeom>
+              <a:solidFill>
+                <a:srgbClr val="000000">
+                  <a:alpha val="60000"/>
+                </a:srgbClr>
+              </a:solidFill>
+              <a:ln>
+                <a:solidFill>
+                  <a:srgbClr val="7F6000">
+                    <a:alpha val="60000"/>
+                  </a:srgbClr>
+                </a:solidFill>
+              </a:ln>
+            </p:spPr>
+            <p:style>
+              <a:lnRef idx="2">
+                <a:schemeClr val="accent1">
+                  <a:shade val="50000"/>
+                </a:schemeClr>
+              </a:lnRef>
+              <a:fillRef idx="1">
+                <a:schemeClr val="accent1"/>
+              </a:fillRef>
+              <a:effectRef idx="0">
+                <a:schemeClr val="accent1"/>
+              </a:effectRef>
+              <a:fontRef idx="minor">
+                <a:schemeClr val="lt1"/>
+              </a:fontRef>
+            </p:style>
+            <p:txBody>
+              <a:bodyPr rtlCol="0" anchor="ctr"/>
+              <a:lstStyle/>
+              <a:p>
+                <a:pPr algn="ctr"/>
+                <a:endParaRPr lang="en-US"/>
+              </a:p>
+            </p:txBody>
+          </p:sp>
+          <p:sp>
+            <p:nvSpPr>
+              <p:cNvPr id="244" name="Oval 243"/>
+              <p:cNvSpPr/>
+              <p:nvPr/>
+            </p:nvSpPr>
+            <p:spPr>
+              <a:xfrm>
+                <a:off x="4756890" y="3786700"/>
+                <a:ext cx="103054" cy="103054"/>
+              </a:xfrm>
+              <a:prstGeom prst="ellipse">
+                <a:avLst/>
+              </a:prstGeom>
+              <a:solidFill>
+                <a:srgbClr val="000000">
+                  <a:alpha val="60000"/>
+                </a:srgbClr>
+              </a:solidFill>
+              <a:ln>
+                <a:solidFill>
+                  <a:srgbClr val="7F6000">
+                    <a:alpha val="60000"/>
+                  </a:srgbClr>
+                </a:solidFill>
+              </a:ln>
+            </p:spPr>
+            <p:style>
+              <a:lnRef idx="2">
+                <a:schemeClr val="accent1">
+                  <a:shade val="50000"/>
+                </a:schemeClr>
+              </a:lnRef>
+              <a:fillRef idx="1">
+                <a:schemeClr val="accent1"/>
+              </a:fillRef>
+              <a:effectRef idx="0">
+                <a:schemeClr val="accent1"/>
+              </a:effectRef>
+              <a:fontRef idx="minor">
+                <a:schemeClr val="lt1"/>
+              </a:fontRef>
+            </p:style>
+            <p:txBody>
+              <a:bodyPr rtlCol="0" anchor="ctr"/>
+              <a:lstStyle/>
+              <a:p>
+                <a:pPr algn="ctr"/>
+                <a:endParaRPr lang="en-US"/>
+              </a:p>
+            </p:txBody>
+          </p:sp>
+          <p:sp>
+            <p:nvSpPr>
+              <p:cNvPr id="245" name="Oval 244"/>
+              <p:cNvSpPr/>
+              <p:nvPr/>
+            </p:nvSpPr>
+            <p:spPr>
+              <a:xfrm>
+                <a:off x="4284051" y="4350739"/>
+                <a:ext cx="103054" cy="103054"/>
+              </a:xfrm>
+              <a:prstGeom prst="ellipse">
+                <a:avLst/>
+              </a:prstGeom>
+              <a:solidFill>
+                <a:srgbClr val="000000">
+                  <a:alpha val="60000"/>
+                </a:srgbClr>
+              </a:solidFill>
+              <a:ln>
+                <a:solidFill>
+                  <a:srgbClr val="7F6000">
+                    <a:alpha val="60000"/>
+                  </a:srgbClr>
+                </a:solidFill>
+              </a:ln>
+            </p:spPr>
+            <p:style>
+              <a:lnRef idx="2">
+                <a:schemeClr val="accent1">
+                  <a:shade val="50000"/>
+                </a:schemeClr>
+              </a:lnRef>
+              <a:fillRef idx="1">
+                <a:schemeClr val="accent1"/>
+              </a:fillRef>
+              <a:effectRef idx="0">
+                <a:schemeClr val="accent1"/>
+              </a:effectRef>
+              <a:fontRef idx="minor">
+                <a:schemeClr val="lt1"/>
+              </a:fontRef>
+            </p:style>
+            <p:txBody>
+              <a:bodyPr rtlCol="0" anchor="ctr"/>
+              <a:lstStyle/>
+              <a:p>
+                <a:pPr algn="ctr"/>
+                <a:endParaRPr lang="en-US"/>
+              </a:p>
+            </p:txBody>
+          </p:sp>
+          <p:sp>
+            <p:nvSpPr>
+              <p:cNvPr id="246" name="Oval 245"/>
+              <p:cNvSpPr/>
+              <p:nvPr/>
+            </p:nvSpPr>
+            <p:spPr>
+              <a:xfrm>
+                <a:off x="4754839" y="4353843"/>
+                <a:ext cx="103054" cy="103054"/>
+              </a:xfrm>
+              <a:prstGeom prst="ellipse">
+                <a:avLst/>
+              </a:prstGeom>
+              <a:solidFill>
+                <a:srgbClr val="000000">
+                  <a:alpha val="60000"/>
+                </a:srgbClr>
+              </a:solidFill>
+              <a:ln>
+                <a:solidFill>
+                  <a:srgbClr val="7F6000">
+                    <a:alpha val="60000"/>
+                  </a:srgbClr>
+                </a:solidFill>
+              </a:ln>
+            </p:spPr>
+            <p:style>
+              <a:lnRef idx="2">
+                <a:schemeClr val="accent1">
+                  <a:shade val="50000"/>
+                </a:schemeClr>
+              </a:lnRef>
+              <a:fillRef idx="1">
+                <a:schemeClr val="accent1"/>
+              </a:fillRef>
+              <a:effectRef idx="0">
+                <a:schemeClr val="accent1"/>
+              </a:effectRef>
+              <a:fontRef idx="minor">
+                <a:schemeClr val="lt1"/>
+              </a:fontRef>
+            </p:style>
+            <p:txBody>
+              <a:bodyPr rtlCol="0" anchor="ctr"/>
+              <a:lstStyle/>
+              <a:p>
+                <a:pPr algn="ctr"/>
+                <a:endParaRPr lang="en-US"/>
+              </a:p>
+            </p:txBody>
+          </p:sp>
+        </p:grpSp>
+        <p:sp>
+          <p:nvSpPr>
+            <p:cNvPr id="235" name="Rectangle 234"/>
+            <p:cNvSpPr/>
+            <p:nvPr/>
+          </p:nvSpPr>
+          <p:spPr>
+            <a:xfrm>
+              <a:off x="4921326" y="3800488"/>
+              <a:ext cx="118345" cy="553144"/>
+            </a:xfrm>
+            <a:prstGeom prst="rect">
+              <a:avLst/>
+            </a:prstGeom>
+            <a:solidFill>
+              <a:srgbClr val="7F6000">
+                <a:alpha val="29804"/>
+              </a:srgbClr>
+            </a:solidFill>
+            <a:ln>
+              <a:noFill/>
+            </a:ln>
+          </p:spPr>
+          <p:style>
+            <a:lnRef idx="2">
+              <a:schemeClr val="accent1">
+                <a:shade val="50000"/>
+              </a:schemeClr>
+            </a:lnRef>
+            <a:fillRef idx="1">
+              <a:schemeClr val="accent1"/>
+            </a:fillRef>
+            <a:effectRef idx="0">
+              <a:schemeClr val="accent1"/>
+            </a:effectRef>
+            <a:fontRef idx="minor">
+              <a:schemeClr val="lt1"/>
+            </a:fontRef>
+          </p:style>
+          <p:txBody>
+            <a:bodyPr rtlCol="0" anchor="ctr"/>
+            <a:lstStyle/>
+            <a:p>
+              <a:pPr algn="ctr"/>
+              <a:endParaRPr lang="en-US"/>
+            </a:p>
+          </p:txBody>
+        </p:sp>
+        <p:sp>
+          <p:nvSpPr>
+            <p:cNvPr id="236" name="Rectangle 235"/>
+            <p:cNvSpPr/>
+            <p:nvPr/>
+          </p:nvSpPr>
+          <p:spPr>
+            <a:xfrm>
+              <a:off x="4095844" y="3800488"/>
+              <a:ext cx="118345" cy="553144"/>
+            </a:xfrm>
+            <a:prstGeom prst="rect">
+              <a:avLst/>
+            </a:prstGeom>
+            <a:solidFill>
+              <a:srgbClr val="7F6000">
+                <a:alpha val="29804"/>
+              </a:srgbClr>
+            </a:solidFill>
+            <a:ln>
+              <a:noFill/>
+            </a:ln>
+          </p:spPr>
+          <p:style>
+            <a:lnRef idx="2">
+              <a:schemeClr val="accent1">
+                <a:shade val="50000"/>
+              </a:schemeClr>
+            </a:lnRef>
+            <a:fillRef idx="1">
+              <a:schemeClr val="accent1"/>
+            </a:fillRef>
+            <a:effectRef idx="0">
+              <a:schemeClr val="accent1"/>
+            </a:effectRef>
+            <a:fontRef idx="minor">
+              <a:schemeClr val="lt1"/>
+            </a:fontRef>
+          </p:style>
+          <p:txBody>
+            <a:bodyPr rtlCol="0" anchor="ctr"/>
+            <a:lstStyle/>
+            <a:p>
+              <a:pPr algn="ctr"/>
+              <a:endParaRPr lang="en-US"/>
+            </a:p>
+          </p:txBody>
+        </p:sp>
+      </p:grpSp>
+      <p:sp>
+        <p:nvSpPr>
+          <p:cNvPr id="62" name="TextBox 61"/>
+          <p:cNvSpPr txBox="1"/>
+          <p:nvPr/>
+        </p:nvSpPr>
+        <p:spPr>
+          <a:xfrm>
+            <a:off x="1833705" y="2590351"/>
+            <a:ext cx="944299" cy="461665"/>
+          </a:xfrm>
+          <a:prstGeom prst="rect">
+            <a:avLst/>
+          </a:prstGeom>
+          <a:noFill/>
+        </p:spPr>
+        <p:txBody>
+          <a:bodyPr wrap="square" rtlCol="0">
+            <a:spAutoFit/>
+          </a:bodyPr>
+          <a:lstStyle/>
+          <a:p>
+            <a:r>
+              <a:rPr lang="ro-RO" sz="1200" dirty="0" smtClean="0">
+                <a:solidFill>
+                  <a:srgbClr val="492207"/>
+                </a:solidFill>
+                <a:latin typeface="Libre Baskerville" panose="02000000000000000000" pitchFamily="2" charset="0"/>
+              </a:rPr>
+              <a:t>Drawing Room</a:t>
+            </a:r>
+            <a:endParaRPr lang="en-US" sz="1200" dirty="0">
+              <a:solidFill>
+                <a:srgbClr val="492207"/>
+              </a:solidFill>
+              <a:latin typeface="Libre Baskerville" panose="02000000000000000000" pitchFamily="2" charset="0"/>
+            </a:endParaRPr>
+          </a:p>
+        </p:txBody>
+      </p:sp>
+      <p:grpSp>
+        <p:nvGrpSpPr>
+          <p:cNvPr id="21" name="Group 20"/>
+          <p:cNvGrpSpPr/>
+          <p:nvPr/>
+        </p:nvGrpSpPr>
+        <p:grpSpPr>
+          <a:xfrm>
+            <a:off x="1650738" y="450412"/>
+            <a:ext cx="394624" cy="119516"/>
+            <a:chOff x="1650738" y="450412"/>
+            <a:chExt cx="394624" cy="119516"/>
+          </a:xfrm>
+        </p:grpSpPr>
+        <p:sp>
+          <p:nvSpPr>
+            <p:cNvPr id="18" name="Oval 17"/>
+            <p:cNvSpPr/>
+            <p:nvPr/>
+          </p:nvSpPr>
+          <p:spPr>
+            <a:xfrm>
+              <a:off x="1653811" y="523458"/>
+              <a:ext cx="45720" cy="45720"/>
+            </a:xfrm>
+            <a:prstGeom prst="ellipse">
+              <a:avLst/>
+            </a:prstGeom>
+            <a:solidFill>
+              <a:schemeClr val="accent1">
+                <a:lumMod val="20000"/>
+                <a:lumOff val="80000"/>
+              </a:schemeClr>
+            </a:solidFill>
+            <a:ln>
+              <a:solidFill>
+                <a:schemeClr val="tx2">
+                  <a:lumMod val="40000"/>
+                  <a:lumOff val="60000"/>
+                </a:schemeClr>
+              </a:solidFill>
+            </a:ln>
+          </p:spPr>
+          <p:style>
+            <a:lnRef idx="2">
+              <a:schemeClr val="accent1">
+                <a:shade val="50000"/>
+              </a:schemeClr>
+            </a:lnRef>
+            <a:fillRef idx="1">
+              <a:schemeClr val="accent1"/>
+            </a:fillRef>
+            <a:effectRef idx="0">
+              <a:schemeClr val="accent1"/>
+            </a:effectRef>
+            <a:fontRef idx="minor">
+              <a:schemeClr val="lt1"/>
+            </a:fontRef>
+          </p:style>
+          <p:txBody>
+            <a:bodyPr rtlCol="0" anchor="ctr"/>
+            <a:lstStyle/>
+            <a:p>
+              <a:pPr algn="ctr"/>
+              <a:endParaRPr lang="en-US" dirty="0"/>
+            </a:p>
+          </p:txBody>
+        </p:sp>
+        <p:sp>
+          <p:nvSpPr>
+            <p:cNvPr id="225" name="Oval 224"/>
+            <p:cNvSpPr/>
+            <p:nvPr/>
+          </p:nvSpPr>
+          <p:spPr>
+            <a:xfrm>
+              <a:off x="1722654" y="523304"/>
+              <a:ext cx="45720" cy="45720"/>
+            </a:xfrm>
+            <a:prstGeom prst="ellipse">
+              <a:avLst/>
+            </a:prstGeom>
+            <a:solidFill>
+              <a:schemeClr val="accent1">
+                <a:lumMod val="20000"/>
+                <a:lumOff val="80000"/>
+              </a:schemeClr>
+            </a:solidFill>
+            <a:ln>
+              <a:solidFill>
+                <a:schemeClr val="tx2">
+                  <a:lumMod val="40000"/>
+                  <a:lumOff val="60000"/>
+                </a:schemeClr>
+              </a:solidFill>
+            </a:ln>
+          </p:spPr>
+          <p:style>
+            <a:lnRef idx="2">
+              <a:schemeClr val="accent1">
+                <a:shade val="50000"/>
+              </a:schemeClr>
+            </a:lnRef>
+            <a:fillRef idx="1">
+              <a:schemeClr val="accent1"/>
+            </a:fillRef>
+            <a:effectRef idx="0">
+              <a:schemeClr val="accent1"/>
+            </a:effectRef>
+            <a:fontRef idx="minor">
+              <a:schemeClr val="lt1"/>
+            </a:fontRef>
+          </p:style>
+          <p:txBody>
+            <a:bodyPr rtlCol="0" anchor="ctr"/>
+            <a:lstStyle/>
+            <a:p>
+              <a:pPr algn="ctr"/>
+              <a:endParaRPr lang="en-US" dirty="0"/>
+            </a:p>
+          </p:txBody>
+        </p:sp>
+        <p:sp>
+          <p:nvSpPr>
+            <p:cNvPr id="226" name="Oval 225"/>
+            <p:cNvSpPr/>
+            <p:nvPr/>
+          </p:nvSpPr>
+          <p:spPr>
+            <a:xfrm>
+              <a:off x="1791645" y="524208"/>
+              <a:ext cx="45720" cy="45720"/>
+            </a:xfrm>
+            <a:prstGeom prst="ellipse">
+              <a:avLst/>
+            </a:prstGeom>
+            <a:solidFill>
+              <a:schemeClr val="accent1">
+                <a:lumMod val="20000"/>
+                <a:lumOff val="80000"/>
+              </a:schemeClr>
+            </a:solidFill>
+            <a:ln>
+              <a:solidFill>
+                <a:schemeClr val="tx2">
+                  <a:lumMod val="40000"/>
+                  <a:lumOff val="60000"/>
+                </a:schemeClr>
+              </a:solidFill>
+            </a:ln>
+          </p:spPr>
+          <p:style>
+            <a:lnRef idx="2">
+              <a:schemeClr val="accent1">
+                <a:shade val="50000"/>
+              </a:schemeClr>
+            </a:lnRef>
+            <a:fillRef idx="1">
+              <a:schemeClr val="accent1"/>
+            </a:fillRef>
+            <a:effectRef idx="0">
+              <a:schemeClr val="accent1"/>
+            </a:effectRef>
+            <a:fontRef idx="minor">
+              <a:schemeClr val="lt1"/>
+            </a:fontRef>
+          </p:style>
+          <p:txBody>
+            <a:bodyPr rtlCol="0" anchor="ctr"/>
+            <a:lstStyle/>
+            <a:p>
+              <a:pPr algn="ctr"/>
+              <a:endParaRPr lang="en-US" dirty="0"/>
+            </a:p>
+          </p:txBody>
+        </p:sp>
+        <p:sp>
+          <p:nvSpPr>
+            <p:cNvPr id="227" name="Oval 226"/>
+            <p:cNvSpPr/>
+            <p:nvPr/>
+          </p:nvSpPr>
+          <p:spPr>
+            <a:xfrm>
+              <a:off x="1858107" y="524054"/>
+              <a:ext cx="45720" cy="45720"/>
+            </a:xfrm>
+            <a:prstGeom prst="ellipse">
+              <a:avLst/>
+            </a:prstGeom>
+            <a:solidFill>
+              <a:schemeClr val="accent1">
+                <a:lumMod val="20000"/>
+                <a:lumOff val="80000"/>
+              </a:schemeClr>
+            </a:solidFill>
+            <a:ln>
+              <a:solidFill>
+                <a:schemeClr val="tx2">
+                  <a:lumMod val="40000"/>
+                  <a:lumOff val="60000"/>
+                </a:schemeClr>
+              </a:solidFill>
+            </a:ln>
+          </p:spPr>
+          <p:style>
+            <a:lnRef idx="2">
+              <a:schemeClr val="accent1">
+                <a:shade val="50000"/>
+              </a:schemeClr>
+            </a:lnRef>
+            <a:fillRef idx="1">
+              <a:schemeClr val="accent1"/>
+            </a:fillRef>
+            <a:effectRef idx="0">
+              <a:schemeClr val="accent1"/>
+            </a:effectRef>
+            <a:fontRef idx="minor">
+              <a:schemeClr val="lt1"/>
+            </a:fontRef>
+          </p:style>
+          <p:txBody>
+            <a:bodyPr rtlCol="0" anchor="ctr"/>
+            <a:lstStyle/>
+            <a:p>
+              <a:pPr algn="ctr"/>
+              <a:endParaRPr lang="en-US" dirty="0"/>
+            </a:p>
+          </p:txBody>
+        </p:sp>
+        <p:sp>
+          <p:nvSpPr>
+            <p:cNvPr id="228" name="Oval 227"/>
+            <p:cNvSpPr/>
+            <p:nvPr/>
+          </p:nvSpPr>
+          <p:spPr>
+            <a:xfrm>
+              <a:off x="1650738" y="454096"/>
+              <a:ext cx="45720" cy="45720"/>
+            </a:xfrm>
+            <a:prstGeom prst="ellipse">
+              <a:avLst/>
+            </a:prstGeom>
+            <a:solidFill>
+              <a:schemeClr val="accent1">
+                <a:lumMod val="20000"/>
+                <a:lumOff val="80000"/>
+              </a:schemeClr>
+            </a:solidFill>
+            <a:ln>
+              <a:solidFill>
+                <a:schemeClr val="tx2">
+                  <a:lumMod val="40000"/>
+                  <a:lumOff val="60000"/>
+                </a:schemeClr>
+              </a:solidFill>
+            </a:ln>
+          </p:spPr>
+          <p:style>
+            <a:lnRef idx="2">
+              <a:schemeClr val="accent1">
+                <a:shade val="50000"/>
+              </a:schemeClr>
+            </a:lnRef>
+            <a:fillRef idx="1">
+              <a:schemeClr val="accent1"/>
+            </a:fillRef>
+            <a:effectRef idx="0">
+              <a:schemeClr val="accent1"/>
+            </a:effectRef>
+            <a:fontRef idx="minor">
+              <a:schemeClr val="lt1"/>
+            </a:fontRef>
+          </p:style>
+          <p:txBody>
+            <a:bodyPr rtlCol="0" anchor="ctr"/>
+            <a:lstStyle/>
+            <a:p>
+              <a:pPr algn="ctr"/>
+              <a:endParaRPr lang="en-US" dirty="0"/>
+            </a:p>
+          </p:txBody>
+        </p:sp>
+        <p:sp>
+          <p:nvSpPr>
+            <p:cNvPr id="229" name="Oval 228"/>
+            <p:cNvSpPr/>
+            <p:nvPr/>
+          </p:nvSpPr>
+          <p:spPr>
+            <a:xfrm>
+              <a:off x="1719581" y="453942"/>
+              <a:ext cx="45720" cy="45720"/>
+            </a:xfrm>
+            <a:prstGeom prst="ellipse">
+              <a:avLst/>
+            </a:prstGeom>
+            <a:solidFill>
+              <a:schemeClr val="accent1">
+                <a:lumMod val="20000"/>
+                <a:lumOff val="80000"/>
+              </a:schemeClr>
+            </a:solidFill>
+            <a:ln>
+              <a:solidFill>
+                <a:schemeClr val="tx2">
+                  <a:lumMod val="40000"/>
+                  <a:lumOff val="60000"/>
+                </a:schemeClr>
+              </a:solidFill>
+            </a:ln>
+          </p:spPr>
+          <p:style>
+            <a:lnRef idx="2">
+              <a:schemeClr val="accent1">
+                <a:shade val="50000"/>
+              </a:schemeClr>
+            </a:lnRef>
+            <a:fillRef idx="1">
+              <a:schemeClr val="accent1"/>
+            </a:fillRef>
+            <a:effectRef idx="0">
+              <a:schemeClr val="accent1"/>
+            </a:effectRef>
+            <a:fontRef idx="minor">
+              <a:schemeClr val="lt1"/>
+            </a:fontRef>
+          </p:style>
+          <p:txBody>
+            <a:bodyPr rtlCol="0" anchor="ctr"/>
+            <a:lstStyle/>
+            <a:p>
+              <a:pPr algn="ctr"/>
+              <a:endParaRPr lang="en-US" dirty="0"/>
+            </a:p>
+          </p:txBody>
+        </p:sp>
+        <p:sp>
+          <p:nvSpPr>
+            <p:cNvPr id="230" name="Oval 229"/>
+            <p:cNvSpPr/>
+            <p:nvPr/>
+          </p:nvSpPr>
+          <p:spPr>
+            <a:xfrm>
+              <a:off x="1788572" y="454846"/>
+              <a:ext cx="45720" cy="45720"/>
+            </a:xfrm>
+            <a:prstGeom prst="ellipse">
+              <a:avLst/>
+            </a:prstGeom>
+            <a:solidFill>
+              <a:schemeClr val="accent1">
+                <a:lumMod val="20000"/>
+                <a:lumOff val="80000"/>
+              </a:schemeClr>
+            </a:solidFill>
+            <a:ln>
+              <a:solidFill>
+                <a:schemeClr val="tx2">
+                  <a:lumMod val="40000"/>
+                  <a:lumOff val="60000"/>
+                </a:schemeClr>
+              </a:solidFill>
+            </a:ln>
+          </p:spPr>
+          <p:style>
+            <a:lnRef idx="2">
+              <a:schemeClr val="accent1">
+                <a:shade val="50000"/>
+              </a:schemeClr>
+            </a:lnRef>
+            <a:fillRef idx="1">
+              <a:schemeClr val="accent1"/>
+            </a:fillRef>
+            <a:effectRef idx="0">
+              <a:schemeClr val="accent1"/>
+            </a:effectRef>
+            <a:fontRef idx="minor">
+              <a:schemeClr val="lt1"/>
+            </a:fontRef>
+          </p:style>
+          <p:txBody>
+            <a:bodyPr rtlCol="0" anchor="ctr"/>
+            <a:lstStyle/>
+            <a:p>
+              <a:pPr algn="ctr"/>
+              <a:endParaRPr lang="en-US" dirty="0"/>
+            </a:p>
+          </p:txBody>
+        </p:sp>
+        <p:sp>
+          <p:nvSpPr>
+            <p:cNvPr id="231" name="Oval 230"/>
+            <p:cNvSpPr/>
+            <p:nvPr/>
+          </p:nvSpPr>
+          <p:spPr>
+            <a:xfrm>
+              <a:off x="1855034" y="454692"/>
+              <a:ext cx="45720" cy="45720"/>
+            </a:xfrm>
+            <a:prstGeom prst="ellipse">
+              <a:avLst/>
+            </a:prstGeom>
+            <a:solidFill>
+              <a:schemeClr val="accent1">
+                <a:lumMod val="20000"/>
+                <a:lumOff val="80000"/>
+              </a:schemeClr>
+            </a:solidFill>
+            <a:ln>
+              <a:solidFill>
+                <a:schemeClr val="tx2">
+                  <a:lumMod val="40000"/>
+                  <a:lumOff val="60000"/>
+                </a:schemeClr>
+              </a:solidFill>
+            </a:ln>
+          </p:spPr>
+          <p:style>
+            <a:lnRef idx="2">
+              <a:schemeClr val="accent1">
+                <a:shade val="50000"/>
+              </a:schemeClr>
+            </a:lnRef>
+            <a:fillRef idx="1">
+              <a:schemeClr val="accent1"/>
+            </a:fillRef>
+            <a:effectRef idx="0">
+              <a:schemeClr val="accent1"/>
+            </a:effectRef>
+            <a:fontRef idx="minor">
+              <a:schemeClr val="lt1"/>
+            </a:fontRef>
+          </p:style>
+          <p:txBody>
+            <a:bodyPr rtlCol="0" anchor="ctr"/>
+            <a:lstStyle/>
+            <a:p>
+              <a:pPr algn="ctr"/>
+              <a:endParaRPr lang="en-US" dirty="0"/>
+            </a:p>
+          </p:txBody>
+        </p:sp>
+        <p:sp>
+          <p:nvSpPr>
+            <p:cNvPr id="259" name="Oval 258"/>
+            <p:cNvSpPr/>
+            <p:nvPr/>
+          </p:nvSpPr>
+          <p:spPr>
+            <a:xfrm>
+              <a:off x="1927854" y="522003"/>
+              <a:ext cx="45720" cy="45720"/>
+            </a:xfrm>
+            <a:prstGeom prst="ellipse">
+              <a:avLst/>
+            </a:prstGeom>
+            <a:solidFill>
+              <a:schemeClr val="accent1">
+                <a:lumMod val="20000"/>
+                <a:lumOff val="80000"/>
+              </a:schemeClr>
+            </a:solidFill>
+            <a:ln>
+              <a:solidFill>
+                <a:schemeClr val="tx2">
+                  <a:lumMod val="40000"/>
+                  <a:lumOff val="60000"/>
+                </a:schemeClr>
+              </a:solidFill>
+            </a:ln>
+          </p:spPr>
+          <p:style>
+            <a:lnRef idx="2">
+              <a:schemeClr val="accent1">
+                <a:shade val="50000"/>
+              </a:schemeClr>
+            </a:lnRef>
+            <a:fillRef idx="1">
+              <a:schemeClr val="accent1"/>
+            </a:fillRef>
+            <a:effectRef idx="0">
+              <a:schemeClr val="accent1"/>
+            </a:effectRef>
+            <a:fontRef idx="minor">
+              <a:schemeClr val="lt1"/>
+            </a:fontRef>
+          </p:style>
+          <p:txBody>
+            <a:bodyPr rtlCol="0" anchor="ctr"/>
+            <a:lstStyle/>
+            <a:p>
+              <a:pPr algn="ctr"/>
+              <a:endParaRPr lang="en-US" dirty="0"/>
+            </a:p>
+          </p:txBody>
+        </p:sp>
+        <p:sp>
+          <p:nvSpPr>
+            <p:cNvPr id="260" name="Oval 259"/>
+            <p:cNvSpPr/>
+            <p:nvPr/>
+          </p:nvSpPr>
+          <p:spPr>
+            <a:xfrm>
+              <a:off x="1924781" y="452641"/>
+              <a:ext cx="45720" cy="45720"/>
+            </a:xfrm>
+            <a:prstGeom prst="ellipse">
+              <a:avLst/>
+            </a:prstGeom>
+            <a:solidFill>
+              <a:schemeClr val="accent1">
+                <a:lumMod val="20000"/>
+                <a:lumOff val="80000"/>
+              </a:schemeClr>
+            </a:solidFill>
+            <a:ln>
+              <a:solidFill>
+                <a:schemeClr val="tx2">
+                  <a:lumMod val="40000"/>
+                  <a:lumOff val="60000"/>
+                </a:schemeClr>
+              </a:solidFill>
+            </a:ln>
+          </p:spPr>
+          <p:style>
+            <a:lnRef idx="2">
+              <a:schemeClr val="accent1">
+                <a:shade val="50000"/>
+              </a:schemeClr>
+            </a:lnRef>
+            <a:fillRef idx="1">
+              <a:schemeClr val="accent1"/>
+            </a:fillRef>
+            <a:effectRef idx="0">
+              <a:schemeClr val="accent1"/>
+            </a:effectRef>
+            <a:fontRef idx="minor">
+              <a:schemeClr val="lt1"/>
+            </a:fontRef>
+          </p:style>
+          <p:txBody>
+            <a:bodyPr rtlCol="0" anchor="ctr"/>
+            <a:lstStyle/>
+            <a:p>
+              <a:pPr algn="ctr"/>
+              <a:endParaRPr lang="en-US" dirty="0"/>
+            </a:p>
+          </p:txBody>
+        </p:sp>
+        <p:sp>
+          <p:nvSpPr>
+            <p:cNvPr id="261" name="Oval 260"/>
+            <p:cNvSpPr/>
+            <p:nvPr/>
+          </p:nvSpPr>
+          <p:spPr>
+            <a:xfrm>
+              <a:off x="1999642" y="519774"/>
+              <a:ext cx="45720" cy="45720"/>
+            </a:xfrm>
+            <a:prstGeom prst="ellipse">
+              <a:avLst/>
+            </a:prstGeom>
+            <a:solidFill>
+              <a:schemeClr val="accent1">
+                <a:lumMod val="20000"/>
+                <a:lumOff val="80000"/>
+              </a:schemeClr>
+            </a:solidFill>
+            <a:ln>
+              <a:solidFill>
+                <a:schemeClr val="tx2">
+                  <a:lumMod val="40000"/>
+                  <a:lumOff val="60000"/>
+                </a:schemeClr>
+              </a:solidFill>
+            </a:ln>
+          </p:spPr>
+          <p:style>
+            <a:lnRef idx="2">
+              <a:schemeClr val="accent1">
+                <a:shade val="50000"/>
+              </a:schemeClr>
+            </a:lnRef>
+            <a:fillRef idx="1">
+              <a:schemeClr val="accent1"/>
+            </a:fillRef>
+            <a:effectRef idx="0">
+              <a:schemeClr val="accent1"/>
+            </a:effectRef>
+            <a:fontRef idx="minor">
+              <a:schemeClr val="lt1"/>
+            </a:fontRef>
+          </p:style>
+          <p:txBody>
+            <a:bodyPr rtlCol="0" anchor="ctr"/>
+            <a:lstStyle/>
+            <a:p>
+              <a:pPr algn="ctr"/>
+              <a:endParaRPr lang="en-US" dirty="0"/>
+            </a:p>
+          </p:txBody>
+        </p:sp>
+        <p:sp>
+          <p:nvSpPr>
+            <p:cNvPr id="262" name="Oval 261"/>
+            <p:cNvSpPr/>
+            <p:nvPr/>
+          </p:nvSpPr>
+          <p:spPr>
+            <a:xfrm>
+              <a:off x="1996569" y="450412"/>
+              <a:ext cx="45720" cy="45720"/>
+            </a:xfrm>
+            <a:prstGeom prst="ellipse">
+              <a:avLst/>
+            </a:prstGeom>
+            <a:solidFill>
+              <a:schemeClr val="accent1">
+                <a:lumMod val="20000"/>
+                <a:lumOff val="80000"/>
+              </a:schemeClr>
+            </a:solidFill>
+            <a:ln>
+              <a:solidFill>
+                <a:schemeClr val="tx2">
+                  <a:lumMod val="40000"/>
+                  <a:lumOff val="60000"/>
+                </a:schemeClr>
+              </a:solidFill>
+            </a:ln>
+          </p:spPr>
+          <p:style>
+            <a:lnRef idx="2">
+              <a:schemeClr val="accent1">
+                <a:shade val="50000"/>
+              </a:schemeClr>
+            </a:lnRef>
+            <a:fillRef idx="1">
+              <a:schemeClr val="accent1"/>
+            </a:fillRef>
+            <a:effectRef idx="0">
+              <a:schemeClr val="accent1"/>
+            </a:effectRef>
+            <a:fontRef idx="minor">
+              <a:schemeClr val="lt1"/>
+            </a:fontRef>
+          </p:style>
+          <p:txBody>
+            <a:bodyPr rtlCol="0" anchor="ctr"/>
+            <a:lstStyle/>
+            <a:p>
+              <a:pPr algn="ctr"/>
+              <a:endParaRPr lang="en-US" dirty="0"/>
+            </a:p>
+          </p:txBody>
+        </p:sp>
+      </p:grpSp>
+      <p:sp>
+        <p:nvSpPr>
+          <p:cNvPr id="24" name="Rounded Rectangle 23"/>
+          <p:cNvSpPr/>
+          <p:nvPr/>
+        </p:nvSpPr>
+        <p:spPr>
+          <a:xfrm>
+            <a:off x="2834651" y="519086"/>
+            <a:ext cx="45719" cy="45719"/>
+          </a:xfrm>
+          <a:prstGeom prst="roundRect">
+            <a:avLst/>
+          </a:prstGeom>
+          <a:solidFill>
+            <a:schemeClr val="accent2">
+              <a:lumMod val="50000"/>
+            </a:schemeClr>
+          </a:solidFill>
+          <a:ln w="28575">
+            <a:solidFill>
+              <a:srgbClr val="ADB9CA">
+                <a:alpha val="40000"/>
+              </a:srgbClr>
+            </a:solidFill>
+          </a:ln>
+        </p:spPr>
+        <p:style>
+          <a:lnRef idx="2">
+            <a:schemeClr val="accent1">
+              <a:shade val="50000"/>
+            </a:schemeClr>
+          </a:lnRef>
+          <a:fillRef idx="1">
+            <a:schemeClr val="accent1"/>
+          </a:fillRef>
+          <a:effectRef idx="0">
+            <a:schemeClr val="accent1"/>
+          </a:effectRef>
+          <a:fontRef idx="minor">
+            <a:schemeClr val="lt1"/>
+          </a:fontRef>
+        </p:style>
+        <p:txBody>
+          <a:bodyPr rtlCol="0" anchor="ctr"/>
+          <a:lstStyle/>
+          <a:p>
+            <a:pPr algn="ctr"/>
+            <a:endParaRPr lang="en-US"/>
+          </a:p>
+        </p:txBody>
+      </p:sp>
+      <p:sp>
+        <p:nvSpPr>
+          <p:cNvPr id="264" name="Rounded Rectangle 263"/>
+          <p:cNvSpPr/>
+          <p:nvPr/>
+        </p:nvSpPr>
+        <p:spPr>
+          <a:xfrm>
+            <a:off x="2651569" y="496226"/>
+            <a:ext cx="45719" cy="45719"/>
+          </a:xfrm>
+          <a:prstGeom prst="roundRect">
+            <a:avLst/>
+          </a:prstGeom>
+          <a:solidFill>
+            <a:schemeClr val="accent6">
+              <a:lumMod val="50000"/>
+            </a:schemeClr>
+          </a:solidFill>
+          <a:ln w="28575">
+            <a:solidFill>
+              <a:srgbClr val="ADB9CA">
+                <a:alpha val="40000"/>
+              </a:srgbClr>
+            </a:solidFill>
+          </a:ln>
+        </p:spPr>
+        <p:style>
+          <a:lnRef idx="2">
+            <a:schemeClr val="accent1">
+              <a:shade val="50000"/>
+            </a:schemeClr>
+          </a:lnRef>
+          <a:fillRef idx="1">
+            <a:schemeClr val="accent1"/>
+          </a:fillRef>
+          <a:effectRef idx="0">
+            <a:schemeClr val="accent1"/>
+          </a:effectRef>
+          <a:fontRef idx="minor">
+            <a:schemeClr val="lt1"/>
+          </a:fontRef>
+        </p:style>
+        <p:txBody>
+          <a:bodyPr rtlCol="0" anchor="ctr"/>
+          <a:lstStyle/>
+          <a:p>
+            <a:pPr algn="ctr"/>
+            <a:endParaRPr lang="en-US"/>
+          </a:p>
+        </p:txBody>
+      </p:sp>
+      <p:sp>
+        <p:nvSpPr>
+          <p:cNvPr id="25" name="Oval 24"/>
+          <p:cNvSpPr/>
+          <p:nvPr/>
+        </p:nvSpPr>
+        <p:spPr>
+          <a:xfrm>
+            <a:off x="2745330" y="520914"/>
+            <a:ext cx="45719" cy="45719"/>
+          </a:xfrm>
+          <a:prstGeom prst="ellipse">
+            <a:avLst/>
+          </a:prstGeom>
+          <a:solidFill>
+            <a:schemeClr val="accent1">
+              <a:lumMod val="50000"/>
+            </a:schemeClr>
+          </a:solidFill>
+          <a:ln w="28575">
+            <a:solidFill>
+              <a:srgbClr val="ADB9CA">
+                <a:alpha val="40000"/>
+              </a:srgbClr>
+            </a:solidFill>
+          </a:ln>
+        </p:spPr>
+        <p:style>
+          <a:lnRef idx="2">
+            <a:schemeClr val="accent1">
+              <a:shade val="50000"/>
+            </a:schemeClr>
+          </a:lnRef>
+          <a:fillRef idx="1">
+            <a:schemeClr val="accent1"/>
+          </a:fillRef>
+          <a:effectRef idx="0">
+            <a:schemeClr val="accent1"/>
+          </a:effectRef>
+          <a:fontRef idx="minor">
+            <a:schemeClr val="lt1"/>
+          </a:fontRef>
+        </p:style>
+        <p:txBody>
+          <a:bodyPr rtlCol="0" anchor="ctr"/>
+          <a:lstStyle/>
+          <a:p>
+            <a:pPr algn="ctr"/>
+            <a:endParaRPr lang="en-US"/>
+          </a:p>
+        </p:txBody>
+      </p:sp>
+      <p:sp>
+        <p:nvSpPr>
+          <p:cNvPr id="267" name="Oval 266"/>
+          <p:cNvSpPr/>
+          <p:nvPr/>
+        </p:nvSpPr>
+        <p:spPr>
+          <a:xfrm>
+            <a:off x="2770320" y="450506"/>
+            <a:ext cx="45719" cy="45719"/>
+          </a:xfrm>
+          <a:prstGeom prst="ellipse">
+            <a:avLst/>
+          </a:prstGeom>
+          <a:solidFill>
+            <a:schemeClr val="accent4">
+              <a:lumMod val="50000"/>
+            </a:schemeClr>
+          </a:solidFill>
+          <a:ln w="28575">
+            <a:solidFill>
+              <a:srgbClr val="ADB9CA">
+                <a:alpha val="40000"/>
+              </a:srgbClr>
+            </a:solidFill>
+          </a:ln>
+        </p:spPr>
+        <p:style>
+          <a:lnRef idx="2">
+            <a:schemeClr val="accent1">
+              <a:shade val="50000"/>
+            </a:schemeClr>
+          </a:lnRef>
+          <a:fillRef idx="1">
+            <a:schemeClr val="accent1"/>
+          </a:fillRef>
+          <a:effectRef idx="0">
+            <a:schemeClr val="accent1"/>
+          </a:effectRef>
+          <a:fontRef idx="minor">
+            <a:schemeClr val="lt1"/>
+          </a:fontRef>
+        </p:style>
+        <p:txBody>
+          <a:bodyPr rtlCol="0" anchor="ctr"/>
+          <a:lstStyle/>
+          <a:p>
+            <a:pPr algn="ctr"/>
+            <a:endParaRPr lang="en-US"/>
+          </a:p>
+        </p:txBody>
+      </p:sp>
     </p:spTree>
     <p:extLst>
       <p:ext uri="{BB962C8B-B14F-4D97-AF65-F5344CB8AC3E}">
@@ -9807,6 +13150,13 @@
   <p:clrMapOvr>
     <a:masterClrMapping/>
   </p:clrMapOvr>
+  <p:timing>
+    <p:tnLst>
+      <p:par>
+        <p:cTn id="1" dur="indefinite" restart="never" nodeType="tmRoot"/>
+      </p:par>
+    </p:tnLst>
+  </p:timing>
 </p:sld>
 </file>
 

--- a/assets/images/adventures/silentspire-manor/interior/layout.pptx
+++ b/assets/images/adventures/silentspire-manor/interior/layout.pptx
@@ -3111,13 +3111,13 @@
           <a:p>
             <a:pPr algn="ctr"/>
             <a:r>
-              <a:rPr lang="ro-RO" sz="1200" dirty="0" smtClean="0">
+              <a:rPr lang="ro-RO" sz="1200" smtClean="0">
                 <a:solidFill>
                   <a:srgbClr val="622E0A"/>
                 </a:solidFill>
                 <a:latin typeface="Libre Baskerville" panose="02000000000000000000" pitchFamily="2" charset="0"/>
               </a:rPr>
-              <a:t>Front Doors</a:t>
+              <a:t>Foyer</a:t>
             </a:r>
             <a:endParaRPr lang="en-US" sz="1200" dirty="0">
               <a:solidFill>
@@ -4116,8 +4116,8 @@
         </p:nvSpPr>
         <p:spPr>
           <a:xfrm>
-            <a:off x="1562100" y="2535810"/>
-            <a:ext cx="50450" cy="1098036"/>
+            <a:off x="1562100" y="2573353"/>
+            <a:ext cx="64604" cy="1060492"/>
           </a:xfrm>
           <a:prstGeom prst="rect">
             <a:avLst/>
@@ -4208,8 +4208,8 @@
         </p:nvSpPr>
         <p:spPr>
           <a:xfrm>
-            <a:off x="1562100" y="244760"/>
-            <a:ext cx="50450" cy="1618178"/>
+            <a:off x="1562100" y="244759"/>
+            <a:ext cx="60786" cy="1949703"/>
           </a:xfrm>
           <a:prstGeom prst="rect">
             <a:avLst/>
@@ -4254,8 +4254,8 @@
         </p:nvSpPr>
         <p:spPr>
           <a:xfrm>
-            <a:off x="1562100" y="1862938"/>
-            <a:ext cx="749300" cy="45719"/>
+            <a:off x="1562100" y="2153023"/>
+            <a:ext cx="480189" cy="45719"/>
           </a:xfrm>
           <a:prstGeom prst="rect">
             <a:avLst/>
@@ -4300,8 +4300,8 @@
         </p:nvSpPr>
         <p:spPr>
           <a:xfrm rot="5400000">
-            <a:off x="895350" y="1168400"/>
-            <a:ext cx="1390650" cy="1390650"/>
+            <a:off x="1181322" y="1751393"/>
+            <a:ext cx="843476" cy="843476"/>
           </a:xfrm>
           <a:prstGeom prst="arc">
             <a:avLst/>
@@ -7146,8 +7146,8 @@
         </p:nvSpPr>
         <p:spPr>
           <a:xfrm>
-            <a:off x="1394232" y="3919206"/>
-            <a:ext cx="2350915" cy="723912"/>
+            <a:off x="1394233" y="3919206"/>
+            <a:ext cx="1885738" cy="723912"/>
           </a:xfrm>
           <a:prstGeom prst="rect">
             <a:avLst/>
@@ -10849,7 +10849,7 @@
           <p:nvPr/>
         </p:nvGrpSpPr>
         <p:grpSpPr>
-          <a:xfrm>
+          <a:xfrm rot="9900000">
             <a:off x="2885213" y="3207137"/>
             <a:ext cx="281090" cy="281090"/>
             <a:chOff x="2836912" y="3174001"/>
@@ -13140,6 +13140,259 @@
           </a:p>
         </p:txBody>
       </p:sp>
+      <p:grpSp>
+        <p:nvGrpSpPr>
+          <p:cNvPr id="263" name="Group 262"/>
+          <p:cNvGrpSpPr/>
+          <p:nvPr/>
+        </p:nvGrpSpPr>
+        <p:grpSpPr>
+          <a:xfrm rot="16200000">
+            <a:off x="1073276" y="1670646"/>
+            <a:ext cx="294854" cy="616305"/>
+            <a:chOff x="2840255" y="1727778"/>
+            <a:chExt cx="375115" cy="784067"/>
+          </a:xfrm>
+        </p:grpSpPr>
+        <p:sp>
+          <p:nvSpPr>
+            <p:cNvPr id="265" name="Rounded Rectangle 264"/>
+            <p:cNvSpPr/>
+            <p:nvPr/>
+          </p:nvSpPr>
+          <p:spPr>
+            <a:xfrm>
+              <a:off x="2840255" y="1727778"/>
+              <a:ext cx="375115" cy="784067"/>
+            </a:xfrm>
+            <a:prstGeom prst="roundRect">
+              <a:avLst/>
+            </a:prstGeom>
+            <a:solidFill>
+              <a:srgbClr val="7E0000"/>
+            </a:solidFill>
+            <a:ln>
+              <a:noFill/>
+            </a:ln>
+          </p:spPr>
+          <p:style>
+            <a:lnRef idx="2">
+              <a:schemeClr val="accent1">
+                <a:shade val="50000"/>
+              </a:schemeClr>
+            </a:lnRef>
+            <a:fillRef idx="1">
+              <a:schemeClr val="accent1"/>
+            </a:fillRef>
+            <a:effectRef idx="0">
+              <a:schemeClr val="accent1"/>
+            </a:effectRef>
+            <a:fontRef idx="minor">
+              <a:schemeClr val="lt1"/>
+            </a:fontRef>
+          </p:style>
+          <p:txBody>
+            <a:bodyPr rtlCol="0" anchor="ctr"/>
+            <a:lstStyle/>
+            <a:p>
+              <a:pPr algn="ctr"/>
+              <a:endParaRPr lang="en-US"/>
+            </a:p>
+          </p:txBody>
+        </p:sp>
+        <p:sp>
+          <p:nvSpPr>
+            <p:cNvPr id="266" name="Rounded Rectangle 265"/>
+            <p:cNvSpPr/>
+            <p:nvPr/>
+          </p:nvSpPr>
+          <p:spPr>
+            <a:xfrm>
+              <a:off x="3005234" y="1790663"/>
+              <a:ext cx="169472" cy="317138"/>
+            </a:xfrm>
+            <a:prstGeom prst="roundRect">
+              <a:avLst/>
+            </a:prstGeom>
+            <a:solidFill>
+              <a:srgbClr val="000000">
+                <a:alpha val="30196"/>
+              </a:srgbClr>
+            </a:solidFill>
+            <a:ln>
+              <a:noFill/>
+            </a:ln>
+          </p:spPr>
+          <p:style>
+            <a:lnRef idx="2">
+              <a:schemeClr val="accent1">
+                <a:shade val="50000"/>
+              </a:schemeClr>
+            </a:lnRef>
+            <a:fillRef idx="1">
+              <a:schemeClr val="accent1"/>
+            </a:fillRef>
+            <a:effectRef idx="0">
+              <a:schemeClr val="accent1"/>
+            </a:effectRef>
+            <a:fontRef idx="minor">
+              <a:schemeClr val="lt1"/>
+            </a:fontRef>
+          </p:style>
+          <p:txBody>
+            <a:bodyPr rtlCol="0" anchor="ctr"/>
+            <a:lstStyle/>
+            <a:p>
+              <a:pPr algn="ctr"/>
+              <a:endParaRPr lang="en-US"/>
+            </a:p>
+          </p:txBody>
+        </p:sp>
+        <p:sp>
+          <p:nvSpPr>
+            <p:cNvPr id="268" name="Rounded Rectangle 267"/>
+            <p:cNvSpPr/>
+            <p:nvPr/>
+          </p:nvSpPr>
+          <p:spPr>
+            <a:xfrm>
+              <a:off x="3005234" y="2126935"/>
+              <a:ext cx="169472" cy="317138"/>
+            </a:xfrm>
+            <a:prstGeom prst="roundRect">
+              <a:avLst/>
+            </a:prstGeom>
+            <a:solidFill>
+              <a:srgbClr val="000000">
+                <a:alpha val="30196"/>
+              </a:srgbClr>
+            </a:solidFill>
+            <a:ln>
+              <a:noFill/>
+            </a:ln>
+          </p:spPr>
+          <p:style>
+            <a:lnRef idx="2">
+              <a:schemeClr val="accent1">
+                <a:shade val="50000"/>
+              </a:schemeClr>
+            </a:lnRef>
+            <a:fillRef idx="1">
+              <a:schemeClr val="accent1"/>
+            </a:fillRef>
+            <a:effectRef idx="0">
+              <a:schemeClr val="accent1"/>
+            </a:effectRef>
+            <a:fontRef idx="minor">
+              <a:schemeClr val="lt1"/>
+            </a:fontRef>
+          </p:style>
+          <p:txBody>
+            <a:bodyPr rtlCol="0" anchor="ctr"/>
+            <a:lstStyle/>
+            <a:p>
+              <a:pPr algn="ctr"/>
+              <a:endParaRPr lang="en-US"/>
+            </a:p>
+          </p:txBody>
+        </p:sp>
+        <p:sp>
+          <p:nvSpPr>
+            <p:cNvPr id="269" name="Rounded Rectangle 268"/>
+            <p:cNvSpPr/>
+            <p:nvPr/>
+          </p:nvSpPr>
+          <p:spPr>
+            <a:xfrm>
+              <a:off x="2876197" y="2455912"/>
+              <a:ext cx="311241" cy="45719"/>
+            </a:xfrm>
+            <a:prstGeom prst="roundRect">
+              <a:avLst/>
+            </a:prstGeom>
+            <a:solidFill>
+              <a:srgbClr val="000000">
+                <a:alpha val="30196"/>
+              </a:srgbClr>
+            </a:solidFill>
+            <a:ln>
+              <a:noFill/>
+            </a:ln>
+          </p:spPr>
+          <p:style>
+            <a:lnRef idx="2">
+              <a:schemeClr val="accent1">
+                <a:shade val="50000"/>
+              </a:schemeClr>
+            </a:lnRef>
+            <a:fillRef idx="1">
+              <a:schemeClr val="accent1"/>
+            </a:fillRef>
+            <a:effectRef idx="0">
+              <a:schemeClr val="accent1"/>
+            </a:effectRef>
+            <a:fontRef idx="minor">
+              <a:schemeClr val="lt1"/>
+            </a:fontRef>
+          </p:style>
+          <p:txBody>
+            <a:bodyPr rtlCol="0" anchor="ctr"/>
+            <a:lstStyle/>
+            <a:p>
+              <a:pPr algn="ctr"/>
+              <a:endParaRPr lang="en-US"/>
+            </a:p>
+          </p:txBody>
+        </p:sp>
+        <p:sp>
+          <p:nvSpPr>
+            <p:cNvPr id="270" name="Rounded Rectangle 269"/>
+            <p:cNvSpPr/>
+            <p:nvPr/>
+          </p:nvSpPr>
+          <p:spPr>
+            <a:xfrm>
+              <a:off x="2869623" y="1736815"/>
+              <a:ext cx="311241" cy="45719"/>
+            </a:xfrm>
+            <a:prstGeom prst="roundRect">
+              <a:avLst/>
+            </a:prstGeom>
+            <a:solidFill>
+              <a:srgbClr val="000000">
+                <a:alpha val="30196"/>
+              </a:srgbClr>
+            </a:solidFill>
+            <a:ln>
+              <a:noFill/>
+            </a:ln>
+          </p:spPr>
+          <p:style>
+            <a:lnRef idx="2">
+              <a:schemeClr val="accent1">
+                <a:shade val="50000"/>
+              </a:schemeClr>
+            </a:lnRef>
+            <a:fillRef idx="1">
+              <a:schemeClr val="accent1"/>
+            </a:fillRef>
+            <a:effectRef idx="0">
+              <a:schemeClr val="accent1"/>
+            </a:effectRef>
+            <a:fontRef idx="minor">
+              <a:schemeClr val="lt1"/>
+            </a:fontRef>
+          </p:style>
+          <p:txBody>
+            <a:bodyPr rtlCol="0" anchor="ctr"/>
+            <a:lstStyle/>
+            <a:p>
+              <a:pPr algn="ctr"/>
+              <a:endParaRPr lang="en-US"/>
+            </a:p>
+          </p:txBody>
+        </p:sp>
+      </p:grpSp>
     </p:spTree>
     <p:extLst>
       <p:ext uri="{BB962C8B-B14F-4D97-AF65-F5344CB8AC3E}">

--- a/assets/images/adventures/silentspire-manor/interior/layout.pptx
+++ b/assets/images/adventures/silentspire-manor/interior/layout.pptx
@@ -2973,101 +2973,161 @@
           <a:chExt cx="0" cy="0"/>
         </a:xfrm>
       </p:grpSpPr>
-      <p:sp>
-        <p:nvSpPr>
-          <p:cNvPr id="6" name="Rectangle 5"/>
-          <p:cNvSpPr/>
+      <p:grpSp>
+        <p:nvGrpSpPr>
+          <p:cNvPr id="290" name="Group 289"/>
+          <p:cNvGrpSpPr/>
           <p:nvPr/>
-        </p:nvSpPr>
-        <p:spPr>
+        </p:nvGrpSpPr>
+        <p:grpSpPr>
           <a:xfrm>
             <a:off x="0" y="0"/>
             <a:ext cx="9144000" cy="5143500"/>
+            <a:chOff x="0" y="0"/>
+            <a:chExt cx="9144000" cy="5143500"/>
           </a:xfrm>
-          <a:prstGeom prst="rect">
-            <a:avLst/>
-          </a:prstGeom>
-          <a:solidFill>
-            <a:schemeClr val="tx1">
-              <a:lumMod val="50000"/>
-              <a:lumOff val="50000"/>
-            </a:schemeClr>
-          </a:solidFill>
-          <a:ln>
-            <a:noFill/>
-          </a:ln>
-        </p:spPr>
-        <p:style>
-          <a:lnRef idx="2">
-            <a:schemeClr val="accent1">
-              <a:shade val="50000"/>
-            </a:schemeClr>
-          </a:lnRef>
-          <a:fillRef idx="1">
-            <a:schemeClr val="accent1"/>
-          </a:fillRef>
-          <a:effectRef idx="0">
-            <a:schemeClr val="accent1"/>
-          </a:effectRef>
-          <a:fontRef idx="minor">
-            <a:schemeClr val="lt1"/>
-          </a:fontRef>
-        </p:style>
-        <p:txBody>
-          <a:bodyPr rtlCol="0" anchor="ctr"/>
-          <a:lstStyle/>
-          <a:p>
-            <a:pPr algn="ctr"/>
-            <a:endParaRPr lang="en-US"/>
-          </a:p>
-        </p:txBody>
-      </p:sp>
-      <p:sp>
-        <p:nvSpPr>
-          <p:cNvPr id="4" name="Rectangle 3"/>
-          <p:cNvSpPr/>
-          <p:nvPr/>
-        </p:nvSpPr>
-        <p:spPr>
-          <a:xfrm>
-            <a:off x="209889" y="245553"/>
-            <a:ext cx="8652116" cy="4660330"/>
-          </a:xfrm>
-          <a:prstGeom prst="rect">
-            <a:avLst/>
-          </a:prstGeom>
-          <a:solidFill>
-            <a:srgbClr val="622E0A"/>
-          </a:solidFill>
-          <a:ln>
-            <a:noFill/>
-          </a:ln>
-        </p:spPr>
-        <p:style>
-          <a:lnRef idx="2">
-            <a:schemeClr val="accent1">
-              <a:shade val="50000"/>
-            </a:schemeClr>
-          </a:lnRef>
-          <a:fillRef idx="1">
-            <a:schemeClr val="accent1"/>
-          </a:fillRef>
-          <a:effectRef idx="0">
-            <a:schemeClr val="accent1"/>
-          </a:effectRef>
-          <a:fontRef idx="minor">
-            <a:schemeClr val="lt1"/>
-          </a:fontRef>
-        </p:style>
-        <p:txBody>
-          <a:bodyPr rtlCol="0" anchor="ctr"/>
-          <a:lstStyle/>
-          <a:p>
-            <a:pPr algn="ctr"/>
-            <a:endParaRPr lang="en-US"/>
-          </a:p>
-        </p:txBody>
-      </p:sp>
+        </p:grpSpPr>
+        <p:grpSp>
+          <p:nvGrpSpPr>
+            <p:cNvPr id="288" name="Group 287"/>
+            <p:cNvGrpSpPr/>
+            <p:nvPr/>
+          </p:nvGrpSpPr>
+          <p:grpSpPr>
+            <a:xfrm>
+              <a:off x="0" y="0"/>
+              <a:ext cx="9144000" cy="5143500"/>
+              <a:chOff x="0" y="0"/>
+              <a:chExt cx="9144000" cy="5143500"/>
+            </a:xfrm>
+          </p:grpSpPr>
+          <p:sp>
+            <p:nvSpPr>
+              <p:cNvPr id="6" name="Rectangle 5"/>
+              <p:cNvSpPr/>
+              <p:nvPr/>
+            </p:nvSpPr>
+            <p:spPr>
+              <a:xfrm>
+                <a:off x="0" y="0"/>
+                <a:ext cx="9144000" cy="5143500"/>
+              </a:xfrm>
+              <a:prstGeom prst="rect">
+                <a:avLst/>
+              </a:prstGeom>
+              <a:solidFill>
+                <a:schemeClr val="tx1">
+                  <a:lumMod val="50000"/>
+                  <a:lumOff val="50000"/>
+                </a:schemeClr>
+              </a:solidFill>
+              <a:ln>
+                <a:noFill/>
+              </a:ln>
+            </p:spPr>
+            <p:style>
+              <a:lnRef idx="2">
+                <a:schemeClr val="accent1">
+                  <a:shade val="50000"/>
+                </a:schemeClr>
+              </a:lnRef>
+              <a:fillRef idx="1">
+                <a:schemeClr val="accent1"/>
+              </a:fillRef>
+              <a:effectRef idx="0">
+                <a:schemeClr val="accent1"/>
+              </a:effectRef>
+              <a:fontRef idx="minor">
+                <a:schemeClr val="lt1"/>
+              </a:fontRef>
+            </p:style>
+            <p:txBody>
+              <a:bodyPr rtlCol="0" anchor="ctr"/>
+              <a:lstStyle/>
+              <a:p>
+                <a:pPr algn="ctr"/>
+                <a:endParaRPr lang="en-US"/>
+              </a:p>
+            </p:txBody>
+          </p:sp>
+          <p:sp>
+            <p:nvSpPr>
+              <p:cNvPr id="287" name="Rectangle 286"/>
+              <p:cNvSpPr/>
+              <p:nvPr/>
+            </p:nvSpPr>
+            <p:spPr>
+              <a:xfrm>
+                <a:off x="209889" y="245553"/>
+                <a:ext cx="8652116" cy="4660330"/>
+              </a:xfrm>
+              <a:prstGeom prst="rect">
+                <a:avLst/>
+              </a:prstGeom>
+              <a:solidFill>
+                <a:srgbClr val="622E0A"/>
+              </a:solidFill>
+              <a:ln>
+                <a:noFill/>
+              </a:ln>
+            </p:spPr>
+            <p:style>
+              <a:lnRef idx="2">
+                <a:schemeClr val="accent1">
+                  <a:shade val="50000"/>
+                </a:schemeClr>
+              </a:lnRef>
+              <a:fillRef idx="1">
+                <a:schemeClr val="accent1"/>
+              </a:fillRef>
+              <a:effectRef idx="0">
+                <a:schemeClr val="accent1"/>
+              </a:effectRef>
+              <a:fontRef idx="minor">
+                <a:schemeClr val="lt1"/>
+              </a:fontRef>
+            </p:style>
+            <p:txBody>
+              <a:bodyPr rtlCol="0" anchor="ctr"/>
+              <a:lstStyle/>
+              <a:p>
+                <a:pPr algn="ctr"/>
+                <a:endParaRPr lang="en-US"/>
+              </a:p>
+            </p:txBody>
+          </p:sp>
+        </p:grpSp>
+        <p:pic>
+          <p:nvPicPr>
+            <p:cNvPr id="289" name="Picture 288"/>
+            <p:cNvPicPr>
+              <a:picLocks noChangeAspect="1"/>
+            </p:cNvPicPr>
+            <p:nvPr/>
+          </p:nvPicPr>
+          <p:blipFill>
+            <a:blip r:embed="rId2">
+              <a:extLst>
+                <a:ext uri="{28A0092B-C50C-407E-A947-70E740481C1C}">
+                  <a14:useLocalDpi xmlns:a14="http://schemas.microsoft.com/office/drawing/2010/main" val="0"/>
+                </a:ext>
+              </a:extLst>
+            </a:blip>
+            <a:stretch>
+              <a:fillRect/>
+            </a:stretch>
+          </p:blipFill>
+          <p:spPr>
+            <a:xfrm>
+              <a:off x="214515" y="250077"/>
+              <a:ext cx="8650151" cy="4653562"/>
+            </a:xfrm>
+            <a:prstGeom prst="rect">
+              <a:avLst/>
+            </a:prstGeom>
+          </p:spPr>
+        </p:pic>
+      </p:grpSp>
       <p:sp>
         <p:nvSpPr>
           <p:cNvPr id="5" name="Rectangle 4"/>
@@ -3076,8 +3136,8 @@
         </p:nvSpPr>
         <p:spPr>
           <a:xfrm>
-            <a:off x="3979217" y="4904432"/>
-            <a:ext cx="1185566" cy="239068"/>
+            <a:off x="4110038" y="4904432"/>
+            <a:ext cx="1283232" cy="239068"/>
           </a:xfrm>
           <a:prstGeom prst="rect">
             <a:avLst/>
@@ -3125,98 +3185,6 @@
               </a:solidFill>
               <a:latin typeface="Libre Baskerville" panose="02000000000000000000" pitchFamily="2" charset="0"/>
             </a:endParaRPr>
-          </a:p>
-        </p:txBody>
-      </p:sp>
-      <p:sp>
-        <p:nvSpPr>
-          <p:cNvPr id="8" name="Rectangle 7"/>
-          <p:cNvSpPr/>
-          <p:nvPr/>
-        </p:nvSpPr>
-        <p:spPr>
-          <a:xfrm>
-            <a:off x="3260309" y="2490090"/>
-            <a:ext cx="2623382" cy="45720"/>
-          </a:xfrm>
-          <a:prstGeom prst="rect">
-            <a:avLst/>
-          </a:prstGeom>
-          <a:solidFill>
-            <a:srgbClr val="492207"/>
-          </a:solidFill>
-          <a:ln>
-            <a:noFill/>
-          </a:ln>
-        </p:spPr>
-        <p:style>
-          <a:lnRef idx="2">
-            <a:schemeClr val="accent1">
-              <a:shade val="50000"/>
-            </a:schemeClr>
-          </a:lnRef>
-          <a:fillRef idx="1">
-            <a:schemeClr val="accent1"/>
-          </a:fillRef>
-          <a:effectRef idx="0">
-            <a:schemeClr val="accent1"/>
-          </a:effectRef>
-          <a:fontRef idx="minor">
-            <a:schemeClr val="lt1"/>
-          </a:fontRef>
-        </p:style>
-        <p:txBody>
-          <a:bodyPr rtlCol="0" anchor="ctr"/>
-          <a:lstStyle/>
-          <a:p>
-            <a:pPr algn="ctr"/>
-            <a:endParaRPr lang="en-US"/>
-          </a:p>
-        </p:txBody>
-      </p:sp>
-      <p:sp>
-        <p:nvSpPr>
-          <p:cNvPr id="9" name="Rectangle 8"/>
-          <p:cNvSpPr/>
-          <p:nvPr/>
-        </p:nvSpPr>
-        <p:spPr>
-          <a:xfrm>
-            <a:off x="3260309" y="2535810"/>
-            <a:ext cx="45719" cy="1098036"/>
-          </a:xfrm>
-          <a:prstGeom prst="rect">
-            <a:avLst/>
-          </a:prstGeom>
-          <a:solidFill>
-            <a:srgbClr val="492207"/>
-          </a:solidFill>
-          <a:ln>
-            <a:noFill/>
-          </a:ln>
-        </p:spPr>
-        <p:style>
-          <a:lnRef idx="2">
-            <a:schemeClr val="accent1">
-              <a:shade val="50000"/>
-            </a:schemeClr>
-          </a:lnRef>
-          <a:fillRef idx="1">
-            <a:schemeClr val="accent1"/>
-          </a:fillRef>
-          <a:effectRef idx="0">
-            <a:schemeClr val="accent1"/>
-          </a:effectRef>
-          <a:fontRef idx="minor">
-            <a:schemeClr val="lt1"/>
-          </a:fontRef>
-        </p:style>
-        <p:txBody>
-          <a:bodyPr rtlCol="0" anchor="ctr"/>
-          <a:lstStyle/>
-          <a:p>
-            <a:pPr algn="ctr"/>
-            <a:endParaRPr lang="en-US"/>
           </a:p>
         </p:txBody>
       </p:sp>
@@ -3274,7 +3242,7 @@
         </p:nvSpPr>
         <p:spPr>
           <a:xfrm>
-            <a:off x="3411657" y="2627250"/>
+            <a:off x="3280196" y="2575312"/>
             <a:ext cx="807917" cy="376299"/>
           </a:xfrm>
           <a:prstGeom prst="rect">
@@ -3320,7 +3288,7 @@
         </p:nvGrpSpPr>
         <p:grpSpPr>
           <a:xfrm>
-            <a:off x="3490632" y="2669890"/>
+            <a:off x="3349422" y="2662690"/>
             <a:ext cx="278261" cy="152925"/>
             <a:chOff x="3490632" y="2669890"/>
             <a:chExt cx="278261" cy="152925"/>
@@ -3590,7 +3558,7 @@
         </p:nvGrpSpPr>
         <p:grpSpPr>
           <a:xfrm>
-            <a:off x="3932437" y="2692750"/>
+            <a:off x="3779203" y="2693471"/>
             <a:ext cx="166907" cy="152847"/>
             <a:chOff x="3909725" y="2706151"/>
             <a:chExt cx="166907" cy="152847"/>
@@ -4018,7 +3986,7 @@
         </p:nvSpPr>
         <p:spPr>
           <a:xfrm>
-            <a:off x="4143375" y="2707639"/>
+            <a:off x="3984907" y="2707638"/>
             <a:ext cx="45719" cy="45719"/>
           </a:xfrm>
           <a:prstGeom prst="ellipse">
@@ -4064,244 +4032,14 @@
       </p:sp>
       <p:sp>
         <p:nvSpPr>
-          <p:cNvPr id="42" name="Rectangle 41"/>
-          <p:cNvSpPr/>
-          <p:nvPr/>
-        </p:nvSpPr>
-        <p:spPr>
-          <a:xfrm>
-            <a:off x="1562100" y="3586106"/>
-            <a:ext cx="1717870" cy="47740"/>
-          </a:xfrm>
-          <a:prstGeom prst="rect">
-            <a:avLst/>
-          </a:prstGeom>
-          <a:solidFill>
-            <a:srgbClr val="492207"/>
-          </a:solidFill>
-          <a:ln>
-            <a:noFill/>
-          </a:ln>
-        </p:spPr>
-        <p:style>
-          <a:lnRef idx="2">
-            <a:schemeClr val="accent1">
-              <a:shade val="50000"/>
-            </a:schemeClr>
-          </a:lnRef>
-          <a:fillRef idx="1">
-            <a:schemeClr val="accent1"/>
-          </a:fillRef>
-          <a:effectRef idx="0">
-            <a:schemeClr val="accent1"/>
-          </a:effectRef>
-          <a:fontRef idx="minor">
-            <a:schemeClr val="lt1"/>
-          </a:fontRef>
-        </p:style>
-        <p:txBody>
-          <a:bodyPr rtlCol="0" anchor="ctr"/>
-          <a:lstStyle/>
-          <a:p>
-            <a:pPr algn="ctr"/>
-            <a:endParaRPr lang="en-US"/>
-          </a:p>
-        </p:txBody>
-      </p:sp>
-      <p:sp>
-        <p:nvSpPr>
-          <p:cNvPr id="43" name="Rectangle 42"/>
-          <p:cNvSpPr/>
-          <p:nvPr/>
-        </p:nvSpPr>
-        <p:spPr>
-          <a:xfrm>
-            <a:off x="1562100" y="2573353"/>
-            <a:ext cx="64604" cy="1060492"/>
-          </a:xfrm>
-          <a:prstGeom prst="rect">
-            <a:avLst/>
-          </a:prstGeom>
-          <a:solidFill>
-            <a:srgbClr val="492207"/>
-          </a:solidFill>
-          <a:ln>
-            <a:noFill/>
-          </a:ln>
-        </p:spPr>
-        <p:style>
-          <a:lnRef idx="2">
-            <a:schemeClr val="accent1">
-              <a:shade val="50000"/>
-            </a:schemeClr>
-          </a:lnRef>
-          <a:fillRef idx="1">
-            <a:schemeClr val="accent1"/>
-          </a:fillRef>
-          <a:effectRef idx="0">
-            <a:schemeClr val="accent1"/>
-          </a:effectRef>
-          <a:fontRef idx="minor">
-            <a:schemeClr val="lt1"/>
-          </a:fontRef>
-        </p:style>
-        <p:txBody>
-          <a:bodyPr rtlCol="0" anchor="ctr"/>
-          <a:lstStyle/>
-          <a:p>
-            <a:pPr algn="ctr"/>
-            <a:endParaRPr lang="en-US"/>
-          </a:p>
-        </p:txBody>
-      </p:sp>
-      <p:sp>
-        <p:nvSpPr>
-          <p:cNvPr id="44" name="Rectangle 43"/>
-          <p:cNvSpPr/>
-          <p:nvPr/>
-        </p:nvSpPr>
-        <p:spPr>
-          <a:xfrm>
-            <a:off x="3260309" y="244760"/>
-            <a:ext cx="50450" cy="2245330"/>
-          </a:xfrm>
-          <a:prstGeom prst="rect">
-            <a:avLst/>
-          </a:prstGeom>
-          <a:solidFill>
-            <a:srgbClr val="492207"/>
-          </a:solidFill>
-          <a:ln>
-            <a:noFill/>
-          </a:ln>
-        </p:spPr>
-        <p:style>
-          <a:lnRef idx="2">
-            <a:schemeClr val="accent1">
-              <a:shade val="50000"/>
-            </a:schemeClr>
-          </a:lnRef>
-          <a:fillRef idx="1">
-            <a:schemeClr val="accent1"/>
-          </a:fillRef>
-          <a:effectRef idx="0">
-            <a:schemeClr val="accent1"/>
-          </a:effectRef>
-          <a:fontRef idx="minor">
-            <a:schemeClr val="lt1"/>
-          </a:fontRef>
-        </p:style>
-        <p:txBody>
-          <a:bodyPr rtlCol="0" anchor="ctr"/>
-          <a:lstStyle/>
-          <a:p>
-            <a:pPr algn="ctr"/>
-            <a:endParaRPr lang="en-US"/>
-          </a:p>
-        </p:txBody>
-      </p:sp>
-      <p:sp>
-        <p:nvSpPr>
-          <p:cNvPr id="45" name="Rectangle 44"/>
-          <p:cNvSpPr/>
-          <p:nvPr/>
-        </p:nvSpPr>
-        <p:spPr>
-          <a:xfrm>
-            <a:off x="1562100" y="244759"/>
-            <a:ext cx="60786" cy="1949703"/>
-          </a:xfrm>
-          <a:prstGeom prst="rect">
-            <a:avLst/>
-          </a:prstGeom>
-          <a:solidFill>
-            <a:srgbClr val="492207"/>
-          </a:solidFill>
-          <a:ln>
-            <a:noFill/>
-          </a:ln>
-        </p:spPr>
-        <p:style>
-          <a:lnRef idx="2">
-            <a:schemeClr val="accent1">
-              <a:shade val="50000"/>
-            </a:schemeClr>
-          </a:lnRef>
-          <a:fillRef idx="1">
-            <a:schemeClr val="accent1"/>
-          </a:fillRef>
-          <a:effectRef idx="0">
-            <a:schemeClr val="accent1"/>
-          </a:effectRef>
-          <a:fontRef idx="minor">
-            <a:schemeClr val="lt1"/>
-          </a:fontRef>
-        </p:style>
-        <p:txBody>
-          <a:bodyPr rtlCol="0" anchor="ctr"/>
-          <a:lstStyle/>
-          <a:p>
-            <a:pPr algn="ctr"/>
-            <a:endParaRPr lang="en-US"/>
-          </a:p>
-        </p:txBody>
-      </p:sp>
-      <p:sp>
-        <p:nvSpPr>
-          <p:cNvPr id="46" name="Rectangle 45"/>
-          <p:cNvSpPr/>
-          <p:nvPr/>
-        </p:nvSpPr>
-        <p:spPr>
-          <a:xfrm>
-            <a:off x="1562100" y="2153023"/>
-            <a:ext cx="480189" cy="45719"/>
-          </a:xfrm>
-          <a:prstGeom prst="rect">
-            <a:avLst/>
-          </a:prstGeom>
-          <a:solidFill>
-            <a:srgbClr val="492207"/>
-          </a:solidFill>
-          <a:ln>
-            <a:noFill/>
-          </a:ln>
-        </p:spPr>
-        <p:style>
-          <a:lnRef idx="2">
-            <a:schemeClr val="accent1">
-              <a:shade val="50000"/>
-            </a:schemeClr>
-          </a:lnRef>
-          <a:fillRef idx="1">
-            <a:schemeClr val="accent1"/>
-          </a:fillRef>
-          <a:effectRef idx="0">
-            <a:schemeClr val="accent1"/>
-          </a:effectRef>
-          <a:fontRef idx="minor">
-            <a:schemeClr val="lt1"/>
-          </a:fontRef>
-        </p:style>
-        <p:txBody>
-          <a:bodyPr rtlCol="0" anchor="ctr"/>
-          <a:lstStyle/>
-          <a:p>
-            <a:pPr algn="ctr"/>
-            <a:endParaRPr lang="en-US"/>
-          </a:p>
-        </p:txBody>
-      </p:sp>
-      <p:sp>
-        <p:nvSpPr>
           <p:cNvPr id="47" name="Arc 46"/>
           <p:cNvSpPr/>
           <p:nvPr/>
         </p:nvSpPr>
         <p:spPr>
           <a:xfrm rot="5400000">
-            <a:off x="1181322" y="1751393"/>
-            <a:ext cx="843476" cy="843476"/>
+            <a:off x="1117216" y="1760812"/>
+            <a:ext cx="767470" cy="860231"/>
           </a:xfrm>
           <a:prstGeom prst="arc">
             <a:avLst/>
@@ -4337,152 +4075,14 @@
       </p:sp>
       <p:sp>
         <p:nvSpPr>
-          <p:cNvPr id="48" name="Rectangle 47"/>
-          <p:cNvSpPr/>
-          <p:nvPr/>
-        </p:nvSpPr>
-        <p:spPr>
-          <a:xfrm>
-            <a:off x="206032" y="1767459"/>
-            <a:ext cx="189863" cy="45719"/>
-          </a:xfrm>
-          <a:prstGeom prst="rect">
-            <a:avLst/>
-          </a:prstGeom>
-          <a:solidFill>
-            <a:srgbClr val="492207"/>
-          </a:solidFill>
-          <a:ln>
-            <a:noFill/>
-          </a:ln>
-        </p:spPr>
-        <p:style>
-          <a:lnRef idx="2">
-            <a:schemeClr val="accent1">
-              <a:shade val="50000"/>
-            </a:schemeClr>
-          </a:lnRef>
-          <a:fillRef idx="1">
-            <a:schemeClr val="accent1"/>
-          </a:fillRef>
-          <a:effectRef idx="0">
-            <a:schemeClr val="accent1"/>
-          </a:effectRef>
-          <a:fontRef idx="minor">
-            <a:schemeClr val="lt1"/>
-          </a:fontRef>
-        </p:style>
-        <p:txBody>
-          <a:bodyPr rtlCol="0" anchor="ctr"/>
-          <a:lstStyle/>
-          <a:p>
-            <a:pPr algn="ctr"/>
-            <a:endParaRPr lang="en-US"/>
-          </a:p>
-        </p:txBody>
-      </p:sp>
-      <p:sp>
-        <p:nvSpPr>
-          <p:cNvPr id="49" name="Rectangle 48"/>
-          <p:cNvSpPr/>
-          <p:nvPr/>
-        </p:nvSpPr>
-        <p:spPr>
-          <a:xfrm>
-            <a:off x="854236" y="1765439"/>
-            <a:ext cx="707864" cy="45719"/>
-          </a:xfrm>
-          <a:prstGeom prst="rect">
-            <a:avLst/>
-          </a:prstGeom>
-          <a:solidFill>
-            <a:srgbClr val="492207"/>
-          </a:solidFill>
-          <a:ln>
-            <a:noFill/>
-          </a:ln>
-        </p:spPr>
-        <p:style>
-          <a:lnRef idx="2">
-            <a:schemeClr val="accent1">
-              <a:shade val="50000"/>
-            </a:schemeClr>
-          </a:lnRef>
-          <a:fillRef idx="1">
-            <a:schemeClr val="accent1"/>
-          </a:fillRef>
-          <a:effectRef idx="0">
-            <a:schemeClr val="accent1"/>
-          </a:effectRef>
-          <a:fontRef idx="minor">
-            <a:schemeClr val="lt1"/>
-          </a:fontRef>
-        </p:style>
-        <p:txBody>
-          <a:bodyPr rtlCol="0" anchor="ctr"/>
-          <a:lstStyle/>
-          <a:p>
-            <a:pPr algn="ctr"/>
-            <a:endParaRPr lang="en-US"/>
-          </a:p>
-        </p:txBody>
-      </p:sp>
-      <p:sp>
-        <p:nvSpPr>
-          <p:cNvPr id="50" name="Rectangle 49"/>
-          <p:cNvSpPr/>
-          <p:nvPr/>
-        </p:nvSpPr>
-        <p:spPr>
-          <a:xfrm rot="16200000">
-            <a:off x="117411" y="1534696"/>
-            <a:ext cx="509226" cy="47741"/>
-          </a:xfrm>
-          <a:prstGeom prst="rect">
-            <a:avLst/>
-          </a:prstGeom>
-          <a:solidFill>
-            <a:srgbClr val="492207"/>
-          </a:solidFill>
-          <a:ln>
-            <a:noFill/>
-          </a:ln>
-        </p:spPr>
-        <p:style>
-          <a:lnRef idx="2">
-            <a:schemeClr val="accent1">
-              <a:shade val="50000"/>
-            </a:schemeClr>
-          </a:lnRef>
-          <a:fillRef idx="1">
-            <a:schemeClr val="accent1"/>
-          </a:fillRef>
-          <a:effectRef idx="0">
-            <a:schemeClr val="accent1"/>
-          </a:effectRef>
-          <a:fontRef idx="minor">
-            <a:schemeClr val="lt1"/>
-          </a:fontRef>
-        </p:style>
-        <p:txBody>
-          <a:bodyPr rtlCol="0" anchor="ctr"/>
-          <a:lstStyle/>
-          <a:p>
-            <a:pPr algn="ctr"/>
-            <a:endParaRPr lang="en-US"/>
-          </a:p>
-        </p:txBody>
-      </p:sp>
-      <p:sp>
-        <p:nvSpPr>
           <p:cNvPr id="51" name="Arc 50"/>
           <p:cNvSpPr/>
           <p:nvPr/>
         </p:nvSpPr>
         <p:spPr>
           <a:xfrm>
-            <a:off x="-153516" y="1303953"/>
-            <a:ext cx="1000458" cy="1000458"/>
+            <a:off x="209888" y="1429631"/>
+            <a:ext cx="893339" cy="728991"/>
           </a:xfrm>
           <a:prstGeom prst="arc">
             <a:avLst/>
@@ -4524,7 +4124,7 @@
         </p:nvSpPr>
         <p:spPr>
           <a:xfrm>
-            <a:off x="4402615" y="2627250"/>
+            <a:off x="4543229" y="2573181"/>
             <a:ext cx="1310397" cy="376299"/>
           </a:xfrm>
           <a:prstGeom prst="rect">
@@ -4618,2130 +4218,14 @@
       </p:sp>
       <p:grpSp>
         <p:nvGrpSpPr>
-          <p:cNvPr id="87" name="Group 86"/>
-          <p:cNvGrpSpPr/>
-          <p:nvPr/>
-        </p:nvGrpSpPr>
-        <p:grpSpPr>
-          <a:xfrm>
-            <a:off x="4045394" y="3235609"/>
-            <a:ext cx="1053212" cy="1386183"/>
-            <a:chOff x="4045394" y="3424269"/>
-            <a:chExt cx="1053212" cy="1386183"/>
-          </a:xfrm>
-        </p:grpSpPr>
-        <p:grpSp>
-          <p:nvGrpSpPr>
-            <p:cNvPr id="80" name="Group 79"/>
-            <p:cNvGrpSpPr/>
-            <p:nvPr/>
-          </p:nvGrpSpPr>
-          <p:grpSpPr>
-            <a:xfrm>
-              <a:off x="4045394" y="3424269"/>
-              <a:ext cx="1053212" cy="1386183"/>
-              <a:chOff x="4045394" y="3424269"/>
-              <a:chExt cx="1053212" cy="1386183"/>
-            </a:xfrm>
-          </p:grpSpPr>
-          <p:grpSp>
-            <p:nvGrpSpPr>
-              <p:cNvPr id="76" name="Group 75"/>
-              <p:cNvGrpSpPr/>
-              <p:nvPr/>
-            </p:nvGrpSpPr>
-            <p:grpSpPr>
-              <a:xfrm>
-                <a:off x="4045394" y="3424269"/>
-                <a:ext cx="1053212" cy="1386183"/>
-                <a:chOff x="4045394" y="3424269"/>
-                <a:chExt cx="1053212" cy="1386183"/>
-              </a:xfrm>
-            </p:grpSpPr>
-            <p:grpSp>
-              <p:nvGrpSpPr>
-                <p:cNvPr id="71" name="Group 70"/>
-                <p:cNvGrpSpPr/>
-                <p:nvPr/>
-              </p:nvGrpSpPr>
-              <p:grpSpPr>
-                <a:xfrm>
-                  <a:off x="4045394" y="3424269"/>
-                  <a:ext cx="1053212" cy="1386183"/>
-                  <a:chOff x="4045394" y="3424269"/>
-                  <a:chExt cx="1053212" cy="1386183"/>
-                </a:xfrm>
-              </p:grpSpPr>
-              <p:grpSp>
-                <p:nvGrpSpPr>
-                  <p:cNvPr id="67" name="Group 66"/>
-                  <p:cNvGrpSpPr/>
-                  <p:nvPr/>
-                </p:nvGrpSpPr>
-                <p:grpSpPr>
-                  <a:xfrm>
-                    <a:off x="4045394" y="3424269"/>
-                    <a:ext cx="1053212" cy="1386183"/>
-                    <a:chOff x="4045394" y="3424269"/>
-                    <a:chExt cx="1053212" cy="1386183"/>
-                  </a:xfrm>
-                </p:grpSpPr>
-                <p:grpSp>
-                  <p:nvGrpSpPr>
-                    <p:cNvPr id="65" name="Group 64"/>
-                    <p:cNvGrpSpPr/>
-                    <p:nvPr/>
-                  </p:nvGrpSpPr>
-                  <p:grpSpPr>
-                    <a:xfrm>
-                      <a:off x="4045394" y="3424269"/>
-                      <a:ext cx="1053212" cy="1386183"/>
-                      <a:chOff x="4045394" y="3424269"/>
-                      <a:chExt cx="1053212" cy="1386183"/>
-                    </a:xfrm>
-                  </p:grpSpPr>
-                  <p:sp>
-                    <p:nvSpPr>
-                      <p:cNvPr id="7" name="Rectangle 6"/>
-                      <p:cNvSpPr/>
-                      <p:nvPr/>
-                    </p:nvSpPr>
-                    <p:spPr>
-                      <a:xfrm>
-                        <a:off x="4045394" y="3424269"/>
-                        <a:ext cx="1053212" cy="1386183"/>
-                      </a:xfrm>
-                      <a:prstGeom prst="rect">
-                        <a:avLst/>
-                      </a:prstGeom>
-                      <a:solidFill>
-                        <a:srgbClr val="600000"/>
-                      </a:solidFill>
-                      <a:ln>
-                        <a:noFill/>
-                      </a:ln>
-                    </p:spPr>
-                    <p:style>
-                      <a:lnRef idx="2">
-                        <a:schemeClr val="accent1">
-                          <a:shade val="50000"/>
-                        </a:schemeClr>
-                      </a:lnRef>
-                      <a:fillRef idx="1">
-                        <a:schemeClr val="accent1"/>
-                      </a:fillRef>
-                      <a:effectRef idx="0">
-                        <a:schemeClr val="accent1"/>
-                      </a:effectRef>
-                      <a:fontRef idx="minor">
-                        <a:schemeClr val="lt1"/>
-                      </a:fontRef>
-                    </p:style>
-                    <p:txBody>
-                      <a:bodyPr rtlCol="0" anchor="ctr"/>
-                      <a:lstStyle/>
-                      <a:p>
-                        <a:pPr algn="ctr"/>
-                        <a:endParaRPr lang="en-US"/>
-                      </a:p>
-                    </p:txBody>
-                  </p:sp>
-                  <p:sp>
-                    <p:nvSpPr>
-                      <p:cNvPr id="64" name="Rectangle 63"/>
-                      <p:cNvSpPr/>
-                      <p:nvPr/>
-                    </p:nvSpPr>
-                    <p:spPr>
-                      <a:xfrm>
-                        <a:off x="4095844" y="3479800"/>
-                        <a:ext cx="941858" cy="1260988"/>
-                      </a:xfrm>
-                      <a:prstGeom prst="rect">
-                        <a:avLst/>
-                      </a:prstGeom>
-                      <a:solidFill>
-                        <a:srgbClr val="7E0000"/>
-                      </a:solidFill>
-                      <a:ln>
-                        <a:noFill/>
-                      </a:ln>
-                    </p:spPr>
-                    <p:style>
-                      <a:lnRef idx="2">
-                        <a:schemeClr val="accent1">
-                          <a:shade val="50000"/>
-                        </a:schemeClr>
-                      </a:lnRef>
-                      <a:fillRef idx="1">
-                        <a:schemeClr val="accent1"/>
-                      </a:fillRef>
-                      <a:effectRef idx="0">
-                        <a:schemeClr val="accent1"/>
-                      </a:effectRef>
-                      <a:fontRef idx="minor">
-                        <a:schemeClr val="lt1"/>
-                      </a:fontRef>
-                    </p:style>
-                    <p:txBody>
-                      <a:bodyPr rtlCol="0" anchor="ctr"/>
-                      <a:lstStyle/>
-                      <a:p>
-                        <a:pPr algn="ctr"/>
-                        <a:endParaRPr lang="en-US"/>
-                      </a:p>
-                    </p:txBody>
-                  </p:sp>
-                </p:grpSp>
-                <p:sp>
-                  <p:nvSpPr>
-                    <p:cNvPr id="66" name="Flowchart: Decision 65"/>
-                    <p:cNvSpPr/>
-                    <p:nvPr/>
-                  </p:nvSpPr>
-                  <p:spPr>
-                    <a:xfrm>
-                      <a:off x="4277638" y="3632294"/>
-                      <a:ext cx="557750" cy="956000"/>
-                    </a:xfrm>
-                    <a:prstGeom prst="flowChartDecision">
-                      <a:avLst/>
-                    </a:prstGeom>
-                    <a:solidFill>
-                      <a:srgbClr val="600000"/>
-                    </a:solidFill>
-                    <a:ln>
-                      <a:noFill/>
-                    </a:ln>
-                  </p:spPr>
-                  <p:style>
-                    <a:lnRef idx="2">
-                      <a:schemeClr val="accent1">
-                        <a:shade val="50000"/>
-                      </a:schemeClr>
-                    </a:lnRef>
-                    <a:fillRef idx="1">
-                      <a:schemeClr val="accent1"/>
-                    </a:fillRef>
-                    <a:effectRef idx="0">
-                      <a:schemeClr val="accent1"/>
-                    </a:effectRef>
-                    <a:fontRef idx="minor">
-                      <a:schemeClr val="lt1"/>
-                    </a:fontRef>
-                  </p:style>
-                  <p:txBody>
-                    <a:bodyPr rtlCol="0" anchor="ctr"/>
-                    <a:lstStyle/>
-                    <a:p>
-                      <a:pPr algn="ctr"/>
-                      <a:endParaRPr lang="en-US"/>
-                    </a:p>
-                  </p:txBody>
-                </p:sp>
-                <p:sp>
-                  <p:nvSpPr>
-                    <p:cNvPr id="68" name="Flowchart: Decision 67"/>
-                    <p:cNvSpPr/>
-                    <p:nvPr/>
-                  </p:nvSpPr>
-                  <p:spPr>
-                    <a:xfrm>
-                      <a:off x="4332148" y="3721100"/>
-                      <a:ext cx="454128" cy="778388"/>
-                    </a:xfrm>
-                    <a:prstGeom prst="flowChartDecision">
-                      <a:avLst/>
-                    </a:prstGeom>
-                    <a:solidFill>
-                      <a:srgbClr val="A40000"/>
-                    </a:solidFill>
-                    <a:ln>
-                      <a:noFill/>
-                    </a:ln>
-                  </p:spPr>
-                  <p:style>
-                    <a:lnRef idx="2">
-                      <a:schemeClr val="accent1">
-                        <a:shade val="50000"/>
-                      </a:schemeClr>
-                    </a:lnRef>
-                    <a:fillRef idx="1">
-                      <a:schemeClr val="accent1"/>
-                    </a:fillRef>
-                    <a:effectRef idx="0">
-                      <a:schemeClr val="accent1"/>
-                    </a:effectRef>
-                    <a:fontRef idx="minor">
-                      <a:schemeClr val="lt1"/>
-                    </a:fontRef>
-                  </p:style>
-                  <p:txBody>
-                    <a:bodyPr rtlCol="0" anchor="ctr"/>
-                    <a:lstStyle/>
-                    <a:p>
-                      <a:pPr algn="ctr"/>
-                      <a:endParaRPr lang="en-US"/>
-                    </a:p>
-                  </p:txBody>
-                </p:sp>
-              </p:grpSp>
-              <p:sp>
-                <p:nvSpPr>
-                  <p:cNvPr id="70" name="Decagon 69"/>
-                  <p:cNvSpPr/>
-                  <p:nvPr/>
-                </p:nvSpPr>
-                <p:spPr>
-                  <a:xfrm>
-                    <a:off x="4410389" y="3960576"/>
-                    <a:ext cx="303176" cy="299436"/>
-                  </a:xfrm>
-                  <a:prstGeom prst="decagon">
-                    <a:avLst/>
-                  </a:prstGeom>
-                  <a:solidFill>
-                    <a:srgbClr val="7F6000">
-                      <a:alpha val="69804"/>
-                    </a:srgbClr>
-                  </a:solidFill>
-                  <a:ln>
-                    <a:noFill/>
-                  </a:ln>
-                </p:spPr>
-                <p:style>
-                  <a:lnRef idx="2">
-                    <a:schemeClr val="accent1">
-                      <a:shade val="50000"/>
-                    </a:schemeClr>
-                  </a:lnRef>
-                  <a:fillRef idx="1">
-                    <a:schemeClr val="accent1"/>
-                  </a:fillRef>
-                  <a:effectRef idx="0">
-                    <a:schemeClr val="accent1"/>
-                  </a:effectRef>
-                  <a:fontRef idx="minor">
-                    <a:schemeClr val="lt1"/>
-                  </a:fontRef>
-                </p:style>
-                <p:txBody>
-                  <a:bodyPr rtlCol="0" anchor="ctr"/>
-                  <a:lstStyle/>
-                  <a:p>
-                    <a:pPr algn="ctr"/>
-                    <a:endParaRPr lang="en-US"/>
-                  </a:p>
-                </p:txBody>
-              </p:sp>
-            </p:grpSp>
-            <p:sp>
-              <p:nvSpPr>
-                <p:cNvPr id="72" name="L-Shape 71"/>
-                <p:cNvSpPr/>
-                <p:nvPr/>
-              </p:nvSpPr>
-              <p:spPr>
-                <a:xfrm>
-                  <a:off x="4095844" y="4480254"/>
-                  <a:ext cx="260534" cy="260534"/>
-                </a:xfrm>
-                <a:prstGeom prst="corner">
-                  <a:avLst/>
-                </a:prstGeom>
-                <a:solidFill>
-                  <a:srgbClr val="7F6000">
-                    <a:alpha val="69804"/>
-                  </a:srgbClr>
-                </a:solidFill>
-                <a:ln>
-                  <a:noFill/>
-                </a:ln>
-              </p:spPr>
-              <p:style>
-                <a:lnRef idx="2">
-                  <a:schemeClr val="accent1">
-                    <a:shade val="50000"/>
-                  </a:schemeClr>
-                </a:lnRef>
-                <a:fillRef idx="1">
-                  <a:schemeClr val="accent1"/>
-                </a:fillRef>
-                <a:effectRef idx="0">
-                  <a:schemeClr val="accent1"/>
-                </a:effectRef>
-                <a:fontRef idx="minor">
-                  <a:schemeClr val="lt1"/>
-                </a:fontRef>
-              </p:style>
-              <p:txBody>
-                <a:bodyPr rtlCol="0" anchor="ctr"/>
-                <a:lstStyle/>
-                <a:p>
-                  <a:pPr algn="ctr"/>
-                  <a:endParaRPr lang="en-US"/>
-                </a:p>
-              </p:txBody>
-            </p:sp>
-            <p:sp>
-              <p:nvSpPr>
-                <p:cNvPr id="73" name="L-Shape 72"/>
-                <p:cNvSpPr/>
-                <p:nvPr/>
-              </p:nvSpPr>
-              <p:spPr>
-                <a:xfrm rot="16200000">
-                  <a:off x="4772311" y="4480254"/>
-                  <a:ext cx="260534" cy="260534"/>
-                </a:xfrm>
-                <a:prstGeom prst="corner">
-                  <a:avLst/>
-                </a:prstGeom>
-                <a:solidFill>
-                  <a:srgbClr val="7F6000">
-                    <a:alpha val="69804"/>
-                  </a:srgbClr>
-                </a:solidFill>
-                <a:ln>
-                  <a:noFill/>
-                </a:ln>
-              </p:spPr>
-              <p:style>
-                <a:lnRef idx="2">
-                  <a:schemeClr val="accent1">
-                    <a:shade val="50000"/>
-                  </a:schemeClr>
-                </a:lnRef>
-                <a:fillRef idx="1">
-                  <a:schemeClr val="accent1"/>
-                </a:fillRef>
-                <a:effectRef idx="0">
-                  <a:schemeClr val="accent1"/>
-                </a:effectRef>
-                <a:fontRef idx="minor">
-                  <a:schemeClr val="lt1"/>
-                </a:fontRef>
-              </p:style>
-              <p:txBody>
-                <a:bodyPr rtlCol="0" anchor="ctr"/>
-                <a:lstStyle/>
-                <a:p>
-                  <a:pPr algn="ctr"/>
-                  <a:endParaRPr lang="en-US"/>
-                </a:p>
-              </p:txBody>
-            </p:sp>
-            <p:sp>
-              <p:nvSpPr>
-                <p:cNvPr id="75" name="L-Shape 74"/>
-                <p:cNvSpPr/>
-                <p:nvPr/>
-              </p:nvSpPr>
-              <p:spPr>
-                <a:xfrm rot="10800000">
-                  <a:off x="4779138" y="3476808"/>
-                  <a:ext cx="260534" cy="260534"/>
-                </a:xfrm>
-                <a:prstGeom prst="corner">
-                  <a:avLst/>
-                </a:prstGeom>
-                <a:solidFill>
-                  <a:srgbClr val="7F6000">
-                    <a:alpha val="69804"/>
-                  </a:srgbClr>
-                </a:solidFill>
-                <a:ln>
-                  <a:noFill/>
-                </a:ln>
-              </p:spPr>
-              <p:style>
-                <a:lnRef idx="2">
-                  <a:schemeClr val="accent1">
-                    <a:shade val="50000"/>
-                  </a:schemeClr>
-                </a:lnRef>
-                <a:fillRef idx="1">
-                  <a:schemeClr val="accent1"/>
-                </a:fillRef>
-                <a:effectRef idx="0">
-                  <a:schemeClr val="accent1"/>
-                </a:effectRef>
-                <a:fontRef idx="minor">
-                  <a:schemeClr val="lt1"/>
-                </a:fontRef>
-              </p:style>
-              <p:txBody>
-                <a:bodyPr rtlCol="0" anchor="ctr"/>
-                <a:lstStyle/>
-                <a:p>
-                  <a:pPr algn="ctr"/>
-                  <a:endParaRPr lang="en-US"/>
-                </a:p>
-              </p:txBody>
-            </p:sp>
-            <p:sp>
-              <p:nvSpPr>
-                <p:cNvPr id="74" name="L-Shape 73"/>
-                <p:cNvSpPr/>
-                <p:nvPr/>
-              </p:nvSpPr>
-              <p:spPr>
-                <a:xfrm rot="5400000">
-                  <a:off x="4102671" y="3476808"/>
-                  <a:ext cx="260534" cy="260534"/>
-                </a:xfrm>
-                <a:prstGeom prst="corner">
-                  <a:avLst/>
-                </a:prstGeom>
-                <a:solidFill>
-                  <a:srgbClr val="7F6000">
-                    <a:alpha val="69804"/>
-                  </a:srgbClr>
-                </a:solidFill>
-                <a:ln>
-                  <a:noFill/>
-                </a:ln>
-              </p:spPr>
-              <p:style>
-                <a:lnRef idx="2">
-                  <a:schemeClr val="accent1">
-                    <a:shade val="50000"/>
-                  </a:schemeClr>
-                </a:lnRef>
-                <a:fillRef idx="1">
-                  <a:schemeClr val="accent1"/>
-                </a:fillRef>
-                <a:effectRef idx="0">
-                  <a:schemeClr val="accent1"/>
-                </a:effectRef>
-                <a:fontRef idx="minor">
-                  <a:schemeClr val="lt1"/>
-                </a:fontRef>
-              </p:style>
-              <p:txBody>
-                <a:bodyPr rtlCol="0" anchor="ctr"/>
-                <a:lstStyle/>
-                <a:p>
-                  <a:pPr algn="ctr"/>
-                  <a:endParaRPr lang="en-US"/>
-                </a:p>
-              </p:txBody>
-            </p:sp>
-          </p:grpSp>
-          <p:sp>
-            <p:nvSpPr>
-              <p:cNvPr id="79" name="Oval 78"/>
-              <p:cNvSpPr/>
-              <p:nvPr/>
-            </p:nvSpPr>
-            <p:spPr>
-              <a:xfrm>
-                <a:off x="4471372" y="4023010"/>
-                <a:ext cx="179806" cy="179806"/>
-              </a:xfrm>
-              <a:prstGeom prst="ellipse">
-                <a:avLst/>
-              </a:prstGeom>
-              <a:solidFill>
-                <a:srgbClr val="000000">
-                  <a:alpha val="30196"/>
-                </a:srgbClr>
-              </a:solidFill>
-              <a:ln>
-                <a:noFill/>
-              </a:ln>
-            </p:spPr>
-            <p:style>
-              <a:lnRef idx="2">
-                <a:schemeClr val="accent1">
-                  <a:shade val="50000"/>
-                </a:schemeClr>
-              </a:lnRef>
-              <a:fillRef idx="1">
-                <a:schemeClr val="accent1"/>
-              </a:fillRef>
-              <a:effectRef idx="0">
-                <a:schemeClr val="accent1"/>
-              </a:effectRef>
-              <a:fontRef idx="minor">
-                <a:schemeClr val="lt1"/>
-              </a:fontRef>
-            </p:style>
-            <p:txBody>
-              <a:bodyPr rtlCol="0" anchor="ctr"/>
-              <a:lstStyle/>
-              <a:p>
-                <a:pPr algn="ctr"/>
-                <a:endParaRPr lang="en-US"/>
-              </a:p>
-            </p:txBody>
-          </p:sp>
-          <p:sp>
-            <p:nvSpPr>
-              <p:cNvPr id="81" name="Oval 80"/>
-              <p:cNvSpPr/>
-              <p:nvPr/>
-            </p:nvSpPr>
-            <p:spPr>
-              <a:xfrm>
-                <a:off x="4819502" y="3529691"/>
-                <a:ext cx="179806" cy="179806"/>
-              </a:xfrm>
-              <a:prstGeom prst="ellipse">
-                <a:avLst/>
-              </a:prstGeom>
-              <a:solidFill>
-                <a:srgbClr val="000000">
-                  <a:alpha val="30196"/>
-                </a:srgbClr>
-              </a:solidFill>
-              <a:ln>
-                <a:noFill/>
-              </a:ln>
-            </p:spPr>
-            <p:style>
-              <a:lnRef idx="2">
-                <a:schemeClr val="accent1">
-                  <a:shade val="50000"/>
-                </a:schemeClr>
-              </a:lnRef>
-              <a:fillRef idx="1">
-                <a:schemeClr val="accent1"/>
-              </a:fillRef>
-              <a:effectRef idx="0">
-                <a:schemeClr val="accent1"/>
-              </a:effectRef>
-              <a:fontRef idx="minor">
-                <a:schemeClr val="lt1"/>
-              </a:fontRef>
-            </p:style>
-            <p:txBody>
-              <a:bodyPr rtlCol="0" anchor="ctr"/>
-              <a:lstStyle/>
-              <a:p>
-                <a:pPr algn="ctr"/>
-                <a:endParaRPr lang="en-US"/>
-              </a:p>
-            </p:txBody>
-          </p:sp>
-          <p:sp>
-            <p:nvSpPr>
-              <p:cNvPr id="82" name="Oval 81"/>
-              <p:cNvSpPr/>
-              <p:nvPr/>
-            </p:nvSpPr>
-            <p:spPr>
-              <a:xfrm>
-                <a:off x="4152342" y="3520073"/>
-                <a:ext cx="179806" cy="179806"/>
-              </a:xfrm>
-              <a:prstGeom prst="ellipse">
-                <a:avLst/>
-              </a:prstGeom>
-              <a:solidFill>
-                <a:srgbClr val="000000">
-                  <a:alpha val="30196"/>
-                </a:srgbClr>
-              </a:solidFill>
-              <a:ln>
-                <a:noFill/>
-              </a:ln>
-            </p:spPr>
-            <p:style>
-              <a:lnRef idx="2">
-                <a:schemeClr val="accent1">
-                  <a:shade val="50000"/>
-                </a:schemeClr>
-              </a:lnRef>
-              <a:fillRef idx="1">
-                <a:schemeClr val="accent1"/>
-              </a:fillRef>
-              <a:effectRef idx="0">
-                <a:schemeClr val="accent1"/>
-              </a:effectRef>
-              <a:fontRef idx="minor">
-                <a:schemeClr val="lt1"/>
-              </a:fontRef>
-            </p:style>
-            <p:txBody>
-              <a:bodyPr rtlCol="0" anchor="ctr"/>
-              <a:lstStyle/>
-              <a:p>
-                <a:pPr algn="ctr"/>
-                <a:endParaRPr lang="en-US"/>
-              </a:p>
-            </p:txBody>
-          </p:sp>
-          <p:sp>
-            <p:nvSpPr>
-              <p:cNvPr id="83" name="Oval 82"/>
-              <p:cNvSpPr/>
-              <p:nvPr/>
-            </p:nvSpPr>
-            <p:spPr>
-              <a:xfrm>
-                <a:off x="4809764" y="4521289"/>
-                <a:ext cx="179806" cy="179806"/>
-              </a:xfrm>
-              <a:prstGeom prst="ellipse">
-                <a:avLst/>
-              </a:prstGeom>
-              <a:solidFill>
-                <a:srgbClr val="000000">
-                  <a:alpha val="30196"/>
-                </a:srgbClr>
-              </a:solidFill>
-              <a:ln>
-                <a:noFill/>
-              </a:ln>
-            </p:spPr>
-            <p:style>
-              <a:lnRef idx="2">
-                <a:schemeClr val="accent1">
-                  <a:shade val="50000"/>
-                </a:schemeClr>
-              </a:lnRef>
-              <a:fillRef idx="1">
-                <a:schemeClr val="accent1"/>
-              </a:fillRef>
-              <a:effectRef idx="0">
-                <a:schemeClr val="accent1"/>
-              </a:effectRef>
-              <a:fontRef idx="minor">
-                <a:schemeClr val="lt1"/>
-              </a:fontRef>
-            </p:style>
-            <p:txBody>
-              <a:bodyPr rtlCol="0" anchor="ctr"/>
-              <a:lstStyle/>
-              <a:p>
-                <a:pPr algn="ctr"/>
-                <a:endParaRPr lang="en-US"/>
-              </a:p>
-            </p:txBody>
-          </p:sp>
-          <p:sp>
-            <p:nvSpPr>
-              <p:cNvPr id="84" name="Oval 83"/>
-              <p:cNvSpPr/>
-              <p:nvPr/>
-            </p:nvSpPr>
-            <p:spPr>
-              <a:xfrm>
-                <a:off x="4142604" y="4511671"/>
-                <a:ext cx="179806" cy="179806"/>
-              </a:xfrm>
-              <a:prstGeom prst="ellipse">
-                <a:avLst/>
-              </a:prstGeom>
-              <a:solidFill>
-                <a:srgbClr val="000000">
-                  <a:alpha val="30196"/>
-                </a:srgbClr>
-              </a:solidFill>
-              <a:ln>
-                <a:noFill/>
-              </a:ln>
-            </p:spPr>
-            <p:style>
-              <a:lnRef idx="2">
-                <a:schemeClr val="accent1">
-                  <a:shade val="50000"/>
-                </a:schemeClr>
-              </a:lnRef>
-              <a:fillRef idx="1">
-                <a:schemeClr val="accent1"/>
-              </a:fillRef>
-              <a:effectRef idx="0">
-                <a:schemeClr val="accent1"/>
-              </a:effectRef>
-              <a:fontRef idx="minor">
-                <a:schemeClr val="lt1"/>
-              </a:fontRef>
-            </p:style>
-            <p:txBody>
-              <a:bodyPr rtlCol="0" anchor="ctr"/>
-              <a:lstStyle/>
-              <a:p>
-                <a:pPr algn="ctr"/>
-                <a:endParaRPr lang="en-US"/>
-              </a:p>
-            </p:txBody>
-          </p:sp>
-          <p:sp>
-            <p:nvSpPr>
-              <p:cNvPr id="88" name="Oval 87"/>
-              <p:cNvSpPr/>
-              <p:nvPr/>
-            </p:nvSpPr>
-            <p:spPr>
-              <a:xfrm>
-                <a:off x="4286102" y="3783596"/>
-                <a:ext cx="103054" cy="103054"/>
-              </a:xfrm>
-              <a:prstGeom prst="ellipse">
-                <a:avLst/>
-              </a:prstGeom>
-              <a:solidFill>
-                <a:srgbClr val="000000">
-                  <a:alpha val="60000"/>
-                </a:srgbClr>
-              </a:solidFill>
-              <a:ln>
-                <a:solidFill>
-                  <a:srgbClr val="7F6000">
-                    <a:alpha val="60000"/>
-                  </a:srgbClr>
-                </a:solidFill>
-              </a:ln>
-            </p:spPr>
-            <p:style>
-              <a:lnRef idx="2">
-                <a:schemeClr val="accent1">
-                  <a:shade val="50000"/>
-                </a:schemeClr>
-              </a:lnRef>
-              <a:fillRef idx="1">
-                <a:schemeClr val="accent1"/>
-              </a:fillRef>
-              <a:effectRef idx="0">
-                <a:schemeClr val="accent1"/>
-              </a:effectRef>
-              <a:fontRef idx="minor">
-                <a:schemeClr val="lt1"/>
-              </a:fontRef>
-            </p:style>
-            <p:txBody>
-              <a:bodyPr rtlCol="0" anchor="ctr"/>
-              <a:lstStyle/>
-              <a:p>
-                <a:pPr algn="ctr"/>
-                <a:endParaRPr lang="en-US"/>
-              </a:p>
-            </p:txBody>
-          </p:sp>
-          <p:sp>
-            <p:nvSpPr>
-              <p:cNvPr id="89" name="Oval 88"/>
-              <p:cNvSpPr/>
-              <p:nvPr/>
-            </p:nvSpPr>
-            <p:spPr>
-              <a:xfrm>
-                <a:off x="4756890" y="3786700"/>
-                <a:ext cx="103054" cy="103054"/>
-              </a:xfrm>
-              <a:prstGeom prst="ellipse">
-                <a:avLst/>
-              </a:prstGeom>
-              <a:solidFill>
-                <a:srgbClr val="000000">
-                  <a:alpha val="60000"/>
-                </a:srgbClr>
-              </a:solidFill>
-              <a:ln>
-                <a:solidFill>
-                  <a:srgbClr val="7F6000">
-                    <a:alpha val="60000"/>
-                  </a:srgbClr>
-                </a:solidFill>
-              </a:ln>
-            </p:spPr>
-            <p:style>
-              <a:lnRef idx="2">
-                <a:schemeClr val="accent1">
-                  <a:shade val="50000"/>
-                </a:schemeClr>
-              </a:lnRef>
-              <a:fillRef idx="1">
-                <a:schemeClr val="accent1"/>
-              </a:fillRef>
-              <a:effectRef idx="0">
-                <a:schemeClr val="accent1"/>
-              </a:effectRef>
-              <a:fontRef idx="minor">
-                <a:schemeClr val="lt1"/>
-              </a:fontRef>
-            </p:style>
-            <p:txBody>
-              <a:bodyPr rtlCol="0" anchor="ctr"/>
-              <a:lstStyle/>
-              <a:p>
-                <a:pPr algn="ctr"/>
-                <a:endParaRPr lang="en-US"/>
-              </a:p>
-            </p:txBody>
-          </p:sp>
-          <p:sp>
-            <p:nvSpPr>
-              <p:cNvPr id="94" name="Oval 93"/>
-              <p:cNvSpPr/>
-              <p:nvPr/>
-            </p:nvSpPr>
-            <p:spPr>
-              <a:xfrm>
-                <a:off x="4284051" y="4350739"/>
-                <a:ext cx="103054" cy="103054"/>
-              </a:xfrm>
-              <a:prstGeom prst="ellipse">
-                <a:avLst/>
-              </a:prstGeom>
-              <a:solidFill>
-                <a:srgbClr val="000000">
-                  <a:alpha val="60000"/>
-                </a:srgbClr>
-              </a:solidFill>
-              <a:ln>
-                <a:solidFill>
-                  <a:srgbClr val="7F6000">
-                    <a:alpha val="60000"/>
-                  </a:srgbClr>
-                </a:solidFill>
-              </a:ln>
-            </p:spPr>
-            <p:style>
-              <a:lnRef idx="2">
-                <a:schemeClr val="accent1">
-                  <a:shade val="50000"/>
-                </a:schemeClr>
-              </a:lnRef>
-              <a:fillRef idx="1">
-                <a:schemeClr val="accent1"/>
-              </a:fillRef>
-              <a:effectRef idx="0">
-                <a:schemeClr val="accent1"/>
-              </a:effectRef>
-              <a:fontRef idx="minor">
-                <a:schemeClr val="lt1"/>
-              </a:fontRef>
-            </p:style>
-            <p:txBody>
-              <a:bodyPr rtlCol="0" anchor="ctr"/>
-              <a:lstStyle/>
-              <a:p>
-                <a:pPr algn="ctr"/>
-                <a:endParaRPr lang="en-US"/>
-              </a:p>
-            </p:txBody>
-          </p:sp>
-          <p:sp>
-            <p:nvSpPr>
-              <p:cNvPr id="95" name="Oval 94"/>
-              <p:cNvSpPr/>
-              <p:nvPr/>
-            </p:nvSpPr>
-            <p:spPr>
-              <a:xfrm>
-                <a:off x="4754839" y="4353843"/>
-                <a:ext cx="103054" cy="103054"/>
-              </a:xfrm>
-              <a:prstGeom prst="ellipse">
-                <a:avLst/>
-              </a:prstGeom>
-              <a:solidFill>
-                <a:srgbClr val="000000">
-                  <a:alpha val="60000"/>
-                </a:srgbClr>
-              </a:solidFill>
-              <a:ln>
-                <a:solidFill>
-                  <a:srgbClr val="7F6000">
-                    <a:alpha val="60000"/>
-                  </a:srgbClr>
-                </a:solidFill>
-              </a:ln>
-            </p:spPr>
-            <p:style>
-              <a:lnRef idx="2">
-                <a:schemeClr val="accent1">
-                  <a:shade val="50000"/>
-                </a:schemeClr>
-              </a:lnRef>
-              <a:fillRef idx="1">
-                <a:schemeClr val="accent1"/>
-              </a:fillRef>
-              <a:effectRef idx="0">
-                <a:schemeClr val="accent1"/>
-              </a:effectRef>
-              <a:fontRef idx="minor">
-                <a:schemeClr val="lt1"/>
-              </a:fontRef>
-            </p:style>
-            <p:txBody>
-              <a:bodyPr rtlCol="0" anchor="ctr"/>
-              <a:lstStyle/>
-              <a:p>
-                <a:pPr algn="ctr"/>
-                <a:endParaRPr lang="en-US"/>
-              </a:p>
-            </p:txBody>
-          </p:sp>
-        </p:grpSp>
-        <p:sp>
-          <p:nvSpPr>
-            <p:cNvPr id="85" name="Rectangle 84"/>
-            <p:cNvSpPr/>
-            <p:nvPr/>
-          </p:nvSpPr>
-          <p:spPr>
-            <a:xfrm>
-              <a:off x="4921326" y="3800488"/>
-              <a:ext cx="118345" cy="553144"/>
-            </a:xfrm>
-            <a:prstGeom prst="rect">
-              <a:avLst/>
-            </a:prstGeom>
-            <a:solidFill>
-              <a:srgbClr val="7F6000">
-                <a:alpha val="29804"/>
-              </a:srgbClr>
-            </a:solidFill>
-            <a:ln>
-              <a:noFill/>
-            </a:ln>
-          </p:spPr>
-          <p:style>
-            <a:lnRef idx="2">
-              <a:schemeClr val="accent1">
-                <a:shade val="50000"/>
-              </a:schemeClr>
-            </a:lnRef>
-            <a:fillRef idx="1">
-              <a:schemeClr val="accent1"/>
-            </a:fillRef>
-            <a:effectRef idx="0">
-              <a:schemeClr val="accent1"/>
-            </a:effectRef>
-            <a:fontRef idx="minor">
-              <a:schemeClr val="lt1"/>
-            </a:fontRef>
-          </p:style>
-          <p:txBody>
-            <a:bodyPr rtlCol="0" anchor="ctr"/>
-            <a:lstStyle/>
-            <a:p>
-              <a:pPr algn="ctr"/>
-              <a:endParaRPr lang="en-US"/>
-            </a:p>
-          </p:txBody>
-        </p:sp>
-        <p:sp>
-          <p:nvSpPr>
-            <p:cNvPr id="86" name="Rectangle 85"/>
-            <p:cNvSpPr/>
-            <p:nvPr/>
-          </p:nvSpPr>
-          <p:spPr>
-            <a:xfrm>
-              <a:off x="4095844" y="3800488"/>
-              <a:ext cx="118345" cy="553144"/>
-            </a:xfrm>
-            <a:prstGeom prst="rect">
-              <a:avLst/>
-            </a:prstGeom>
-            <a:solidFill>
-              <a:srgbClr val="7F6000">
-                <a:alpha val="29804"/>
-              </a:srgbClr>
-            </a:solidFill>
-            <a:ln>
-              <a:noFill/>
-            </a:ln>
-          </p:spPr>
-          <p:style>
-            <a:lnRef idx="2">
-              <a:schemeClr val="accent1">
-                <a:shade val="50000"/>
-              </a:schemeClr>
-            </a:lnRef>
-            <a:fillRef idx="1">
-              <a:schemeClr val="accent1"/>
-            </a:fillRef>
-            <a:effectRef idx="0">
-              <a:schemeClr val="accent1"/>
-            </a:effectRef>
-            <a:fontRef idx="minor">
-              <a:schemeClr val="lt1"/>
-            </a:fontRef>
-          </p:style>
-          <p:txBody>
-            <a:bodyPr rtlCol="0" anchor="ctr"/>
-            <a:lstStyle/>
-            <a:p>
-              <a:pPr algn="ctr"/>
-              <a:endParaRPr lang="en-US"/>
-            </a:p>
-          </p:txBody>
-        </p:sp>
-      </p:grpSp>
-      <p:grpSp>
-        <p:nvGrpSpPr>
-          <p:cNvPr id="96" name="Group 95"/>
-          <p:cNvGrpSpPr/>
-          <p:nvPr/>
-        </p:nvGrpSpPr>
-        <p:grpSpPr>
-          <a:xfrm>
-            <a:off x="315930" y="2260280"/>
-            <a:ext cx="1053212" cy="1386183"/>
-            <a:chOff x="4045394" y="3424269"/>
-            <a:chExt cx="1053212" cy="1386183"/>
-          </a:xfrm>
-        </p:grpSpPr>
-        <p:grpSp>
-          <p:nvGrpSpPr>
-            <p:cNvPr id="97" name="Group 96"/>
-            <p:cNvGrpSpPr/>
-            <p:nvPr/>
-          </p:nvGrpSpPr>
-          <p:grpSpPr>
-            <a:xfrm>
-              <a:off x="4045394" y="3424269"/>
-              <a:ext cx="1053212" cy="1386183"/>
-              <a:chOff x="4045394" y="3424269"/>
-              <a:chExt cx="1053212" cy="1386183"/>
-            </a:xfrm>
-          </p:grpSpPr>
-          <p:grpSp>
-            <p:nvGrpSpPr>
-              <p:cNvPr id="100" name="Group 99"/>
-              <p:cNvGrpSpPr/>
-              <p:nvPr/>
-            </p:nvGrpSpPr>
-            <p:grpSpPr>
-              <a:xfrm>
-                <a:off x="4045394" y="3424269"/>
-                <a:ext cx="1053212" cy="1386183"/>
-                <a:chOff x="4045394" y="3424269"/>
-                <a:chExt cx="1053212" cy="1386183"/>
-              </a:xfrm>
-            </p:grpSpPr>
-            <p:grpSp>
-              <p:nvGrpSpPr>
-                <p:cNvPr id="110" name="Group 109"/>
-                <p:cNvGrpSpPr/>
-                <p:nvPr/>
-              </p:nvGrpSpPr>
-              <p:grpSpPr>
-                <a:xfrm>
-                  <a:off x="4045394" y="3424269"/>
-                  <a:ext cx="1053212" cy="1386183"/>
-                  <a:chOff x="4045394" y="3424269"/>
-                  <a:chExt cx="1053212" cy="1386183"/>
-                </a:xfrm>
-              </p:grpSpPr>
-              <p:grpSp>
-                <p:nvGrpSpPr>
-                  <p:cNvPr id="115" name="Group 114"/>
-                  <p:cNvGrpSpPr/>
-                  <p:nvPr/>
-                </p:nvGrpSpPr>
-                <p:grpSpPr>
-                  <a:xfrm>
-                    <a:off x="4045394" y="3424269"/>
-                    <a:ext cx="1053212" cy="1386183"/>
-                    <a:chOff x="4045394" y="3424269"/>
-                    <a:chExt cx="1053212" cy="1386183"/>
-                  </a:xfrm>
-                </p:grpSpPr>
-                <p:grpSp>
-                  <p:nvGrpSpPr>
-                    <p:cNvPr id="117" name="Group 116"/>
-                    <p:cNvGrpSpPr/>
-                    <p:nvPr/>
-                  </p:nvGrpSpPr>
-                  <p:grpSpPr>
-                    <a:xfrm>
-                      <a:off x="4045394" y="3424269"/>
-                      <a:ext cx="1053212" cy="1386183"/>
-                      <a:chOff x="4045394" y="3424269"/>
-                      <a:chExt cx="1053212" cy="1386183"/>
-                    </a:xfrm>
-                  </p:grpSpPr>
-                  <p:sp>
-                    <p:nvSpPr>
-                      <p:cNvPr id="120" name="Rectangle 119"/>
-                      <p:cNvSpPr/>
-                      <p:nvPr/>
-                    </p:nvSpPr>
-                    <p:spPr>
-                      <a:xfrm>
-                        <a:off x="4045394" y="3424269"/>
-                        <a:ext cx="1053212" cy="1386183"/>
-                      </a:xfrm>
-                      <a:prstGeom prst="rect">
-                        <a:avLst/>
-                      </a:prstGeom>
-                      <a:solidFill>
-                        <a:srgbClr val="600000"/>
-                      </a:solidFill>
-                      <a:ln>
-                        <a:noFill/>
-                      </a:ln>
-                    </p:spPr>
-                    <p:style>
-                      <a:lnRef idx="2">
-                        <a:schemeClr val="accent1">
-                          <a:shade val="50000"/>
-                        </a:schemeClr>
-                      </a:lnRef>
-                      <a:fillRef idx="1">
-                        <a:schemeClr val="accent1"/>
-                      </a:fillRef>
-                      <a:effectRef idx="0">
-                        <a:schemeClr val="accent1"/>
-                      </a:effectRef>
-                      <a:fontRef idx="minor">
-                        <a:schemeClr val="lt1"/>
-                      </a:fontRef>
-                    </p:style>
-                    <p:txBody>
-                      <a:bodyPr rtlCol="0" anchor="ctr"/>
-                      <a:lstStyle/>
-                      <a:p>
-                        <a:pPr algn="ctr"/>
-                        <a:endParaRPr lang="en-US"/>
-                      </a:p>
-                    </p:txBody>
-                  </p:sp>
-                  <p:sp>
-                    <p:nvSpPr>
-                      <p:cNvPr id="121" name="Rectangle 120"/>
-                      <p:cNvSpPr/>
-                      <p:nvPr/>
-                    </p:nvSpPr>
-                    <p:spPr>
-                      <a:xfrm>
-                        <a:off x="4095844" y="3479800"/>
-                        <a:ext cx="941858" cy="1260988"/>
-                      </a:xfrm>
-                      <a:prstGeom prst="rect">
-                        <a:avLst/>
-                      </a:prstGeom>
-                      <a:solidFill>
-                        <a:srgbClr val="7E0000"/>
-                      </a:solidFill>
-                      <a:ln>
-                        <a:noFill/>
-                      </a:ln>
-                    </p:spPr>
-                    <p:style>
-                      <a:lnRef idx="2">
-                        <a:schemeClr val="accent1">
-                          <a:shade val="50000"/>
-                        </a:schemeClr>
-                      </a:lnRef>
-                      <a:fillRef idx="1">
-                        <a:schemeClr val="accent1"/>
-                      </a:fillRef>
-                      <a:effectRef idx="0">
-                        <a:schemeClr val="accent1"/>
-                      </a:effectRef>
-                      <a:fontRef idx="minor">
-                        <a:schemeClr val="lt1"/>
-                      </a:fontRef>
-                    </p:style>
-                    <p:txBody>
-                      <a:bodyPr rtlCol="0" anchor="ctr"/>
-                      <a:lstStyle/>
-                      <a:p>
-                        <a:pPr algn="ctr"/>
-                        <a:endParaRPr lang="en-US"/>
-                      </a:p>
-                    </p:txBody>
-                  </p:sp>
-                </p:grpSp>
-                <p:sp>
-                  <p:nvSpPr>
-                    <p:cNvPr id="118" name="Flowchart: Decision 117"/>
-                    <p:cNvSpPr/>
-                    <p:nvPr/>
-                  </p:nvSpPr>
-                  <p:spPr>
-                    <a:xfrm>
-                      <a:off x="4277638" y="3632294"/>
-                      <a:ext cx="557750" cy="956000"/>
-                    </a:xfrm>
-                    <a:prstGeom prst="flowChartDecision">
-                      <a:avLst/>
-                    </a:prstGeom>
-                    <a:solidFill>
-                      <a:srgbClr val="600000"/>
-                    </a:solidFill>
-                    <a:ln>
-                      <a:noFill/>
-                    </a:ln>
-                  </p:spPr>
-                  <p:style>
-                    <a:lnRef idx="2">
-                      <a:schemeClr val="accent1">
-                        <a:shade val="50000"/>
-                      </a:schemeClr>
-                    </a:lnRef>
-                    <a:fillRef idx="1">
-                      <a:schemeClr val="accent1"/>
-                    </a:fillRef>
-                    <a:effectRef idx="0">
-                      <a:schemeClr val="accent1"/>
-                    </a:effectRef>
-                    <a:fontRef idx="minor">
-                      <a:schemeClr val="lt1"/>
-                    </a:fontRef>
-                  </p:style>
-                  <p:txBody>
-                    <a:bodyPr rtlCol="0" anchor="ctr"/>
-                    <a:lstStyle/>
-                    <a:p>
-                      <a:pPr algn="ctr"/>
-                      <a:endParaRPr lang="en-US"/>
-                    </a:p>
-                  </p:txBody>
-                </p:sp>
-                <p:sp>
-                  <p:nvSpPr>
-                    <p:cNvPr id="119" name="Flowchart: Decision 118"/>
-                    <p:cNvSpPr/>
-                    <p:nvPr/>
-                  </p:nvSpPr>
-                  <p:spPr>
-                    <a:xfrm>
-                      <a:off x="4332148" y="3721100"/>
-                      <a:ext cx="454128" cy="778388"/>
-                    </a:xfrm>
-                    <a:prstGeom prst="flowChartDecision">
-                      <a:avLst/>
-                    </a:prstGeom>
-                    <a:solidFill>
-                      <a:srgbClr val="A40000"/>
-                    </a:solidFill>
-                    <a:ln>
-                      <a:noFill/>
-                    </a:ln>
-                  </p:spPr>
-                  <p:style>
-                    <a:lnRef idx="2">
-                      <a:schemeClr val="accent1">
-                        <a:shade val="50000"/>
-                      </a:schemeClr>
-                    </a:lnRef>
-                    <a:fillRef idx="1">
-                      <a:schemeClr val="accent1"/>
-                    </a:fillRef>
-                    <a:effectRef idx="0">
-                      <a:schemeClr val="accent1"/>
-                    </a:effectRef>
-                    <a:fontRef idx="minor">
-                      <a:schemeClr val="lt1"/>
-                    </a:fontRef>
-                  </p:style>
-                  <p:txBody>
-                    <a:bodyPr rtlCol="0" anchor="ctr"/>
-                    <a:lstStyle/>
-                    <a:p>
-                      <a:pPr algn="ctr"/>
-                      <a:endParaRPr lang="en-US"/>
-                    </a:p>
-                  </p:txBody>
-                </p:sp>
-              </p:grpSp>
-              <p:sp>
-                <p:nvSpPr>
-                  <p:cNvPr id="116" name="Decagon 115"/>
-                  <p:cNvSpPr/>
-                  <p:nvPr/>
-                </p:nvSpPr>
-                <p:spPr>
-                  <a:xfrm>
-                    <a:off x="4410389" y="3960576"/>
-                    <a:ext cx="303176" cy="299436"/>
-                  </a:xfrm>
-                  <a:prstGeom prst="decagon">
-                    <a:avLst/>
-                  </a:prstGeom>
-                  <a:solidFill>
-                    <a:srgbClr val="7F6000">
-                      <a:alpha val="69804"/>
-                    </a:srgbClr>
-                  </a:solidFill>
-                  <a:ln>
-                    <a:noFill/>
-                  </a:ln>
-                </p:spPr>
-                <p:style>
-                  <a:lnRef idx="2">
-                    <a:schemeClr val="accent1">
-                      <a:shade val="50000"/>
-                    </a:schemeClr>
-                  </a:lnRef>
-                  <a:fillRef idx="1">
-                    <a:schemeClr val="accent1"/>
-                  </a:fillRef>
-                  <a:effectRef idx="0">
-                    <a:schemeClr val="accent1"/>
-                  </a:effectRef>
-                  <a:fontRef idx="minor">
-                    <a:schemeClr val="lt1"/>
-                  </a:fontRef>
-                </p:style>
-                <p:txBody>
-                  <a:bodyPr rtlCol="0" anchor="ctr"/>
-                  <a:lstStyle/>
-                  <a:p>
-                    <a:pPr algn="ctr"/>
-                    <a:endParaRPr lang="en-US"/>
-                  </a:p>
-                </p:txBody>
-              </p:sp>
-            </p:grpSp>
-            <p:sp>
-              <p:nvSpPr>
-                <p:cNvPr id="111" name="L-Shape 110"/>
-                <p:cNvSpPr/>
-                <p:nvPr/>
-              </p:nvSpPr>
-              <p:spPr>
-                <a:xfrm>
-                  <a:off x="4095844" y="4480254"/>
-                  <a:ext cx="260534" cy="260534"/>
-                </a:xfrm>
-                <a:prstGeom prst="corner">
-                  <a:avLst/>
-                </a:prstGeom>
-                <a:solidFill>
-                  <a:srgbClr val="7F6000">
-                    <a:alpha val="69804"/>
-                  </a:srgbClr>
-                </a:solidFill>
-                <a:ln>
-                  <a:noFill/>
-                </a:ln>
-              </p:spPr>
-              <p:style>
-                <a:lnRef idx="2">
-                  <a:schemeClr val="accent1">
-                    <a:shade val="50000"/>
-                  </a:schemeClr>
-                </a:lnRef>
-                <a:fillRef idx="1">
-                  <a:schemeClr val="accent1"/>
-                </a:fillRef>
-                <a:effectRef idx="0">
-                  <a:schemeClr val="accent1"/>
-                </a:effectRef>
-                <a:fontRef idx="minor">
-                  <a:schemeClr val="lt1"/>
-                </a:fontRef>
-              </p:style>
-              <p:txBody>
-                <a:bodyPr rtlCol="0" anchor="ctr"/>
-                <a:lstStyle/>
-                <a:p>
-                  <a:pPr algn="ctr"/>
-                  <a:endParaRPr lang="en-US"/>
-                </a:p>
-              </p:txBody>
-            </p:sp>
-            <p:sp>
-              <p:nvSpPr>
-                <p:cNvPr id="112" name="L-Shape 111"/>
-                <p:cNvSpPr/>
-                <p:nvPr/>
-              </p:nvSpPr>
-              <p:spPr>
-                <a:xfrm rot="16200000">
-                  <a:off x="4772311" y="4480254"/>
-                  <a:ext cx="260534" cy="260534"/>
-                </a:xfrm>
-                <a:prstGeom prst="corner">
-                  <a:avLst/>
-                </a:prstGeom>
-                <a:solidFill>
-                  <a:srgbClr val="7F6000">
-                    <a:alpha val="69804"/>
-                  </a:srgbClr>
-                </a:solidFill>
-                <a:ln>
-                  <a:noFill/>
-                </a:ln>
-              </p:spPr>
-              <p:style>
-                <a:lnRef idx="2">
-                  <a:schemeClr val="accent1">
-                    <a:shade val="50000"/>
-                  </a:schemeClr>
-                </a:lnRef>
-                <a:fillRef idx="1">
-                  <a:schemeClr val="accent1"/>
-                </a:fillRef>
-                <a:effectRef idx="0">
-                  <a:schemeClr val="accent1"/>
-                </a:effectRef>
-                <a:fontRef idx="minor">
-                  <a:schemeClr val="lt1"/>
-                </a:fontRef>
-              </p:style>
-              <p:txBody>
-                <a:bodyPr rtlCol="0" anchor="ctr"/>
-                <a:lstStyle/>
-                <a:p>
-                  <a:pPr algn="ctr"/>
-                  <a:endParaRPr lang="en-US"/>
-                </a:p>
-              </p:txBody>
-            </p:sp>
-            <p:sp>
-              <p:nvSpPr>
-                <p:cNvPr id="113" name="L-Shape 112"/>
-                <p:cNvSpPr/>
-                <p:nvPr/>
-              </p:nvSpPr>
-              <p:spPr>
-                <a:xfrm rot="10800000">
-                  <a:off x="4779138" y="3476808"/>
-                  <a:ext cx="260534" cy="260534"/>
-                </a:xfrm>
-                <a:prstGeom prst="corner">
-                  <a:avLst/>
-                </a:prstGeom>
-                <a:solidFill>
-                  <a:srgbClr val="7F6000">
-                    <a:alpha val="69804"/>
-                  </a:srgbClr>
-                </a:solidFill>
-                <a:ln>
-                  <a:noFill/>
-                </a:ln>
-              </p:spPr>
-              <p:style>
-                <a:lnRef idx="2">
-                  <a:schemeClr val="accent1">
-                    <a:shade val="50000"/>
-                  </a:schemeClr>
-                </a:lnRef>
-                <a:fillRef idx="1">
-                  <a:schemeClr val="accent1"/>
-                </a:fillRef>
-                <a:effectRef idx="0">
-                  <a:schemeClr val="accent1"/>
-                </a:effectRef>
-                <a:fontRef idx="minor">
-                  <a:schemeClr val="lt1"/>
-                </a:fontRef>
-              </p:style>
-              <p:txBody>
-                <a:bodyPr rtlCol="0" anchor="ctr"/>
-                <a:lstStyle/>
-                <a:p>
-                  <a:pPr algn="ctr"/>
-                  <a:endParaRPr lang="en-US"/>
-                </a:p>
-              </p:txBody>
-            </p:sp>
-            <p:sp>
-              <p:nvSpPr>
-                <p:cNvPr id="114" name="L-Shape 113"/>
-                <p:cNvSpPr/>
-                <p:nvPr/>
-              </p:nvSpPr>
-              <p:spPr>
-                <a:xfrm rot="5400000">
-                  <a:off x="4102671" y="3476808"/>
-                  <a:ext cx="260534" cy="260534"/>
-                </a:xfrm>
-                <a:prstGeom prst="corner">
-                  <a:avLst/>
-                </a:prstGeom>
-                <a:solidFill>
-                  <a:srgbClr val="7F6000">
-                    <a:alpha val="69804"/>
-                  </a:srgbClr>
-                </a:solidFill>
-                <a:ln>
-                  <a:noFill/>
-                </a:ln>
-              </p:spPr>
-              <p:style>
-                <a:lnRef idx="2">
-                  <a:schemeClr val="accent1">
-                    <a:shade val="50000"/>
-                  </a:schemeClr>
-                </a:lnRef>
-                <a:fillRef idx="1">
-                  <a:schemeClr val="accent1"/>
-                </a:fillRef>
-                <a:effectRef idx="0">
-                  <a:schemeClr val="accent1"/>
-                </a:effectRef>
-                <a:fontRef idx="minor">
-                  <a:schemeClr val="lt1"/>
-                </a:fontRef>
-              </p:style>
-              <p:txBody>
-                <a:bodyPr rtlCol="0" anchor="ctr"/>
-                <a:lstStyle/>
-                <a:p>
-                  <a:pPr algn="ctr"/>
-                  <a:endParaRPr lang="en-US"/>
-                </a:p>
-              </p:txBody>
-            </p:sp>
-          </p:grpSp>
-          <p:sp>
-            <p:nvSpPr>
-              <p:cNvPr id="101" name="Oval 100"/>
-              <p:cNvSpPr/>
-              <p:nvPr/>
-            </p:nvSpPr>
-            <p:spPr>
-              <a:xfrm>
-                <a:off x="4471372" y="4023010"/>
-                <a:ext cx="179806" cy="179806"/>
-              </a:xfrm>
-              <a:prstGeom prst="ellipse">
-                <a:avLst/>
-              </a:prstGeom>
-              <a:solidFill>
-                <a:srgbClr val="000000">
-                  <a:alpha val="30196"/>
-                </a:srgbClr>
-              </a:solidFill>
-              <a:ln>
-                <a:noFill/>
-              </a:ln>
-            </p:spPr>
-            <p:style>
-              <a:lnRef idx="2">
-                <a:schemeClr val="accent1">
-                  <a:shade val="50000"/>
-                </a:schemeClr>
-              </a:lnRef>
-              <a:fillRef idx="1">
-                <a:schemeClr val="accent1"/>
-              </a:fillRef>
-              <a:effectRef idx="0">
-                <a:schemeClr val="accent1"/>
-              </a:effectRef>
-              <a:fontRef idx="minor">
-                <a:schemeClr val="lt1"/>
-              </a:fontRef>
-            </p:style>
-            <p:txBody>
-              <a:bodyPr rtlCol="0" anchor="ctr"/>
-              <a:lstStyle/>
-              <a:p>
-                <a:pPr algn="ctr"/>
-                <a:endParaRPr lang="en-US"/>
-              </a:p>
-            </p:txBody>
-          </p:sp>
-          <p:sp>
-            <p:nvSpPr>
-              <p:cNvPr id="102" name="Oval 101"/>
-              <p:cNvSpPr/>
-              <p:nvPr/>
-            </p:nvSpPr>
-            <p:spPr>
-              <a:xfrm>
-                <a:off x="4819502" y="3529691"/>
-                <a:ext cx="179806" cy="179806"/>
-              </a:xfrm>
-              <a:prstGeom prst="ellipse">
-                <a:avLst/>
-              </a:prstGeom>
-              <a:solidFill>
-                <a:srgbClr val="000000">
-                  <a:alpha val="30196"/>
-                </a:srgbClr>
-              </a:solidFill>
-              <a:ln>
-                <a:noFill/>
-              </a:ln>
-            </p:spPr>
-            <p:style>
-              <a:lnRef idx="2">
-                <a:schemeClr val="accent1">
-                  <a:shade val="50000"/>
-                </a:schemeClr>
-              </a:lnRef>
-              <a:fillRef idx="1">
-                <a:schemeClr val="accent1"/>
-              </a:fillRef>
-              <a:effectRef idx="0">
-                <a:schemeClr val="accent1"/>
-              </a:effectRef>
-              <a:fontRef idx="minor">
-                <a:schemeClr val="lt1"/>
-              </a:fontRef>
-            </p:style>
-            <p:txBody>
-              <a:bodyPr rtlCol="0" anchor="ctr"/>
-              <a:lstStyle/>
-              <a:p>
-                <a:pPr algn="ctr"/>
-                <a:endParaRPr lang="en-US"/>
-              </a:p>
-            </p:txBody>
-          </p:sp>
-          <p:sp>
-            <p:nvSpPr>
-              <p:cNvPr id="103" name="Oval 102"/>
-              <p:cNvSpPr/>
-              <p:nvPr/>
-            </p:nvSpPr>
-            <p:spPr>
-              <a:xfrm>
-                <a:off x="4152342" y="3520073"/>
-                <a:ext cx="179806" cy="179806"/>
-              </a:xfrm>
-              <a:prstGeom prst="ellipse">
-                <a:avLst/>
-              </a:prstGeom>
-              <a:solidFill>
-                <a:srgbClr val="000000">
-                  <a:alpha val="30196"/>
-                </a:srgbClr>
-              </a:solidFill>
-              <a:ln>
-                <a:noFill/>
-              </a:ln>
-            </p:spPr>
-            <p:style>
-              <a:lnRef idx="2">
-                <a:schemeClr val="accent1">
-                  <a:shade val="50000"/>
-                </a:schemeClr>
-              </a:lnRef>
-              <a:fillRef idx="1">
-                <a:schemeClr val="accent1"/>
-              </a:fillRef>
-              <a:effectRef idx="0">
-                <a:schemeClr val="accent1"/>
-              </a:effectRef>
-              <a:fontRef idx="minor">
-                <a:schemeClr val="lt1"/>
-              </a:fontRef>
-            </p:style>
-            <p:txBody>
-              <a:bodyPr rtlCol="0" anchor="ctr"/>
-              <a:lstStyle/>
-              <a:p>
-                <a:pPr algn="ctr"/>
-                <a:endParaRPr lang="en-US"/>
-              </a:p>
-            </p:txBody>
-          </p:sp>
-          <p:sp>
-            <p:nvSpPr>
-              <p:cNvPr id="104" name="Oval 103"/>
-              <p:cNvSpPr/>
-              <p:nvPr/>
-            </p:nvSpPr>
-            <p:spPr>
-              <a:xfrm>
-                <a:off x="4809764" y="4521289"/>
-                <a:ext cx="179806" cy="179806"/>
-              </a:xfrm>
-              <a:prstGeom prst="ellipse">
-                <a:avLst/>
-              </a:prstGeom>
-              <a:solidFill>
-                <a:srgbClr val="000000">
-                  <a:alpha val="30196"/>
-                </a:srgbClr>
-              </a:solidFill>
-              <a:ln>
-                <a:noFill/>
-              </a:ln>
-            </p:spPr>
-            <p:style>
-              <a:lnRef idx="2">
-                <a:schemeClr val="accent1">
-                  <a:shade val="50000"/>
-                </a:schemeClr>
-              </a:lnRef>
-              <a:fillRef idx="1">
-                <a:schemeClr val="accent1"/>
-              </a:fillRef>
-              <a:effectRef idx="0">
-                <a:schemeClr val="accent1"/>
-              </a:effectRef>
-              <a:fontRef idx="minor">
-                <a:schemeClr val="lt1"/>
-              </a:fontRef>
-            </p:style>
-            <p:txBody>
-              <a:bodyPr rtlCol="0" anchor="ctr"/>
-              <a:lstStyle/>
-              <a:p>
-                <a:pPr algn="ctr"/>
-                <a:endParaRPr lang="en-US"/>
-              </a:p>
-            </p:txBody>
-          </p:sp>
-          <p:sp>
-            <p:nvSpPr>
-              <p:cNvPr id="105" name="Oval 104"/>
-              <p:cNvSpPr/>
-              <p:nvPr/>
-            </p:nvSpPr>
-            <p:spPr>
-              <a:xfrm>
-                <a:off x="4142604" y="4511671"/>
-                <a:ext cx="179806" cy="179806"/>
-              </a:xfrm>
-              <a:prstGeom prst="ellipse">
-                <a:avLst/>
-              </a:prstGeom>
-              <a:solidFill>
-                <a:srgbClr val="000000">
-                  <a:alpha val="30196"/>
-                </a:srgbClr>
-              </a:solidFill>
-              <a:ln>
-                <a:noFill/>
-              </a:ln>
-            </p:spPr>
-            <p:style>
-              <a:lnRef idx="2">
-                <a:schemeClr val="accent1">
-                  <a:shade val="50000"/>
-                </a:schemeClr>
-              </a:lnRef>
-              <a:fillRef idx="1">
-                <a:schemeClr val="accent1"/>
-              </a:fillRef>
-              <a:effectRef idx="0">
-                <a:schemeClr val="accent1"/>
-              </a:effectRef>
-              <a:fontRef idx="minor">
-                <a:schemeClr val="lt1"/>
-              </a:fontRef>
-            </p:style>
-            <p:txBody>
-              <a:bodyPr rtlCol="0" anchor="ctr"/>
-              <a:lstStyle/>
-              <a:p>
-                <a:pPr algn="ctr"/>
-                <a:endParaRPr lang="en-US"/>
-              </a:p>
-            </p:txBody>
-          </p:sp>
-          <p:sp>
-            <p:nvSpPr>
-              <p:cNvPr id="106" name="Oval 105"/>
-              <p:cNvSpPr/>
-              <p:nvPr/>
-            </p:nvSpPr>
-            <p:spPr>
-              <a:xfrm>
-                <a:off x="4286102" y="3783596"/>
-                <a:ext cx="103054" cy="103054"/>
-              </a:xfrm>
-              <a:prstGeom prst="ellipse">
-                <a:avLst/>
-              </a:prstGeom>
-              <a:solidFill>
-                <a:srgbClr val="000000">
-                  <a:alpha val="60000"/>
-                </a:srgbClr>
-              </a:solidFill>
-              <a:ln>
-                <a:solidFill>
-                  <a:srgbClr val="7F6000">
-                    <a:alpha val="60000"/>
-                  </a:srgbClr>
-                </a:solidFill>
-              </a:ln>
-            </p:spPr>
-            <p:style>
-              <a:lnRef idx="2">
-                <a:schemeClr val="accent1">
-                  <a:shade val="50000"/>
-                </a:schemeClr>
-              </a:lnRef>
-              <a:fillRef idx="1">
-                <a:schemeClr val="accent1"/>
-              </a:fillRef>
-              <a:effectRef idx="0">
-                <a:schemeClr val="accent1"/>
-              </a:effectRef>
-              <a:fontRef idx="minor">
-                <a:schemeClr val="lt1"/>
-              </a:fontRef>
-            </p:style>
-            <p:txBody>
-              <a:bodyPr rtlCol="0" anchor="ctr"/>
-              <a:lstStyle/>
-              <a:p>
-                <a:pPr algn="ctr"/>
-                <a:endParaRPr lang="en-US"/>
-              </a:p>
-            </p:txBody>
-          </p:sp>
-          <p:sp>
-            <p:nvSpPr>
-              <p:cNvPr id="107" name="Oval 106"/>
-              <p:cNvSpPr/>
-              <p:nvPr/>
-            </p:nvSpPr>
-            <p:spPr>
-              <a:xfrm>
-                <a:off x="4756890" y="3786700"/>
-                <a:ext cx="103054" cy="103054"/>
-              </a:xfrm>
-              <a:prstGeom prst="ellipse">
-                <a:avLst/>
-              </a:prstGeom>
-              <a:solidFill>
-                <a:srgbClr val="000000">
-                  <a:alpha val="60000"/>
-                </a:srgbClr>
-              </a:solidFill>
-              <a:ln>
-                <a:solidFill>
-                  <a:srgbClr val="7F6000">
-                    <a:alpha val="60000"/>
-                  </a:srgbClr>
-                </a:solidFill>
-              </a:ln>
-            </p:spPr>
-            <p:style>
-              <a:lnRef idx="2">
-                <a:schemeClr val="accent1">
-                  <a:shade val="50000"/>
-                </a:schemeClr>
-              </a:lnRef>
-              <a:fillRef idx="1">
-                <a:schemeClr val="accent1"/>
-              </a:fillRef>
-              <a:effectRef idx="0">
-                <a:schemeClr val="accent1"/>
-              </a:effectRef>
-              <a:fontRef idx="minor">
-                <a:schemeClr val="lt1"/>
-              </a:fontRef>
-            </p:style>
-            <p:txBody>
-              <a:bodyPr rtlCol="0" anchor="ctr"/>
-              <a:lstStyle/>
-              <a:p>
-                <a:pPr algn="ctr"/>
-                <a:endParaRPr lang="en-US"/>
-              </a:p>
-            </p:txBody>
-          </p:sp>
-          <p:sp>
-            <p:nvSpPr>
-              <p:cNvPr id="108" name="Oval 107"/>
-              <p:cNvSpPr/>
-              <p:nvPr/>
-            </p:nvSpPr>
-            <p:spPr>
-              <a:xfrm>
-                <a:off x="4284051" y="4350739"/>
-                <a:ext cx="103054" cy="103054"/>
-              </a:xfrm>
-              <a:prstGeom prst="ellipse">
-                <a:avLst/>
-              </a:prstGeom>
-              <a:solidFill>
-                <a:srgbClr val="000000">
-                  <a:alpha val="60000"/>
-                </a:srgbClr>
-              </a:solidFill>
-              <a:ln>
-                <a:solidFill>
-                  <a:srgbClr val="7F6000">
-                    <a:alpha val="60000"/>
-                  </a:srgbClr>
-                </a:solidFill>
-              </a:ln>
-            </p:spPr>
-            <p:style>
-              <a:lnRef idx="2">
-                <a:schemeClr val="accent1">
-                  <a:shade val="50000"/>
-                </a:schemeClr>
-              </a:lnRef>
-              <a:fillRef idx="1">
-                <a:schemeClr val="accent1"/>
-              </a:fillRef>
-              <a:effectRef idx="0">
-                <a:schemeClr val="accent1"/>
-              </a:effectRef>
-              <a:fontRef idx="minor">
-                <a:schemeClr val="lt1"/>
-              </a:fontRef>
-            </p:style>
-            <p:txBody>
-              <a:bodyPr rtlCol="0" anchor="ctr"/>
-              <a:lstStyle/>
-              <a:p>
-                <a:pPr algn="ctr"/>
-                <a:endParaRPr lang="en-US"/>
-              </a:p>
-            </p:txBody>
-          </p:sp>
-          <p:sp>
-            <p:nvSpPr>
-              <p:cNvPr id="109" name="Oval 108"/>
-              <p:cNvSpPr/>
-              <p:nvPr/>
-            </p:nvSpPr>
-            <p:spPr>
-              <a:xfrm>
-                <a:off x="4754839" y="4353843"/>
-                <a:ext cx="103054" cy="103054"/>
-              </a:xfrm>
-              <a:prstGeom prst="ellipse">
-                <a:avLst/>
-              </a:prstGeom>
-              <a:solidFill>
-                <a:srgbClr val="000000">
-                  <a:alpha val="60000"/>
-                </a:srgbClr>
-              </a:solidFill>
-              <a:ln>
-                <a:solidFill>
-                  <a:srgbClr val="7F6000">
-                    <a:alpha val="60000"/>
-                  </a:srgbClr>
-                </a:solidFill>
-              </a:ln>
-            </p:spPr>
-            <p:style>
-              <a:lnRef idx="2">
-                <a:schemeClr val="accent1">
-                  <a:shade val="50000"/>
-                </a:schemeClr>
-              </a:lnRef>
-              <a:fillRef idx="1">
-                <a:schemeClr val="accent1"/>
-              </a:fillRef>
-              <a:effectRef idx="0">
-                <a:schemeClr val="accent1"/>
-              </a:effectRef>
-              <a:fontRef idx="minor">
-                <a:schemeClr val="lt1"/>
-              </a:fontRef>
-            </p:style>
-            <p:txBody>
-              <a:bodyPr rtlCol="0" anchor="ctr"/>
-              <a:lstStyle/>
-              <a:p>
-                <a:pPr algn="ctr"/>
-                <a:endParaRPr lang="en-US"/>
-              </a:p>
-            </p:txBody>
-          </p:sp>
-        </p:grpSp>
-        <p:sp>
-          <p:nvSpPr>
-            <p:cNvPr id="98" name="Rectangle 97"/>
-            <p:cNvSpPr/>
-            <p:nvPr/>
-          </p:nvSpPr>
-          <p:spPr>
-            <a:xfrm>
-              <a:off x="4921326" y="3800488"/>
-              <a:ext cx="118345" cy="553144"/>
-            </a:xfrm>
-            <a:prstGeom prst="rect">
-              <a:avLst/>
-            </a:prstGeom>
-            <a:solidFill>
-              <a:srgbClr val="7F6000">
-                <a:alpha val="29804"/>
-              </a:srgbClr>
-            </a:solidFill>
-            <a:ln>
-              <a:noFill/>
-            </a:ln>
-          </p:spPr>
-          <p:style>
-            <a:lnRef idx="2">
-              <a:schemeClr val="accent1">
-                <a:shade val="50000"/>
-              </a:schemeClr>
-            </a:lnRef>
-            <a:fillRef idx="1">
-              <a:schemeClr val="accent1"/>
-            </a:fillRef>
-            <a:effectRef idx="0">
-              <a:schemeClr val="accent1"/>
-            </a:effectRef>
-            <a:fontRef idx="minor">
-              <a:schemeClr val="lt1"/>
-            </a:fontRef>
-          </p:style>
-          <p:txBody>
-            <a:bodyPr rtlCol="0" anchor="ctr"/>
-            <a:lstStyle/>
-            <a:p>
-              <a:pPr algn="ctr"/>
-              <a:endParaRPr lang="en-US"/>
-            </a:p>
-          </p:txBody>
-        </p:sp>
-        <p:sp>
-          <p:nvSpPr>
-            <p:cNvPr id="99" name="Rectangle 98"/>
-            <p:cNvSpPr/>
-            <p:nvPr/>
-          </p:nvSpPr>
-          <p:spPr>
-            <a:xfrm>
-              <a:off x="4095844" y="3800488"/>
-              <a:ext cx="118345" cy="553144"/>
-            </a:xfrm>
-            <a:prstGeom prst="rect">
-              <a:avLst/>
-            </a:prstGeom>
-            <a:solidFill>
-              <a:srgbClr val="7F6000">
-                <a:alpha val="29804"/>
-              </a:srgbClr>
-            </a:solidFill>
-            <a:ln>
-              <a:noFill/>
-            </a:ln>
-          </p:spPr>
-          <p:style>
-            <a:lnRef idx="2">
-              <a:schemeClr val="accent1">
-                <a:shade val="50000"/>
-              </a:schemeClr>
-            </a:lnRef>
-            <a:fillRef idx="1">
-              <a:schemeClr val="accent1"/>
-            </a:fillRef>
-            <a:effectRef idx="0">
-              <a:schemeClr val="accent1"/>
-            </a:effectRef>
-            <a:fontRef idx="minor">
-              <a:schemeClr val="lt1"/>
-            </a:fontRef>
-          </p:style>
-          <p:txBody>
-            <a:bodyPr rtlCol="0" anchor="ctr"/>
-            <a:lstStyle/>
-            <a:p>
-              <a:pPr algn="ctr"/>
-              <a:endParaRPr lang="en-US"/>
-            </a:p>
-          </p:txBody>
-        </p:sp>
-      </p:grpSp>
-      <p:grpSp>
-        <p:nvGrpSpPr>
           <p:cNvPr id="123" name="Group 122"/>
           <p:cNvGrpSpPr/>
           <p:nvPr/>
         </p:nvGrpSpPr>
         <p:grpSpPr>
           <a:xfrm>
-            <a:off x="206032" y="4260850"/>
-            <a:ext cx="943605" cy="644240"/>
+            <a:off x="206032" y="4131778"/>
+            <a:ext cx="1304039" cy="773312"/>
             <a:chOff x="206032" y="4254500"/>
             <a:chExt cx="1323707" cy="644240"/>
           </a:xfrm>
@@ -7140,74 +4624,14 @@
       </p:grpSp>
       <p:sp>
         <p:nvSpPr>
-          <p:cNvPr id="125" name="Rectangle 124"/>
-          <p:cNvSpPr/>
-          <p:nvPr/>
-        </p:nvSpPr>
-        <p:spPr>
-          <a:xfrm>
-            <a:off x="1394233" y="3919206"/>
-            <a:ext cx="1885738" cy="723912"/>
-          </a:xfrm>
-          <a:prstGeom prst="rect">
-            <a:avLst/>
-          </a:prstGeom>
-          <a:solidFill>
-            <a:srgbClr val="492207"/>
-          </a:solidFill>
-          <a:ln>
-            <a:noFill/>
-          </a:ln>
-        </p:spPr>
-        <p:style>
-          <a:lnRef idx="2">
-            <a:schemeClr val="accent1">
-              <a:shade val="50000"/>
-            </a:schemeClr>
-          </a:lnRef>
-          <a:fillRef idx="1">
-            <a:schemeClr val="accent1"/>
-          </a:fillRef>
-          <a:effectRef idx="0">
-            <a:schemeClr val="accent1"/>
-          </a:effectRef>
-          <a:fontRef idx="minor">
-            <a:schemeClr val="lt1"/>
-          </a:fontRef>
-        </p:style>
-        <p:txBody>
-          <a:bodyPr rtlCol="0" anchor="ctr"/>
-          <a:lstStyle/>
-          <a:p>
-            <a:pPr algn="ctr"/>
-            <a:r>
-              <a:rPr lang="ro-RO" dirty="0" smtClean="0">
-                <a:solidFill>
-                  <a:srgbClr val="622E0A"/>
-                </a:solidFill>
-                <a:latin typeface="Libre Baskerville" panose="02000000000000000000" pitchFamily="2" charset="0"/>
-              </a:rPr>
-              <a:t>Dining Table</a:t>
-            </a:r>
-            <a:endParaRPr lang="en-US" dirty="0">
-              <a:solidFill>
-                <a:srgbClr val="622E0A"/>
-              </a:solidFill>
-              <a:latin typeface="Libre Baskerville" panose="02000000000000000000" pitchFamily="2" charset="0"/>
-            </a:endParaRPr>
-          </a:p>
-        </p:txBody>
-      </p:sp>
-      <p:sp>
-        <p:nvSpPr>
           <p:cNvPr id="127" name="Rectangle 126"/>
           <p:cNvSpPr/>
           <p:nvPr/>
         </p:nvSpPr>
         <p:spPr>
           <a:xfrm>
-            <a:off x="1691316" y="3145469"/>
-            <a:ext cx="1089273" cy="376299"/>
+            <a:off x="1956573" y="3344733"/>
+            <a:ext cx="850256" cy="353257"/>
           </a:xfrm>
           <a:prstGeom prst="rect">
             <a:avLst/>
@@ -7264,106 +4688,14 @@
       </p:sp>
       <p:sp>
         <p:nvSpPr>
-          <p:cNvPr id="128" name="Rectangle 127"/>
-          <p:cNvSpPr/>
-          <p:nvPr/>
-        </p:nvSpPr>
-        <p:spPr>
-          <a:xfrm>
-            <a:off x="5833486" y="244760"/>
-            <a:ext cx="50205" cy="1618178"/>
-          </a:xfrm>
-          <a:prstGeom prst="rect">
-            <a:avLst/>
-          </a:prstGeom>
-          <a:solidFill>
-            <a:srgbClr val="492207"/>
-          </a:solidFill>
-          <a:ln>
-            <a:noFill/>
-          </a:ln>
-        </p:spPr>
-        <p:style>
-          <a:lnRef idx="2">
-            <a:schemeClr val="accent1">
-              <a:shade val="50000"/>
-            </a:schemeClr>
-          </a:lnRef>
-          <a:fillRef idx="1">
-            <a:schemeClr val="accent1"/>
-          </a:fillRef>
-          <a:effectRef idx="0">
-            <a:schemeClr val="accent1"/>
-          </a:effectRef>
-          <a:fontRef idx="minor">
-            <a:schemeClr val="lt1"/>
-          </a:fontRef>
-        </p:style>
-        <p:txBody>
-          <a:bodyPr rtlCol="0" anchor="ctr"/>
-          <a:lstStyle/>
-          <a:p>
-            <a:pPr algn="ctr"/>
-            <a:endParaRPr lang="en-US"/>
-          </a:p>
-        </p:txBody>
-      </p:sp>
-      <p:sp>
-        <p:nvSpPr>
-          <p:cNvPr id="129" name="Rectangle 128"/>
-          <p:cNvSpPr/>
-          <p:nvPr/>
-        </p:nvSpPr>
-        <p:spPr>
-          <a:xfrm>
-            <a:off x="5213350" y="1823575"/>
-            <a:ext cx="668346" cy="45719"/>
-          </a:xfrm>
-          <a:prstGeom prst="rect">
-            <a:avLst/>
-          </a:prstGeom>
-          <a:solidFill>
-            <a:srgbClr val="492207"/>
-          </a:solidFill>
-          <a:ln>
-            <a:noFill/>
-          </a:ln>
-        </p:spPr>
-        <p:style>
-          <a:lnRef idx="2">
-            <a:schemeClr val="accent1">
-              <a:shade val="50000"/>
-            </a:schemeClr>
-          </a:lnRef>
-          <a:fillRef idx="1">
-            <a:schemeClr val="accent1"/>
-          </a:fillRef>
-          <a:effectRef idx="0">
-            <a:schemeClr val="accent1"/>
-          </a:effectRef>
-          <a:fontRef idx="minor">
-            <a:schemeClr val="lt1"/>
-          </a:fontRef>
-        </p:style>
-        <p:txBody>
-          <a:bodyPr rtlCol="0" anchor="ctr"/>
-          <a:lstStyle/>
-          <a:p>
-            <a:pPr algn="ctr"/>
-            <a:endParaRPr lang="en-US"/>
-          </a:p>
-        </p:txBody>
-      </p:sp>
-      <p:sp>
-        <p:nvSpPr>
           <p:cNvPr id="130" name="Arc 129"/>
           <p:cNvSpPr/>
           <p:nvPr/>
         </p:nvSpPr>
         <p:spPr>
           <a:xfrm rot="10800000">
-            <a:off x="5229067" y="1206392"/>
-            <a:ext cx="1305258" cy="1305258"/>
+            <a:off x="5844500" y="1439794"/>
+            <a:ext cx="861100" cy="726985"/>
           </a:xfrm>
           <a:prstGeom prst="arc">
             <a:avLst/>
@@ -7405,7 +4737,7 @@
         </p:nvSpPr>
         <p:spPr>
           <a:xfrm>
-            <a:off x="3989189" y="1870556"/>
+            <a:off x="4254128" y="1533316"/>
             <a:ext cx="944299" cy="461665"/>
           </a:xfrm>
           <a:prstGeom prst="rect">
@@ -7439,34 +4771,143 @@
       </p:sp>
       <p:grpSp>
         <p:nvGrpSpPr>
-          <p:cNvPr id="134" name="Group 133"/>
+          <p:cNvPr id="60" name="Group 59"/>
           <p:cNvGrpSpPr/>
           <p:nvPr/>
         </p:nvGrpSpPr>
         <p:grpSpPr>
           <a:xfrm>
-            <a:off x="4446420" y="349588"/>
-            <a:ext cx="1297188" cy="1229227"/>
+            <a:off x="5015145" y="268748"/>
+            <a:ext cx="791983" cy="750490"/>
             <a:chOff x="4446420" y="349588"/>
             <a:chExt cx="1297188" cy="1229227"/>
           </a:xfrm>
         </p:grpSpPr>
+        <p:grpSp>
+          <p:nvGrpSpPr>
+            <p:cNvPr id="134" name="Group 133"/>
+            <p:cNvGrpSpPr/>
+            <p:nvPr/>
+          </p:nvGrpSpPr>
+          <p:grpSpPr>
+            <a:xfrm>
+              <a:off x="4446420" y="349588"/>
+              <a:ext cx="1297188" cy="1229227"/>
+              <a:chOff x="4446420" y="349588"/>
+              <a:chExt cx="1297188" cy="1229227"/>
+            </a:xfrm>
+          </p:grpSpPr>
+          <p:sp>
+            <p:nvSpPr>
+              <p:cNvPr id="132" name="Rectangle 131"/>
+              <p:cNvSpPr/>
+              <p:nvPr/>
+            </p:nvSpPr>
+            <p:spPr>
+              <a:xfrm>
+                <a:off x="4446420" y="349588"/>
+                <a:ext cx="1297188" cy="1229227"/>
+              </a:xfrm>
+              <a:prstGeom prst="rect">
+                <a:avLst/>
+              </a:prstGeom>
+              <a:solidFill>
+                <a:srgbClr val="492207"/>
+              </a:solidFill>
+              <a:ln>
+                <a:noFill/>
+              </a:ln>
+            </p:spPr>
+            <p:style>
+              <a:lnRef idx="2">
+                <a:schemeClr val="accent1">
+                  <a:shade val="50000"/>
+                </a:schemeClr>
+              </a:lnRef>
+              <a:fillRef idx="1">
+                <a:schemeClr val="accent1"/>
+              </a:fillRef>
+              <a:effectRef idx="0">
+                <a:schemeClr val="accent1"/>
+              </a:effectRef>
+              <a:fontRef idx="minor">
+                <a:schemeClr val="lt1"/>
+              </a:fontRef>
+            </p:style>
+            <p:txBody>
+              <a:bodyPr rtlCol="0" anchor="ctr"/>
+              <a:lstStyle/>
+              <a:p>
+                <a:pPr algn="ctr"/>
+                <a:endParaRPr lang="en-US"/>
+              </a:p>
+            </p:txBody>
+          </p:sp>
+          <p:sp>
+            <p:nvSpPr>
+              <p:cNvPr id="133" name="Rectangle 132"/>
+              <p:cNvSpPr/>
+              <p:nvPr/>
+            </p:nvSpPr>
+            <p:spPr>
+              <a:xfrm>
+                <a:off x="4488130" y="397914"/>
+                <a:ext cx="1205532" cy="1125182"/>
+              </a:xfrm>
+              <a:prstGeom prst="rect">
+                <a:avLst/>
+              </a:prstGeom>
+              <a:solidFill>
+                <a:srgbClr val="7E0000"/>
+              </a:solidFill>
+              <a:ln>
+                <a:noFill/>
+              </a:ln>
+            </p:spPr>
+            <p:style>
+              <a:lnRef idx="2">
+                <a:schemeClr val="accent1">
+                  <a:shade val="50000"/>
+                </a:schemeClr>
+              </a:lnRef>
+              <a:fillRef idx="1">
+                <a:schemeClr val="accent1"/>
+              </a:fillRef>
+              <a:effectRef idx="0">
+                <a:schemeClr val="accent1"/>
+              </a:effectRef>
+              <a:fontRef idx="minor">
+                <a:schemeClr val="lt1"/>
+              </a:fontRef>
+            </p:style>
+            <p:txBody>
+              <a:bodyPr rtlCol="0" anchor="ctr"/>
+              <a:lstStyle/>
+              <a:p>
+                <a:pPr algn="ctr"/>
+                <a:endParaRPr lang="en-US"/>
+              </a:p>
+            </p:txBody>
+          </p:sp>
+        </p:grpSp>
         <p:sp>
           <p:nvSpPr>
-            <p:cNvPr id="132" name="Rectangle 131"/>
+            <p:cNvPr id="135" name="Rounded Rectangle 134"/>
             <p:cNvSpPr/>
             <p:nvPr/>
           </p:nvSpPr>
           <p:spPr>
             <a:xfrm>
-              <a:off x="4446420" y="349588"/>
-              <a:ext cx="1297188" cy="1229227"/>
+              <a:off x="4547852" y="455883"/>
+              <a:ext cx="517900" cy="309798"/>
             </a:xfrm>
-            <a:prstGeom prst="rect">
+            <a:prstGeom prst="roundRect">
               <a:avLst/>
             </a:prstGeom>
             <a:solidFill>
-              <a:srgbClr val="492207"/>
+              <a:schemeClr val="bg1">
+                <a:lumMod val="85000"/>
+              </a:schemeClr>
             </a:solidFill>
             <a:ln>
               <a:noFill/>
@@ -7499,20 +4940,70 @@
         </p:sp>
         <p:sp>
           <p:nvSpPr>
-            <p:cNvPr id="133" name="Rectangle 132"/>
+            <p:cNvPr id="137" name="Rounded Rectangle 136"/>
             <p:cNvSpPr/>
             <p:nvPr/>
           </p:nvSpPr>
           <p:spPr>
             <a:xfrm>
-              <a:off x="4488130" y="397914"/>
-              <a:ext cx="1205532" cy="1125182"/>
+              <a:off x="5124686" y="455883"/>
+              <a:ext cx="517900" cy="309798"/>
+            </a:xfrm>
+            <a:prstGeom prst="roundRect">
+              <a:avLst/>
+            </a:prstGeom>
+            <a:solidFill>
+              <a:schemeClr val="bg1">
+                <a:lumMod val="85000"/>
+              </a:schemeClr>
+            </a:solidFill>
+            <a:ln>
+              <a:noFill/>
+            </a:ln>
+          </p:spPr>
+          <p:style>
+            <a:lnRef idx="2">
+              <a:schemeClr val="accent1">
+                <a:shade val="50000"/>
+              </a:schemeClr>
+            </a:lnRef>
+            <a:fillRef idx="1">
+              <a:schemeClr val="accent1"/>
+            </a:fillRef>
+            <a:effectRef idx="0">
+              <a:schemeClr val="accent1"/>
+            </a:effectRef>
+            <a:fontRef idx="minor">
+              <a:schemeClr val="lt1"/>
+            </a:fontRef>
+          </p:style>
+          <p:txBody>
+            <a:bodyPr rtlCol="0" anchor="ctr"/>
+            <a:lstStyle/>
+            <a:p>
+              <a:pPr algn="ctr"/>
+              <a:endParaRPr lang="en-US"/>
+            </a:p>
+          </p:txBody>
+        </p:sp>
+        <p:sp>
+          <p:nvSpPr>
+            <p:cNvPr id="138" name="Rectangle 137"/>
+            <p:cNvSpPr/>
+            <p:nvPr/>
+          </p:nvSpPr>
+          <p:spPr>
+            <a:xfrm>
+              <a:off x="4488130" y="806717"/>
+              <a:ext cx="1205532" cy="716379"/>
             </a:xfrm>
             <a:prstGeom prst="rect">
               <a:avLst/>
             </a:prstGeom>
             <a:solidFill>
-              <a:srgbClr val="7E0000"/>
+              <a:schemeClr val="bg1">
+                <a:lumMod val="85000"/>
+              </a:schemeClr>
             </a:solidFill>
             <a:ln>
               <a:noFill/>
@@ -7546,157 +5037,13 @@
       </p:grpSp>
       <p:sp>
         <p:nvSpPr>
-          <p:cNvPr id="135" name="Rounded Rectangle 134"/>
-          <p:cNvSpPr/>
-          <p:nvPr/>
-        </p:nvSpPr>
-        <p:spPr>
-          <a:xfrm>
-            <a:off x="4547852" y="455883"/>
-            <a:ext cx="517900" cy="309798"/>
-          </a:xfrm>
-          <a:prstGeom prst="roundRect">
-            <a:avLst/>
-          </a:prstGeom>
-          <a:solidFill>
-            <a:schemeClr val="bg1">
-              <a:lumMod val="85000"/>
-            </a:schemeClr>
-          </a:solidFill>
-          <a:ln>
-            <a:noFill/>
-          </a:ln>
-        </p:spPr>
-        <p:style>
-          <a:lnRef idx="2">
-            <a:schemeClr val="accent1">
-              <a:shade val="50000"/>
-            </a:schemeClr>
-          </a:lnRef>
-          <a:fillRef idx="1">
-            <a:schemeClr val="accent1"/>
-          </a:fillRef>
-          <a:effectRef idx="0">
-            <a:schemeClr val="accent1"/>
-          </a:effectRef>
-          <a:fontRef idx="minor">
-            <a:schemeClr val="lt1"/>
-          </a:fontRef>
-        </p:style>
-        <p:txBody>
-          <a:bodyPr rtlCol="0" anchor="ctr"/>
-          <a:lstStyle/>
-          <a:p>
-            <a:pPr algn="ctr"/>
-            <a:endParaRPr lang="en-US"/>
-          </a:p>
-        </p:txBody>
-      </p:sp>
-      <p:sp>
-        <p:nvSpPr>
-          <p:cNvPr id="137" name="Rounded Rectangle 136"/>
-          <p:cNvSpPr/>
-          <p:nvPr/>
-        </p:nvSpPr>
-        <p:spPr>
-          <a:xfrm>
-            <a:off x="5124686" y="455883"/>
-            <a:ext cx="517900" cy="309798"/>
-          </a:xfrm>
-          <a:prstGeom prst="roundRect">
-            <a:avLst/>
-          </a:prstGeom>
-          <a:solidFill>
-            <a:schemeClr val="bg1">
-              <a:lumMod val="85000"/>
-            </a:schemeClr>
-          </a:solidFill>
-          <a:ln>
-            <a:noFill/>
-          </a:ln>
-        </p:spPr>
-        <p:style>
-          <a:lnRef idx="2">
-            <a:schemeClr val="accent1">
-              <a:shade val="50000"/>
-            </a:schemeClr>
-          </a:lnRef>
-          <a:fillRef idx="1">
-            <a:schemeClr val="accent1"/>
-          </a:fillRef>
-          <a:effectRef idx="0">
-            <a:schemeClr val="accent1"/>
-          </a:effectRef>
-          <a:fontRef idx="minor">
-            <a:schemeClr val="lt1"/>
-          </a:fontRef>
-        </p:style>
-        <p:txBody>
-          <a:bodyPr rtlCol="0" anchor="ctr"/>
-          <a:lstStyle/>
-          <a:p>
-            <a:pPr algn="ctr"/>
-            <a:endParaRPr lang="en-US"/>
-          </a:p>
-        </p:txBody>
-      </p:sp>
-      <p:sp>
-        <p:nvSpPr>
-          <p:cNvPr id="138" name="Rectangle 137"/>
-          <p:cNvSpPr/>
-          <p:nvPr/>
-        </p:nvSpPr>
-        <p:spPr>
-          <a:xfrm>
-            <a:off x="4488130" y="806717"/>
-            <a:ext cx="1205532" cy="716379"/>
-          </a:xfrm>
-          <a:prstGeom prst="rect">
-            <a:avLst/>
-          </a:prstGeom>
-          <a:solidFill>
-            <a:schemeClr val="bg1">
-              <a:lumMod val="85000"/>
-            </a:schemeClr>
-          </a:solidFill>
-          <a:ln>
-            <a:noFill/>
-          </a:ln>
-        </p:spPr>
-        <p:style>
-          <a:lnRef idx="2">
-            <a:schemeClr val="accent1">
-              <a:shade val="50000"/>
-            </a:schemeClr>
-          </a:lnRef>
-          <a:fillRef idx="1">
-            <a:schemeClr val="accent1"/>
-          </a:fillRef>
-          <a:effectRef idx="0">
-            <a:schemeClr val="accent1"/>
-          </a:effectRef>
-          <a:fontRef idx="minor">
-            <a:schemeClr val="lt1"/>
-          </a:fontRef>
-        </p:style>
-        <p:txBody>
-          <a:bodyPr rtlCol="0" anchor="ctr"/>
-          <a:lstStyle/>
-          <a:p>
-            <a:pPr algn="ctr"/>
-            <a:endParaRPr lang="en-US"/>
-          </a:p>
-        </p:txBody>
-      </p:sp>
-      <p:sp>
-        <p:nvSpPr>
           <p:cNvPr id="139" name="Rectangle 138"/>
           <p:cNvSpPr/>
           <p:nvPr/>
         </p:nvSpPr>
         <p:spPr>
           <a:xfrm rot="16200000">
-            <a:off x="2969791" y="1737036"/>
+            <a:off x="2919732" y="1779975"/>
             <a:ext cx="1107173" cy="376299"/>
           </a:xfrm>
           <a:prstGeom prst="rect">
@@ -7756,8 +5103,8 @@
         </p:nvSpPr>
         <p:spPr>
           <a:xfrm rot="16200000">
-            <a:off x="3117470" y="626647"/>
-            <a:ext cx="826386" cy="376299"/>
+            <a:off x="3102062" y="442218"/>
+            <a:ext cx="739842" cy="382798"/>
           </a:xfrm>
           <a:prstGeom prst="rect">
             <a:avLst/>
@@ -7791,7 +5138,7 @@
           <a:p>
             <a:pPr algn="ctr"/>
             <a:r>
-              <a:rPr lang="ro-RO" dirty="0" smtClean="0">
+              <a:rPr lang="ro-RO" sz="1200" dirty="0" smtClean="0">
                 <a:solidFill>
                   <a:schemeClr val="bg1">
                     <a:lumMod val="65000"/>
@@ -7801,7 +5148,7 @@
               </a:rPr>
               <a:t>Hearth</a:t>
             </a:r>
-            <a:endParaRPr lang="en-US" dirty="0">
+            <a:endParaRPr lang="en-US" sz="1200" dirty="0">
               <a:solidFill>
                 <a:schemeClr val="bg1">
                   <a:lumMod val="65000"/>
@@ -7820,7 +5167,7 @@
         </p:nvGrpSpPr>
         <p:grpSpPr>
           <a:xfrm>
-            <a:off x="1327762" y="687030"/>
+            <a:off x="1255595" y="679876"/>
             <a:ext cx="229766" cy="717513"/>
             <a:chOff x="2873773" y="858073"/>
             <a:chExt cx="367513" cy="2710004"/>
@@ -7923,106 +5270,14 @@
       </p:grpSp>
       <p:sp>
         <p:nvSpPr>
-          <p:cNvPr id="142" name="Rectangle 141"/>
-          <p:cNvSpPr/>
-          <p:nvPr/>
-        </p:nvSpPr>
-        <p:spPr>
-          <a:xfrm>
-            <a:off x="6933610" y="244760"/>
-            <a:ext cx="45719" cy="3769396"/>
-          </a:xfrm>
-          <a:prstGeom prst="rect">
-            <a:avLst/>
-          </a:prstGeom>
-          <a:solidFill>
-            <a:srgbClr val="492207"/>
-          </a:solidFill>
-          <a:ln>
-            <a:noFill/>
-          </a:ln>
-        </p:spPr>
-        <p:style>
-          <a:lnRef idx="2">
-            <a:schemeClr val="accent1">
-              <a:shade val="50000"/>
-            </a:schemeClr>
-          </a:lnRef>
-          <a:fillRef idx="1">
-            <a:schemeClr val="accent1"/>
-          </a:fillRef>
-          <a:effectRef idx="0">
-            <a:schemeClr val="accent1"/>
-          </a:effectRef>
-          <a:fontRef idx="minor">
-            <a:schemeClr val="lt1"/>
-          </a:fontRef>
-        </p:style>
-        <p:txBody>
-          <a:bodyPr rtlCol="0" anchor="ctr"/>
-          <a:lstStyle/>
-          <a:p>
-            <a:pPr algn="ctr"/>
-            <a:endParaRPr lang="en-US"/>
-          </a:p>
-        </p:txBody>
-      </p:sp>
-      <p:sp>
-        <p:nvSpPr>
-          <p:cNvPr id="143" name="Rectangle 142"/>
-          <p:cNvSpPr/>
-          <p:nvPr/>
-        </p:nvSpPr>
-        <p:spPr>
-          <a:xfrm>
-            <a:off x="6970415" y="3968437"/>
-            <a:ext cx="668346" cy="45719"/>
-          </a:xfrm>
-          <a:prstGeom prst="rect">
-            <a:avLst/>
-          </a:prstGeom>
-          <a:solidFill>
-            <a:srgbClr val="492207"/>
-          </a:solidFill>
-          <a:ln>
-            <a:noFill/>
-          </a:ln>
-        </p:spPr>
-        <p:style>
-          <a:lnRef idx="2">
-            <a:schemeClr val="accent1">
-              <a:shade val="50000"/>
-            </a:schemeClr>
-          </a:lnRef>
-          <a:fillRef idx="1">
-            <a:schemeClr val="accent1"/>
-          </a:fillRef>
-          <a:effectRef idx="0">
-            <a:schemeClr val="accent1"/>
-          </a:effectRef>
-          <a:fontRef idx="minor">
-            <a:schemeClr val="lt1"/>
-          </a:fontRef>
-        </p:style>
-        <p:txBody>
-          <a:bodyPr rtlCol="0" anchor="ctr"/>
-          <a:lstStyle/>
-          <a:p>
-            <a:pPr algn="ctr"/>
-            <a:endParaRPr lang="en-US"/>
-          </a:p>
-        </p:txBody>
-      </p:sp>
-      <p:sp>
-        <p:nvSpPr>
           <p:cNvPr id="144" name="Arc 143"/>
           <p:cNvSpPr/>
           <p:nvPr/>
         </p:nvSpPr>
         <p:spPr>
           <a:xfrm rot="5400000">
-            <a:off x="6314211" y="3347682"/>
-            <a:ext cx="1305258" cy="1305258"/>
+            <a:off x="6770284" y="3701762"/>
+            <a:ext cx="751283" cy="828264"/>
           </a:xfrm>
           <a:prstGeom prst="arc">
             <a:avLst/>
@@ -8056,52 +5311,6 @@
           </a:p>
         </p:txBody>
       </p:sp>
-      <p:sp>
-        <p:nvSpPr>
-          <p:cNvPr id="145" name="Rectangle 144"/>
-          <p:cNvSpPr/>
-          <p:nvPr/>
-        </p:nvSpPr>
-        <p:spPr>
-          <a:xfrm>
-            <a:off x="6933610" y="4634492"/>
-            <a:ext cx="45719" cy="270598"/>
-          </a:xfrm>
-          <a:prstGeom prst="rect">
-            <a:avLst/>
-          </a:prstGeom>
-          <a:solidFill>
-            <a:srgbClr val="492207"/>
-          </a:solidFill>
-          <a:ln>
-            <a:noFill/>
-          </a:ln>
-        </p:spPr>
-        <p:style>
-          <a:lnRef idx="2">
-            <a:schemeClr val="accent1">
-              <a:shade val="50000"/>
-            </a:schemeClr>
-          </a:lnRef>
-          <a:fillRef idx="1">
-            <a:schemeClr val="accent1"/>
-          </a:fillRef>
-          <a:effectRef idx="0">
-            <a:schemeClr val="accent1"/>
-          </a:effectRef>
-          <a:fontRef idx="minor">
-            <a:schemeClr val="lt1"/>
-          </a:fontRef>
-        </p:style>
-        <p:txBody>
-          <a:bodyPr rtlCol="0" anchor="ctr"/>
-          <a:lstStyle/>
-          <a:p>
-            <a:pPr algn="ctr"/>
-            <a:endParaRPr lang="en-US"/>
-          </a:p>
-        </p:txBody>
-      </p:sp>
       <p:grpSp>
         <p:nvGrpSpPr>
           <p:cNvPr id="149" name="Group 148"/>
@@ -8110,7 +5319,7 @@
         </p:nvGrpSpPr>
         <p:grpSpPr>
           <a:xfrm>
-            <a:off x="1244401" y="1442365"/>
+            <a:off x="1160296" y="1457206"/>
             <a:ext cx="281090" cy="281090"/>
             <a:chOff x="2836912" y="3174001"/>
             <a:chExt cx="377756" cy="377756"/>
@@ -8223,7 +5432,7 @@
         </p:nvSpPr>
         <p:spPr>
           <a:xfrm>
-            <a:off x="7508184" y="300590"/>
+            <a:off x="7540308" y="263645"/>
             <a:ext cx="1310397" cy="376299"/>
           </a:xfrm>
           <a:prstGeom prst="rect">
@@ -8283,7 +5492,7 @@
         </p:nvSpPr>
         <p:spPr>
           <a:xfrm>
-            <a:off x="7508184" y="1012459"/>
+            <a:off x="7551608" y="1036028"/>
             <a:ext cx="1310397" cy="376299"/>
           </a:xfrm>
           <a:prstGeom prst="rect">
@@ -8343,7 +5552,7 @@
         </p:nvSpPr>
         <p:spPr>
           <a:xfrm>
-            <a:off x="7508184" y="1727778"/>
+            <a:off x="7540309" y="1804648"/>
             <a:ext cx="1310397" cy="376299"/>
           </a:xfrm>
           <a:prstGeom prst="rect">
@@ -8403,7 +5612,7 @@
         </p:nvSpPr>
         <p:spPr>
           <a:xfrm>
-            <a:off x="7508184" y="2439647"/>
+            <a:off x="7540309" y="2576492"/>
             <a:ext cx="1310397" cy="376299"/>
           </a:xfrm>
           <a:prstGeom prst="rect">
@@ -8463,7 +5672,7 @@
         </p:nvSpPr>
         <p:spPr>
           <a:xfrm>
-            <a:off x="7508184" y="3160807"/>
+            <a:off x="7542734" y="3351755"/>
             <a:ext cx="1310397" cy="376299"/>
           </a:xfrm>
           <a:prstGeom prst="rect">
@@ -8523,7 +5732,7 @@
         </p:nvSpPr>
         <p:spPr>
           <a:xfrm>
-            <a:off x="8401050" y="3881968"/>
+            <a:off x="8433661" y="3920073"/>
             <a:ext cx="404620" cy="959122"/>
           </a:xfrm>
           <a:prstGeom prst="rect">
@@ -9089,7 +6298,7 @@
         </p:nvGrpSpPr>
         <p:grpSpPr>
           <a:xfrm>
-            <a:off x="8446705" y="3928700"/>
+            <a:off x="8478727" y="3979950"/>
             <a:ext cx="285939" cy="199686"/>
             <a:chOff x="3488228" y="2647721"/>
             <a:chExt cx="285939" cy="199686"/>
@@ -9359,8 +6568,8 @@
         </p:nvGrpSpPr>
         <p:grpSpPr>
           <a:xfrm rot="5400000">
-            <a:off x="5743002" y="389378"/>
-            <a:ext cx="1323707" cy="1030308"/>
+            <a:off x="6194824" y="369276"/>
+            <a:ext cx="1051176" cy="818183"/>
             <a:chOff x="206032" y="4254498"/>
             <a:chExt cx="1323707" cy="644242"/>
           </a:xfrm>
@@ -9724,8 +6933,8 @@
           </p:nvSpPr>
           <p:spPr>
             <a:xfrm rot="16200000">
-              <a:off x="286146" y="4305181"/>
-              <a:ext cx="537884" cy="507831"/>
+              <a:off x="293841" y="4297485"/>
+              <a:ext cx="537884" cy="523221"/>
             </a:xfrm>
             <a:prstGeom prst="rect">
               <a:avLst/>
@@ -9739,7 +6948,7 @@
             <a:lstStyle/>
             <a:p>
               <a:r>
-                <a:rPr lang="ro-RO" dirty="0" smtClean="0">
+                <a:rPr lang="ro-RO" sz="1000" dirty="0" smtClean="0">
                   <a:solidFill>
                     <a:srgbClr val="622E0A"/>
                   </a:solidFill>
@@ -9747,7 +6956,7 @@
                 </a:rPr>
                 <a:t>Second Floor</a:t>
               </a:r>
-              <a:endParaRPr lang="en-US" dirty="0">
+              <a:endParaRPr lang="en-US" sz="1000" dirty="0">
                 <a:solidFill>
                   <a:srgbClr val="622E0A"/>
                 </a:solidFill>
@@ -9765,8 +6974,8 @@
         </p:nvSpPr>
         <p:spPr>
           <a:xfrm>
-            <a:off x="234347" y="268747"/>
-            <a:ext cx="1089273" cy="376299"/>
+            <a:off x="234348" y="268748"/>
+            <a:ext cx="836488" cy="369814"/>
           </a:xfrm>
           <a:prstGeom prst="rect">
             <a:avLst/>
@@ -9821,76 +7030,30 @@
           </a:p>
         </p:txBody>
       </p:sp>
-      <p:sp>
-        <p:nvSpPr>
-          <p:cNvPr id="182" name="Rectangle 181"/>
-          <p:cNvSpPr/>
-          <p:nvPr/>
-        </p:nvSpPr>
-        <p:spPr>
-          <a:xfrm flipH="1">
-            <a:off x="2861180" y="344364"/>
-            <a:ext cx="49402" cy="100860"/>
-          </a:xfrm>
-          <a:prstGeom prst="rect">
-            <a:avLst/>
-          </a:prstGeom>
-          <a:solidFill>
-            <a:srgbClr val="492207"/>
-          </a:solidFill>
-          <a:ln>
-            <a:noFill/>
-          </a:ln>
-        </p:spPr>
-        <p:style>
-          <a:lnRef idx="2">
-            <a:schemeClr val="accent1">
-              <a:shade val="50000"/>
-            </a:schemeClr>
-          </a:lnRef>
-          <a:fillRef idx="1">
-            <a:schemeClr val="accent1"/>
-          </a:fillRef>
-          <a:effectRef idx="0">
-            <a:schemeClr val="accent1"/>
-          </a:effectRef>
-          <a:fontRef idx="minor">
-            <a:schemeClr val="lt1"/>
-          </a:fontRef>
-        </p:style>
-        <p:txBody>
-          <a:bodyPr rtlCol="0" anchor="ctr"/>
-          <a:lstStyle/>
-          <a:p>
-            <a:pPr algn="ctr"/>
-            <a:endParaRPr lang="en-US"/>
-          </a:p>
-        </p:txBody>
-      </p:sp>
       <p:grpSp>
         <p:nvGrpSpPr>
-          <p:cNvPr id="2" name="Group 1"/>
+          <p:cNvPr id="391" name="Group 390"/>
           <p:cNvGrpSpPr/>
           <p:nvPr/>
         </p:nvGrpSpPr>
         <p:grpSpPr>
           <a:xfrm>
-            <a:off x="1600288" y="435595"/>
-            <a:ext cx="1310397" cy="231807"/>
-            <a:chOff x="1600288" y="435595"/>
-            <a:chExt cx="1310397" cy="231807"/>
+            <a:off x="1504412" y="327573"/>
+            <a:ext cx="1310540" cy="323038"/>
+            <a:chOff x="1600145" y="344364"/>
+            <a:chExt cx="1310540" cy="323038"/>
           </a:xfrm>
         </p:grpSpPr>
         <p:sp>
           <p:nvSpPr>
-            <p:cNvPr id="181" name="Rectangle 180"/>
+            <p:cNvPr id="182" name="Rectangle 181"/>
             <p:cNvSpPr/>
             <p:nvPr/>
           </p:nvSpPr>
           <p:spPr>
-            <a:xfrm>
-              <a:off x="1600288" y="435595"/>
-              <a:ext cx="1310397" cy="231807"/>
+            <a:xfrm flipH="1">
+              <a:off x="2861180" y="344364"/>
+              <a:ext cx="49402" cy="100860"/>
             </a:xfrm>
             <a:prstGeom prst="rect">
               <a:avLst/>
@@ -9923,45 +7086,421 @@
             <a:lstStyle/>
             <a:p>
               <a:pPr algn="ctr"/>
-              <a:r>
-                <a:rPr lang="ro-RO" dirty="0" smtClean="0">
+              <a:endParaRPr lang="en-US"/>
+            </a:p>
+          </p:txBody>
+        </p:sp>
+        <p:grpSp>
+          <p:nvGrpSpPr>
+            <p:cNvPr id="2" name="Group 1"/>
+            <p:cNvGrpSpPr/>
+            <p:nvPr/>
+          </p:nvGrpSpPr>
+          <p:grpSpPr>
+            <a:xfrm>
+              <a:off x="1600145" y="435595"/>
+              <a:ext cx="1310540" cy="231807"/>
+              <a:chOff x="1600145" y="435595"/>
+              <a:chExt cx="1310540" cy="231807"/>
+            </a:xfrm>
+          </p:grpSpPr>
+          <p:sp>
+            <p:nvSpPr>
+              <p:cNvPr id="181" name="Rectangle 180"/>
+              <p:cNvSpPr/>
+              <p:nvPr/>
+            </p:nvSpPr>
+            <p:spPr>
+              <a:xfrm>
+                <a:off x="1600288" y="435595"/>
+                <a:ext cx="1310397" cy="231807"/>
+              </a:xfrm>
+              <a:prstGeom prst="rect">
+                <a:avLst/>
+              </a:prstGeom>
+              <a:solidFill>
+                <a:srgbClr val="492207"/>
+              </a:solidFill>
+              <a:ln>
+                <a:noFill/>
+              </a:ln>
+            </p:spPr>
+            <p:style>
+              <a:lnRef idx="2">
+                <a:schemeClr val="accent1">
+                  <a:shade val="50000"/>
+                </a:schemeClr>
+              </a:lnRef>
+              <a:fillRef idx="1">
+                <a:schemeClr val="accent1"/>
+              </a:fillRef>
+              <a:effectRef idx="0">
+                <a:schemeClr val="accent1"/>
+              </a:effectRef>
+              <a:fontRef idx="minor">
+                <a:schemeClr val="lt1"/>
+              </a:fontRef>
+            </p:style>
+            <p:txBody>
+              <a:bodyPr rtlCol="0" anchor="ctr"/>
+              <a:lstStyle/>
+              <a:p>
+                <a:pPr algn="ctr"/>
+                <a:r>
+                  <a:rPr lang="ro-RO" dirty="0" smtClean="0">
+                    <a:solidFill>
+                      <a:srgbClr val="622E0A"/>
+                    </a:solidFill>
+                    <a:latin typeface="Libre Baskerville" panose="02000000000000000000" pitchFamily="2" charset="0"/>
+                  </a:rPr>
+                  <a:t>Bar</a:t>
+                </a:r>
+                <a:endParaRPr lang="en-US" dirty="0">
                   <a:solidFill>
                     <a:srgbClr val="622E0A"/>
                   </a:solidFill>
                   <a:latin typeface="Libre Baskerville" panose="02000000000000000000" pitchFamily="2" charset="0"/>
-                </a:rPr>
-                <a:t>Bar</a:t>
-              </a:r>
-              <a:endParaRPr lang="en-US" dirty="0">
-                <a:solidFill>
-                  <a:srgbClr val="622E0A"/>
-                </a:solidFill>
-                <a:latin typeface="Libre Baskerville" panose="02000000000000000000" pitchFamily="2" charset="0"/>
-              </a:endParaRPr>
+                </a:endParaRPr>
+              </a:p>
+            </p:txBody>
+          </p:sp>
+          <p:sp>
+            <p:nvSpPr>
+              <p:cNvPr id="183" name="Rectangle 182"/>
+              <p:cNvSpPr/>
+              <p:nvPr/>
+            </p:nvSpPr>
+            <p:spPr>
+              <a:xfrm>
+                <a:off x="1600145" y="581981"/>
+                <a:ext cx="1304717" cy="85421"/>
+              </a:xfrm>
+              <a:prstGeom prst="rect">
+                <a:avLst/>
+              </a:prstGeom>
+              <a:solidFill>
+                <a:srgbClr val="000000">
+                  <a:alpha val="20000"/>
+                </a:srgbClr>
+              </a:solidFill>
+              <a:ln>
+                <a:noFill/>
+              </a:ln>
+            </p:spPr>
+            <p:style>
+              <a:lnRef idx="2">
+                <a:schemeClr val="accent1">
+                  <a:shade val="50000"/>
+                </a:schemeClr>
+              </a:lnRef>
+              <a:fillRef idx="1">
+                <a:schemeClr val="accent1"/>
+              </a:fillRef>
+              <a:effectRef idx="0">
+                <a:schemeClr val="accent1"/>
+              </a:effectRef>
+              <a:fontRef idx="minor">
+                <a:schemeClr val="lt1"/>
+              </a:fontRef>
+            </p:style>
+            <p:txBody>
+              <a:bodyPr rtlCol="0" anchor="ctr"/>
+              <a:lstStyle/>
+              <a:p>
+                <a:pPr algn="ctr"/>
+                <a:endParaRPr lang="en-US" dirty="0"/>
+              </a:p>
+            </p:txBody>
+          </p:sp>
+        </p:grpSp>
+      </p:grpSp>
+      <p:grpSp>
+        <p:nvGrpSpPr>
+          <p:cNvPr id="392" name="Group 391"/>
+          <p:cNvGrpSpPr/>
+          <p:nvPr/>
+        </p:nvGrpSpPr>
+        <p:grpSpPr>
+          <a:xfrm>
+            <a:off x="1620273" y="695295"/>
+            <a:ext cx="1117712" cy="166866"/>
+            <a:chOff x="1620273" y="695295"/>
+            <a:chExt cx="1117712" cy="166866"/>
+          </a:xfrm>
+        </p:grpSpPr>
+        <p:sp>
+          <p:nvSpPr>
+            <p:cNvPr id="196" name="Oval 195"/>
+            <p:cNvSpPr/>
+            <p:nvPr/>
+          </p:nvSpPr>
+          <p:spPr>
+            <a:xfrm>
+              <a:off x="1620273" y="698651"/>
+              <a:ext cx="109410" cy="109410"/>
+            </a:xfrm>
+            <a:prstGeom prst="ellipse">
+              <a:avLst/>
+            </a:prstGeom>
+            <a:solidFill>
+              <a:srgbClr val="492207"/>
+            </a:solidFill>
+            <a:ln w="57150">
+              <a:solidFill>
+                <a:srgbClr val="000000">
+                  <a:alpha val="30196"/>
+                </a:srgbClr>
+              </a:solidFill>
+            </a:ln>
+          </p:spPr>
+          <p:style>
+            <a:lnRef idx="2">
+              <a:schemeClr val="accent1">
+                <a:shade val="50000"/>
+              </a:schemeClr>
+            </a:lnRef>
+            <a:fillRef idx="1">
+              <a:schemeClr val="accent1"/>
+            </a:fillRef>
+            <a:effectRef idx="0">
+              <a:schemeClr val="accent1"/>
+            </a:effectRef>
+            <a:fontRef idx="minor">
+              <a:schemeClr val="lt1"/>
+            </a:fontRef>
+          </p:style>
+          <p:txBody>
+            <a:bodyPr rtlCol="0" anchor="ctr"/>
+            <a:lstStyle/>
+            <a:p>
+              <a:pPr algn="ctr"/>
+              <a:endParaRPr lang="en-US" dirty="0"/>
             </a:p>
           </p:txBody>
         </p:sp>
         <p:sp>
           <p:nvSpPr>
-            <p:cNvPr id="183" name="Rectangle 182"/>
+            <p:cNvPr id="198" name="Oval 197"/>
             <p:cNvSpPr/>
             <p:nvPr/>
           </p:nvSpPr>
           <p:spPr>
             <a:xfrm>
-              <a:off x="1630117" y="581981"/>
-              <a:ext cx="1274745" cy="85421"/>
+              <a:off x="1798819" y="707371"/>
+              <a:ext cx="109410" cy="109410"/>
             </a:xfrm>
-            <a:prstGeom prst="rect">
+            <a:prstGeom prst="ellipse">
               <a:avLst/>
             </a:prstGeom>
             <a:solidFill>
-              <a:srgbClr val="000000">
-                <a:alpha val="20000"/>
-              </a:srgbClr>
+              <a:srgbClr val="492207"/>
             </a:solidFill>
-            <a:ln>
-              <a:noFill/>
+            <a:ln w="57150">
+              <a:solidFill>
+                <a:srgbClr val="000000">
+                  <a:alpha val="30196"/>
+                </a:srgbClr>
+              </a:solidFill>
+            </a:ln>
+          </p:spPr>
+          <p:style>
+            <a:lnRef idx="2">
+              <a:schemeClr val="accent1">
+                <a:shade val="50000"/>
+              </a:schemeClr>
+            </a:lnRef>
+            <a:fillRef idx="1">
+              <a:schemeClr val="accent1"/>
+            </a:fillRef>
+            <a:effectRef idx="0">
+              <a:schemeClr val="accent1"/>
+            </a:effectRef>
+            <a:fontRef idx="minor">
+              <a:schemeClr val="lt1"/>
+            </a:fontRef>
+          </p:style>
+          <p:txBody>
+            <a:bodyPr rtlCol="0" anchor="ctr"/>
+            <a:lstStyle/>
+            <a:p>
+              <a:pPr algn="ctr"/>
+              <a:endParaRPr lang="en-US" dirty="0"/>
+            </a:p>
+          </p:txBody>
+        </p:sp>
+        <p:sp>
+          <p:nvSpPr>
+            <p:cNvPr id="199" name="Oval 198"/>
+            <p:cNvSpPr/>
+            <p:nvPr/>
+          </p:nvSpPr>
+          <p:spPr>
+            <a:xfrm>
+              <a:off x="2011903" y="752751"/>
+              <a:ext cx="109410" cy="109410"/>
+            </a:xfrm>
+            <a:prstGeom prst="ellipse">
+              <a:avLst/>
+            </a:prstGeom>
+            <a:solidFill>
+              <a:srgbClr val="492207"/>
+            </a:solidFill>
+            <a:ln w="57150">
+              <a:solidFill>
+                <a:srgbClr val="000000">
+                  <a:alpha val="30196"/>
+                </a:srgbClr>
+              </a:solidFill>
+            </a:ln>
+          </p:spPr>
+          <p:style>
+            <a:lnRef idx="2">
+              <a:schemeClr val="accent1">
+                <a:shade val="50000"/>
+              </a:schemeClr>
+            </a:lnRef>
+            <a:fillRef idx="1">
+              <a:schemeClr val="accent1"/>
+            </a:fillRef>
+            <a:effectRef idx="0">
+              <a:schemeClr val="accent1"/>
+            </a:effectRef>
+            <a:fontRef idx="minor">
+              <a:schemeClr val="lt1"/>
+            </a:fontRef>
+          </p:style>
+          <p:txBody>
+            <a:bodyPr rtlCol="0" anchor="ctr"/>
+            <a:lstStyle/>
+            <a:p>
+              <a:pPr algn="ctr"/>
+              <a:endParaRPr lang="en-US" dirty="0"/>
+            </a:p>
+          </p:txBody>
+        </p:sp>
+        <p:sp>
+          <p:nvSpPr>
+            <p:cNvPr id="200" name="Oval 199"/>
+            <p:cNvSpPr/>
+            <p:nvPr/>
+          </p:nvSpPr>
+          <p:spPr>
+            <a:xfrm>
+              <a:off x="2220568" y="695295"/>
+              <a:ext cx="109410" cy="109410"/>
+            </a:xfrm>
+            <a:prstGeom prst="ellipse">
+              <a:avLst/>
+            </a:prstGeom>
+            <a:solidFill>
+              <a:srgbClr val="492207"/>
+            </a:solidFill>
+            <a:ln w="57150">
+              <a:solidFill>
+                <a:srgbClr val="000000">
+                  <a:alpha val="30196"/>
+                </a:srgbClr>
+              </a:solidFill>
+            </a:ln>
+          </p:spPr>
+          <p:style>
+            <a:lnRef idx="2">
+              <a:schemeClr val="accent1">
+                <a:shade val="50000"/>
+              </a:schemeClr>
+            </a:lnRef>
+            <a:fillRef idx="1">
+              <a:schemeClr val="accent1"/>
+            </a:fillRef>
+            <a:effectRef idx="0">
+              <a:schemeClr val="accent1"/>
+            </a:effectRef>
+            <a:fontRef idx="minor">
+              <a:schemeClr val="lt1"/>
+            </a:fontRef>
+          </p:style>
+          <p:txBody>
+            <a:bodyPr rtlCol="0" anchor="ctr"/>
+            <a:lstStyle/>
+            <a:p>
+              <a:pPr algn="ctr"/>
+              <a:endParaRPr lang="en-US" dirty="0"/>
+            </a:p>
+          </p:txBody>
+        </p:sp>
+        <p:sp>
+          <p:nvSpPr>
+            <p:cNvPr id="201" name="Oval 200"/>
+            <p:cNvSpPr/>
+            <p:nvPr/>
+          </p:nvSpPr>
+          <p:spPr>
+            <a:xfrm>
+              <a:off x="2419910" y="710441"/>
+              <a:ext cx="109410" cy="109410"/>
+            </a:xfrm>
+            <a:prstGeom prst="ellipse">
+              <a:avLst/>
+            </a:prstGeom>
+            <a:solidFill>
+              <a:srgbClr val="492207"/>
+            </a:solidFill>
+            <a:ln w="57150">
+              <a:solidFill>
+                <a:srgbClr val="000000">
+                  <a:alpha val="30196"/>
+                </a:srgbClr>
+              </a:solidFill>
+            </a:ln>
+          </p:spPr>
+          <p:style>
+            <a:lnRef idx="2">
+              <a:schemeClr val="accent1">
+                <a:shade val="50000"/>
+              </a:schemeClr>
+            </a:lnRef>
+            <a:fillRef idx="1">
+              <a:schemeClr val="accent1"/>
+            </a:fillRef>
+            <a:effectRef idx="0">
+              <a:schemeClr val="accent1"/>
+            </a:effectRef>
+            <a:fontRef idx="minor">
+              <a:schemeClr val="lt1"/>
+            </a:fontRef>
+          </p:style>
+          <p:txBody>
+            <a:bodyPr rtlCol="0" anchor="ctr"/>
+            <a:lstStyle/>
+            <a:p>
+              <a:pPr algn="ctr"/>
+              <a:endParaRPr lang="en-US" dirty="0"/>
+            </a:p>
+          </p:txBody>
+        </p:sp>
+        <p:sp>
+          <p:nvSpPr>
+            <p:cNvPr id="202" name="Oval 201"/>
+            <p:cNvSpPr/>
+            <p:nvPr/>
+          </p:nvSpPr>
+          <p:spPr>
+            <a:xfrm>
+              <a:off x="2628575" y="710441"/>
+              <a:ext cx="109410" cy="109410"/>
+            </a:xfrm>
+            <a:prstGeom prst="ellipse">
+              <a:avLst/>
+            </a:prstGeom>
+            <a:solidFill>
+              <a:srgbClr val="492207"/>
+            </a:solidFill>
+            <a:ln w="57150">
+              <a:solidFill>
+                <a:srgbClr val="000000">
+                  <a:alpha val="30196"/>
+                </a:srgbClr>
+              </a:solidFill>
             </a:ln>
           </p:spPr>
           <p:style>
@@ -9990,559 +7529,6 @@
           </p:txBody>
         </p:sp>
       </p:grpSp>
-      <p:sp>
-        <p:nvSpPr>
-          <p:cNvPr id="196" name="Oval 195"/>
-          <p:cNvSpPr/>
-          <p:nvPr/>
-        </p:nvSpPr>
-        <p:spPr>
-          <a:xfrm>
-            <a:off x="1714817" y="710441"/>
-            <a:ext cx="109410" cy="109410"/>
-          </a:xfrm>
-          <a:prstGeom prst="ellipse">
-            <a:avLst/>
-          </a:prstGeom>
-          <a:solidFill>
-            <a:srgbClr val="492207"/>
-          </a:solidFill>
-          <a:ln w="57150">
-            <a:solidFill>
-              <a:srgbClr val="000000">
-                <a:alpha val="30196"/>
-              </a:srgbClr>
-            </a:solidFill>
-          </a:ln>
-        </p:spPr>
-        <p:style>
-          <a:lnRef idx="2">
-            <a:schemeClr val="accent1">
-              <a:shade val="50000"/>
-            </a:schemeClr>
-          </a:lnRef>
-          <a:fillRef idx="1">
-            <a:schemeClr val="accent1"/>
-          </a:fillRef>
-          <a:effectRef idx="0">
-            <a:schemeClr val="accent1"/>
-          </a:effectRef>
-          <a:fontRef idx="minor">
-            <a:schemeClr val="lt1"/>
-          </a:fontRef>
-        </p:style>
-        <p:txBody>
-          <a:bodyPr rtlCol="0" anchor="ctr"/>
-          <a:lstStyle/>
-          <a:p>
-            <a:pPr algn="ctr"/>
-            <a:endParaRPr lang="en-US" dirty="0"/>
-          </a:p>
-        </p:txBody>
-      </p:sp>
-      <p:sp>
-        <p:nvSpPr>
-          <p:cNvPr id="198" name="Oval 197"/>
-          <p:cNvSpPr/>
-          <p:nvPr/>
-        </p:nvSpPr>
-        <p:spPr>
-          <a:xfrm>
-            <a:off x="1910019" y="694876"/>
-            <a:ext cx="109410" cy="109410"/>
-          </a:xfrm>
-          <a:prstGeom prst="ellipse">
-            <a:avLst/>
-          </a:prstGeom>
-          <a:solidFill>
-            <a:srgbClr val="492207"/>
-          </a:solidFill>
-          <a:ln w="57150">
-            <a:solidFill>
-              <a:srgbClr val="000000">
-                <a:alpha val="30196"/>
-              </a:srgbClr>
-            </a:solidFill>
-          </a:ln>
-        </p:spPr>
-        <p:style>
-          <a:lnRef idx="2">
-            <a:schemeClr val="accent1">
-              <a:shade val="50000"/>
-            </a:schemeClr>
-          </a:lnRef>
-          <a:fillRef idx="1">
-            <a:schemeClr val="accent1"/>
-          </a:fillRef>
-          <a:effectRef idx="0">
-            <a:schemeClr val="accent1"/>
-          </a:effectRef>
-          <a:fontRef idx="minor">
-            <a:schemeClr val="lt1"/>
-          </a:fontRef>
-        </p:style>
-        <p:txBody>
-          <a:bodyPr rtlCol="0" anchor="ctr"/>
-          <a:lstStyle/>
-          <a:p>
-            <a:pPr algn="ctr"/>
-            <a:endParaRPr lang="en-US" dirty="0"/>
-          </a:p>
-        </p:txBody>
-      </p:sp>
-      <p:sp>
-        <p:nvSpPr>
-          <p:cNvPr id="199" name="Oval 198"/>
-          <p:cNvSpPr/>
-          <p:nvPr/>
-        </p:nvSpPr>
-        <p:spPr>
-          <a:xfrm>
-            <a:off x="2086776" y="741415"/>
-            <a:ext cx="109410" cy="109410"/>
-          </a:xfrm>
-          <a:prstGeom prst="ellipse">
-            <a:avLst/>
-          </a:prstGeom>
-          <a:solidFill>
-            <a:srgbClr val="492207"/>
-          </a:solidFill>
-          <a:ln w="57150">
-            <a:solidFill>
-              <a:srgbClr val="000000">
-                <a:alpha val="30196"/>
-              </a:srgbClr>
-            </a:solidFill>
-          </a:ln>
-        </p:spPr>
-        <p:style>
-          <a:lnRef idx="2">
-            <a:schemeClr val="accent1">
-              <a:shade val="50000"/>
-            </a:schemeClr>
-          </a:lnRef>
-          <a:fillRef idx="1">
-            <a:schemeClr val="accent1"/>
-          </a:fillRef>
-          <a:effectRef idx="0">
-            <a:schemeClr val="accent1"/>
-          </a:effectRef>
-          <a:fontRef idx="minor">
-            <a:schemeClr val="lt1"/>
-          </a:fontRef>
-        </p:style>
-        <p:txBody>
-          <a:bodyPr rtlCol="0" anchor="ctr"/>
-          <a:lstStyle/>
-          <a:p>
-            <a:pPr algn="ctr"/>
-            <a:endParaRPr lang="en-US" dirty="0"/>
-          </a:p>
-        </p:txBody>
-      </p:sp>
-      <p:sp>
-        <p:nvSpPr>
-          <p:cNvPr id="200" name="Oval 199"/>
-          <p:cNvSpPr/>
-          <p:nvPr/>
-        </p:nvSpPr>
-        <p:spPr>
-          <a:xfrm>
-            <a:off x="2262193" y="710441"/>
-            <a:ext cx="109410" cy="109410"/>
-          </a:xfrm>
-          <a:prstGeom prst="ellipse">
-            <a:avLst/>
-          </a:prstGeom>
-          <a:solidFill>
-            <a:srgbClr val="492207"/>
-          </a:solidFill>
-          <a:ln w="57150">
-            <a:solidFill>
-              <a:srgbClr val="000000">
-                <a:alpha val="30196"/>
-              </a:srgbClr>
-            </a:solidFill>
-          </a:ln>
-        </p:spPr>
-        <p:style>
-          <a:lnRef idx="2">
-            <a:schemeClr val="accent1">
-              <a:shade val="50000"/>
-            </a:schemeClr>
-          </a:lnRef>
-          <a:fillRef idx="1">
-            <a:schemeClr val="accent1"/>
-          </a:fillRef>
-          <a:effectRef idx="0">
-            <a:schemeClr val="accent1"/>
-          </a:effectRef>
-          <a:fontRef idx="minor">
-            <a:schemeClr val="lt1"/>
-          </a:fontRef>
-        </p:style>
-        <p:txBody>
-          <a:bodyPr rtlCol="0" anchor="ctr"/>
-          <a:lstStyle/>
-          <a:p>
-            <a:pPr algn="ctr"/>
-            <a:endParaRPr lang="en-US" dirty="0"/>
-          </a:p>
-        </p:txBody>
-      </p:sp>
-      <p:sp>
-        <p:nvSpPr>
-          <p:cNvPr id="201" name="Oval 200"/>
-          <p:cNvSpPr/>
-          <p:nvPr/>
-        </p:nvSpPr>
-        <p:spPr>
-          <a:xfrm>
-            <a:off x="2455026" y="710441"/>
-            <a:ext cx="109410" cy="109410"/>
-          </a:xfrm>
-          <a:prstGeom prst="ellipse">
-            <a:avLst/>
-          </a:prstGeom>
-          <a:solidFill>
-            <a:srgbClr val="492207"/>
-          </a:solidFill>
-          <a:ln w="57150">
-            <a:solidFill>
-              <a:srgbClr val="000000">
-                <a:alpha val="30196"/>
-              </a:srgbClr>
-            </a:solidFill>
-          </a:ln>
-        </p:spPr>
-        <p:style>
-          <a:lnRef idx="2">
-            <a:schemeClr val="accent1">
-              <a:shade val="50000"/>
-            </a:schemeClr>
-          </a:lnRef>
-          <a:fillRef idx="1">
-            <a:schemeClr val="accent1"/>
-          </a:fillRef>
-          <a:effectRef idx="0">
-            <a:schemeClr val="accent1"/>
-          </a:effectRef>
-          <a:fontRef idx="minor">
-            <a:schemeClr val="lt1"/>
-          </a:fontRef>
-        </p:style>
-        <p:txBody>
-          <a:bodyPr rtlCol="0" anchor="ctr"/>
-          <a:lstStyle/>
-          <a:p>
-            <a:pPr algn="ctr"/>
-            <a:endParaRPr lang="en-US" dirty="0"/>
-          </a:p>
-        </p:txBody>
-      </p:sp>
-      <p:sp>
-        <p:nvSpPr>
-          <p:cNvPr id="202" name="Oval 201"/>
-          <p:cNvSpPr/>
-          <p:nvPr/>
-        </p:nvSpPr>
-        <p:spPr>
-          <a:xfrm>
-            <a:off x="2654606" y="710441"/>
-            <a:ext cx="109410" cy="109410"/>
-          </a:xfrm>
-          <a:prstGeom prst="ellipse">
-            <a:avLst/>
-          </a:prstGeom>
-          <a:solidFill>
-            <a:srgbClr val="492207"/>
-          </a:solidFill>
-          <a:ln w="57150">
-            <a:solidFill>
-              <a:srgbClr val="000000">
-                <a:alpha val="30196"/>
-              </a:srgbClr>
-            </a:solidFill>
-          </a:ln>
-        </p:spPr>
-        <p:style>
-          <a:lnRef idx="2">
-            <a:schemeClr val="accent1">
-              <a:shade val="50000"/>
-            </a:schemeClr>
-          </a:lnRef>
-          <a:fillRef idx="1">
-            <a:schemeClr val="accent1"/>
-          </a:fillRef>
-          <a:effectRef idx="0">
-            <a:schemeClr val="accent1"/>
-          </a:effectRef>
-          <a:fontRef idx="minor">
-            <a:schemeClr val="lt1"/>
-          </a:fontRef>
-        </p:style>
-        <p:txBody>
-          <a:bodyPr rtlCol="0" anchor="ctr"/>
-          <a:lstStyle/>
-          <a:p>
-            <a:pPr algn="ctr"/>
-            <a:endParaRPr lang="en-US" dirty="0"/>
-          </a:p>
-        </p:txBody>
-      </p:sp>
-      <p:grpSp>
-        <p:nvGrpSpPr>
-          <p:cNvPr id="12" name="Group 11"/>
-          <p:cNvGrpSpPr/>
-          <p:nvPr/>
-        </p:nvGrpSpPr>
-        <p:grpSpPr>
-          <a:xfrm>
-            <a:off x="2853072" y="1420610"/>
-            <a:ext cx="375115" cy="784067"/>
-            <a:chOff x="2840255" y="1727778"/>
-            <a:chExt cx="375115" cy="784067"/>
-          </a:xfrm>
-        </p:grpSpPr>
-        <p:sp>
-          <p:nvSpPr>
-            <p:cNvPr id="3" name="Rounded Rectangle 2"/>
-            <p:cNvSpPr/>
-            <p:nvPr/>
-          </p:nvSpPr>
-          <p:spPr>
-            <a:xfrm>
-              <a:off x="2840255" y="1727778"/>
-              <a:ext cx="375115" cy="784067"/>
-            </a:xfrm>
-            <a:prstGeom prst="roundRect">
-              <a:avLst/>
-            </a:prstGeom>
-            <a:solidFill>
-              <a:srgbClr val="7E0000"/>
-            </a:solidFill>
-            <a:ln>
-              <a:noFill/>
-            </a:ln>
-          </p:spPr>
-          <p:style>
-            <a:lnRef idx="2">
-              <a:schemeClr val="accent1">
-                <a:shade val="50000"/>
-              </a:schemeClr>
-            </a:lnRef>
-            <a:fillRef idx="1">
-              <a:schemeClr val="accent1"/>
-            </a:fillRef>
-            <a:effectRef idx="0">
-              <a:schemeClr val="accent1"/>
-            </a:effectRef>
-            <a:fontRef idx="minor">
-              <a:schemeClr val="lt1"/>
-            </a:fontRef>
-          </p:style>
-          <p:txBody>
-            <a:bodyPr rtlCol="0" anchor="ctr"/>
-            <a:lstStyle/>
-            <a:p>
-              <a:pPr algn="ctr"/>
-              <a:endParaRPr lang="en-US"/>
-            </a:p>
-          </p:txBody>
-        </p:sp>
-        <p:sp>
-          <p:nvSpPr>
-            <p:cNvPr id="203" name="Rounded Rectangle 202"/>
-            <p:cNvSpPr/>
-            <p:nvPr/>
-          </p:nvSpPr>
-          <p:spPr>
-            <a:xfrm>
-              <a:off x="3005234" y="1790663"/>
-              <a:ext cx="169472" cy="317138"/>
-            </a:xfrm>
-            <a:prstGeom prst="roundRect">
-              <a:avLst/>
-            </a:prstGeom>
-            <a:solidFill>
-              <a:srgbClr val="000000">
-                <a:alpha val="30196"/>
-              </a:srgbClr>
-            </a:solidFill>
-            <a:ln>
-              <a:noFill/>
-            </a:ln>
-          </p:spPr>
-          <p:style>
-            <a:lnRef idx="2">
-              <a:schemeClr val="accent1">
-                <a:shade val="50000"/>
-              </a:schemeClr>
-            </a:lnRef>
-            <a:fillRef idx="1">
-              <a:schemeClr val="accent1"/>
-            </a:fillRef>
-            <a:effectRef idx="0">
-              <a:schemeClr val="accent1"/>
-            </a:effectRef>
-            <a:fontRef idx="minor">
-              <a:schemeClr val="lt1"/>
-            </a:fontRef>
-          </p:style>
-          <p:txBody>
-            <a:bodyPr rtlCol="0" anchor="ctr"/>
-            <a:lstStyle/>
-            <a:p>
-              <a:pPr algn="ctr"/>
-              <a:endParaRPr lang="en-US"/>
-            </a:p>
-          </p:txBody>
-        </p:sp>
-        <p:sp>
-          <p:nvSpPr>
-            <p:cNvPr id="205" name="Rounded Rectangle 204"/>
-            <p:cNvSpPr/>
-            <p:nvPr/>
-          </p:nvSpPr>
-          <p:spPr>
-            <a:xfrm>
-              <a:off x="3005234" y="2126935"/>
-              <a:ext cx="169472" cy="317138"/>
-            </a:xfrm>
-            <a:prstGeom prst="roundRect">
-              <a:avLst/>
-            </a:prstGeom>
-            <a:solidFill>
-              <a:srgbClr val="000000">
-                <a:alpha val="30196"/>
-              </a:srgbClr>
-            </a:solidFill>
-            <a:ln>
-              <a:noFill/>
-            </a:ln>
-          </p:spPr>
-          <p:style>
-            <a:lnRef idx="2">
-              <a:schemeClr val="accent1">
-                <a:shade val="50000"/>
-              </a:schemeClr>
-            </a:lnRef>
-            <a:fillRef idx="1">
-              <a:schemeClr val="accent1"/>
-            </a:fillRef>
-            <a:effectRef idx="0">
-              <a:schemeClr val="accent1"/>
-            </a:effectRef>
-            <a:fontRef idx="minor">
-              <a:schemeClr val="lt1"/>
-            </a:fontRef>
-          </p:style>
-          <p:txBody>
-            <a:bodyPr rtlCol="0" anchor="ctr"/>
-            <a:lstStyle/>
-            <a:p>
-              <a:pPr algn="ctr"/>
-              <a:endParaRPr lang="en-US"/>
-            </a:p>
-          </p:txBody>
-        </p:sp>
-        <p:sp>
-          <p:nvSpPr>
-            <p:cNvPr id="206" name="Rounded Rectangle 205"/>
-            <p:cNvSpPr/>
-            <p:nvPr/>
-          </p:nvSpPr>
-          <p:spPr>
-            <a:xfrm>
-              <a:off x="2876197" y="2455912"/>
-              <a:ext cx="311241" cy="45719"/>
-            </a:xfrm>
-            <a:prstGeom prst="roundRect">
-              <a:avLst/>
-            </a:prstGeom>
-            <a:solidFill>
-              <a:srgbClr val="000000">
-                <a:alpha val="30196"/>
-              </a:srgbClr>
-            </a:solidFill>
-            <a:ln>
-              <a:noFill/>
-            </a:ln>
-          </p:spPr>
-          <p:style>
-            <a:lnRef idx="2">
-              <a:schemeClr val="accent1">
-                <a:shade val="50000"/>
-              </a:schemeClr>
-            </a:lnRef>
-            <a:fillRef idx="1">
-              <a:schemeClr val="accent1"/>
-            </a:fillRef>
-            <a:effectRef idx="0">
-              <a:schemeClr val="accent1"/>
-            </a:effectRef>
-            <a:fontRef idx="minor">
-              <a:schemeClr val="lt1"/>
-            </a:fontRef>
-          </p:style>
-          <p:txBody>
-            <a:bodyPr rtlCol="0" anchor="ctr"/>
-            <a:lstStyle/>
-            <a:p>
-              <a:pPr algn="ctr"/>
-              <a:endParaRPr lang="en-US"/>
-            </a:p>
-          </p:txBody>
-        </p:sp>
-        <p:sp>
-          <p:nvSpPr>
-            <p:cNvPr id="207" name="Rounded Rectangle 206"/>
-            <p:cNvSpPr/>
-            <p:nvPr/>
-          </p:nvSpPr>
-          <p:spPr>
-            <a:xfrm>
-              <a:off x="2869623" y="1736815"/>
-              <a:ext cx="311241" cy="45719"/>
-            </a:xfrm>
-            <a:prstGeom prst="roundRect">
-              <a:avLst/>
-            </a:prstGeom>
-            <a:solidFill>
-              <a:srgbClr val="000000">
-                <a:alpha val="30196"/>
-              </a:srgbClr>
-            </a:solidFill>
-            <a:ln>
-              <a:noFill/>
-            </a:ln>
-          </p:spPr>
-          <p:style>
-            <a:lnRef idx="2">
-              <a:schemeClr val="accent1">
-                <a:shade val="50000"/>
-              </a:schemeClr>
-            </a:lnRef>
-            <a:fillRef idx="1">
-              <a:schemeClr val="accent1"/>
-            </a:fillRef>
-            <a:effectRef idx="0">
-              <a:schemeClr val="accent1"/>
-            </a:effectRef>
-            <a:fontRef idx="minor">
-              <a:schemeClr val="lt1"/>
-            </a:fontRef>
-          </p:style>
-          <p:txBody>
-            <a:bodyPr rtlCol="0" anchor="ctr"/>
-            <a:lstStyle/>
-            <a:p>
-              <a:pPr algn="ctr"/>
-              <a:endParaRPr lang="en-US"/>
-            </a:p>
-          </p:txBody>
-        </p:sp>
-      </p:grpSp>
       <p:grpSp>
         <p:nvGrpSpPr>
           <p:cNvPr id="208" name="Group 207"/>
@@ -10551,8 +7537,8 @@
         </p:nvGrpSpPr>
         <p:grpSpPr>
           <a:xfrm>
-            <a:off x="2840770" y="2252136"/>
-            <a:ext cx="375115" cy="784067"/>
+            <a:off x="2863680" y="2215757"/>
+            <a:ext cx="345447" cy="722055"/>
             <a:chOff x="2840255" y="1727778"/>
             <a:chExt cx="375115" cy="784067"/>
           </a:xfrm>
@@ -10804,8 +7790,8 @@
         </p:nvSpPr>
         <p:spPr>
           <a:xfrm>
-            <a:off x="2889014" y="1019237"/>
-            <a:ext cx="314907" cy="376299"/>
+            <a:off x="2848243" y="1055103"/>
+            <a:ext cx="359731" cy="326532"/>
           </a:xfrm>
           <a:prstGeom prst="rect">
             <a:avLst/>
@@ -10850,7 +7836,7 @@
         </p:nvGrpSpPr>
         <p:grpSpPr>
           <a:xfrm rot="9900000">
-            <a:off x="2885213" y="3207137"/>
+            <a:off x="2876233" y="3388887"/>
             <a:ext cx="281090" cy="281090"/>
             <a:chOff x="2836912" y="3174001"/>
             <a:chExt cx="377756" cy="377756"/>
@@ -10963,7 +7949,7 @@
         </p:nvGrpSpPr>
         <p:grpSpPr>
           <a:xfrm rot="5400000">
-            <a:off x="2953336" y="1084844"/>
+            <a:off x="3012914" y="1108447"/>
             <a:ext cx="180369" cy="137161"/>
             <a:chOff x="3490632" y="2669890"/>
             <a:chExt cx="180369" cy="137161"/>
@@ -11131,7 +8117,7 @@
         </p:nvSpPr>
         <p:spPr>
           <a:xfrm>
-            <a:off x="1613890" y="247472"/>
+            <a:off x="1503994" y="247472"/>
             <a:ext cx="1249671" cy="68429"/>
           </a:xfrm>
           <a:prstGeom prst="rect">
@@ -11179,10 +8165,10 @@
         </p:nvGrpSpPr>
         <p:grpSpPr>
           <a:xfrm rot="16200000">
-            <a:off x="1845781" y="889468"/>
-            <a:ext cx="721628" cy="949770"/>
+            <a:off x="1808591" y="851347"/>
+            <a:ext cx="721628" cy="1138520"/>
             <a:chOff x="4045394" y="3424269"/>
-            <a:chExt cx="1053212" cy="1386183"/>
+            <a:chExt cx="1053212" cy="1661662"/>
           </a:xfrm>
         </p:grpSpPr>
         <p:grpSp>
@@ -11194,9 +8180,9 @@
           <p:grpSpPr>
             <a:xfrm>
               <a:off x="4045394" y="3424269"/>
-              <a:ext cx="1053212" cy="1386183"/>
+              <a:ext cx="1053212" cy="1661662"/>
               <a:chOff x="4045394" y="3424269"/>
-              <a:chExt cx="1053212" cy="1386183"/>
+              <a:chExt cx="1053212" cy="1661662"/>
             </a:xfrm>
           </p:grpSpPr>
           <p:grpSp>
@@ -11208,9 +8194,9 @@
             <p:grpSpPr>
               <a:xfrm>
                 <a:off x="4045394" y="3424269"/>
-                <a:ext cx="1053212" cy="1386183"/>
+                <a:ext cx="1053212" cy="1661662"/>
                 <a:chOff x="4045394" y="3424269"/>
-                <a:chExt cx="1053212" cy="1386183"/>
+                <a:chExt cx="1053212" cy="1661662"/>
               </a:xfrm>
             </p:grpSpPr>
             <p:grpSp>
@@ -11222,9 +8208,9 @@
               <p:grpSpPr>
                 <a:xfrm>
                   <a:off x="4045394" y="3424269"/>
-                  <a:ext cx="1053212" cy="1386183"/>
+                  <a:ext cx="1053212" cy="1661662"/>
                   <a:chOff x="4045394" y="3424269"/>
-                  <a:chExt cx="1053212" cy="1386183"/>
+                  <a:chExt cx="1053212" cy="1661662"/>
                 </a:xfrm>
               </p:grpSpPr>
               <p:grpSp>
@@ -11236,9 +8222,9 @@
                 <p:grpSpPr>
                   <a:xfrm>
                     <a:off x="4045394" y="3424269"/>
-                    <a:ext cx="1053212" cy="1386183"/>
+                    <a:ext cx="1053212" cy="1661662"/>
                     <a:chOff x="4045394" y="3424269"/>
-                    <a:chExt cx="1053212" cy="1386183"/>
+                    <a:chExt cx="1053212" cy="1661662"/>
                   </a:xfrm>
                 </p:grpSpPr>
                 <p:grpSp>
@@ -11250,9 +8236,9 @@
                   <p:grpSpPr>
                     <a:xfrm>
                       <a:off x="4045394" y="3424269"/>
-                      <a:ext cx="1053212" cy="1386183"/>
+                      <a:ext cx="1053212" cy="1661662"/>
                       <a:chOff x="4045394" y="3424269"/>
-                      <a:chExt cx="1053212" cy="1386183"/>
+                      <a:chExt cx="1053212" cy="1661662"/>
                     </a:xfrm>
                   </p:grpSpPr>
                   <p:sp>
@@ -11264,7 +8250,7 @@
                     <p:spPr>
                       <a:xfrm>
                         <a:off x="4045394" y="3424269"/>
-                        <a:ext cx="1053212" cy="1386183"/>
+                        <a:ext cx="1053212" cy="1661662"/>
                       </a:xfrm>
                       <a:prstGeom prst="rect">
                         <a:avLst/>
@@ -11310,7 +8296,7 @@
                     <p:spPr>
                       <a:xfrm>
                         <a:off x="4095844" y="3479800"/>
-                        <a:ext cx="941858" cy="1260988"/>
+                        <a:ext cx="941858" cy="1560382"/>
                       </a:xfrm>
                       <a:prstGeom prst="rect">
                         <a:avLst/>
@@ -11356,8 +8342,8 @@
                   </p:nvSpPr>
                   <p:spPr>
                     <a:xfrm>
-                      <a:off x="4277638" y="3632294"/>
-                      <a:ext cx="557750" cy="956000"/>
+                      <a:off x="4286448" y="3689424"/>
+                      <a:ext cx="557750" cy="1147353"/>
                     </a:xfrm>
                     <a:prstGeom prst="flowChartDecision">
                       <a:avLst/>
@@ -11402,8 +8388,8 @@
                   </p:nvSpPr>
                   <p:spPr>
                     <a:xfrm>
-                      <a:off x="4332148" y="3721100"/>
-                      <a:ext cx="454128" cy="778388"/>
+                      <a:off x="4340958" y="3778230"/>
+                      <a:ext cx="454128" cy="975257"/>
                     </a:xfrm>
                     <a:prstGeom prst="flowChartDecision">
                       <a:avLst/>
@@ -11449,8 +8435,8 @@
                 </p:nvSpPr>
                 <p:spPr>
                   <a:xfrm>
-                    <a:off x="4410389" y="3960576"/>
-                    <a:ext cx="303176" cy="299436"/>
+                    <a:off x="4419198" y="4118285"/>
+                    <a:ext cx="303176" cy="299435"/>
                   </a:xfrm>
                   <a:prstGeom prst="decagon">
                     <a:avLst/>
@@ -11498,7 +8484,7 @@
               </p:nvSpPr>
               <p:spPr>
                 <a:xfrm>
-                  <a:off x="4095844" y="4480254"/>
+                  <a:off x="4095844" y="4779648"/>
                   <a:ext cx="260534" cy="260534"/>
                 </a:xfrm>
                 <a:prstGeom prst="corner">
@@ -11546,7 +8532,7 @@
               </p:nvSpPr>
               <p:spPr>
                 <a:xfrm rot="16200000">
-                  <a:off x="4772311" y="4480254"/>
+                  <a:off x="4772311" y="4779648"/>
                   <a:ext cx="260534" cy="260534"/>
                 </a:xfrm>
                 <a:prstGeom prst="corner">
@@ -11691,8 +8677,8 @@
             </p:nvSpPr>
             <p:spPr>
               <a:xfrm>
-                <a:off x="4471372" y="4023010"/>
-                <a:ext cx="179806" cy="179806"/>
+                <a:off x="4480181" y="4180718"/>
+                <a:ext cx="179805" cy="179807"/>
               </a:xfrm>
               <a:prstGeom prst="ellipse">
                 <a:avLst/>
@@ -11835,8 +8821,8 @@
             </p:nvSpPr>
             <p:spPr>
               <a:xfrm>
-                <a:off x="4809764" y="4521289"/>
-                <a:ext cx="179806" cy="179806"/>
+                <a:off x="4809764" y="4830666"/>
+                <a:ext cx="179805" cy="179807"/>
               </a:xfrm>
               <a:prstGeom prst="ellipse">
                 <a:avLst/>
@@ -11883,8 +8869,8 @@
             </p:nvSpPr>
             <p:spPr>
               <a:xfrm>
-                <a:off x="4142604" y="4511671"/>
-                <a:ext cx="179806" cy="179806"/>
+                <a:off x="4142604" y="4821048"/>
+                <a:ext cx="179805" cy="179807"/>
               </a:xfrm>
               <a:prstGeom prst="ellipse">
                 <a:avLst/>
@@ -12035,8 +9021,8 @@
             </p:nvSpPr>
             <p:spPr>
               <a:xfrm>
-                <a:off x="4284051" y="4350739"/>
-                <a:ext cx="103054" cy="103054"/>
+                <a:off x="4284052" y="4652186"/>
+                <a:ext cx="103053" cy="103053"/>
               </a:xfrm>
               <a:prstGeom prst="ellipse">
                 <a:avLst/>
@@ -12087,8 +9073,8 @@
             </p:nvSpPr>
             <p:spPr>
               <a:xfrm>
-                <a:off x="4754839" y="4353843"/>
-                <a:ext cx="103054" cy="103054"/>
+                <a:off x="4754840" y="4655290"/>
+                <a:ext cx="103053" cy="103053"/>
               </a:xfrm>
               <a:prstGeom prst="ellipse">
                 <a:avLst/>
@@ -12141,7 +9127,7 @@
           <p:spPr>
             <a:xfrm>
               <a:off x="4921326" y="3800488"/>
-              <a:ext cx="118345" cy="553144"/>
+              <a:ext cx="118345" cy="954704"/>
             </a:xfrm>
             <a:prstGeom prst="rect">
               <a:avLst/>
@@ -12188,8 +9174,8 @@
           </p:nvSpPr>
           <p:spPr>
             <a:xfrm>
-              <a:off x="4095844" y="3800488"/>
-              <a:ext cx="118345" cy="553144"/>
+              <a:off x="4095845" y="3800489"/>
+              <a:ext cx="118345" cy="954705"/>
             </a:xfrm>
             <a:prstGeom prst="rect">
               <a:avLst/>
@@ -12277,7 +9263,7 @@
         </p:nvGrpSpPr>
         <p:grpSpPr>
           <a:xfrm>
-            <a:off x="1650738" y="450412"/>
+            <a:off x="1546494" y="432709"/>
             <a:ext cx="394624" cy="119516"/>
             <a:chOff x="1650738" y="450412"/>
             <a:chExt cx="394624" cy="119516"/>
@@ -12932,247 +9918,45 @@
           </p:txBody>
         </p:sp>
       </p:grpSp>
-      <p:sp>
-        <p:nvSpPr>
-          <p:cNvPr id="24" name="Rounded Rectangle 23"/>
-          <p:cNvSpPr/>
-          <p:nvPr/>
-        </p:nvSpPr>
-        <p:spPr>
-          <a:xfrm>
-            <a:off x="2834651" y="519086"/>
-            <a:ext cx="45719" cy="45719"/>
-          </a:xfrm>
-          <a:prstGeom prst="roundRect">
-            <a:avLst/>
-          </a:prstGeom>
-          <a:solidFill>
-            <a:schemeClr val="accent2">
-              <a:lumMod val="50000"/>
-            </a:schemeClr>
-          </a:solidFill>
-          <a:ln w="28575">
-            <a:solidFill>
-              <a:srgbClr val="ADB9CA">
-                <a:alpha val="40000"/>
-              </a:srgbClr>
-            </a:solidFill>
-          </a:ln>
-        </p:spPr>
-        <p:style>
-          <a:lnRef idx="2">
-            <a:schemeClr val="accent1">
-              <a:shade val="50000"/>
-            </a:schemeClr>
-          </a:lnRef>
-          <a:fillRef idx="1">
-            <a:schemeClr val="accent1"/>
-          </a:fillRef>
-          <a:effectRef idx="0">
-            <a:schemeClr val="accent1"/>
-          </a:effectRef>
-          <a:fontRef idx="minor">
-            <a:schemeClr val="lt1"/>
-          </a:fontRef>
-        </p:style>
-        <p:txBody>
-          <a:bodyPr rtlCol="0" anchor="ctr"/>
-          <a:lstStyle/>
-          <a:p>
-            <a:pPr algn="ctr"/>
-            <a:endParaRPr lang="en-US"/>
-          </a:p>
-        </p:txBody>
-      </p:sp>
-      <p:sp>
-        <p:nvSpPr>
-          <p:cNvPr id="264" name="Rounded Rectangle 263"/>
-          <p:cNvSpPr/>
-          <p:nvPr/>
-        </p:nvSpPr>
-        <p:spPr>
-          <a:xfrm>
-            <a:off x="2651569" y="496226"/>
-            <a:ext cx="45719" cy="45719"/>
-          </a:xfrm>
-          <a:prstGeom prst="roundRect">
-            <a:avLst/>
-          </a:prstGeom>
-          <a:solidFill>
-            <a:schemeClr val="accent6">
-              <a:lumMod val="50000"/>
-            </a:schemeClr>
-          </a:solidFill>
-          <a:ln w="28575">
-            <a:solidFill>
-              <a:srgbClr val="ADB9CA">
-                <a:alpha val="40000"/>
-              </a:srgbClr>
-            </a:solidFill>
-          </a:ln>
-        </p:spPr>
-        <p:style>
-          <a:lnRef idx="2">
-            <a:schemeClr val="accent1">
-              <a:shade val="50000"/>
-            </a:schemeClr>
-          </a:lnRef>
-          <a:fillRef idx="1">
-            <a:schemeClr val="accent1"/>
-          </a:fillRef>
-          <a:effectRef idx="0">
-            <a:schemeClr val="accent1"/>
-          </a:effectRef>
-          <a:fontRef idx="minor">
-            <a:schemeClr val="lt1"/>
-          </a:fontRef>
-        </p:style>
-        <p:txBody>
-          <a:bodyPr rtlCol="0" anchor="ctr"/>
-          <a:lstStyle/>
-          <a:p>
-            <a:pPr algn="ctr"/>
-            <a:endParaRPr lang="en-US"/>
-          </a:p>
-        </p:txBody>
-      </p:sp>
-      <p:sp>
-        <p:nvSpPr>
-          <p:cNvPr id="25" name="Oval 24"/>
-          <p:cNvSpPr/>
-          <p:nvPr/>
-        </p:nvSpPr>
-        <p:spPr>
-          <a:xfrm>
-            <a:off x="2745330" y="520914"/>
-            <a:ext cx="45719" cy="45719"/>
-          </a:xfrm>
-          <a:prstGeom prst="ellipse">
-            <a:avLst/>
-          </a:prstGeom>
-          <a:solidFill>
-            <a:schemeClr val="accent1">
-              <a:lumMod val="50000"/>
-            </a:schemeClr>
-          </a:solidFill>
-          <a:ln w="28575">
-            <a:solidFill>
-              <a:srgbClr val="ADB9CA">
-                <a:alpha val="40000"/>
-              </a:srgbClr>
-            </a:solidFill>
-          </a:ln>
-        </p:spPr>
-        <p:style>
-          <a:lnRef idx="2">
-            <a:schemeClr val="accent1">
-              <a:shade val="50000"/>
-            </a:schemeClr>
-          </a:lnRef>
-          <a:fillRef idx="1">
-            <a:schemeClr val="accent1"/>
-          </a:fillRef>
-          <a:effectRef idx="0">
-            <a:schemeClr val="accent1"/>
-          </a:effectRef>
-          <a:fontRef idx="minor">
-            <a:schemeClr val="lt1"/>
-          </a:fontRef>
-        </p:style>
-        <p:txBody>
-          <a:bodyPr rtlCol="0" anchor="ctr"/>
-          <a:lstStyle/>
-          <a:p>
-            <a:pPr algn="ctr"/>
-            <a:endParaRPr lang="en-US"/>
-          </a:p>
-        </p:txBody>
-      </p:sp>
-      <p:sp>
-        <p:nvSpPr>
-          <p:cNvPr id="267" name="Oval 266"/>
-          <p:cNvSpPr/>
-          <p:nvPr/>
-        </p:nvSpPr>
-        <p:spPr>
-          <a:xfrm>
-            <a:off x="2770320" y="450506"/>
-            <a:ext cx="45719" cy="45719"/>
-          </a:xfrm>
-          <a:prstGeom prst="ellipse">
-            <a:avLst/>
-          </a:prstGeom>
-          <a:solidFill>
-            <a:schemeClr val="accent4">
-              <a:lumMod val="50000"/>
-            </a:schemeClr>
-          </a:solidFill>
-          <a:ln w="28575">
-            <a:solidFill>
-              <a:srgbClr val="ADB9CA">
-                <a:alpha val="40000"/>
-              </a:srgbClr>
-            </a:solidFill>
-          </a:ln>
-        </p:spPr>
-        <p:style>
-          <a:lnRef idx="2">
-            <a:schemeClr val="accent1">
-              <a:shade val="50000"/>
-            </a:schemeClr>
-          </a:lnRef>
-          <a:fillRef idx="1">
-            <a:schemeClr val="accent1"/>
-          </a:fillRef>
-          <a:effectRef idx="0">
-            <a:schemeClr val="accent1"/>
-          </a:effectRef>
-          <a:fontRef idx="minor">
-            <a:schemeClr val="lt1"/>
-          </a:fontRef>
-        </p:style>
-        <p:txBody>
-          <a:bodyPr rtlCol="0" anchor="ctr"/>
-          <a:lstStyle/>
-          <a:p>
-            <a:pPr algn="ctr"/>
-            <a:endParaRPr lang="en-US"/>
-          </a:p>
-        </p:txBody>
-      </p:sp>
       <p:grpSp>
         <p:nvGrpSpPr>
-          <p:cNvPr id="263" name="Group 262"/>
+          <p:cNvPr id="390" name="Group 389"/>
           <p:cNvGrpSpPr/>
           <p:nvPr/>
         </p:nvGrpSpPr>
         <p:grpSpPr>
-          <a:xfrm rot="16200000">
-            <a:off x="1073276" y="1670646"/>
-            <a:ext cx="294854" cy="616305"/>
-            <a:chOff x="2840255" y="1727778"/>
-            <a:chExt cx="375115" cy="784067"/>
+          <a:xfrm>
+            <a:off x="2534912" y="436754"/>
+            <a:ext cx="228801" cy="116127"/>
+            <a:chOff x="2651569" y="450506"/>
+            <a:chExt cx="228801" cy="116127"/>
           </a:xfrm>
         </p:grpSpPr>
         <p:sp>
           <p:nvSpPr>
-            <p:cNvPr id="265" name="Rounded Rectangle 264"/>
+            <p:cNvPr id="24" name="Rounded Rectangle 23"/>
             <p:cNvSpPr/>
             <p:nvPr/>
           </p:nvSpPr>
           <p:spPr>
             <a:xfrm>
-              <a:off x="2840255" y="1727778"/>
-              <a:ext cx="375115" cy="784067"/>
+              <a:off x="2834651" y="519086"/>
+              <a:ext cx="45719" cy="45719"/>
             </a:xfrm>
             <a:prstGeom prst="roundRect">
               <a:avLst/>
             </a:prstGeom>
             <a:solidFill>
-              <a:srgbClr val="7E0000"/>
+              <a:schemeClr val="accent2">
+                <a:lumMod val="50000"/>
+              </a:schemeClr>
             </a:solidFill>
-            <a:ln>
-              <a:noFill/>
+            <a:ln w="28575">
+              <a:solidFill>
+                <a:srgbClr val="ADB9CA">
+                  <a:alpha val="40000"/>
+                </a:srgbClr>
+              </a:solidFill>
             </a:ln>
           </p:spPr>
           <p:style>
@@ -13202,22 +9986,191 @@
         </p:sp>
         <p:sp>
           <p:nvSpPr>
-            <p:cNvPr id="266" name="Rounded Rectangle 265"/>
+            <p:cNvPr id="264" name="Rounded Rectangle 263"/>
             <p:cNvSpPr/>
             <p:nvPr/>
           </p:nvSpPr>
           <p:spPr>
             <a:xfrm>
-              <a:off x="3005234" y="1790663"/>
-              <a:ext cx="169472" cy="317138"/>
+              <a:off x="2651569" y="496226"/>
+              <a:ext cx="45719" cy="45719"/>
             </a:xfrm>
             <a:prstGeom prst="roundRect">
               <a:avLst/>
             </a:prstGeom>
             <a:solidFill>
-              <a:srgbClr val="000000">
-                <a:alpha val="30196"/>
-              </a:srgbClr>
+              <a:schemeClr val="accent6">
+                <a:lumMod val="50000"/>
+              </a:schemeClr>
+            </a:solidFill>
+            <a:ln w="28575">
+              <a:solidFill>
+                <a:srgbClr val="ADB9CA">
+                  <a:alpha val="40000"/>
+                </a:srgbClr>
+              </a:solidFill>
+            </a:ln>
+          </p:spPr>
+          <p:style>
+            <a:lnRef idx="2">
+              <a:schemeClr val="accent1">
+                <a:shade val="50000"/>
+              </a:schemeClr>
+            </a:lnRef>
+            <a:fillRef idx="1">
+              <a:schemeClr val="accent1"/>
+            </a:fillRef>
+            <a:effectRef idx="0">
+              <a:schemeClr val="accent1"/>
+            </a:effectRef>
+            <a:fontRef idx="minor">
+              <a:schemeClr val="lt1"/>
+            </a:fontRef>
+          </p:style>
+          <p:txBody>
+            <a:bodyPr rtlCol="0" anchor="ctr"/>
+            <a:lstStyle/>
+            <a:p>
+              <a:pPr algn="ctr"/>
+              <a:endParaRPr lang="en-US"/>
+            </a:p>
+          </p:txBody>
+        </p:sp>
+        <p:sp>
+          <p:nvSpPr>
+            <p:cNvPr id="25" name="Oval 24"/>
+            <p:cNvSpPr/>
+            <p:nvPr/>
+          </p:nvSpPr>
+          <p:spPr>
+            <a:xfrm>
+              <a:off x="2745330" y="520914"/>
+              <a:ext cx="45719" cy="45719"/>
+            </a:xfrm>
+            <a:prstGeom prst="ellipse">
+              <a:avLst/>
+            </a:prstGeom>
+            <a:solidFill>
+              <a:schemeClr val="accent1">
+                <a:lumMod val="50000"/>
+              </a:schemeClr>
+            </a:solidFill>
+            <a:ln w="28575">
+              <a:solidFill>
+                <a:srgbClr val="ADB9CA">
+                  <a:alpha val="40000"/>
+                </a:srgbClr>
+              </a:solidFill>
+            </a:ln>
+          </p:spPr>
+          <p:style>
+            <a:lnRef idx="2">
+              <a:schemeClr val="accent1">
+                <a:shade val="50000"/>
+              </a:schemeClr>
+            </a:lnRef>
+            <a:fillRef idx="1">
+              <a:schemeClr val="accent1"/>
+            </a:fillRef>
+            <a:effectRef idx="0">
+              <a:schemeClr val="accent1"/>
+            </a:effectRef>
+            <a:fontRef idx="minor">
+              <a:schemeClr val="lt1"/>
+            </a:fontRef>
+          </p:style>
+          <p:txBody>
+            <a:bodyPr rtlCol="0" anchor="ctr"/>
+            <a:lstStyle/>
+            <a:p>
+              <a:pPr algn="ctr"/>
+              <a:endParaRPr lang="en-US"/>
+            </a:p>
+          </p:txBody>
+        </p:sp>
+        <p:sp>
+          <p:nvSpPr>
+            <p:cNvPr id="267" name="Oval 266"/>
+            <p:cNvSpPr/>
+            <p:nvPr/>
+          </p:nvSpPr>
+          <p:spPr>
+            <a:xfrm>
+              <a:off x="2770320" y="450506"/>
+              <a:ext cx="45719" cy="45719"/>
+            </a:xfrm>
+            <a:prstGeom prst="ellipse">
+              <a:avLst/>
+            </a:prstGeom>
+            <a:solidFill>
+              <a:schemeClr val="accent4">
+                <a:lumMod val="50000"/>
+              </a:schemeClr>
+            </a:solidFill>
+            <a:ln w="28575">
+              <a:solidFill>
+                <a:srgbClr val="ADB9CA">
+                  <a:alpha val="40000"/>
+                </a:srgbClr>
+              </a:solidFill>
+            </a:ln>
+          </p:spPr>
+          <p:style>
+            <a:lnRef idx="2">
+              <a:schemeClr val="accent1">
+                <a:shade val="50000"/>
+              </a:schemeClr>
+            </a:lnRef>
+            <a:fillRef idx="1">
+              <a:schemeClr val="accent1"/>
+            </a:fillRef>
+            <a:effectRef idx="0">
+              <a:schemeClr val="accent1"/>
+            </a:effectRef>
+            <a:fontRef idx="minor">
+              <a:schemeClr val="lt1"/>
+            </a:fontRef>
+          </p:style>
+          <p:txBody>
+            <a:bodyPr rtlCol="0" anchor="ctr"/>
+            <a:lstStyle/>
+            <a:p>
+              <a:pPr algn="ctr"/>
+              <a:endParaRPr lang="en-US"/>
+            </a:p>
+          </p:txBody>
+        </p:sp>
+      </p:grpSp>
+      <p:grpSp>
+        <p:nvGrpSpPr>
+          <p:cNvPr id="263" name="Group 262"/>
+          <p:cNvGrpSpPr/>
+          <p:nvPr/>
+        </p:nvGrpSpPr>
+        <p:grpSpPr>
+          <a:xfrm rot="16200000">
+            <a:off x="1141902" y="1810620"/>
+            <a:ext cx="294854" cy="368561"/>
+            <a:chOff x="2840254" y="2042961"/>
+            <a:chExt cx="375115" cy="468886"/>
+          </a:xfrm>
+        </p:grpSpPr>
+        <p:sp>
+          <p:nvSpPr>
+            <p:cNvPr id="265" name="Rounded Rectangle 264"/>
+            <p:cNvSpPr/>
+            <p:nvPr/>
+          </p:nvSpPr>
+          <p:spPr>
+            <a:xfrm>
+              <a:off x="2840254" y="2042961"/>
+              <a:ext cx="375115" cy="468886"/>
+            </a:xfrm>
+            <a:prstGeom prst="roundRect">
+              <a:avLst/>
+            </a:prstGeom>
+            <a:solidFill>
+              <a:srgbClr val="7E0000"/>
             </a:solidFill>
             <a:ln>
               <a:noFill/>
@@ -13256,7 +10209,7 @@
           </p:nvSpPr>
           <p:spPr>
             <a:xfrm>
-              <a:off x="3005234" y="2126935"/>
+              <a:off x="3016430" y="2120404"/>
               <a:ext cx="169472" cy="317138"/>
             </a:xfrm>
             <a:prstGeom prst="roundRect">
@@ -13352,6 +10305,590 @@
           </p:nvSpPr>
           <p:spPr>
             <a:xfrm>
+              <a:off x="2869622" y="2056432"/>
+              <a:ext cx="311241" cy="45719"/>
+            </a:xfrm>
+            <a:prstGeom prst="roundRect">
+              <a:avLst/>
+            </a:prstGeom>
+            <a:solidFill>
+              <a:srgbClr val="000000">
+                <a:alpha val="30196"/>
+              </a:srgbClr>
+            </a:solidFill>
+            <a:ln>
+              <a:noFill/>
+            </a:ln>
+          </p:spPr>
+          <p:style>
+            <a:lnRef idx="2">
+              <a:schemeClr val="accent1">
+                <a:shade val="50000"/>
+              </a:schemeClr>
+            </a:lnRef>
+            <a:fillRef idx="1">
+              <a:schemeClr val="accent1"/>
+            </a:fillRef>
+            <a:effectRef idx="0">
+              <a:schemeClr val="accent1"/>
+            </a:effectRef>
+            <a:fontRef idx="minor">
+              <a:schemeClr val="lt1"/>
+            </a:fontRef>
+          </p:style>
+          <p:txBody>
+            <a:bodyPr rtlCol="0" anchor="ctr"/>
+            <a:lstStyle/>
+            <a:p>
+              <a:pPr algn="ctr"/>
+              <a:endParaRPr lang="en-US"/>
+            </a:p>
+          </p:txBody>
+        </p:sp>
+      </p:grpSp>
+      <p:cxnSp>
+        <p:nvCxnSpPr>
+          <p:cNvPr id="77" name="Straight Connector 76"/>
+          <p:cNvCxnSpPr/>
+          <p:nvPr/>
+        </p:nvCxnSpPr>
+        <p:spPr>
+          <a:xfrm>
+            <a:off x="5833241" y="1800633"/>
+            <a:ext cx="453259" cy="0"/>
+          </a:xfrm>
+          <a:prstGeom prst="line">
+            <a:avLst/>
+          </a:prstGeom>
+          <a:ln w="38100">
+            <a:solidFill>
+              <a:srgbClr val="492207"/>
+            </a:solidFill>
+          </a:ln>
+        </p:spPr>
+        <p:style>
+          <a:lnRef idx="1">
+            <a:schemeClr val="accent1"/>
+          </a:lnRef>
+          <a:fillRef idx="0">
+            <a:schemeClr val="accent1"/>
+          </a:fillRef>
+          <a:effectRef idx="0">
+            <a:schemeClr val="accent1"/>
+          </a:effectRef>
+          <a:fontRef idx="minor">
+            <a:schemeClr val="tx1"/>
+          </a:fontRef>
+        </p:style>
+      </p:cxnSp>
+      <p:cxnSp>
+        <p:nvCxnSpPr>
+          <p:cNvPr id="93" name="Straight Connector 92"/>
+          <p:cNvCxnSpPr/>
+          <p:nvPr/>
+        </p:nvCxnSpPr>
+        <p:spPr>
+          <a:xfrm flipV="1">
+            <a:off x="6266040" y="244759"/>
+            <a:ext cx="0" cy="1562896"/>
+          </a:xfrm>
+          <a:prstGeom prst="line">
+            <a:avLst/>
+          </a:prstGeom>
+          <a:ln w="38100">
+            <a:solidFill>
+              <a:srgbClr val="492207"/>
+            </a:solidFill>
+          </a:ln>
+        </p:spPr>
+        <p:style>
+          <a:lnRef idx="1">
+            <a:schemeClr val="accent1"/>
+          </a:lnRef>
+          <a:fillRef idx="0">
+            <a:schemeClr val="accent1"/>
+          </a:fillRef>
+          <a:effectRef idx="0">
+            <a:schemeClr val="accent1"/>
+          </a:effectRef>
+          <a:fontRef idx="minor">
+            <a:schemeClr val="tx1"/>
+          </a:fontRef>
+        </p:style>
+      </p:cxnSp>
+      <p:cxnSp>
+        <p:nvCxnSpPr>
+          <p:cNvPr id="273" name="Straight Connector 272"/>
+          <p:cNvCxnSpPr/>
+          <p:nvPr/>
+        </p:nvCxnSpPr>
+        <p:spPr>
+          <a:xfrm flipV="1">
+            <a:off x="7153319" y="244759"/>
+            <a:ext cx="0" cy="3862511"/>
+          </a:xfrm>
+          <a:prstGeom prst="line">
+            <a:avLst/>
+          </a:prstGeom>
+          <a:ln w="38100">
+            <a:solidFill>
+              <a:srgbClr val="492207"/>
+            </a:solidFill>
+          </a:ln>
+        </p:spPr>
+        <p:style>
+          <a:lnRef idx="1">
+            <a:schemeClr val="accent1"/>
+          </a:lnRef>
+          <a:fillRef idx="0">
+            <a:schemeClr val="accent1"/>
+          </a:fillRef>
+          <a:effectRef idx="0">
+            <a:schemeClr val="accent1"/>
+          </a:effectRef>
+          <a:fontRef idx="minor">
+            <a:schemeClr val="tx1"/>
+          </a:fontRef>
+        </p:style>
+      </p:cxnSp>
+      <p:cxnSp>
+        <p:nvCxnSpPr>
+          <p:cNvPr id="197" name="Straight Connector 196"/>
+          <p:cNvCxnSpPr/>
+          <p:nvPr/>
+        </p:nvCxnSpPr>
+        <p:spPr>
+          <a:xfrm>
+            <a:off x="7153319" y="4107270"/>
+            <a:ext cx="406739" cy="0"/>
+          </a:xfrm>
+          <a:prstGeom prst="line">
+            <a:avLst/>
+          </a:prstGeom>
+          <a:ln w="38100">
+            <a:solidFill>
+              <a:srgbClr val="492207"/>
+            </a:solidFill>
+          </a:ln>
+        </p:spPr>
+        <p:style>
+          <a:lnRef idx="1">
+            <a:schemeClr val="accent1"/>
+          </a:lnRef>
+          <a:fillRef idx="0">
+            <a:schemeClr val="accent1"/>
+          </a:fillRef>
+          <a:effectRef idx="0">
+            <a:schemeClr val="accent1"/>
+          </a:effectRef>
+          <a:fontRef idx="minor">
+            <a:schemeClr val="tx1"/>
+          </a:fontRef>
+        </p:style>
+      </p:cxnSp>
+      <p:cxnSp>
+        <p:nvCxnSpPr>
+          <p:cNvPr id="276" name="Straight Connector 275"/>
+          <p:cNvCxnSpPr/>
+          <p:nvPr/>
+        </p:nvCxnSpPr>
+        <p:spPr>
+          <a:xfrm flipV="1">
+            <a:off x="6261734" y="2151461"/>
+            <a:ext cx="0" cy="405650"/>
+          </a:xfrm>
+          <a:prstGeom prst="line">
+            <a:avLst/>
+          </a:prstGeom>
+          <a:ln w="38100">
+            <a:solidFill>
+              <a:srgbClr val="492207"/>
+            </a:solidFill>
+          </a:ln>
+        </p:spPr>
+        <p:style>
+          <a:lnRef idx="1">
+            <a:schemeClr val="accent1"/>
+          </a:lnRef>
+          <a:fillRef idx="0">
+            <a:schemeClr val="accent1"/>
+          </a:fillRef>
+          <a:effectRef idx="0">
+            <a:schemeClr val="accent1"/>
+          </a:effectRef>
+          <a:fontRef idx="minor">
+            <a:schemeClr val="tx1"/>
+          </a:fontRef>
+        </p:style>
+      </p:cxnSp>
+      <p:cxnSp>
+        <p:nvCxnSpPr>
+          <p:cNvPr id="279" name="Straight Connector 278"/>
+          <p:cNvCxnSpPr/>
+          <p:nvPr/>
+        </p:nvCxnSpPr>
+        <p:spPr>
+          <a:xfrm flipV="1">
+            <a:off x="3262313" y="2555138"/>
+            <a:ext cx="3024187" cy="1973"/>
+          </a:xfrm>
+          <a:prstGeom prst="line">
+            <a:avLst/>
+          </a:prstGeom>
+          <a:ln w="38100">
+            <a:solidFill>
+              <a:srgbClr val="492207"/>
+            </a:solidFill>
+          </a:ln>
+        </p:spPr>
+        <p:style>
+          <a:lnRef idx="1">
+            <a:schemeClr val="accent1"/>
+          </a:lnRef>
+          <a:fillRef idx="0">
+            <a:schemeClr val="accent1"/>
+          </a:fillRef>
+          <a:effectRef idx="0">
+            <a:schemeClr val="accent1"/>
+          </a:effectRef>
+          <a:fontRef idx="minor">
+            <a:schemeClr val="tx1"/>
+          </a:fontRef>
+        </p:style>
+      </p:cxnSp>
+      <p:cxnSp>
+        <p:nvCxnSpPr>
+          <p:cNvPr id="282" name="Straight Connector 281"/>
+          <p:cNvCxnSpPr/>
+          <p:nvPr/>
+        </p:nvCxnSpPr>
+        <p:spPr>
+          <a:xfrm flipH="1" flipV="1">
+            <a:off x="3260903" y="252780"/>
+            <a:ext cx="1410" cy="3475274"/>
+          </a:xfrm>
+          <a:prstGeom prst="line">
+            <a:avLst/>
+          </a:prstGeom>
+          <a:ln w="38100">
+            <a:solidFill>
+              <a:srgbClr val="492207"/>
+            </a:solidFill>
+          </a:ln>
+        </p:spPr>
+        <p:style>
+          <a:lnRef idx="1">
+            <a:schemeClr val="accent1"/>
+          </a:lnRef>
+          <a:fillRef idx="0">
+            <a:schemeClr val="accent1"/>
+          </a:fillRef>
+          <a:effectRef idx="0">
+            <a:schemeClr val="accent1"/>
+          </a:effectRef>
+          <a:fontRef idx="minor">
+            <a:schemeClr val="tx1"/>
+          </a:fontRef>
+        </p:style>
+      </p:cxnSp>
+      <p:cxnSp>
+        <p:nvCxnSpPr>
+          <p:cNvPr id="291" name="Straight Connector 290"/>
+          <p:cNvCxnSpPr/>
+          <p:nvPr/>
+        </p:nvCxnSpPr>
+        <p:spPr>
+          <a:xfrm flipH="1" flipV="1">
+            <a:off x="7126167" y="4473545"/>
+            <a:ext cx="3334" cy="430094"/>
+          </a:xfrm>
+          <a:prstGeom prst="line">
+            <a:avLst/>
+          </a:prstGeom>
+          <a:ln w="38100">
+            <a:solidFill>
+              <a:srgbClr val="492207"/>
+            </a:solidFill>
+          </a:ln>
+        </p:spPr>
+        <p:style>
+          <a:lnRef idx="1">
+            <a:schemeClr val="accent1"/>
+          </a:lnRef>
+          <a:fillRef idx="0">
+            <a:schemeClr val="accent1"/>
+          </a:fillRef>
+          <a:effectRef idx="0">
+            <a:schemeClr val="accent1"/>
+          </a:effectRef>
+          <a:fontRef idx="minor">
+            <a:schemeClr val="tx1"/>
+          </a:fontRef>
+        </p:style>
+      </p:cxnSp>
+      <p:sp>
+        <p:nvSpPr>
+          <p:cNvPr id="293" name="Rectangle 292"/>
+          <p:cNvSpPr/>
+          <p:nvPr/>
+        </p:nvSpPr>
+        <p:spPr>
+          <a:xfrm>
+            <a:off x="5823757" y="257209"/>
+            <a:ext cx="425902" cy="188996"/>
+          </a:xfrm>
+          <a:prstGeom prst="rect">
+            <a:avLst/>
+          </a:prstGeom>
+          <a:solidFill>
+            <a:srgbClr val="492207"/>
+          </a:solidFill>
+          <a:ln>
+            <a:noFill/>
+          </a:ln>
+        </p:spPr>
+        <p:style>
+          <a:lnRef idx="2">
+            <a:schemeClr val="accent1">
+              <a:shade val="50000"/>
+            </a:schemeClr>
+          </a:lnRef>
+          <a:fillRef idx="1">
+            <a:schemeClr val="accent1"/>
+          </a:fillRef>
+          <a:effectRef idx="0">
+            <a:schemeClr val="accent1"/>
+          </a:effectRef>
+          <a:fontRef idx="minor">
+            <a:schemeClr val="lt1"/>
+          </a:fontRef>
+        </p:style>
+        <p:txBody>
+          <a:bodyPr rtlCol="0" anchor="ctr"/>
+          <a:lstStyle/>
+          <a:p>
+            <a:pPr algn="ctr"/>
+            <a:endParaRPr lang="en-US" sz="400" dirty="0">
+              <a:solidFill>
+                <a:srgbClr val="622E0A"/>
+              </a:solidFill>
+              <a:latin typeface="Libre Baskerville" panose="02000000000000000000" pitchFamily="2" charset="0"/>
+            </a:endParaRPr>
+          </a:p>
+        </p:txBody>
+      </p:sp>
+      <p:grpSp>
+        <p:nvGrpSpPr>
+          <p:cNvPr id="294" name="Group 293"/>
+          <p:cNvGrpSpPr/>
+          <p:nvPr/>
+        </p:nvGrpSpPr>
+        <p:grpSpPr>
+          <a:xfrm>
+            <a:off x="2854588" y="1439605"/>
+            <a:ext cx="345447" cy="722055"/>
+            <a:chOff x="2840255" y="1727778"/>
+            <a:chExt cx="375115" cy="784067"/>
+          </a:xfrm>
+        </p:grpSpPr>
+        <p:sp>
+          <p:nvSpPr>
+            <p:cNvPr id="295" name="Rounded Rectangle 294"/>
+            <p:cNvSpPr/>
+            <p:nvPr/>
+          </p:nvSpPr>
+          <p:spPr>
+            <a:xfrm>
+              <a:off x="2840255" y="1727778"/>
+              <a:ext cx="375115" cy="784067"/>
+            </a:xfrm>
+            <a:prstGeom prst="roundRect">
+              <a:avLst/>
+            </a:prstGeom>
+            <a:solidFill>
+              <a:srgbClr val="7E0000"/>
+            </a:solidFill>
+            <a:ln>
+              <a:noFill/>
+            </a:ln>
+          </p:spPr>
+          <p:style>
+            <a:lnRef idx="2">
+              <a:schemeClr val="accent1">
+                <a:shade val="50000"/>
+              </a:schemeClr>
+            </a:lnRef>
+            <a:fillRef idx="1">
+              <a:schemeClr val="accent1"/>
+            </a:fillRef>
+            <a:effectRef idx="0">
+              <a:schemeClr val="accent1"/>
+            </a:effectRef>
+            <a:fontRef idx="minor">
+              <a:schemeClr val="lt1"/>
+            </a:fontRef>
+          </p:style>
+          <p:txBody>
+            <a:bodyPr rtlCol="0" anchor="ctr"/>
+            <a:lstStyle/>
+            <a:p>
+              <a:pPr algn="ctr"/>
+              <a:endParaRPr lang="en-US"/>
+            </a:p>
+          </p:txBody>
+        </p:sp>
+        <p:sp>
+          <p:nvSpPr>
+            <p:cNvPr id="296" name="Rounded Rectangle 295"/>
+            <p:cNvSpPr/>
+            <p:nvPr/>
+          </p:nvSpPr>
+          <p:spPr>
+            <a:xfrm>
+              <a:off x="3005234" y="1790663"/>
+              <a:ext cx="169472" cy="317138"/>
+            </a:xfrm>
+            <a:prstGeom prst="roundRect">
+              <a:avLst/>
+            </a:prstGeom>
+            <a:solidFill>
+              <a:srgbClr val="000000">
+                <a:alpha val="30196"/>
+              </a:srgbClr>
+            </a:solidFill>
+            <a:ln>
+              <a:noFill/>
+            </a:ln>
+          </p:spPr>
+          <p:style>
+            <a:lnRef idx="2">
+              <a:schemeClr val="accent1">
+                <a:shade val="50000"/>
+              </a:schemeClr>
+            </a:lnRef>
+            <a:fillRef idx="1">
+              <a:schemeClr val="accent1"/>
+            </a:fillRef>
+            <a:effectRef idx="0">
+              <a:schemeClr val="accent1"/>
+            </a:effectRef>
+            <a:fontRef idx="minor">
+              <a:schemeClr val="lt1"/>
+            </a:fontRef>
+          </p:style>
+          <p:txBody>
+            <a:bodyPr rtlCol="0" anchor="ctr"/>
+            <a:lstStyle/>
+            <a:p>
+              <a:pPr algn="ctr"/>
+              <a:endParaRPr lang="en-US"/>
+            </a:p>
+          </p:txBody>
+        </p:sp>
+        <p:sp>
+          <p:nvSpPr>
+            <p:cNvPr id="297" name="Rounded Rectangle 296"/>
+            <p:cNvSpPr/>
+            <p:nvPr/>
+          </p:nvSpPr>
+          <p:spPr>
+            <a:xfrm>
+              <a:off x="3005234" y="2126935"/>
+              <a:ext cx="169472" cy="317138"/>
+            </a:xfrm>
+            <a:prstGeom prst="roundRect">
+              <a:avLst/>
+            </a:prstGeom>
+            <a:solidFill>
+              <a:srgbClr val="000000">
+                <a:alpha val="30196"/>
+              </a:srgbClr>
+            </a:solidFill>
+            <a:ln>
+              <a:noFill/>
+            </a:ln>
+          </p:spPr>
+          <p:style>
+            <a:lnRef idx="2">
+              <a:schemeClr val="accent1">
+                <a:shade val="50000"/>
+              </a:schemeClr>
+            </a:lnRef>
+            <a:fillRef idx="1">
+              <a:schemeClr val="accent1"/>
+            </a:fillRef>
+            <a:effectRef idx="0">
+              <a:schemeClr val="accent1"/>
+            </a:effectRef>
+            <a:fontRef idx="minor">
+              <a:schemeClr val="lt1"/>
+            </a:fontRef>
+          </p:style>
+          <p:txBody>
+            <a:bodyPr rtlCol="0" anchor="ctr"/>
+            <a:lstStyle/>
+            <a:p>
+              <a:pPr algn="ctr"/>
+              <a:endParaRPr lang="en-US"/>
+            </a:p>
+          </p:txBody>
+        </p:sp>
+        <p:sp>
+          <p:nvSpPr>
+            <p:cNvPr id="298" name="Rounded Rectangle 297"/>
+            <p:cNvSpPr/>
+            <p:nvPr/>
+          </p:nvSpPr>
+          <p:spPr>
+            <a:xfrm>
+              <a:off x="2876197" y="2455912"/>
+              <a:ext cx="311241" cy="45719"/>
+            </a:xfrm>
+            <a:prstGeom prst="roundRect">
+              <a:avLst/>
+            </a:prstGeom>
+            <a:solidFill>
+              <a:srgbClr val="000000">
+                <a:alpha val="30196"/>
+              </a:srgbClr>
+            </a:solidFill>
+            <a:ln>
+              <a:noFill/>
+            </a:ln>
+          </p:spPr>
+          <p:style>
+            <a:lnRef idx="2">
+              <a:schemeClr val="accent1">
+                <a:shade val="50000"/>
+              </a:schemeClr>
+            </a:lnRef>
+            <a:fillRef idx="1">
+              <a:schemeClr val="accent1"/>
+            </a:fillRef>
+            <a:effectRef idx="0">
+              <a:schemeClr val="accent1"/>
+            </a:effectRef>
+            <a:fontRef idx="minor">
+              <a:schemeClr val="lt1"/>
+            </a:fontRef>
+          </p:style>
+          <p:txBody>
+            <a:bodyPr rtlCol="0" anchor="ctr"/>
+            <a:lstStyle/>
+            <a:p>
+              <a:pPr algn="ctr"/>
+              <a:endParaRPr lang="en-US"/>
+            </a:p>
+          </p:txBody>
+        </p:sp>
+        <p:sp>
+          <p:nvSpPr>
+            <p:cNvPr id="299" name="Rounded Rectangle 298"/>
+            <p:cNvSpPr/>
+            <p:nvPr/>
+          </p:nvSpPr>
+          <p:spPr>
+            <a:xfrm>
               <a:off x="2869623" y="1736815"/>
               <a:ext cx="311241" cy="45719"/>
             </a:xfrm>
@@ -13392,6 +10929,3646 @@
             </a:p>
           </p:txBody>
         </p:sp>
+      </p:grpSp>
+      <p:cxnSp>
+        <p:nvCxnSpPr>
+          <p:cNvPr id="304" name="Straight Connector 303"/>
+          <p:cNvCxnSpPr/>
+          <p:nvPr/>
+        </p:nvCxnSpPr>
+        <p:spPr>
+          <a:xfrm>
+            <a:off x="1520827" y="3734212"/>
+            <a:ext cx="1755926" cy="1"/>
+          </a:xfrm>
+          <a:prstGeom prst="line">
+            <a:avLst/>
+          </a:prstGeom>
+          <a:ln w="38100">
+            <a:solidFill>
+              <a:srgbClr val="492207"/>
+            </a:solidFill>
+          </a:ln>
+        </p:spPr>
+        <p:style>
+          <a:lnRef idx="1">
+            <a:schemeClr val="accent1"/>
+          </a:lnRef>
+          <a:fillRef idx="0">
+            <a:schemeClr val="accent1"/>
+          </a:fillRef>
+          <a:effectRef idx="0">
+            <a:schemeClr val="accent1"/>
+          </a:effectRef>
+          <a:fontRef idx="minor">
+            <a:schemeClr val="tx1"/>
+          </a:fontRef>
+        </p:style>
+      </p:cxnSp>
+      <p:cxnSp>
+        <p:nvCxnSpPr>
+          <p:cNvPr id="308" name="Straight Connector 307"/>
+          <p:cNvCxnSpPr/>
+          <p:nvPr/>
+        </p:nvCxnSpPr>
+        <p:spPr>
+          <a:xfrm flipV="1">
+            <a:off x="1517228" y="2583345"/>
+            <a:ext cx="0" cy="1155574"/>
+          </a:xfrm>
+          <a:prstGeom prst="line">
+            <a:avLst/>
+          </a:prstGeom>
+          <a:ln w="38100">
+            <a:solidFill>
+              <a:srgbClr val="492207"/>
+            </a:solidFill>
+          </a:ln>
+        </p:spPr>
+        <p:style>
+          <a:lnRef idx="1">
+            <a:schemeClr val="accent1"/>
+          </a:lnRef>
+          <a:fillRef idx="0">
+            <a:schemeClr val="accent1"/>
+          </a:fillRef>
+          <a:effectRef idx="0">
+            <a:schemeClr val="accent1"/>
+          </a:effectRef>
+          <a:fontRef idx="minor">
+            <a:schemeClr val="tx1"/>
+          </a:fontRef>
+        </p:style>
+      </p:cxnSp>
+      <p:cxnSp>
+        <p:nvCxnSpPr>
+          <p:cNvPr id="312" name="Straight Connector 311"/>
+          <p:cNvCxnSpPr/>
+          <p:nvPr/>
+        </p:nvCxnSpPr>
+        <p:spPr>
+          <a:xfrm flipV="1">
+            <a:off x="1517228" y="244759"/>
+            <a:ext cx="0" cy="1943318"/>
+          </a:xfrm>
+          <a:prstGeom prst="line">
+            <a:avLst/>
+          </a:prstGeom>
+          <a:ln w="38100">
+            <a:solidFill>
+              <a:srgbClr val="492207"/>
+            </a:solidFill>
+          </a:ln>
+        </p:spPr>
+        <p:style>
+          <a:lnRef idx="1">
+            <a:schemeClr val="accent1"/>
+          </a:lnRef>
+          <a:fillRef idx="0">
+            <a:schemeClr val="accent1"/>
+          </a:fillRef>
+          <a:effectRef idx="0">
+            <a:schemeClr val="accent1"/>
+          </a:effectRef>
+          <a:fontRef idx="minor">
+            <a:schemeClr val="tx1"/>
+          </a:fontRef>
+        </p:style>
+      </p:cxnSp>
+      <p:cxnSp>
+        <p:nvCxnSpPr>
+          <p:cNvPr id="314" name="Straight Connector 313"/>
+          <p:cNvCxnSpPr/>
+          <p:nvPr/>
+        </p:nvCxnSpPr>
+        <p:spPr>
+          <a:xfrm>
+            <a:off x="1496024" y="2188077"/>
+            <a:ext cx="453259" cy="0"/>
+          </a:xfrm>
+          <a:prstGeom prst="line">
+            <a:avLst/>
+          </a:prstGeom>
+          <a:ln w="38100">
+            <a:solidFill>
+              <a:srgbClr val="492207"/>
+            </a:solidFill>
+          </a:ln>
+        </p:spPr>
+        <p:style>
+          <a:lnRef idx="1">
+            <a:schemeClr val="accent1"/>
+          </a:lnRef>
+          <a:fillRef idx="0">
+            <a:schemeClr val="accent1"/>
+          </a:fillRef>
+          <a:effectRef idx="0">
+            <a:schemeClr val="accent1"/>
+          </a:effectRef>
+          <a:fontRef idx="minor">
+            <a:schemeClr val="tx1"/>
+          </a:fontRef>
+        </p:style>
+      </p:cxnSp>
+      <p:cxnSp>
+        <p:nvCxnSpPr>
+          <p:cNvPr id="315" name="Straight Connector 314"/>
+          <p:cNvCxnSpPr/>
+          <p:nvPr/>
+        </p:nvCxnSpPr>
+        <p:spPr>
+          <a:xfrm>
+            <a:off x="1090038" y="1807192"/>
+            <a:ext cx="420033" cy="0"/>
+          </a:xfrm>
+          <a:prstGeom prst="line">
+            <a:avLst/>
+          </a:prstGeom>
+          <a:ln w="38100">
+            <a:solidFill>
+              <a:srgbClr val="492207"/>
+            </a:solidFill>
+          </a:ln>
+        </p:spPr>
+        <p:style>
+          <a:lnRef idx="1">
+            <a:schemeClr val="accent1"/>
+          </a:lnRef>
+          <a:fillRef idx="0">
+            <a:schemeClr val="accent1"/>
+          </a:fillRef>
+          <a:effectRef idx="0">
+            <a:schemeClr val="accent1"/>
+          </a:effectRef>
+          <a:fontRef idx="minor">
+            <a:schemeClr val="tx1"/>
+          </a:fontRef>
+        </p:style>
+      </p:cxnSp>
+      <p:cxnSp>
+        <p:nvCxnSpPr>
+          <p:cNvPr id="317" name="Straight Connector 316"/>
+          <p:cNvCxnSpPr/>
+          <p:nvPr/>
+        </p:nvCxnSpPr>
+        <p:spPr>
+          <a:xfrm>
+            <a:off x="212922" y="1807192"/>
+            <a:ext cx="444719" cy="0"/>
+          </a:xfrm>
+          <a:prstGeom prst="line">
+            <a:avLst/>
+          </a:prstGeom>
+          <a:ln w="38100">
+            <a:solidFill>
+              <a:srgbClr val="492207"/>
+            </a:solidFill>
+          </a:ln>
+        </p:spPr>
+        <p:style>
+          <a:lnRef idx="1">
+            <a:schemeClr val="accent1"/>
+          </a:lnRef>
+          <a:fillRef idx="0">
+            <a:schemeClr val="accent1"/>
+          </a:fillRef>
+          <a:effectRef idx="0">
+            <a:schemeClr val="accent1"/>
+          </a:effectRef>
+          <a:fontRef idx="minor">
+            <a:schemeClr val="tx1"/>
+          </a:fontRef>
+        </p:style>
+      </p:cxnSp>
+      <p:cxnSp>
+        <p:nvCxnSpPr>
+          <p:cNvPr id="322" name="Straight Connector 321"/>
+          <p:cNvCxnSpPr/>
+          <p:nvPr/>
+        </p:nvCxnSpPr>
+        <p:spPr>
+          <a:xfrm>
+            <a:off x="642319" y="1417464"/>
+            <a:ext cx="4519" cy="400652"/>
+          </a:xfrm>
+          <a:prstGeom prst="line">
+            <a:avLst/>
+          </a:prstGeom>
+          <a:ln w="38100">
+            <a:solidFill>
+              <a:srgbClr val="492207"/>
+            </a:solidFill>
+          </a:ln>
+        </p:spPr>
+        <p:style>
+          <a:lnRef idx="1">
+            <a:schemeClr val="accent1"/>
+          </a:lnRef>
+          <a:fillRef idx="0">
+            <a:schemeClr val="accent1"/>
+          </a:fillRef>
+          <a:effectRef idx="0">
+            <a:schemeClr val="accent1"/>
+          </a:effectRef>
+          <a:fontRef idx="minor">
+            <a:schemeClr val="tx1"/>
+          </a:fontRef>
+        </p:style>
+      </p:cxnSp>
+      <p:grpSp>
+        <p:nvGrpSpPr>
+          <p:cNvPr id="327" name="Group 326"/>
+          <p:cNvGrpSpPr/>
+          <p:nvPr/>
+        </p:nvGrpSpPr>
+        <p:grpSpPr>
+          <a:xfrm rot="4599317">
+            <a:off x="1594958" y="3388850"/>
+            <a:ext cx="281090" cy="281090"/>
+            <a:chOff x="2836912" y="3174001"/>
+            <a:chExt cx="377756" cy="377756"/>
+          </a:xfrm>
+        </p:grpSpPr>
+        <p:sp>
+          <p:nvSpPr>
+            <p:cNvPr id="328" name="Oval 327"/>
+            <p:cNvSpPr/>
+            <p:nvPr/>
+          </p:nvSpPr>
+          <p:spPr>
+            <a:xfrm>
+              <a:off x="2836912" y="3174001"/>
+              <a:ext cx="377756" cy="377756"/>
+            </a:xfrm>
+            <a:prstGeom prst="ellipse">
+              <a:avLst/>
+            </a:prstGeom>
+            <a:solidFill>
+              <a:srgbClr val="492207"/>
+            </a:solidFill>
+            <a:ln w="57150">
+              <a:solidFill>
+                <a:srgbClr val="000000">
+                  <a:alpha val="30196"/>
+                </a:srgbClr>
+              </a:solidFill>
+            </a:ln>
+          </p:spPr>
+          <p:style>
+            <a:lnRef idx="2">
+              <a:schemeClr val="accent1">
+                <a:shade val="50000"/>
+              </a:schemeClr>
+            </a:lnRef>
+            <a:fillRef idx="1">
+              <a:schemeClr val="accent1"/>
+            </a:fillRef>
+            <a:effectRef idx="0">
+              <a:schemeClr val="accent1"/>
+            </a:effectRef>
+            <a:fontRef idx="minor">
+              <a:schemeClr val="lt1"/>
+            </a:fontRef>
+          </p:style>
+          <p:txBody>
+            <a:bodyPr rtlCol="0" anchor="ctr"/>
+            <a:lstStyle/>
+            <a:p>
+              <a:pPr algn="ctr"/>
+              <a:endParaRPr lang="en-US" dirty="0"/>
+            </a:p>
+          </p:txBody>
+        </p:sp>
+        <p:sp>
+          <p:nvSpPr>
+            <p:cNvPr id="329" name="Oval 328"/>
+            <p:cNvSpPr/>
+            <p:nvPr/>
+          </p:nvSpPr>
+          <p:spPr>
+            <a:xfrm>
+              <a:off x="2924781" y="3280114"/>
+              <a:ext cx="45720" cy="45720"/>
+            </a:xfrm>
+            <a:prstGeom prst="ellipse">
+              <a:avLst/>
+            </a:prstGeom>
+            <a:solidFill>
+              <a:srgbClr val="000000">
+                <a:alpha val="40000"/>
+              </a:srgbClr>
+            </a:solidFill>
+            <a:ln>
+              <a:noFill/>
+            </a:ln>
+          </p:spPr>
+          <p:style>
+            <a:lnRef idx="2">
+              <a:schemeClr val="accent1">
+                <a:shade val="50000"/>
+              </a:schemeClr>
+            </a:lnRef>
+            <a:fillRef idx="1">
+              <a:schemeClr val="accent1"/>
+            </a:fillRef>
+            <a:effectRef idx="0">
+              <a:schemeClr val="accent1"/>
+            </a:effectRef>
+            <a:fontRef idx="minor">
+              <a:schemeClr val="lt1"/>
+            </a:fontRef>
+          </p:style>
+          <p:txBody>
+            <a:bodyPr rtlCol="0" anchor="ctr"/>
+            <a:lstStyle/>
+            <a:p>
+              <a:pPr algn="ctr"/>
+              <a:endParaRPr lang="en-US" dirty="0"/>
+            </a:p>
+          </p:txBody>
+        </p:sp>
+      </p:grpSp>
+      <p:grpSp>
+        <p:nvGrpSpPr>
+          <p:cNvPr id="330" name="Group 329"/>
+          <p:cNvGrpSpPr/>
+          <p:nvPr/>
+        </p:nvGrpSpPr>
+        <p:grpSpPr>
+          <a:xfrm>
+            <a:off x="4150871" y="2996539"/>
+            <a:ext cx="1193283" cy="1882656"/>
+            <a:chOff x="4045394" y="3424269"/>
+            <a:chExt cx="1053212" cy="1661662"/>
+          </a:xfrm>
+        </p:grpSpPr>
+        <p:grpSp>
+          <p:nvGrpSpPr>
+            <p:cNvPr id="331" name="Group 330"/>
+            <p:cNvGrpSpPr/>
+            <p:nvPr/>
+          </p:nvGrpSpPr>
+          <p:grpSpPr>
+            <a:xfrm>
+              <a:off x="4045394" y="3424269"/>
+              <a:ext cx="1053212" cy="1661662"/>
+              <a:chOff x="4045394" y="3424269"/>
+              <a:chExt cx="1053212" cy="1661662"/>
+            </a:xfrm>
+          </p:grpSpPr>
+          <p:grpSp>
+            <p:nvGrpSpPr>
+              <p:cNvPr id="334" name="Group 333"/>
+              <p:cNvGrpSpPr/>
+              <p:nvPr/>
+            </p:nvGrpSpPr>
+            <p:grpSpPr>
+              <a:xfrm>
+                <a:off x="4045394" y="3424269"/>
+                <a:ext cx="1053212" cy="1661662"/>
+                <a:chOff x="4045394" y="3424269"/>
+                <a:chExt cx="1053212" cy="1661662"/>
+              </a:xfrm>
+            </p:grpSpPr>
+            <p:grpSp>
+              <p:nvGrpSpPr>
+                <p:cNvPr id="344" name="Group 343"/>
+                <p:cNvGrpSpPr/>
+                <p:nvPr/>
+              </p:nvGrpSpPr>
+              <p:grpSpPr>
+                <a:xfrm>
+                  <a:off x="4045394" y="3424269"/>
+                  <a:ext cx="1053212" cy="1661662"/>
+                  <a:chOff x="4045394" y="3424269"/>
+                  <a:chExt cx="1053212" cy="1661662"/>
+                </a:xfrm>
+              </p:grpSpPr>
+              <p:grpSp>
+                <p:nvGrpSpPr>
+                  <p:cNvPr id="349" name="Group 348"/>
+                  <p:cNvGrpSpPr/>
+                  <p:nvPr/>
+                </p:nvGrpSpPr>
+                <p:grpSpPr>
+                  <a:xfrm>
+                    <a:off x="4045394" y="3424269"/>
+                    <a:ext cx="1053212" cy="1661662"/>
+                    <a:chOff x="4045394" y="3424269"/>
+                    <a:chExt cx="1053212" cy="1661662"/>
+                  </a:xfrm>
+                </p:grpSpPr>
+                <p:grpSp>
+                  <p:nvGrpSpPr>
+                    <p:cNvPr id="351" name="Group 350"/>
+                    <p:cNvGrpSpPr/>
+                    <p:nvPr/>
+                  </p:nvGrpSpPr>
+                  <p:grpSpPr>
+                    <a:xfrm>
+                      <a:off x="4045394" y="3424269"/>
+                      <a:ext cx="1053212" cy="1661662"/>
+                      <a:chOff x="4045394" y="3424269"/>
+                      <a:chExt cx="1053212" cy="1661662"/>
+                    </a:xfrm>
+                  </p:grpSpPr>
+                  <p:sp>
+                    <p:nvSpPr>
+                      <p:cNvPr id="354" name="Rectangle 353"/>
+                      <p:cNvSpPr/>
+                      <p:nvPr/>
+                    </p:nvSpPr>
+                    <p:spPr>
+                      <a:xfrm>
+                        <a:off x="4045394" y="3424269"/>
+                        <a:ext cx="1053212" cy="1661662"/>
+                      </a:xfrm>
+                      <a:prstGeom prst="rect">
+                        <a:avLst/>
+                      </a:prstGeom>
+                      <a:solidFill>
+                        <a:srgbClr val="600000"/>
+                      </a:solidFill>
+                      <a:ln>
+                        <a:noFill/>
+                      </a:ln>
+                    </p:spPr>
+                    <p:style>
+                      <a:lnRef idx="2">
+                        <a:schemeClr val="accent1">
+                          <a:shade val="50000"/>
+                        </a:schemeClr>
+                      </a:lnRef>
+                      <a:fillRef idx="1">
+                        <a:schemeClr val="accent1"/>
+                      </a:fillRef>
+                      <a:effectRef idx="0">
+                        <a:schemeClr val="accent1"/>
+                      </a:effectRef>
+                      <a:fontRef idx="minor">
+                        <a:schemeClr val="lt1"/>
+                      </a:fontRef>
+                    </p:style>
+                    <p:txBody>
+                      <a:bodyPr rtlCol="0" anchor="ctr"/>
+                      <a:lstStyle/>
+                      <a:p>
+                        <a:pPr algn="ctr"/>
+                        <a:endParaRPr lang="en-US"/>
+                      </a:p>
+                    </p:txBody>
+                  </p:sp>
+                  <p:sp>
+                    <p:nvSpPr>
+                      <p:cNvPr id="355" name="Rectangle 354"/>
+                      <p:cNvSpPr/>
+                      <p:nvPr/>
+                    </p:nvSpPr>
+                    <p:spPr>
+                      <a:xfrm>
+                        <a:off x="4095844" y="3479800"/>
+                        <a:ext cx="941858" cy="1560382"/>
+                      </a:xfrm>
+                      <a:prstGeom prst="rect">
+                        <a:avLst/>
+                      </a:prstGeom>
+                      <a:solidFill>
+                        <a:srgbClr val="7E0000"/>
+                      </a:solidFill>
+                      <a:ln>
+                        <a:noFill/>
+                      </a:ln>
+                    </p:spPr>
+                    <p:style>
+                      <a:lnRef idx="2">
+                        <a:schemeClr val="accent1">
+                          <a:shade val="50000"/>
+                        </a:schemeClr>
+                      </a:lnRef>
+                      <a:fillRef idx="1">
+                        <a:schemeClr val="accent1"/>
+                      </a:fillRef>
+                      <a:effectRef idx="0">
+                        <a:schemeClr val="accent1"/>
+                      </a:effectRef>
+                      <a:fontRef idx="minor">
+                        <a:schemeClr val="lt1"/>
+                      </a:fontRef>
+                    </p:style>
+                    <p:txBody>
+                      <a:bodyPr rtlCol="0" anchor="ctr"/>
+                      <a:lstStyle/>
+                      <a:p>
+                        <a:pPr algn="ctr"/>
+                        <a:endParaRPr lang="en-US"/>
+                      </a:p>
+                    </p:txBody>
+                  </p:sp>
+                </p:grpSp>
+                <p:sp>
+                  <p:nvSpPr>
+                    <p:cNvPr id="352" name="Flowchart: Decision 351"/>
+                    <p:cNvSpPr/>
+                    <p:nvPr/>
+                  </p:nvSpPr>
+                  <p:spPr>
+                    <a:xfrm>
+                      <a:off x="4286448" y="3689424"/>
+                      <a:ext cx="557750" cy="1147353"/>
+                    </a:xfrm>
+                    <a:prstGeom prst="flowChartDecision">
+                      <a:avLst/>
+                    </a:prstGeom>
+                    <a:solidFill>
+                      <a:srgbClr val="600000"/>
+                    </a:solidFill>
+                    <a:ln>
+                      <a:noFill/>
+                    </a:ln>
+                  </p:spPr>
+                  <p:style>
+                    <a:lnRef idx="2">
+                      <a:schemeClr val="accent1">
+                        <a:shade val="50000"/>
+                      </a:schemeClr>
+                    </a:lnRef>
+                    <a:fillRef idx="1">
+                      <a:schemeClr val="accent1"/>
+                    </a:fillRef>
+                    <a:effectRef idx="0">
+                      <a:schemeClr val="accent1"/>
+                    </a:effectRef>
+                    <a:fontRef idx="minor">
+                      <a:schemeClr val="lt1"/>
+                    </a:fontRef>
+                  </p:style>
+                  <p:txBody>
+                    <a:bodyPr rtlCol="0" anchor="ctr"/>
+                    <a:lstStyle/>
+                    <a:p>
+                      <a:pPr algn="ctr"/>
+                      <a:endParaRPr lang="en-US"/>
+                    </a:p>
+                  </p:txBody>
+                </p:sp>
+                <p:sp>
+                  <p:nvSpPr>
+                    <p:cNvPr id="353" name="Flowchart: Decision 352"/>
+                    <p:cNvSpPr/>
+                    <p:nvPr/>
+                  </p:nvSpPr>
+                  <p:spPr>
+                    <a:xfrm>
+                      <a:off x="4340958" y="3778230"/>
+                      <a:ext cx="454128" cy="975257"/>
+                    </a:xfrm>
+                    <a:prstGeom prst="flowChartDecision">
+                      <a:avLst/>
+                    </a:prstGeom>
+                    <a:solidFill>
+                      <a:srgbClr val="A40000"/>
+                    </a:solidFill>
+                    <a:ln>
+                      <a:noFill/>
+                    </a:ln>
+                  </p:spPr>
+                  <p:style>
+                    <a:lnRef idx="2">
+                      <a:schemeClr val="accent1">
+                        <a:shade val="50000"/>
+                      </a:schemeClr>
+                    </a:lnRef>
+                    <a:fillRef idx="1">
+                      <a:schemeClr val="accent1"/>
+                    </a:fillRef>
+                    <a:effectRef idx="0">
+                      <a:schemeClr val="accent1"/>
+                    </a:effectRef>
+                    <a:fontRef idx="minor">
+                      <a:schemeClr val="lt1"/>
+                    </a:fontRef>
+                  </p:style>
+                  <p:txBody>
+                    <a:bodyPr rtlCol="0" anchor="ctr"/>
+                    <a:lstStyle/>
+                    <a:p>
+                      <a:pPr algn="ctr"/>
+                      <a:endParaRPr lang="en-US"/>
+                    </a:p>
+                  </p:txBody>
+                </p:sp>
+              </p:grpSp>
+              <p:sp>
+                <p:nvSpPr>
+                  <p:cNvPr id="350" name="Decagon 349"/>
+                  <p:cNvSpPr/>
+                  <p:nvPr/>
+                </p:nvSpPr>
+                <p:spPr>
+                  <a:xfrm>
+                    <a:off x="4419198" y="4118285"/>
+                    <a:ext cx="303176" cy="299435"/>
+                  </a:xfrm>
+                  <a:prstGeom prst="decagon">
+                    <a:avLst/>
+                  </a:prstGeom>
+                  <a:solidFill>
+                    <a:srgbClr val="7F6000">
+                      <a:alpha val="69804"/>
+                    </a:srgbClr>
+                  </a:solidFill>
+                  <a:ln>
+                    <a:noFill/>
+                  </a:ln>
+                </p:spPr>
+                <p:style>
+                  <a:lnRef idx="2">
+                    <a:schemeClr val="accent1">
+                      <a:shade val="50000"/>
+                    </a:schemeClr>
+                  </a:lnRef>
+                  <a:fillRef idx="1">
+                    <a:schemeClr val="accent1"/>
+                  </a:fillRef>
+                  <a:effectRef idx="0">
+                    <a:schemeClr val="accent1"/>
+                  </a:effectRef>
+                  <a:fontRef idx="minor">
+                    <a:schemeClr val="lt1"/>
+                  </a:fontRef>
+                </p:style>
+                <p:txBody>
+                  <a:bodyPr rtlCol="0" anchor="ctr"/>
+                  <a:lstStyle/>
+                  <a:p>
+                    <a:pPr algn="ctr"/>
+                    <a:endParaRPr lang="en-US"/>
+                  </a:p>
+                </p:txBody>
+              </p:sp>
+            </p:grpSp>
+            <p:sp>
+              <p:nvSpPr>
+                <p:cNvPr id="345" name="L-Shape 344"/>
+                <p:cNvSpPr/>
+                <p:nvPr/>
+              </p:nvSpPr>
+              <p:spPr>
+                <a:xfrm>
+                  <a:off x="4095844" y="4779648"/>
+                  <a:ext cx="260534" cy="260534"/>
+                </a:xfrm>
+                <a:prstGeom prst="corner">
+                  <a:avLst/>
+                </a:prstGeom>
+                <a:solidFill>
+                  <a:srgbClr val="7F6000">
+                    <a:alpha val="69804"/>
+                  </a:srgbClr>
+                </a:solidFill>
+                <a:ln>
+                  <a:noFill/>
+                </a:ln>
+              </p:spPr>
+              <p:style>
+                <a:lnRef idx="2">
+                  <a:schemeClr val="accent1">
+                    <a:shade val="50000"/>
+                  </a:schemeClr>
+                </a:lnRef>
+                <a:fillRef idx="1">
+                  <a:schemeClr val="accent1"/>
+                </a:fillRef>
+                <a:effectRef idx="0">
+                  <a:schemeClr val="accent1"/>
+                </a:effectRef>
+                <a:fontRef idx="minor">
+                  <a:schemeClr val="lt1"/>
+                </a:fontRef>
+              </p:style>
+              <p:txBody>
+                <a:bodyPr rtlCol="0" anchor="ctr"/>
+                <a:lstStyle/>
+                <a:p>
+                  <a:pPr algn="ctr"/>
+                  <a:endParaRPr lang="en-US"/>
+                </a:p>
+              </p:txBody>
+            </p:sp>
+            <p:sp>
+              <p:nvSpPr>
+                <p:cNvPr id="346" name="L-Shape 345"/>
+                <p:cNvSpPr/>
+                <p:nvPr/>
+              </p:nvSpPr>
+              <p:spPr>
+                <a:xfrm rot="16200000">
+                  <a:off x="4772311" y="4779648"/>
+                  <a:ext cx="260534" cy="260534"/>
+                </a:xfrm>
+                <a:prstGeom prst="corner">
+                  <a:avLst/>
+                </a:prstGeom>
+                <a:solidFill>
+                  <a:srgbClr val="7F6000">
+                    <a:alpha val="69804"/>
+                  </a:srgbClr>
+                </a:solidFill>
+                <a:ln>
+                  <a:noFill/>
+                </a:ln>
+              </p:spPr>
+              <p:style>
+                <a:lnRef idx="2">
+                  <a:schemeClr val="accent1">
+                    <a:shade val="50000"/>
+                  </a:schemeClr>
+                </a:lnRef>
+                <a:fillRef idx="1">
+                  <a:schemeClr val="accent1"/>
+                </a:fillRef>
+                <a:effectRef idx="0">
+                  <a:schemeClr val="accent1"/>
+                </a:effectRef>
+                <a:fontRef idx="minor">
+                  <a:schemeClr val="lt1"/>
+                </a:fontRef>
+              </p:style>
+              <p:txBody>
+                <a:bodyPr rtlCol="0" anchor="ctr"/>
+                <a:lstStyle/>
+                <a:p>
+                  <a:pPr algn="ctr"/>
+                  <a:endParaRPr lang="en-US"/>
+                </a:p>
+              </p:txBody>
+            </p:sp>
+            <p:sp>
+              <p:nvSpPr>
+                <p:cNvPr id="347" name="L-Shape 346"/>
+                <p:cNvSpPr/>
+                <p:nvPr/>
+              </p:nvSpPr>
+              <p:spPr>
+                <a:xfrm rot="10800000">
+                  <a:off x="4779138" y="3476808"/>
+                  <a:ext cx="260534" cy="260534"/>
+                </a:xfrm>
+                <a:prstGeom prst="corner">
+                  <a:avLst/>
+                </a:prstGeom>
+                <a:solidFill>
+                  <a:srgbClr val="7F6000">
+                    <a:alpha val="69804"/>
+                  </a:srgbClr>
+                </a:solidFill>
+                <a:ln>
+                  <a:noFill/>
+                </a:ln>
+              </p:spPr>
+              <p:style>
+                <a:lnRef idx="2">
+                  <a:schemeClr val="accent1">
+                    <a:shade val="50000"/>
+                  </a:schemeClr>
+                </a:lnRef>
+                <a:fillRef idx="1">
+                  <a:schemeClr val="accent1"/>
+                </a:fillRef>
+                <a:effectRef idx="0">
+                  <a:schemeClr val="accent1"/>
+                </a:effectRef>
+                <a:fontRef idx="minor">
+                  <a:schemeClr val="lt1"/>
+                </a:fontRef>
+              </p:style>
+              <p:txBody>
+                <a:bodyPr rtlCol="0" anchor="ctr"/>
+                <a:lstStyle/>
+                <a:p>
+                  <a:pPr algn="ctr"/>
+                  <a:endParaRPr lang="en-US"/>
+                </a:p>
+              </p:txBody>
+            </p:sp>
+            <p:sp>
+              <p:nvSpPr>
+                <p:cNvPr id="348" name="L-Shape 347"/>
+                <p:cNvSpPr/>
+                <p:nvPr/>
+              </p:nvSpPr>
+              <p:spPr>
+                <a:xfrm rot="5400000">
+                  <a:off x="4102671" y="3476808"/>
+                  <a:ext cx="260534" cy="260534"/>
+                </a:xfrm>
+                <a:prstGeom prst="corner">
+                  <a:avLst/>
+                </a:prstGeom>
+                <a:solidFill>
+                  <a:srgbClr val="7F6000">
+                    <a:alpha val="69804"/>
+                  </a:srgbClr>
+                </a:solidFill>
+                <a:ln>
+                  <a:noFill/>
+                </a:ln>
+              </p:spPr>
+              <p:style>
+                <a:lnRef idx="2">
+                  <a:schemeClr val="accent1">
+                    <a:shade val="50000"/>
+                  </a:schemeClr>
+                </a:lnRef>
+                <a:fillRef idx="1">
+                  <a:schemeClr val="accent1"/>
+                </a:fillRef>
+                <a:effectRef idx="0">
+                  <a:schemeClr val="accent1"/>
+                </a:effectRef>
+                <a:fontRef idx="minor">
+                  <a:schemeClr val="lt1"/>
+                </a:fontRef>
+              </p:style>
+              <p:txBody>
+                <a:bodyPr rtlCol="0" anchor="ctr"/>
+                <a:lstStyle/>
+                <a:p>
+                  <a:pPr algn="ctr"/>
+                  <a:endParaRPr lang="en-US"/>
+                </a:p>
+              </p:txBody>
+            </p:sp>
+          </p:grpSp>
+          <p:sp>
+            <p:nvSpPr>
+              <p:cNvPr id="335" name="Oval 334"/>
+              <p:cNvSpPr/>
+              <p:nvPr/>
+            </p:nvSpPr>
+            <p:spPr>
+              <a:xfrm>
+                <a:off x="4480181" y="4180718"/>
+                <a:ext cx="179805" cy="179807"/>
+              </a:xfrm>
+              <a:prstGeom prst="ellipse">
+                <a:avLst/>
+              </a:prstGeom>
+              <a:solidFill>
+                <a:srgbClr val="000000">
+                  <a:alpha val="30196"/>
+                </a:srgbClr>
+              </a:solidFill>
+              <a:ln>
+                <a:noFill/>
+              </a:ln>
+            </p:spPr>
+            <p:style>
+              <a:lnRef idx="2">
+                <a:schemeClr val="accent1">
+                  <a:shade val="50000"/>
+                </a:schemeClr>
+              </a:lnRef>
+              <a:fillRef idx="1">
+                <a:schemeClr val="accent1"/>
+              </a:fillRef>
+              <a:effectRef idx="0">
+                <a:schemeClr val="accent1"/>
+              </a:effectRef>
+              <a:fontRef idx="minor">
+                <a:schemeClr val="lt1"/>
+              </a:fontRef>
+            </p:style>
+            <p:txBody>
+              <a:bodyPr rtlCol="0" anchor="ctr"/>
+              <a:lstStyle/>
+              <a:p>
+                <a:pPr algn="ctr"/>
+                <a:endParaRPr lang="en-US"/>
+              </a:p>
+            </p:txBody>
+          </p:sp>
+          <p:sp>
+            <p:nvSpPr>
+              <p:cNvPr id="336" name="Oval 335"/>
+              <p:cNvSpPr/>
+              <p:nvPr/>
+            </p:nvSpPr>
+            <p:spPr>
+              <a:xfrm>
+                <a:off x="4819502" y="3529691"/>
+                <a:ext cx="179806" cy="179806"/>
+              </a:xfrm>
+              <a:prstGeom prst="ellipse">
+                <a:avLst/>
+              </a:prstGeom>
+              <a:solidFill>
+                <a:srgbClr val="000000">
+                  <a:alpha val="30196"/>
+                </a:srgbClr>
+              </a:solidFill>
+              <a:ln>
+                <a:noFill/>
+              </a:ln>
+            </p:spPr>
+            <p:style>
+              <a:lnRef idx="2">
+                <a:schemeClr val="accent1">
+                  <a:shade val="50000"/>
+                </a:schemeClr>
+              </a:lnRef>
+              <a:fillRef idx="1">
+                <a:schemeClr val="accent1"/>
+              </a:fillRef>
+              <a:effectRef idx="0">
+                <a:schemeClr val="accent1"/>
+              </a:effectRef>
+              <a:fontRef idx="minor">
+                <a:schemeClr val="lt1"/>
+              </a:fontRef>
+            </p:style>
+            <p:txBody>
+              <a:bodyPr rtlCol="0" anchor="ctr"/>
+              <a:lstStyle/>
+              <a:p>
+                <a:pPr algn="ctr"/>
+                <a:endParaRPr lang="en-US"/>
+              </a:p>
+            </p:txBody>
+          </p:sp>
+          <p:sp>
+            <p:nvSpPr>
+              <p:cNvPr id="337" name="Oval 336"/>
+              <p:cNvSpPr/>
+              <p:nvPr/>
+            </p:nvSpPr>
+            <p:spPr>
+              <a:xfrm>
+                <a:off x="4152342" y="3520073"/>
+                <a:ext cx="179806" cy="179806"/>
+              </a:xfrm>
+              <a:prstGeom prst="ellipse">
+                <a:avLst/>
+              </a:prstGeom>
+              <a:solidFill>
+                <a:srgbClr val="000000">
+                  <a:alpha val="30196"/>
+                </a:srgbClr>
+              </a:solidFill>
+              <a:ln>
+                <a:noFill/>
+              </a:ln>
+            </p:spPr>
+            <p:style>
+              <a:lnRef idx="2">
+                <a:schemeClr val="accent1">
+                  <a:shade val="50000"/>
+                </a:schemeClr>
+              </a:lnRef>
+              <a:fillRef idx="1">
+                <a:schemeClr val="accent1"/>
+              </a:fillRef>
+              <a:effectRef idx="0">
+                <a:schemeClr val="accent1"/>
+              </a:effectRef>
+              <a:fontRef idx="minor">
+                <a:schemeClr val="lt1"/>
+              </a:fontRef>
+            </p:style>
+            <p:txBody>
+              <a:bodyPr rtlCol="0" anchor="ctr"/>
+              <a:lstStyle/>
+              <a:p>
+                <a:pPr algn="ctr"/>
+                <a:endParaRPr lang="en-US"/>
+              </a:p>
+            </p:txBody>
+          </p:sp>
+          <p:sp>
+            <p:nvSpPr>
+              <p:cNvPr id="338" name="Oval 337"/>
+              <p:cNvSpPr/>
+              <p:nvPr/>
+            </p:nvSpPr>
+            <p:spPr>
+              <a:xfrm>
+                <a:off x="4809764" y="4830666"/>
+                <a:ext cx="179805" cy="179807"/>
+              </a:xfrm>
+              <a:prstGeom prst="ellipse">
+                <a:avLst/>
+              </a:prstGeom>
+              <a:solidFill>
+                <a:srgbClr val="000000">
+                  <a:alpha val="30196"/>
+                </a:srgbClr>
+              </a:solidFill>
+              <a:ln>
+                <a:noFill/>
+              </a:ln>
+            </p:spPr>
+            <p:style>
+              <a:lnRef idx="2">
+                <a:schemeClr val="accent1">
+                  <a:shade val="50000"/>
+                </a:schemeClr>
+              </a:lnRef>
+              <a:fillRef idx="1">
+                <a:schemeClr val="accent1"/>
+              </a:fillRef>
+              <a:effectRef idx="0">
+                <a:schemeClr val="accent1"/>
+              </a:effectRef>
+              <a:fontRef idx="minor">
+                <a:schemeClr val="lt1"/>
+              </a:fontRef>
+            </p:style>
+            <p:txBody>
+              <a:bodyPr rtlCol="0" anchor="ctr"/>
+              <a:lstStyle/>
+              <a:p>
+                <a:pPr algn="ctr"/>
+                <a:endParaRPr lang="en-US"/>
+              </a:p>
+            </p:txBody>
+          </p:sp>
+          <p:sp>
+            <p:nvSpPr>
+              <p:cNvPr id="339" name="Oval 338"/>
+              <p:cNvSpPr/>
+              <p:nvPr/>
+            </p:nvSpPr>
+            <p:spPr>
+              <a:xfrm>
+                <a:off x="4142604" y="4821048"/>
+                <a:ext cx="179805" cy="179807"/>
+              </a:xfrm>
+              <a:prstGeom prst="ellipse">
+                <a:avLst/>
+              </a:prstGeom>
+              <a:solidFill>
+                <a:srgbClr val="000000">
+                  <a:alpha val="30196"/>
+                </a:srgbClr>
+              </a:solidFill>
+              <a:ln>
+                <a:noFill/>
+              </a:ln>
+            </p:spPr>
+            <p:style>
+              <a:lnRef idx="2">
+                <a:schemeClr val="accent1">
+                  <a:shade val="50000"/>
+                </a:schemeClr>
+              </a:lnRef>
+              <a:fillRef idx="1">
+                <a:schemeClr val="accent1"/>
+              </a:fillRef>
+              <a:effectRef idx="0">
+                <a:schemeClr val="accent1"/>
+              </a:effectRef>
+              <a:fontRef idx="minor">
+                <a:schemeClr val="lt1"/>
+              </a:fontRef>
+            </p:style>
+            <p:txBody>
+              <a:bodyPr rtlCol="0" anchor="ctr"/>
+              <a:lstStyle/>
+              <a:p>
+                <a:pPr algn="ctr"/>
+                <a:endParaRPr lang="en-US"/>
+              </a:p>
+            </p:txBody>
+          </p:sp>
+          <p:sp>
+            <p:nvSpPr>
+              <p:cNvPr id="340" name="Oval 339"/>
+              <p:cNvSpPr/>
+              <p:nvPr/>
+            </p:nvSpPr>
+            <p:spPr>
+              <a:xfrm>
+                <a:off x="4248978" y="4013294"/>
+                <a:ext cx="103054" cy="103054"/>
+              </a:xfrm>
+              <a:prstGeom prst="ellipse">
+                <a:avLst/>
+              </a:prstGeom>
+              <a:solidFill>
+                <a:srgbClr val="000000">
+                  <a:alpha val="60000"/>
+                </a:srgbClr>
+              </a:solidFill>
+              <a:ln>
+                <a:solidFill>
+                  <a:srgbClr val="7F6000">
+                    <a:alpha val="60000"/>
+                  </a:srgbClr>
+                </a:solidFill>
+              </a:ln>
+            </p:spPr>
+            <p:style>
+              <a:lnRef idx="2">
+                <a:schemeClr val="accent1">
+                  <a:shade val="50000"/>
+                </a:schemeClr>
+              </a:lnRef>
+              <a:fillRef idx="1">
+                <a:schemeClr val="accent1"/>
+              </a:fillRef>
+              <a:effectRef idx="0">
+                <a:schemeClr val="accent1"/>
+              </a:effectRef>
+              <a:fontRef idx="minor">
+                <a:schemeClr val="lt1"/>
+              </a:fontRef>
+            </p:style>
+            <p:txBody>
+              <a:bodyPr rtlCol="0" anchor="ctr"/>
+              <a:lstStyle/>
+              <a:p>
+                <a:pPr algn="ctr"/>
+                <a:endParaRPr lang="en-US"/>
+              </a:p>
+            </p:txBody>
+          </p:sp>
+          <p:sp>
+            <p:nvSpPr>
+              <p:cNvPr id="356" name="Oval 355"/>
+              <p:cNvSpPr/>
+              <p:nvPr/>
+            </p:nvSpPr>
+            <p:spPr>
+              <a:xfrm>
+                <a:off x="4369781" y="3745246"/>
+                <a:ext cx="103054" cy="103054"/>
+              </a:xfrm>
+              <a:prstGeom prst="ellipse">
+                <a:avLst/>
+              </a:prstGeom>
+              <a:solidFill>
+                <a:srgbClr val="000000">
+                  <a:alpha val="60000"/>
+                </a:srgbClr>
+              </a:solidFill>
+              <a:ln>
+                <a:solidFill>
+                  <a:srgbClr val="7F6000">
+                    <a:alpha val="60000"/>
+                  </a:srgbClr>
+                </a:solidFill>
+              </a:ln>
+            </p:spPr>
+            <p:style>
+              <a:lnRef idx="2">
+                <a:schemeClr val="accent1">
+                  <a:shade val="50000"/>
+                </a:schemeClr>
+              </a:lnRef>
+              <a:fillRef idx="1">
+                <a:schemeClr val="accent1"/>
+              </a:fillRef>
+              <a:effectRef idx="0">
+                <a:schemeClr val="accent1"/>
+              </a:effectRef>
+              <a:fontRef idx="minor">
+                <a:schemeClr val="lt1"/>
+              </a:fontRef>
+            </p:style>
+            <p:txBody>
+              <a:bodyPr rtlCol="0" anchor="ctr"/>
+              <a:lstStyle/>
+              <a:p>
+                <a:pPr algn="ctr"/>
+                <a:endParaRPr lang="en-US"/>
+              </a:p>
+            </p:txBody>
+          </p:sp>
+          <p:sp>
+            <p:nvSpPr>
+              <p:cNvPr id="357" name="Oval 356"/>
+              <p:cNvSpPr/>
+              <p:nvPr/>
+            </p:nvSpPr>
+            <p:spPr>
+              <a:xfrm>
+                <a:off x="4770417" y="4013294"/>
+                <a:ext cx="103054" cy="103054"/>
+              </a:xfrm>
+              <a:prstGeom prst="ellipse">
+                <a:avLst/>
+              </a:prstGeom>
+              <a:solidFill>
+                <a:srgbClr val="000000">
+                  <a:alpha val="60000"/>
+                </a:srgbClr>
+              </a:solidFill>
+              <a:ln>
+                <a:solidFill>
+                  <a:srgbClr val="7F6000">
+                    <a:alpha val="60000"/>
+                  </a:srgbClr>
+                </a:solidFill>
+              </a:ln>
+            </p:spPr>
+            <p:style>
+              <a:lnRef idx="2">
+                <a:schemeClr val="accent1">
+                  <a:shade val="50000"/>
+                </a:schemeClr>
+              </a:lnRef>
+              <a:fillRef idx="1">
+                <a:schemeClr val="accent1"/>
+              </a:fillRef>
+              <a:effectRef idx="0">
+                <a:schemeClr val="accent1"/>
+              </a:effectRef>
+              <a:fontRef idx="minor">
+                <a:schemeClr val="lt1"/>
+              </a:fontRef>
+            </p:style>
+            <p:txBody>
+              <a:bodyPr rtlCol="0" anchor="ctr"/>
+              <a:lstStyle/>
+              <a:p>
+                <a:pPr algn="ctr"/>
+                <a:endParaRPr lang="en-US"/>
+              </a:p>
+            </p:txBody>
+          </p:sp>
+          <p:sp>
+            <p:nvSpPr>
+              <p:cNvPr id="358" name="Oval 357"/>
+              <p:cNvSpPr/>
+              <p:nvPr/>
+            </p:nvSpPr>
+            <p:spPr>
+              <a:xfrm>
+                <a:off x="4660292" y="3745246"/>
+                <a:ext cx="103054" cy="103054"/>
+              </a:xfrm>
+              <a:prstGeom prst="ellipse">
+                <a:avLst/>
+              </a:prstGeom>
+              <a:solidFill>
+                <a:srgbClr val="000000">
+                  <a:alpha val="60000"/>
+                </a:srgbClr>
+              </a:solidFill>
+              <a:ln>
+                <a:solidFill>
+                  <a:srgbClr val="7F6000">
+                    <a:alpha val="60000"/>
+                  </a:srgbClr>
+                </a:solidFill>
+              </a:ln>
+            </p:spPr>
+            <p:style>
+              <a:lnRef idx="2">
+                <a:schemeClr val="accent1">
+                  <a:shade val="50000"/>
+                </a:schemeClr>
+              </a:lnRef>
+              <a:fillRef idx="1">
+                <a:schemeClr val="accent1"/>
+              </a:fillRef>
+              <a:effectRef idx="0">
+                <a:schemeClr val="accent1"/>
+              </a:effectRef>
+              <a:fontRef idx="minor">
+                <a:schemeClr val="lt1"/>
+              </a:fontRef>
+            </p:style>
+            <p:txBody>
+              <a:bodyPr rtlCol="0" anchor="ctr"/>
+              <a:lstStyle/>
+              <a:p>
+                <a:pPr algn="ctr"/>
+                <a:endParaRPr lang="en-US"/>
+              </a:p>
+            </p:txBody>
+          </p:sp>
+          <p:sp>
+            <p:nvSpPr>
+              <p:cNvPr id="359" name="Oval 358"/>
+              <p:cNvSpPr/>
+              <p:nvPr/>
+            </p:nvSpPr>
+            <p:spPr>
+              <a:xfrm>
+                <a:off x="4248978" y="4407080"/>
+                <a:ext cx="103054" cy="103054"/>
+              </a:xfrm>
+              <a:prstGeom prst="ellipse">
+                <a:avLst/>
+              </a:prstGeom>
+              <a:solidFill>
+                <a:srgbClr val="000000">
+                  <a:alpha val="60000"/>
+                </a:srgbClr>
+              </a:solidFill>
+              <a:ln>
+                <a:solidFill>
+                  <a:srgbClr val="7F6000">
+                    <a:alpha val="60000"/>
+                  </a:srgbClr>
+                </a:solidFill>
+              </a:ln>
+            </p:spPr>
+            <p:style>
+              <a:lnRef idx="2">
+                <a:schemeClr val="accent1">
+                  <a:shade val="50000"/>
+                </a:schemeClr>
+              </a:lnRef>
+              <a:fillRef idx="1">
+                <a:schemeClr val="accent1"/>
+              </a:fillRef>
+              <a:effectRef idx="0">
+                <a:schemeClr val="accent1"/>
+              </a:effectRef>
+              <a:fontRef idx="minor">
+                <a:schemeClr val="lt1"/>
+              </a:fontRef>
+            </p:style>
+            <p:txBody>
+              <a:bodyPr rtlCol="0" anchor="ctr"/>
+              <a:lstStyle/>
+              <a:p>
+                <a:pPr algn="ctr"/>
+                <a:endParaRPr lang="en-US"/>
+              </a:p>
+            </p:txBody>
+          </p:sp>
+          <p:sp>
+            <p:nvSpPr>
+              <p:cNvPr id="360" name="Oval 359"/>
+              <p:cNvSpPr/>
+              <p:nvPr/>
+            </p:nvSpPr>
+            <p:spPr>
+              <a:xfrm>
+                <a:off x="4770417" y="4407080"/>
+                <a:ext cx="103054" cy="103054"/>
+              </a:xfrm>
+              <a:prstGeom prst="ellipse">
+                <a:avLst/>
+              </a:prstGeom>
+              <a:solidFill>
+                <a:srgbClr val="000000">
+                  <a:alpha val="60000"/>
+                </a:srgbClr>
+              </a:solidFill>
+              <a:ln>
+                <a:solidFill>
+                  <a:srgbClr val="7F6000">
+                    <a:alpha val="60000"/>
+                  </a:srgbClr>
+                </a:solidFill>
+              </a:ln>
+            </p:spPr>
+            <p:style>
+              <a:lnRef idx="2">
+                <a:schemeClr val="accent1">
+                  <a:shade val="50000"/>
+                </a:schemeClr>
+              </a:lnRef>
+              <a:fillRef idx="1">
+                <a:schemeClr val="accent1"/>
+              </a:fillRef>
+              <a:effectRef idx="0">
+                <a:schemeClr val="accent1"/>
+              </a:effectRef>
+              <a:fontRef idx="minor">
+                <a:schemeClr val="lt1"/>
+              </a:fontRef>
+            </p:style>
+            <p:txBody>
+              <a:bodyPr rtlCol="0" anchor="ctr"/>
+              <a:lstStyle/>
+              <a:p>
+                <a:pPr algn="ctr"/>
+                <a:endParaRPr lang="en-US"/>
+              </a:p>
+            </p:txBody>
+          </p:sp>
+          <p:sp>
+            <p:nvSpPr>
+              <p:cNvPr id="361" name="Oval 360"/>
+              <p:cNvSpPr/>
+              <p:nvPr/>
+            </p:nvSpPr>
+            <p:spPr>
+              <a:xfrm>
+                <a:off x="4369781" y="4650433"/>
+                <a:ext cx="103054" cy="103054"/>
+              </a:xfrm>
+              <a:prstGeom prst="ellipse">
+                <a:avLst/>
+              </a:prstGeom>
+              <a:solidFill>
+                <a:srgbClr val="000000">
+                  <a:alpha val="60000"/>
+                </a:srgbClr>
+              </a:solidFill>
+              <a:ln>
+                <a:solidFill>
+                  <a:srgbClr val="7F6000">
+                    <a:alpha val="60000"/>
+                  </a:srgbClr>
+                </a:solidFill>
+              </a:ln>
+            </p:spPr>
+            <p:style>
+              <a:lnRef idx="2">
+                <a:schemeClr val="accent1">
+                  <a:shade val="50000"/>
+                </a:schemeClr>
+              </a:lnRef>
+              <a:fillRef idx="1">
+                <a:schemeClr val="accent1"/>
+              </a:fillRef>
+              <a:effectRef idx="0">
+                <a:schemeClr val="accent1"/>
+              </a:effectRef>
+              <a:fontRef idx="minor">
+                <a:schemeClr val="lt1"/>
+              </a:fontRef>
+            </p:style>
+            <p:txBody>
+              <a:bodyPr rtlCol="0" anchor="ctr"/>
+              <a:lstStyle/>
+              <a:p>
+                <a:pPr algn="ctr"/>
+                <a:endParaRPr lang="en-US"/>
+              </a:p>
+            </p:txBody>
+          </p:sp>
+          <p:sp>
+            <p:nvSpPr>
+              <p:cNvPr id="362" name="Oval 361"/>
+              <p:cNvSpPr/>
+              <p:nvPr/>
+            </p:nvSpPr>
+            <p:spPr>
+              <a:xfrm>
+                <a:off x="4660292" y="4650433"/>
+                <a:ext cx="103054" cy="103054"/>
+              </a:xfrm>
+              <a:prstGeom prst="ellipse">
+                <a:avLst/>
+              </a:prstGeom>
+              <a:solidFill>
+                <a:srgbClr val="000000">
+                  <a:alpha val="60000"/>
+                </a:srgbClr>
+              </a:solidFill>
+              <a:ln>
+                <a:solidFill>
+                  <a:srgbClr val="7F6000">
+                    <a:alpha val="60000"/>
+                  </a:srgbClr>
+                </a:solidFill>
+              </a:ln>
+            </p:spPr>
+            <p:style>
+              <a:lnRef idx="2">
+                <a:schemeClr val="accent1">
+                  <a:shade val="50000"/>
+                </a:schemeClr>
+              </a:lnRef>
+              <a:fillRef idx="1">
+                <a:schemeClr val="accent1"/>
+              </a:fillRef>
+              <a:effectRef idx="0">
+                <a:schemeClr val="accent1"/>
+              </a:effectRef>
+              <a:fontRef idx="minor">
+                <a:schemeClr val="lt1"/>
+              </a:fontRef>
+            </p:style>
+            <p:txBody>
+              <a:bodyPr rtlCol="0" anchor="ctr"/>
+              <a:lstStyle/>
+              <a:p>
+                <a:pPr algn="ctr"/>
+                <a:endParaRPr lang="en-US"/>
+              </a:p>
+            </p:txBody>
+          </p:sp>
+        </p:grpSp>
+        <p:sp>
+          <p:nvSpPr>
+            <p:cNvPr id="332" name="Rectangle 331"/>
+            <p:cNvSpPr/>
+            <p:nvPr/>
+          </p:nvSpPr>
+          <p:spPr>
+            <a:xfrm>
+              <a:off x="4921326" y="3800488"/>
+              <a:ext cx="118345" cy="954704"/>
+            </a:xfrm>
+            <a:prstGeom prst="rect">
+              <a:avLst/>
+            </a:prstGeom>
+            <a:solidFill>
+              <a:srgbClr val="7F6000">
+                <a:alpha val="29804"/>
+              </a:srgbClr>
+            </a:solidFill>
+            <a:ln>
+              <a:noFill/>
+            </a:ln>
+          </p:spPr>
+          <p:style>
+            <a:lnRef idx="2">
+              <a:schemeClr val="accent1">
+                <a:shade val="50000"/>
+              </a:schemeClr>
+            </a:lnRef>
+            <a:fillRef idx="1">
+              <a:schemeClr val="accent1"/>
+            </a:fillRef>
+            <a:effectRef idx="0">
+              <a:schemeClr val="accent1"/>
+            </a:effectRef>
+            <a:fontRef idx="minor">
+              <a:schemeClr val="lt1"/>
+            </a:fontRef>
+          </p:style>
+          <p:txBody>
+            <a:bodyPr rtlCol="0" anchor="ctr"/>
+            <a:lstStyle/>
+            <a:p>
+              <a:pPr algn="ctr"/>
+              <a:endParaRPr lang="en-US"/>
+            </a:p>
+          </p:txBody>
+        </p:sp>
+        <p:sp>
+          <p:nvSpPr>
+            <p:cNvPr id="333" name="Rectangle 332"/>
+            <p:cNvSpPr/>
+            <p:nvPr/>
+          </p:nvSpPr>
+          <p:spPr>
+            <a:xfrm>
+              <a:off x="4095845" y="3800489"/>
+              <a:ext cx="118345" cy="954705"/>
+            </a:xfrm>
+            <a:prstGeom prst="rect">
+              <a:avLst/>
+            </a:prstGeom>
+            <a:solidFill>
+              <a:srgbClr val="7F6000">
+                <a:alpha val="29804"/>
+              </a:srgbClr>
+            </a:solidFill>
+            <a:ln>
+              <a:noFill/>
+            </a:ln>
+          </p:spPr>
+          <p:style>
+            <a:lnRef idx="2">
+              <a:schemeClr val="accent1">
+                <a:shade val="50000"/>
+              </a:schemeClr>
+            </a:lnRef>
+            <a:fillRef idx="1">
+              <a:schemeClr val="accent1"/>
+            </a:fillRef>
+            <a:effectRef idx="0">
+              <a:schemeClr val="accent1"/>
+            </a:effectRef>
+            <a:fontRef idx="minor">
+              <a:schemeClr val="lt1"/>
+            </a:fontRef>
+          </p:style>
+          <p:txBody>
+            <a:bodyPr rtlCol="0" anchor="ctr"/>
+            <a:lstStyle/>
+            <a:p>
+              <a:pPr algn="ctr"/>
+              <a:endParaRPr lang="en-US"/>
+            </a:p>
+          </p:txBody>
+        </p:sp>
+      </p:grpSp>
+      <p:grpSp>
+        <p:nvGrpSpPr>
+          <p:cNvPr id="363" name="Group 362"/>
+          <p:cNvGrpSpPr/>
+          <p:nvPr/>
+        </p:nvGrpSpPr>
+        <p:grpSpPr>
+          <a:xfrm>
+            <a:off x="385545" y="2199922"/>
+            <a:ext cx="960865" cy="1515967"/>
+            <a:chOff x="4045394" y="3424269"/>
+            <a:chExt cx="1053212" cy="1661662"/>
+          </a:xfrm>
+        </p:grpSpPr>
+        <p:grpSp>
+          <p:nvGrpSpPr>
+            <p:cNvPr id="364" name="Group 363"/>
+            <p:cNvGrpSpPr/>
+            <p:nvPr/>
+          </p:nvGrpSpPr>
+          <p:grpSpPr>
+            <a:xfrm>
+              <a:off x="4045394" y="3424269"/>
+              <a:ext cx="1053212" cy="1661662"/>
+              <a:chOff x="4045394" y="3424269"/>
+              <a:chExt cx="1053212" cy="1661662"/>
+            </a:xfrm>
+          </p:grpSpPr>
+          <p:grpSp>
+            <p:nvGrpSpPr>
+              <p:cNvPr id="367" name="Group 366"/>
+              <p:cNvGrpSpPr/>
+              <p:nvPr/>
+            </p:nvGrpSpPr>
+            <p:grpSpPr>
+              <a:xfrm>
+                <a:off x="4045394" y="3424269"/>
+                <a:ext cx="1053212" cy="1661662"/>
+                <a:chOff x="4045394" y="3424269"/>
+                <a:chExt cx="1053212" cy="1661662"/>
+              </a:xfrm>
+            </p:grpSpPr>
+            <p:grpSp>
+              <p:nvGrpSpPr>
+                <p:cNvPr id="377" name="Group 376"/>
+                <p:cNvGrpSpPr/>
+                <p:nvPr/>
+              </p:nvGrpSpPr>
+              <p:grpSpPr>
+                <a:xfrm>
+                  <a:off x="4045394" y="3424269"/>
+                  <a:ext cx="1053212" cy="1661662"/>
+                  <a:chOff x="4045394" y="3424269"/>
+                  <a:chExt cx="1053212" cy="1661662"/>
+                </a:xfrm>
+              </p:grpSpPr>
+              <p:grpSp>
+                <p:nvGrpSpPr>
+                  <p:cNvPr id="382" name="Group 381"/>
+                  <p:cNvGrpSpPr/>
+                  <p:nvPr/>
+                </p:nvGrpSpPr>
+                <p:grpSpPr>
+                  <a:xfrm>
+                    <a:off x="4045394" y="3424269"/>
+                    <a:ext cx="1053212" cy="1661662"/>
+                    <a:chOff x="4045394" y="3424269"/>
+                    <a:chExt cx="1053212" cy="1661662"/>
+                  </a:xfrm>
+                </p:grpSpPr>
+                <p:grpSp>
+                  <p:nvGrpSpPr>
+                    <p:cNvPr id="384" name="Group 383"/>
+                    <p:cNvGrpSpPr/>
+                    <p:nvPr/>
+                  </p:nvGrpSpPr>
+                  <p:grpSpPr>
+                    <a:xfrm>
+                      <a:off x="4045394" y="3424269"/>
+                      <a:ext cx="1053212" cy="1661662"/>
+                      <a:chOff x="4045394" y="3424269"/>
+                      <a:chExt cx="1053212" cy="1661662"/>
+                    </a:xfrm>
+                  </p:grpSpPr>
+                  <p:sp>
+                    <p:nvSpPr>
+                      <p:cNvPr id="387" name="Rectangle 386"/>
+                      <p:cNvSpPr/>
+                      <p:nvPr/>
+                    </p:nvSpPr>
+                    <p:spPr>
+                      <a:xfrm>
+                        <a:off x="4045394" y="3424269"/>
+                        <a:ext cx="1053212" cy="1661662"/>
+                      </a:xfrm>
+                      <a:prstGeom prst="rect">
+                        <a:avLst/>
+                      </a:prstGeom>
+                      <a:solidFill>
+                        <a:srgbClr val="600000"/>
+                      </a:solidFill>
+                      <a:ln>
+                        <a:noFill/>
+                      </a:ln>
+                    </p:spPr>
+                    <p:style>
+                      <a:lnRef idx="2">
+                        <a:schemeClr val="accent1">
+                          <a:shade val="50000"/>
+                        </a:schemeClr>
+                      </a:lnRef>
+                      <a:fillRef idx="1">
+                        <a:schemeClr val="accent1"/>
+                      </a:fillRef>
+                      <a:effectRef idx="0">
+                        <a:schemeClr val="accent1"/>
+                      </a:effectRef>
+                      <a:fontRef idx="minor">
+                        <a:schemeClr val="lt1"/>
+                      </a:fontRef>
+                    </p:style>
+                    <p:txBody>
+                      <a:bodyPr rtlCol="0" anchor="ctr"/>
+                      <a:lstStyle/>
+                      <a:p>
+                        <a:pPr algn="ctr"/>
+                        <a:endParaRPr lang="en-US"/>
+                      </a:p>
+                    </p:txBody>
+                  </p:sp>
+                  <p:sp>
+                    <p:nvSpPr>
+                      <p:cNvPr id="388" name="Rectangle 387"/>
+                      <p:cNvSpPr/>
+                      <p:nvPr/>
+                    </p:nvSpPr>
+                    <p:spPr>
+                      <a:xfrm>
+                        <a:off x="4095844" y="3479800"/>
+                        <a:ext cx="941858" cy="1560382"/>
+                      </a:xfrm>
+                      <a:prstGeom prst="rect">
+                        <a:avLst/>
+                      </a:prstGeom>
+                      <a:solidFill>
+                        <a:srgbClr val="7E0000"/>
+                      </a:solidFill>
+                      <a:ln>
+                        <a:noFill/>
+                      </a:ln>
+                    </p:spPr>
+                    <p:style>
+                      <a:lnRef idx="2">
+                        <a:schemeClr val="accent1">
+                          <a:shade val="50000"/>
+                        </a:schemeClr>
+                      </a:lnRef>
+                      <a:fillRef idx="1">
+                        <a:schemeClr val="accent1"/>
+                      </a:fillRef>
+                      <a:effectRef idx="0">
+                        <a:schemeClr val="accent1"/>
+                      </a:effectRef>
+                      <a:fontRef idx="minor">
+                        <a:schemeClr val="lt1"/>
+                      </a:fontRef>
+                    </p:style>
+                    <p:txBody>
+                      <a:bodyPr rtlCol="0" anchor="ctr"/>
+                      <a:lstStyle/>
+                      <a:p>
+                        <a:pPr algn="ctr"/>
+                        <a:endParaRPr lang="en-US"/>
+                      </a:p>
+                    </p:txBody>
+                  </p:sp>
+                </p:grpSp>
+                <p:sp>
+                  <p:nvSpPr>
+                    <p:cNvPr id="385" name="Flowchart: Decision 384"/>
+                    <p:cNvSpPr/>
+                    <p:nvPr/>
+                  </p:nvSpPr>
+                  <p:spPr>
+                    <a:xfrm>
+                      <a:off x="4286448" y="3689424"/>
+                      <a:ext cx="557750" cy="1147353"/>
+                    </a:xfrm>
+                    <a:prstGeom prst="flowChartDecision">
+                      <a:avLst/>
+                    </a:prstGeom>
+                    <a:solidFill>
+                      <a:srgbClr val="600000"/>
+                    </a:solidFill>
+                    <a:ln>
+                      <a:noFill/>
+                    </a:ln>
+                  </p:spPr>
+                  <p:style>
+                    <a:lnRef idx="2">
+                      <a:schemeClr val="accent1">
+                        <a:shade val="50000"/>
+                      </a:schemeClr>
+                    </a:lnRef>
+                    <a:fillRef idx="1">
+                      <a:schemeClr val="accent1"/>
+                    </a:fillRef>
+                    <a:effectRef idx="0">
+                      <a:schemeClr val="accent1"/>
+                    </a:effectRef>
+                    <a:fontRef idx="minor">
+                      <a:schemeClr val="lt1"/>
+                    </a:fontRef>
+                  </p:style>
+                  <p:txBody>
+                    <a:bodyPr rtlCol="0" anchor="ctr"/>
+                    <a:lstStyle/>
+                    <a:p>
+                      <a:pPr algn="ctr"/>
+                      <a:endParaRPr lang="en-US"/>
+                    </a:p>
+                  </p:txBody>
+                </p:sp>
+                <p:sp>
+                  <p:nvSpPr>
+                    <p:cNvPr id="386" name="Flowchart: Decision 385"/>
+                    <p:cNvSpPr/>
+                    <p:nvPr/>
+                  </p:nvSpPr>
+                  <p:spPr>
+                    <a:xfrm>
+                      <a:off x="4340958" y="3778230"/>
+                      <a:ext cx="454128" cy="975257"/>
+                    </a:xfrm>
+                    <a:prstGeom prst="flowChartDecision">
+                      <a:avLst/>
+                    </a:prstGeom>
+                    <a:solidFill>
+                      <a:srgbClr val="A40000"/>
+                    </a:solidFill>
+                    <a:ln>
+                      <a:noFill/>
+                    </a:ln>
+                  </p:spPr>
+                  <p:style>
+                    <a:lnRef idx="2">
+                      <a:schemeClr val="accent1">
+                        <a:shade val="50000"/>
+                      </a:schemeClr>
+                    </a:lnRef>
+                    <a:fillRef idx="1">
+                      <a:schemeClr val="accent1"/>
+                    </a:fillRef>
+                    <a:effectRef idx="0">
+                      <a:schemeClr val="accent1"/>
+                    </a:effectRef>
+                    <a:fontRef idx="minor">
+                      <a:schemeClr val="lt1"/>
+                    </a:fontRef>
+                  </p:style>
+                  <p:txBody>
+                    <a:bodyPr rtlCol="0" anchor="ctr"/>
+                    <a:lstStyle/>
+                    <a:p>
+                      <a:pPr algn="ctr"/>
+                      <a:endParaRPr lang="en-US"/>
+                    </a:p>
+                  </p:txBody>
+                </p:sp>
+              </p:grpSp>
+              <p:sp>
+                <p:nvSpPr>
+                  <p:cNvPr id="383" name="Decagon 382"/>
+                  <p:cNvSpPr/>
+                  <p:nvPr/>
+                </p:nvSpPr>
+                <p:spPr>
+                  <a:xfrm>
+                    <a:off x="4419198" y="4118285"/>
+                    <a:ext cx="303176" cy="299435"/>
+                  </a:xfrm>
+                  <a:prstGeom prst="decagon">
+                    <a:avLst/>
+                  </a:prstGeom>
+                  <a:solidFill>
+                    <a:srgbClr val="7F6000">
+                      <a:alpha val="69804"/>
+                    </a:srgbClr>
+                  </a:solidFill>
+                  <a:ln>
+                    <a:noFill/>
+                  </a:ln>
+                </p:spPr>
+                <p:style>
+                  <a:lnRef idx="2">
+                    <a:schemeClr val="accent1">
+                      <a:shade val="50000"/>
+                    </a:schemeClr>
+                  </a:lnRef>
+                  <a:fillRef idx="1">
+                    <a:schemeClr val="accent1"/>
+                  </a:fillRef>
+                  <a:effectRef idx="0">
+                    <a:schemeClr val="accent1"/>
+                  </a:effectRef>
+                  <a:fontRef idx="minor">
+                    <a:schemeClr val="lt1"/>
+                  </a:fontRef>
+                </p:style>
+                <p:txBody>
+                  <a:bodyPr rtlCol="0" anchor="ctr"/>
+                  <a:lstStyle/>
+                  <a:p>
+                    <a:pPr algn="ctr"/>
+                    <a:endParaRPr lang="en-US"/>
+                  </a:p>
+                </p:txBody>
+              </p:sp>
+            </p:grpSp>
+            <p:sp>
+              <p:nvSpPr>
+                <p:cNvPr id="378" name="L-Shape 377"/>
+                <p:cNvSpPr/>
+                <p:nvPr/>
+              </p:nvSpPr>
+              <p:spPr>
+                <a:xfrm>
+                  <a:off x="4095844" y="4779648"/>
+                  <a:ext cx="260534" cy="260534"/>
+                </a:xfrm>
+                <a:prstGeom prst="corner">
+                  <a:avLst/>
+                </a:prstGeom>
+                <a:solidFill>
+                  <a:srgbClr val="7F6000">
+                    <a:alpha val="69804"/>
+                  </a:srgbClr>
+                </a:solidFill>
+                <a:ln>
+                  <a:noFill/>
+                </a:ln>
+              </p:spPr>
+              <p:style>
+                <a:lnRef idx="2">
+                  <a:schemeClr val="accent1">
+                    <a:shade val="50000"/>
+                  </a:schemeClr>
+                </a:lnRef>
+                <a:fillRef idx="1">
+                  <a:schemeClr val="accent1"/>
+                </a:fillRef>
+                <a:effectRef idx="0">
+                  <a:schemeClr val="accent1"/>
+                </a:effectRef>
+                <a:fontRef idx="minor">
+                  <a:schemeClr val="lt1"/>
+                </a:fontRef>
+              </p:style>
+              <p:txBody>
+                <a:bodyPr rtlCol="0" anchor="ctr"/>
+                <a:lstStyle/>
+                <a:p>
+                  <a:pPr algn="ctr"/>
+                  <a:endParaRPr lang="en-US"/>
+                </a:p>
+              </p:txBody>
+            </p:sp>
+            <p:sp>
+              <p:nvSpPr>
+                <p:cNvPr id="379" name="L-Shape 378"/>
+                <p:cNvSpPr/>
+                <p:nvPr/>
+              </p:nvSpPr>
+              <p:spPr>
+                <a:xfrm rot="16200000">
+                  <a:off x="4772311" y="4779648"/>
+                  <a:ext cx="260534" cy="260534"/>
+                </a:xfrm>
+                <a:prstGeom prst="corner">
+                  <a:avLst/>
+                </a:prstGeom>
+                <a:solidFill>
+                  <a:srgbClr val="7F6000">
+                    <a:alpha val="69804"/>
+                  </a:srgbClr>
+                </a:solidFill>
+                <a:ln>
+                  <a:noFill/>
+                </a:ln>
+              </p:spPr>
+              <p:style>
+                <a:lnRef idx="2">
+                  <a:schemeClr val="accent1">
+                    <a:shade val="50000"/>
+                  </a:schemeClr>
+                </a:lnRef>
+                <a:fillRef idx="1">
+                  <a:schemeClr val="accent1"/>
+                </a:fillRef>
+                <a:effectRef idx="0">
+                  <a:schemeClr val="accent1"/>
+                </a:effectRef>
+                <a:fontRef idx="minor">
+                  <a:schemeClr val="lt1"/>
+                </a:fontRef>
+              </p:style>
+              <p:txBody>
+                <a:bodyPr rtlCol="0" anchor="ctr"/>
+                <a:lstStyle/>
+                <a:p>
+                  <a:pPr algn="ctr"/>
+                  <a:endParaRPr lang="en-US"/>
+                </a:p>
+              </p:txBody>
+            </p:sp>
+            <p:sp>
+              <p:nvSpPr>
+                <p:cNvPr id="380" name="L-Shape 379"/>
+                <p:cNvSpPr/>
+                <p:nvPr/>
+              </p:nvSpPr>
+              <p:spPr>
+                <a:xfrm rot="10800000">
+                  <a:off x="4779138" y="3476808"/>
+                  <a:ext cx="260534" cy="260534"/>
+                </a:xfrm>
+                <a:prstGeom prst="corner">
+                  <a:avLst/>
+                </a:prstGeom>
+                <a:solidFill>
+                  <a:srgbClr val="7F6000">
+                    <a:alpha val="69804"/>
+                  </a:srgbClr>
+                </a:solidFill>
+                <a:ln>
+                  <a:noFill/>
+                </a:ln>
+              </p:spPr>
+              <p:style>
+                <a:lnRef idx="2">
+                  <a:schemeClr val="accent1">
+                    <a:shade val="50000"/>
+                  </a:schemeClr>
+                </a:lnRef>
+                <a:fillRef idx="1">
+                  <a:schemeClr val="accent1"/>
+                </a:fillRef>
+                <a:effectRef idx="0">
+                  <a:schemeClr val="accent1"/>
+                </a:effectRef>
+                <a:fontRef idx="minor">
+                  <a:schemeClr val="lt1"/>
+                </a:fontRef>
+              </p:style>
+              <p:txBody>
+                <a:bodyPr rtlCol="0" anchor="ctr"/>
+                <a:lstStyle/>
+                <a:p>
+                  <a:pPr algn="ctr"/>
+                  <a:endParaRPr lang="en-US"/>
+                </a:p>
+              </p:txBody>
+            </p:sp>
+            <p:sp>
+              <p:nvSpPr>
+                <p:cNvPr id="381" name="L-Shape 380"/>
+                <p:cNvSpPr/>
+                <p:nvPr/>
+              </p:nvSpPr>
+              <p:spPr>
+                <a:xfrm rot="5400000">
+                  <a:off x="4102671" y="3476808"/>
+                  <a:ext cx="260534" cy="260534"/>
+                </a:xfrm>
+                <a:prstGeom prst="corner">
+                  <a:avLst/>
+                </a:prstGeom>
+                <a:solidFill>
+                  <a:srgbClr val="7F6000">
+                    <a:alpha val="69804"/>
+                  </a:srgbClr>
+                </a:solidFill>
+                <a:ln>
+                  <a:noFill/>
+                </a:ln>
+              </p:spPr>
+              <p:style>
+                <a:lnRef idx="2">
+                  <a:schemeClr val="accent1">
+                    <a:shade val="50000"/>
+                  </a:schemeClr>
+                </a:lnRef>
+                <a:fillRef idx="1">
+                  <a:schemeClr val="accent1"/>
+                </a:fillRef>
+                <a:effectRef idx="0">
+                  <a:schemeClr val="accent1"/>
+                </a:effectRef>
+                <a:fontRef idx="minor">
+                  <a:schemeClr val="lt1"/>
+                </a:fontRef>
+              </p:style>
+              <p:txBody>
+                <a:bodyPr rtlCol="0" anchor="ctr"/>
+                <a:lstStyle/>
+                <a:p>
+                  <a:pPr algn="ctr"/>
+                  <a:endParaRPr lang="en-US"/>
+                </a:p>
+              </p:txBody>
+            </p:sp>
+          </p:grpSp>
+          <p:sp>
+            <p:nvSpPr>
+              <p:cNvPr id="368" name="Oval 367"/>
+              <p:cNvSpPr/>
+              <p:nvPr/>
+            </p:nvSpPr>
+            <p:spPr>
+              <a:xfrm>
+                <a:off x="4480181" y="4180718"/>
+                <a:ext cx="179805" cy="179807"/>
+              </a:xfrm>
+              <a:prstGeom prst="ellipse">
+                <a:avLst/>
+              </a:prstGeom>
+              <a:solidFill>
+                <a:srgbClr val="000000">
+                  <a:alpha val="30196"/>
+                </a:srgbClr>
+              </a:solidFill>
+              <a:ln>
+                <a:noFill/>
+              </a:ln>
+            </p:spPr>
+            <p:style>
+              <a:lnRef idx="2">
+                <a:schemeClr val="accent1">
+                  <a:shade val="50000"/>
+                </a:schemeClr>
+              </a:lnRef>
+              <a:fillRef idx="1">
+                <a:schemeClr val="accent1"/>
+              </a:fillRef>
+              <a:effectRef idx="0">
+                <a:schemeClr val="accent1"/>
+              </a:effectRef>
+              <a:fontRef idx="minor">
+                <a:schemeClr val="lt1"/>
+              </a:fontRef>
+            </p:style>
+            <p:txBody>
+              <a:bodyPr rtlCol="0" anchor="ctr"/>
+              <a:lstStyle/>
+              <a:p>
+                <a:pPr algn="ctr"/>
+                <a:endParaRPr lang="en-US"/>
+              </a:p>
+            </p:txBody>
+          </p:sp>
+          <p:sp>
+            <p:nvSpPr>
+              <p:cNvPr id="369" name="Oval 368"/>
+              <p:cNvSpPr/>
+              <p:nvPr/>
+            </p:nvSpPr>
+            <p:spPr>
+              <a:xfrm>
+                <a:off x="4819502" y="3529691"/>
+                <a:ext cx="179806" cy="179806"/>
+              </a:xfrm>
+              <a:prstGeom prst="ellipse">
+                <a:avLst/>
+              </a:prstGeom>
+              <a:solidFill>
+                <a:srgbClr val="000000">
+                  <a:alpha val="30196"/>
+                </a:srgbClr>
+              </a:solidFill>
+              <a:ln>
+                <a:noFill/>
+              </a:ln>
+            </p:spPr>
+            <p:style>
+              <a:lnRef idx="2">
+                <a:schemeClr val="accent1">
+                  <a:shade val="50000"/>
+                </a:schemeClr>
+              </a:lnRef>
+              <a:fillRef idx="1">
+                <a:schemeClr val="accent1"/>
+              </a:fillRef>
+              <a:effectRef idx="0">
+                <a:schemeClr val="accent1"/>
+              </a:effectRef>
+              <a:fontRef idx="minor">
+                <a:schemeClr val="lt1"/>
+              </a:fontRef>
+            </p:style>
+            <p:txBody>
+              <a:bodyPr rtlCol="0" anchor="ctr"/>
+              <a:lstStyle/>
+              <a:p>
+                <a:pPr algn="ctr"/>
+                <a:endParaRPr lang="en-US"/>
+              </a:p>
+            </p:txBody>
+          </p:sp>
+          <p:sp>
+            <p:nvSpPr>
+              <p:cNvPr id="370" name="Oval 369"/>
+              <p:cNvSpPr/>
+              <p:nvPr/>
+            </p:nvSpPr>
+            <p:spPr>
+              <a:xfrm>
+                <a:off x="4152342" y="3520073"/>
+                <a:ext cx="179806" cy="179806"/>
+              </a:xfrm>
+              <a:prstGeom prst="ellipse">
+                <a:avLst/>
+              </a:prstGeom>
+              <a:solidFill>
+                <a:srgbClr val="000000">
+                  <a:alpha val="30196"/>
+                </a:srgbClr>
+              </a:solidFill>
+              <a:ln>
+                <a:noFill/>
+              </a:ln>
+            </p:spPr>
+            <p:style>
+              <a:lnRef idx="2">
+                <a:schemeClr val="accent1">
+                  <a:shade val="50000"/>
+                </a:schemeClr>
+              </a:lnRef>
+              <a:fillRef idx="1">
+                <a:schemeClr val="accent1"/>
+              </a:fillRef>
+              <a:effectRef idx="0">
+                <a:schemeClr val="accent1"/>
+              </a:effectRef>
+              <a:fontRef idx="minor">
+                <a:schemeClr val="lt1"/>
+              </a:fontRef>
+            </p:style>
+            <p:txBody>
+              <a:bodyPr rtlCol="0" anchor="ctr"/>
+              <a:lstStyle/>
+              <a:p>
+                <a:pPr algn="ctr"/>
+                <a:endParaRPr lang="en-US"/>
+              </a:p>
+            </p:txBody>
+          </p:sp>
+          <p:sp>
+            <p:nvSpPr>
+              <p:cNvPr id="371" name="Oval 370"/>
+              <p:cNvSpPr/>
+              <p:nvPr/>
+            </p:nvSpPr>
+            <p:spPr>
+              <a:xfrm>
+                <a:off x="4809764" y="4830666"/>
+                <a:ext cx="179805" cy="179807"/>
+              </a:xfrm>
+              <a:prstGeom prst="ellipse">
+                <a:avLst/>
+              </a:prstGeom>
+              <a:solidFill>
+                <a:srgbClr val="000000">
+                  <a:alpha val="30196"/>
+                </a:srgbClr>
+              </a:solidFill>
+              <a:ln>
+                <a:noFill/>
+              </a:ln>
+            </p:spPr>
+            <p:style>
+              <a:lnRef idx="2">
+                <a:schemeClr val="accent1">
+                  <a:shade val="50000"/>
+                </a:schemeClr>
+              </a:lnRef>
+              <a:fillRef idx="1">
+                <a:schemeClr val="accent1"/>
+              </a:fillRef>
+              <a:effectRef idx="0">
+                <a:schemeClr val="accent1"/>
+              </a:effectRef>
+              <a:fontRef idx="minor">
+                <a:schemeClr val="lt1"/>
+              </a:fontRef>
+            </p:style>
+            <p:txBody>
+              <a:bodyPr rtlCol="0" anchor="ctr"/>
+              <a:lstStyle/>
+              <a:p>
+                <a:pPr algn="ctr"/>
+                <a:endParaRPr lang="en-US"/>
+              </a:p>
+            </p:txBody>
+          </p:sp>
+          <p:sp>
+            <p:nvSpPr>
+              <p:cNvPr id="372" name="Oval 371"/>
+              <p:cNvSpPr/>
+              <p:nvPr/>
+            </p:nvSpPr>
+            <p:spPr>
+              <a:xfrm>
+                <a:off x="4142604" y="4821048"/>
+                <a:ext cx="179805" cy="179807"/>
+              </a:xfrm>
+              <a:prstGeom prst="ellipse">
+                <a:avLst/>
+              </a:prstGeom>
+              <a:solidFill>
+                <a:srgbClr val="000000">
+                  <a:alpha val="30196"/>
+                </a:srgbClr>
+              </a:solidFill>
+              <a:ln>
+                <a:noFill/>
+              </a:ln>
+            </p:spPr>
+            <p:style>
+              <a:lnRef idx="2">
+                <a:schemeClr val="accent1">
+                  <a:shade val="50000"/>
+                </a:schemeClr>
+              </a:lnRef>
+              <a:fillRef idx="1">
+                <a:schemeClr val="accent1"/>
+              </a:fillRef>
+              <a:effectRef idx="0">
+                <a:schemeClr val="accent1"/>
+              </a:effectRef>
+              <a:fontRef idx="minor">
+                <a:schemeClr val="lt1"/>
+              </a:fontRef>
+            </p:style>
+            <p:txBody>
+              <a:bodyPr rtlCol="0" anchor="ctr"/>
+              <a:lstStyle/>
+              <a:p>
+                <a:pPr algn="ctr"/>
+                <a:endParaRPr lang="en-US"/>
+              </a:p>
+            </p:txBody>
+          </p:sp>
+          <p:sp>
+            <p:nvSpPr>
+              <p:cNvPr id="373" name="Oval 372"/>
+              <p:cNvSpPr/>
+              <p:nvPr/>
+            </p:nvSpPr>
+            <p:spPr>
+              <a:xfrm>
+                <a:off x="4286102" y="3783596"/>
+                <a:ext cx="103054" cy="103054"/>
+              </a:xfrm>
+              <a:prstGeom prst="ellipse">
+                <a:avLst/>
+              </a:prstGeom>
+              <a:solidFill>
+                <a:srgbClr val="000000">
+                  <a:alpha val="60000"/>
+                </a:srgbClr>
+              </a:solidFill>
+              <a:ln>
+                <a:solidFill>
+                  <a:srgbClr val="7F6000">
+                    <a:alpha val="60000"/>
+                  </a:srgbClr>
+                </a:solidFill>
+              </a:ln>
+            </p:spPr>
+            <p:style>
+              <a:lnRef idx="2">
+                <a:schemeClr val="accent1">
+                  <a:shade val="50000"/>
+                </a:schemeClr>
+              </a:lnRef>
+              <a:fillRef idx="1">
+                <a:schemeClr val="accent1"/>
+              </a:fillRef>
+              <a:effectRef idx="0">
+                <a:schemeClr val="accent1"/>
+              </a:effectRef>
+              <a:fontRef idx="minor">
+                <a:schemeClr val="lt1"/>
+              </a:fontRef>
+            </p:style>
+            <p:txBody>
+              <a:bodyPr rtlCol="0" anchor="ctr"/>
+              <a:lstStyle/>
+              <a:p>
+                <a:pPr algn="ctr"/>
+                <a:endParaRPr lang="en-US"/>
+              </a:p>
+            </p:txBody>
+          </p:sp>
+          <p:sp>
+            <p:nvSpPr>
+              <p:cNvPr id="374" name="Oval 373"/>
+              <p:cNvSpPr/>
+              <p:nvPr/>
+            </p:nvSpPr>
+            <p:spPr>
+              <a:xfrm>
+                <a:off x="4756890" y="3786700"/>
+                <a:ext cx="103054" cy="103054"/>
+              </a:xfrm>
+              <a:prstGeom prst="ellipse">
+                <a:avLst/>
+              </a:prstGeom>
+              <a:solidFill>
+                <a:srgbClr val="000000">
+                  <a:alpha val="60000"/>
+                </a:srgbClr>
+              </a:solidFill>
+              <a:ln>
+                <a:solidFill>
+                  <a:srgbClr val="7F6000">
+                    <a:alpha val="60000"/>
+                  </a:srgbClr>
+                </a:solidFill>
+              </a:ln>
+            </p:spPr>
+            <p:style>
+              <a:lnRef idx="2">
+                <a:schemeClr val="accent1">
+                  <a:shade val="50000"/>
+                </a:schemeClr>
+              </a:lnRef>
+              <a:fillRef idx="1">
+                <a:schemeClr val="accent1"/>
+              </a:fillRef>
+              <a:effectRef idx="0">
+                <a:schemeClr val="accent1"/>
+              </a:effectRef>
+              <a:fontRef idx="minor">
+                <a:schemeClr val="lt1"/>
+              </a:fontRef>
+            </p:style>
+            <p:txBody>
+              <a:bodyPr rtlCol="0" anchor="ctr"/>
+              <a:lstStyle/>
+              <a:p>
+                <a:pPr algn="ctr"/>
+                <a:endParaRPr lang="en-US"/>
+              </a:p>
+            </p:txBody>
+          </p:sp>
+          <p:sp>
+            <p:nvSpPr>
+              <p:cNvPr id="375" name="Oval 374"/>
+              <p:cNvSpPr/>
+              <p:nvPr/>
+            </p:nvSpPr>
+            <p:spPr>
+              <a:xfrm>
+                <a:off x="4284052" y="4652186"/>
+                <a:ext cx="103053" cy="103053"/>
+              </a:xfrm>
+              <a:prstGeom prst="ellipse">
+                <a:avLst/>
+              </a:prstGeom>
+              <a:solidFill>
+                <a:srgbClr val="000000">
+                  <a:alpha val="60000"/>
+                </a:srgbClr>
+              </a:solidFill>
+              <a:ln>
+                <a:solidFill>
+                  <a:srgbClr val="7F6000">
+                    <a:alpha val="60000"/>
+                  </a:srgbClr>
+                </a:solidFill>
+              </a:ln>
+            </p:spPr>
+            <p:style>
+              <a:lnRef idx="2">
+                <a:schemeClr val="accent1">
+                  <a:shade val="50000"/>
+                </a:schemeClr>
+              </a:lnRef>
+              <a:fillRef idx="1">
+                <a:schemeClr val="accent1"/>
+              </a:fillRef>
+              <a:effectRef idx="0">
+                <a:schemeClr val="accent1"/>
+              </a:effectRef>
+              <a:fontRef idx="minor">
+                <a:schemeClr val="lt1"/>
+              </a:fontRef>
+            </p:style>
+            <p:txBody>
+              <a:bodyPr rtlCol="0" anchor="ctr"/>
+              <a:lstStyle/>
+              <a:p>
+                <a:pPr algn="ctr"/>
+                <a:endParaRPr lang="en-US"/>
+              </a:p>
+            </p:txBody>
+          </p:sp>
+          <p:sp>
+            <p:nvSpPr>
+              <p:cNvPr id="376" name="Oval 375"/>
+              <p:cNvSpPr/>
+              <p:nvPr/>
+            </p:nvSpPr>
+            <p:spPr>
+              <a:xfrm>
+                <a:off x="4754840" y="4655290"/>
+                <a:ext cx="103053" cy="103053"/>
+              </a:xfrm>
+              <a:prstGeom prst="ellipse">
+                <a:avLst/>
+              </a:prstGeom>
+              <a:solidFill>
+                <a:srgbClr val="000000">
+                  <a:alpha val="60000"/>
+                </a:srgbClr>
+              </a:solidFill>
+              <a:ln>
+                <a:solidFill>
+                  <a:srgbClr val="7F6000">
+                    <a:alpha val="60000"/>
+                  </a:srgbClr>
+                </a:solidFill>
+              </a:ln>
+            </p:spPr>
+            <p:style>
+              <a:lnRef idx="2">
+                <a:schemeClr val="accent1">
+                  <a:shade val="50000"/>
+                </a:schemeClr>
+              </a:lnRef>
+              <a:fillRef idx="1">
+                <a:schemeClr val="accent1"/>
+              </a:fillRef>
+              <a:effectRef idx="0">
+                <a:schemeClr val="accent1"/>
+              </a:effectRef>
+              <a:fontRef idx="minor">
+                <a:schemeClr val="lt1"/>
+              </a:fontRef>
+            </p:style>
+            <p:txBody>
+              <a:bodyPr rtlCol="0" anchor="ctr"/>
+              <a:lstStyle/>
+              <a:p>
+                <a:pPr algn="ctr"/>
+                <a:endParaRPr lang="en-US"/>
+              </a:p>
+            </p:txBody>
+          </p:sp>
+        </p:grpSp>
+        <p:sp>
+          <p:nvSpPr>
+            <p:cNvPr id="365" name="Rectangle 364"/>
+            <p:cNvSpPr/>
+            <p:nvPr/>
+          </p:nvSpPr>
+          <p:spPr>
+            <a:xfrm>
+              <a:off x="4921326" y="3800488"/>
+              <a:ext cx="118345" cy="954704"/>
+            </a:xfrm>
+            <a:prstGeom prst="rect">
+              <a:avLst/>
+            </a:prstGeom>
+            <a:solidFill>
+              <a:srgbClr val="7F6000">
+                <a:alpha val="29804"/>
+              </a:srgbClr>
+            </a:solidFill>
+            <a:ln>
+              <a:noFill/>
+            </a:ln>
+          </p:spPr>
+          <p:style>
+            <a:lnRef idx="2">
+              <a:schemeClr val="accent1">
+                <a:shade val="50000"/>
+              </a:schemeClr>
+            </a:lnRef>
+            <a:fillRef idx="1">
+              <a:schemeClr val="accent1"/>
+            </a:fillRef>
+            <a:effectRef idx="0">
+              <a:schemeClr val="accent1"/>
+            </a:effectRef>
+            <a:fontRef idx="minor">
+              <a:schemeClr val="lt1"/>
+            </a:fontRef>
+          </p:style>
+          <p:txBody>
+            <a:bodyPr rtlCol="0" anchor="ctr"/>
+            <a:lstStyle/>
+            <a:p>
+              <a:pPr algn="ctr"/>
+              <a:endParaRPr lang="en-US"/>
+            </a:p>
+          </p:txBody>
+        </p:sp>
+        <p:sp>
+          <p:nvSpPr>
+            <p:cNvPr id="366" name="Rectangle 365"/>
+            <p:cNvSpPr/>
+            <p:nvPr/>
+          </p:nvSpPr>
+          <p:spPr>
+            <a:xfrm>
+              <a:off x="4095845" y="3800489"/>
+              <a:ext cx="118345" cy="954705"/>
+            </a:xfrm>
+            <a:prstGeom prst="rect">
+              <a:avLst/>
+            </a:prstGeom>
+            <a:solidFill>
+              <a:srgbClr val="7F6000">
+                <a:alpha val="29804"/>
+              </a:srgbClr>
+            </a:solidFill>
+            <a:ln>
+              <a:noFill/>
+            </a:ln>
+          </p:spPr>
+          <p:style>
+            <a:lnRef idx="2">
+              <a:schemeClr val="accent1">
+                <a:shade val="50000"/>
+              </a:schemeClr>
+            </a:lnRef>
+            <a:fillRef idx="1">
+              <a:schemeClr val="accent1"/>
+            </a:fillRef>
+            <a:effectRef idx="0">
+              <a:schemeClr val="accent1"/>
+            </a:effectRef>
+            <a:fontRef idx="minor">
+              <a:schemeClr val="lt1"/>
+            </a:fontRef>
+          </p:style>
+          <p:txBody>
+            <a:bodyPr rtlCol="0" anchor="ctr"/>
+            <a:lstStyle/>
+            <a:p>
+              <a:pPr algn="ctr"/>
+              <a:endParaRPr lang="en-US"/>
+            </a:p>
+          </p:txBody>
+        </p:sp>
+      </p:grpSp>
+      <p:sp>
+        <p:nvSpPr>
+          <p:cNvPr id="389" name="Rectangle 388"/>
+          <p:cNvSpPr/>
+          <p:nvPr/>
+        </p:nvSpPr>
+        <p:spPr>
+          <a:xfrm rot="16200000">
+            <a:off x="-536218" y="2729599"/>
+            <a:ext cx="1283232" cy="206032"/>
+          </a:xfrm>
+          <a:prstGeom prst="rect">
+            <a:avLst/>
+          </a:prstGeom>
+          <a:solidFill>
+            <a:srgbClr val="492207"/>
+          </a:solidFill>
+          <a:ln>
+            <a:noFill/>
+          </a:ln>
+        </p:spPr>
+        <p:style>
+          <a:lnRef idx="2">
+            <a:schemeClr val="accent1">
+              <a:shade val="50000"/>
+            </a:schemeClr>
+          </a:lnRef>
+          <a:fillRef idx="1">
+            <a:schemeClr val="accent1"/>
+          </a:fillRef>
+          <a:effectRef idx="0">
+            <a:schemeClr val="accent1"/>
+          </a:effectRef>
+          <a:fontRef idx="minor">
+            <a:schemeClr val="lt1"/>
+          </a:fontRef>
+        </p:style>
+        <p:txBody>
+          <a:bodyPr rtlCol="0" anchor="ctr"/>
+          <a:lstStyle/>
+          <a:p>
+            <a:pPr algn="ctr"/>
+            <a:r>
+              <a:rPr lang="ro-RO" sz="1200" dirty="0" smtClean="0">
+                <a:solidFill>
+                  <a:srgbClr val="622E0A"/>
+                </a:solidFill>
+                <a:latin typeface="Libre Baskerville" panose="02000000000000000000" pitchFamily="2" charset="0"/>
+              </a:rPr>
+              <a:t>Dining Area</a:t>
+            </a:r>
+            <a:endParaRPr lang="en-US" sz="1200" dirty="0">
+              <a:solidFill>
+                <a:srgbClr val="622E0A"/>
+              </a:solidFill>
+              <a:latin typeface="Libre Baskerville" panose="02000000000000000000" pitchFamily="2" charset="0"/>
+            </a:endParaRPr>
+          </a:p>
+        </p:txBody>
+      </p:sp>
+      <p:grpSp>
+        <p:nvGrpSpPr>
+          <p:cNvPr id="393" name="Group 392"/>
+          <p:cNvGrpSpPr/>
+          <p:nvPr/>
+        </p:nvGrpSpPr>
+        <p:grpSpPr>
+          <a:xfrm rot="16200000">
+            <a:off x="278286" y="1826476"/>
+            <a:ext cx="294854" cy="368561"/>
+            <a:chOff x="2840254" y="2042961"/>
+            <a:chExt cx="375115" cy="468886"/>
+          </a:xfrm>
+        </p:grpSpPr>
+        <p:sp>
+          <p:nvSpPr>
+            <p:cNvPr id="394" name="Rounded Rectangle 393"/>
+            <p:cNvSpPr/>
+            <p:nvPr/>
+          </p:nvSpPr>
+          <p:spPr>
+            <a:xfrm>
+              <a:off x="2840254" y="2042961"/>
+              <a:ext cx="375115" cy="468886"/>
+            </a:xfrm>
+            <a:prstGeom prst="roundRect">
+              <a:avLst/>
+            </a:prstGeom>
+            <a:solidFill>
+              <a:srgbClr val="7E0000"/>
+            </a:solidFill>
+            <a:ln>
+              <a:noFill/>
+            </a:ln>
+          </p:spPr>
+          <p:style>
+            <a:lnRef idx="2">
+              <a:schemeClr val="accent1">
+                <a:shade val="50000"/>
+              </a:schemeClr>
+            </a:lnRef>
+            <a:fillRef idx="1">
+              <a:schemeClr val="accent1"/>
+            </a:fillRef>
+            <a:effectRef idx="0">
+              <a:schemeClr val="accent1"/>
+            </a:effectRef>
+            <a:fontRef idx="minor">
+              <a:schemeClr val="lt1"/>
+            </a:fontRef>
+          </p:style>
+          <p:txBody>
+            <a:bodyPr rtlCol="0" anchor="ctr"/>
+            <a:lstStyle/>
+            <a:p>
+              <a:pPr algn="ctr"/>
+              <a:endParaRPr lang="en-US"/>
+            </a:p>
+          </p:txBody>
+        </p:sp>
+        <p:sp>
+          <p:nvSpPr>
+            <p:cNvPr id="395" name="Rounded Rectangle 394"/>
+            <p:cNvSpPr/>
+            <p:nvPr/>
+          </p:nvSpPr>
+          <p:spPr>
+            <a:xfrm>
+              <a:off x="3016430" y="2120404"/>
+              <a:ext cx="169472" cy="317138"/>
+            </a:xfrm>
+            <a:prstGeom prst="roundRect">
+              <a:avLst/>
+            </a:prstGeom>
+            <a:solidFill>
+              <a:srgbClr val="000000">
+                <a:alpha val="30196"/>
+              </a:srgbClr>
+            </a:solidFill>
+            <a:ln>
+              <a:noFill/>
+            </a:ln>
+          </p:spPr>
+          <p:style>
+            <a:lnRef idx="2">
+              <a:schemeClr val="accent1">
+                <a:shade val="50000"/>
+              </a:schemeClr>
+            </a:lnRef>
+            <a:fillRef idx="1">
+              <a:schemeClr val="accent1"/>
+            </a:fillRef>
+            <a:effectRef idx="0">
+              <a:schemeClr val="accent1"/>
+            </a:effectRef>
+            <a:fontRef idx="minor">
+              <a:schemeClr val="lt1"/>
+            </a:fontRef>
+          </p:style>
+          <p:txBody>
+            <a:bodyPr rtlCol="0" anchor="ctr"/>
+            <a:lstStyle/>
+            <a:p>
+              <a:pPr algn="ctr"/>
+              <a:endParaRPr lang="en-US"/>
+            </a:p>
+          </p:txBody>
+        </p:sp>
+        <p:sp>
+          <p:nvSpPr>
+            <p:cNvPr id="396" name="Rounded Rectangle 395"/>
+            <p:cNvSpPr/>
+            <p:nvPr/>
+          </p:nvSpPr>
+          <p:spPr>
+            <a:xfrm>
+              <a:off x="2876197" y="2455912"/>
+              <a:ext cx="311241" cy="45719"/>
+            </a:xfrm>
+            <a:prstGeom prst="roundRect">
+              <a:avLst/>
+            </a:prstGeom>
+            <a:solidFill>
+              <a:srgbClr val="000000">
+                <a:alpha val="30196"/>
+              </a:srgbClr>
+            </a:solidFill>
+            <a:ln>
+              <a:noFill/>
+            </a:ln>
+          </p:spPr>
+          <p:style>
+            <a:lnRef idx="2">
+              <a:schemeClr val="accent1">
+                <a:shade val="50000"/>
+              </a:schemeClr>
+            </a:lnRef>
+            <a:fillRef idx="1">
+              <a:schemeClr val="accent1"/>
+            </a:fillRef>
+            <a:effectRef idx="0">
+              <a:schemeClr val="accent1"/>
+            </a:effectRef>
+            <a:fontRef idx="minor">
+              <a:schemeClr val="lt1"/>
+            </a:fontRef>
+          </p:style>
+          <p:txBody>
+            <a:bodyPr rtlCol="0" anchor="ctr"/>
+            <a:lstStyle/>
+            <a:p>
+              <a:pPr algn="ctr"/>
+              <a:endParaRPr lang="en-US"/>
+            </a:p>
+          </p:txBody>
+        </p:sp>
+        <p:sp>
+          <p:nvSpPr>
+            <p:cNvPr id="397" name="Rounded Rectangle 396"/>
+            <p:cNvSpPr/>
+            <p:nvPr/>
+          </p:nvSpPr>
+          <p:spPr>
+            <a:xfrm>
+              <a:off x="2869622" y="2056432"/>
+              <a:ext cx="311241" cy="45719"/>
+            </a:xfrm>
+            <a:prstGeom prst="roundRect">
+              <a:avLst/>
+            </a:prstGeom>
+            <a:solidFill>
+              <a:srgbClr val="000000">
+                <a:alpha val="30196"/>
+              </a:srgbClr>
+            </a:solidFill>
+            <a:ln>
+              <a:noFill/>
+            </a:ln>
+          </p:spPr>
+          <p:style>
+            <a:lnRef idx="2">
+              <a:schemeClr val="accent1">
+                <a:shade val="50000"/>
+              </a:schemeClr>
+            </a:lnRef>
+            <a:fillRef idx="1">
+              <a:schemeClr val="accent1"/>
+            </a:fillRef>
+            <a:effectRef idx="0">
+              <a:schemeClr val="accent1"/>
+            </a:effectRef>
+            <a:fontRef idx="minor">
+              <a:schemeClr val="lt1"/>
+            </a:fontRef>
+          </p:style>
+          <p:txBody>
+            <a:bodyPr rtlCol="0" anchor="ctr"/>
+            <a:lstStyle/>
+            <a:p>
+              <a:pPr algn="ctr"/>
+              <a:endParaRPr lang="en-US"/>
+            </a:p>
+          </p:txBody>
+        </p:sp>
+      </p:grpSp>
+      <p:sp>
+        <p:nvSpPr>
+          <p:cNvPr id="398" name="Rectangle 397"/>
+          <p:cNvSpPr/>
+          <p:nvPr/>
+        </p:nvSpPr>
+        <p:spPr>
+          <a:xfrm>
+            <a:off x="4116171" y="263645"/>
+            <a:ext cx="846978" cy="376299"/>
+          </a:xfrm>
+          <a:prstGeom prst="rect">
+            <a:avLst/>
+          </a:prstGeom>
+          <a:solidFill>
+            <a:srgbClr val="492207"/>
+          </a:solidFill>
+          <a:ln>
+            <a:noFill/>
+          </a:ln>
+        </p:spPr>
+        <p:style>
+          <a:lnRef idx="2">
+            <a:schemeClr val="accent1">
+              <a:shade val="50000"/>
+            </a:schemeClr>
+          </a:lnRef>
+          <a:fillRef idx="1">
+            <a:schemeClr val="accent1"/>
+          </a:fillRef>
+          <a:effectRef idx="0">
+            <a:schemeClr val="accent1"/>
+          </a:effectRef>
+          <a:fontRef idx="minor">
+            <a:schemeClr val="lt1"/>
+          </a:fontRef>
+        </p:style>
+        <p:txBody>
+          <a:bodyPr rtlCol="0" anchor="ctr"/>
+          <a:lstStyle/>
+          <a:p>
+            <a:pPr algn="ctr"/>
+            <a:endParaRPr lang="en-US" dirty="0"/>
+          </a:p>
+        </p:txBody>
+      </p:sp>
+      <p:grpSp>
+        <p:nvGrpSpPr>
+          <p:cNvPr id="399" name="Group 398"/>
+          <p:cNvGrpSpPr/>
+          <p:nvPr/>
+        </p:nvGrpSpPr>
+        <p:grpSpPr>
+          <a:xfrm>
+            <a:off x="4144685" y="296217"/>
+            <a:ext cx="178778" cy="182212"/>
+            <a:chOff x="3476850" y="2598160"/>
+            <a:chExt cx="178778" cy="182212"/>
+          </a:xfrm>
+        </p:grpSpPr>
+        <p:sp>
+          <p:nvSpPr>
+            <p:cNvPr id="400" name="Oval 399"/>
+            <p:cNvSpPr/>
+            <p:nvPr/>
+          </p:nvSpPr>
+          <p:spPr>
+            <a:xfrm>
+              <a:off x="3567808" y="2598160"/>
+              <a:ext cx="45720" cy="45720"/>
+            </a:xfrm>
+            <a:prstGeom prst="ellipse">
+              <a:avLst/>
+            </a:prstGeom>
+            <a:solidFill>
+              <a:srgbClr val="FFC000"/>
+            </a:solidFill>
+            <a:ln w="28575">
+              <a:solidFill>
+                <a:schemeClr val="accent4">
+                  <a:lumMod val="20000"/>
+                  <a:lumOff val="80000"/>
+                </a:schemeClr>
+              </a:solidFill>
+            </a:ln>
+          </p:spPr>
+          <p:style>
+            <a:lnRef idx="2">
+              <a:schemeClr val="accent1">
+                <a:shade val="50000"/>
+              </a:schemeClr>
+            </a:lnRef>
+            <a:fillRef idx="1">
+              <a:schemeClr val="accent1"/>
+            </a:fillRef>
+            <a:effectRef idx="0">
+              <a:schemeClr val="accent1"/>
+            </a:effectRef>
+            <a:fontRef idx="minor">
+              <a:schemeClr val="lt1"/>
+            </a:fontRef>
+          </p:style>
+          <p:txBody>
+            <a:bodyPr rtlCol="0" anchor="ctr"/>
+            <a:lstStyle/>
+            <a:p>
+              <a:pPr algn="ctr"/>
+              <a:endParaRPr lang="en-US"/>
+            </a:p>
+          </p:txBody>
+        </p:sp>
+        <p:sp>
+          <p:nvSpPr>
+            <p:cNvPr id="401" name="Oval 400"/>
+            <p:cNvSpPr/>
+            <p:nvPr/>
+          </p:nvSpPr>
+          <p:spPr>
+            <a:xfrm>
+              <a:off x="3571428" y="2686633"/>
+              <a:ext cx="84200" cy="84200"/>
+            </a:xfrm>
+            <a:prstGeom prst="ellipse">
+              <a:avLst/>
+            </a:prstGeom>
+            <a:solidFill>
+              <a:srgbClr val="FFC000"/>
+            </a:solidFill>
+            <a:ln w="57150">
+              <a:solidFill>
+                <a:schemeClr val="accent4">
+                  <a:lumMod val="20000"/>
+                  <a:lumOff val="80000"/>
+                </a:schemeClr>
+              </a:solidFill>
+            </a:ln>
+          </p:spPr>
+          <p:style>
+            <a:lnRef idx="2">
+              <a:schemeClr val="accent1">
+                <a:shade val="50000"/>
+              </a:schemeClr>
+            </a:lnRef>
+            <a:fillRef idx="1">
+              <a:schemeClr val="accent1"/>
+            </a:fillRef>
+            <a:effectRef idx="0">
+              <a:schemeClr val="accent1"/>
+            </a:effectRef>
+            <a:fontRef idx="minor">
+              <a:schemeClr val="lt1"/>
+            </a:fontRef>
+          </p:style>
+          <p:txBody>
+            <a:bodyPr rtlCol="0" anchor="ctr"/>
+            <a:lstStyle/>
+            <a:p>
+              <a:pPr algn="ctr"/>
+              <a:endParaRPr lang="en-US"/>
+            </a:p>
+          </p:txBody>
+        </p:sp>
+        <p:sp>
+          <p:nvSpPr>
+            <p:cNvPr id="404" name="Oval 403"/>
+            <p:cNvSpPr/>
+            <p:nvPr/>
+          </p:nvSpPr>
+          <p:spPr>
+            <a:xfrm>
+              <a:off x="3492346" y="2643649"/>
+              <a:ext cx="45720" cy="45720"/>
+            </a:xfrm>
+            <a:prstGeom prst="ellipse">
+              <a:avLst/>
+            </a:prstGeom>
+            <a:solidFill>
+              <a:srgbClr val="FFC000"/>
+            </a:solidFill>
+            <a:ln w="28575">
+              <a:solidFill>
+                <a:schemeClr val="accent4">
+                  <a:lumMod val="20000"/>
+                  <a:lumOff val="80000"/>
+                </a:schemeClr>
+              </a:solidFill>
+            </a:ln>
+          </p:spPr>
+          <p:style>
+            <a:lnRef idx="2">
+              <a:schemeClr val="accent1">
+                <a:shade val="50000"/>
+              </a:schemeClr>
+            </a:lnRef>
+            <a:fillRef idx="1">
+              <a:schemeClr val="accent1"/>
+            </a:fillRef>
+            <a:effectRef idx="0">
+              <a:schemeClr val="accent1"/>
+            </a:effectRef>
+            <a:fontRef idx="minor">
+              <a:schemeClr val="lt1"/>
+            </a:fontRef>
+          </p:style>
+          <p:txBody>
+            <a:bodyPr rtlCol="0" anchor="ctr"/>
+            <a:lstStyle/>
+            <a:p>
+              <a:pPr algn="ctr"/>
+              <a:endParaRPr lang="en-US"/>
+            </a:p>
+          </p:txBody>
+        </p:sp>
+        <p:sp>
+          <p:nvSpPr>
+            <p:cNvPr id="419" name="Oval 418"/>
+            <p:cNvSpPr/>
+            <p:nvPr/>
+          </p:nvSpPr>
+          <p:spPr>
+            <a:xfrm>
+              <a:off x="3476850" y="2734652"/>
+              <a:ext cx="45720" cy="45720"/>
+            </a:xfrm>
+            <a:prstGeom prst="ellipse">
+              <a:avLst/>
+            </a:prstGeom>
+            <a:solidFill>
+              <a:srgbClr val="FFC000"/>
+            </a:solidFill>
+            <a:ln w="28575">
+              <a:solidFill>
+                <a:schemeClr val="accent4">
+                  <a:lumMod val="20000"/>
+                  <a:lumOff val="80000"/>
+                </a:schemeClr>
+              </a:solidFill>
+            </a:ln>
+          </p:spPr>
+          <p:style>
+            <a:lnRef idx="2">
+              <a:schemeClr val="accent1">
+                <a:shade val="50000"/>
+              </a:schemeClr>
+            </a:lnRef>
+            <a:fillRef idx="1">
+              <a:schemeClr val="accent1"/>
+            </a:fillRef>
+            <a:effectRef idx="0">
+              <a:schemeClr val="accent1"/>
+            </a:effectRef>
+            <a:fontRef idx="minor">
+              <a:schemeClr val="lt1"/>
+            </a:fontRef>
+          </p:style>
+          <p:txBody>
+            <a:bodyPr rtlCol="0" anchor="ctr"/>
+            <a:lstStyle/>
+            <a:p>
+              <a:pPr algn="ctr"/>
+              <a:endParaRPr lang="en-US"/>
+            </a:p>
+          </p:txBody>
+        </p:sp>
+      </p:grpSp>
+      <p:grpSp>
+        <p:nvGrpSpPr>
+          <p:cNvPr id="405" name="Group 404"/>
+          <p:cNvGrpSpPr/>
+          <p:nvPr/>
+        </p:nvGrpSpPr>
+        <p:grpSpPr>
+          <a:xfrm>
+            <a:off x="4655738" y="392285"/>
+            <a:ext cx="166907" cy="152847"/>
+            <a:chOff x="3909725" y="2706151"/>
+            <a:chExt cx="166907" cy="152847"/>
+          </a:xfrm>
+        </p:grpSpPr>
+        <p:grpSp>
+          <p:nvGrpSpPr>
+            <p:cNvPr id="406" name="Group 405"/>
+            <p:cNvGrpSpPr/>
+            <p:nvPr/>
+          </p:nvGrpSpPr>
+          <p:grpSpPr>
+            <a:xfrm>
+              <a:off x="3909725" y="2706151"/>
+              <a:ext cx="166907" cy="152847"/>
+              <a:chOff x="3909725" y="2706151"/>
+              <a:chExt cx="166907" cy="152847"/>
+            </a:xfrm>
+          </p:grpSpPr>
+          <p:grpSp>
+            <p:nvGrpSpPr>
+              <p:cNvPr id="409" name="Group 408"/>
+              <p:cNvGrpSpPr/>
+              <p:nvPr/>
+            </p:nvGrpSpPr>
+            <p:grpSpPr>
+              <a:xfrm>
+                <a:off x="3909725" y="2706151"/>
+                <a:ext cx="166907" cy="152847"/>
+                <a:chOff x="3909725" y="2706151"/>
+                <a:chExt cx="166907" cy="152847"/>
+              </a:xfrm>
+            </p:grpSpPr>
+            <p:grpSp>
+              <p:nvGrpSpPr>
+                <p:cNvPr id="411" name="Group 410"/>
+                <p:cNvGrpSpPr/>
+                <p:nvPr/>
+              </p:nvGrpSpPr>
+              <p:grpSpPr>
+                <a:xfrm>
+                  <a:off x="3909725" y="2706151"/>
+                  <a:ext cx="166907" cy="152847"/>
+                  <a:chOff x="3909725" y="2706151"/>
+                  <a:chExt cx="166907" cy="152847"/>
+                </a:xfrm>
+              </p:grpSpPr>
+              <p:grpSp>
+                <p:nvGrpSpPr>
+                  <p:cNvPr id="413" name="Group 412"/>
+                  <p:cNvGrpSpPr/>
+                  <p:nvPr/>
+                </p:nvGrpSpPr>
+                <p:grpSpPr>
+                  <a:xfrm>
+                    <a:off x="3909725" y="2706151"/>
+                    <a:ext cx="166907" cy="152847"/>
+                    <a:chOff x="3909725" y="2706151"/>
+                    <a:chExt cx="166907" cy="152847"/>
+                  </a:xfrm>
+                </p:grpSpPr>
+                <p:sp>
+                  <p:nvSpPr>
+                    <p:cNvPr id="415" name="Wave 414"/>
+                    <p:cNvSpPr/>
+                    <p:nvPr/>
+                  </p:nvSpPr>
+                  <p:spPr>
+                    <a:xfrm rot="5400000">
+                      <a:off x="3916755" y="2699121"/>
+                      <a:ext cx="152847" cy="166907"/>
+                    </a:xfrm>
+                    <a:prstGeom prst="wave">
+                      <a:avLst>
+                        <a:gd name="adj1" fmla="val 4573"/>
+                        <a:gd name="adj2" fmla="val 0"/>
+                      </a:avLst>
+                    </a:prstGeom>
+                    <a:solidFill>
+                      <a:schemeClr val="accent4">
+                        <a:lumMod val="20000"/>
+                        <a:lumOff val="80000"/>
+                      </a:schemeClr>
+                    </a:solidFill>
+                    <a:ln>
+                      <a:solidFill>
+                        <a:schemeClr val="accent4">
+                          <a:lumMod val="20000"/>
+                          <a:lumOff val="80000"/>
+                        </a:schemeClr>
+                      </a:solidFill>
+                    </a:ln>
+                  </p:spPr>
+                  <p:style>
+                    <a:lnRef idx="2">
+                      <a:schemeClr val="accent1">
+                        <a:shade val="50000"/>
+                      </a:schemeClr>
+                    </a:lnRef>
+                    <a:fillRef idx="1">
+                      <a:schemeClr val="accent1"/>
+                    </a:fillRef>
+                    <a:effectRef idx="0">
+                      <a:schemeClr val="accent1"/>
+                    </a:effectRef>
+                    <a:fontRef idx="minor">
+                      <a:schemeClr val="lt1"/>
+                    </a:fontRef>
+                  </p:style>
+                  <p:txBody>
+                    <a:bodyPr rtlCol="0" anchor="ctr"/>
+                    <a:lstStyle/>
+                    <a:p>
+                      <a:pPr algn="ctr"/>
+                      <a:endParaRPr lang="en-US"/>
+                    </a:p>
+                  </p:txBody>
+                </p:sp>
+                <p:cxnSp>
+                  <p:nvCxnSpPr>
+                    <p:cNvPr id="416" name="Straight Connector 415"/>
+                    <p:cNvCxnSpPr/>
+                    <p:nvPr/>
+                  </p:nvCxnSpPr>
+                  <p:spPr>
+                    <a:xfrm>
+                      <a:off x="3948477" y="2802765"/>
+                      <a:ext cx="94166" cy="0"/>
+                    </a:xfrm>
+                    <a:prstGeom prst="line">
+                      <a:avLst/>
+                    </a:prstGeom>
+                    <a:ln>
+                      <a:solidFill>
+                        <a:schemeClr val="tx2">
+                          <a:lumMod val="75000"/>
+                        </a:schemeClr>
+                      </a:solidFill>
+                    </a:ln>
+                  </p:spPr>
+                  <p:style>
+                    <a:lnRef idx="1">
+                      <a:schemeClr val="accent1"/>
+                    </a:lnRef>
+                    <a:fillRef idx="0">
+                      <a:schemeClr val="accent1"/>
+                    </a:fillRef>
+                    <a:effectRef idx="0">
+                      <a:schemeClr val="accent1"/>
+                    </a:effectRef>
+                    <a:fontRef idx="minor">
+                      <a:schemeClr val="tx1"/>
+                    </a:fontRef>
+                  </p:style>
+                </p:cxnSp>
+                <p:cxnSp>
+                  <p:nvCxnSpPr>
+                    <p:cNvPr id="417" name="Straight Connector 416"/>
+                    <p:cNvCxnSpPr/>
+                    <p:nvPr/>
+                  </p:nvCxnSpPr>
+                  <p:spPr>
+                    <a:xfrm>
+                      <a:off x="4022297" y="2834279"/>
+                      <a:ext cx="36000" cy="0"/>
+                    </a:xfrm>
+                    <a:prstGeom prst="line">
+                      <a:avLst/>
+                    </a:prstGeom>
+                    <a:ln>
+                      <a:solidFill>
+                        <a:schemeClr val="tx2">
+                          <a:lumMod val="75000"/>
+                        </a:schemeClr>
+                      </a:solidFill>
+                    </a:ln>
+                  </p:spPr>
+                  <p:style>
+                    <a:lnRef idx="1">
+                      <a:schemeClr val="accent1"/>
+                    </a:lnRef>
+                    <a:fillRef idx="0">
+                      <a:schemeClr val="accent1"/>
+                    </a:fillRef>
+                    <a:effectRef idx="0">
+                      <a:schemeClr val="accent1"/>
+                    </a:effectRef>
+                    <a:fontRef idx="minor">
+                      <a:schemeClr val="tx1"/>
+                    </a:fontRef>
+                  </p:style>
+                </p:cxnSp>
+                <p:cxnSp>
+                  <p:nvCxnSpPr>
+                    <p:cNvPr id="418" name="Straight Connector 417"/>
+                    <p:cNvCxnSpPr/>
+                    <p:nvPr/>
+                  </p:nvCxnSpPr>
+                  <p:spPr>
+                    <a:xfrm>
+                      <a:off x="3948477" y="2836216"/>
+                      <a:ext cx="36000" cy="0"/>
+                    </a:xfrm>
+                    <a:prstGeom prst="line">
+                      <a:avLst/>
+                    </a:prstGeom>
+                    <a:ln>
+                      <a:solidFill>
+                        <a:schemeClr val="tx2">
+                          <a:lumMod val="75000"/>
+                        </a:schemeClr>
+                      </a:solidFill>
+                    </a:ln>
+                  </p:spPr>
+                  <p:style>
+                    <a:lnRef idx="1">
+                      <a:schemeClr val="accent1"/>
+                    </a:lnRef>
+                    <a:fillRef idx="0">
+                      <a:schemeClr val="accent1"/>
+                    </a:fillRef>
+                    <a:effectRef idx="0">
+                      <a:schemeClr val="accent1"/>
+                    </a:effectRef>
+                    <a:fontRef idx="minor">
+                      <a:schemeClr val="tx1"/>
+                    </a:fontRef>
+                  </p:style>
+                </p:cxnSp>
+              </p:grpSp>
+              <p:cxnSp>
+                <p:nvCxnSpPr>
+                  <p:cNvPr id="414" name="Straight Connector 413"/>
+                  <p:cNvCxnSpPr/>
+                  <p:nvPr/>
+                </p:nvCxnSpPr>
+                <p:spPr>
+                  <a:xfrm>
+                    <a:off x="3948477" y="2785335"/>
+                    <a:ext cx="94166" cy="0"/>
+                  </a:xfrm>
+                  <a:prstGeom prst="line">
+                    <a:avLst/>
+                  </a:prstGeom>
+                  <a:ln>
+                    <a:solidFill>
+                      <a:schemeClr val="tx2">
+                        <a:lumMod val="75000"/>
+                      </a:schemeClr>
+                    </a:solidFill>
+                  </a:ln>
+                </p:spPr>
+                <p:style>
+                  <a:lnRef idx="1">
+                    <a:schemeClr val="accent1"/>
+                  </a:lnRef>
+                  <a:fillRef idx="0">
+                    <a:schemeClr val="accent1"/>
+                  </a:fillRef>
+                  <a:effectRef idx="0">
+                    <a:schemeClr val="accent1"/>
+                  </a:effectRef>
+                  <a:fontRef idx="minor">
+                    <a:schemeClr val="tx1"/>
+                  </a:fontRef>
+                </p:style>
+              </p:cxnSp>
+            </p:grpSp>
+            <p:cxnSp>
+              <p:nvCxnSpPr>
+                <p:cNvPr id="412" name="Straight Connector 411"/>
+                <p:cNvCxnSpPr/>
+                <p:nvPr/>
+              </p:nvCxnSpPr>
+              <p:spPr>
+                <a:xfrm>
+                  <a:off x="3951228" y="2769984"/>
+                  <a:ext cx="94166" cy="0"/>
+                </a:xfrm>
+                <a:prstGeom prst="line">
+                  <a:avLst/>
+                </a:prstGeom>
+                <a:ln>
+                  <a:solidFill>
+                    <a:schemeClr val="tx2">
+                      <a:lumMod val="75000"/>
+                    </a:schemeClr>
+                  </a:solidFill>
+                </a:ln>
+              </p:spPr>
+              <p:style>
+                <a:lnRef idx="1">
+                  <a:schemeClr val="accent1"/>
+                </a:lnRef>
+                <a:fillRef idx="0">
+                  <a:schemeClr val="accent1"/>
+                </a:fillRef>
+                <a:effectRef idx="0">
+                  <a:schemeClr val="accent1"/>
+                </a:effectRef>
+                <a:fontRef idx="minor">
+                  <a:schemeClr val="tx1"/>
+                </a:fontRef>
+              </p:style>
+            </p:cxnSp>
+          </p:grpSp>
+          <p:cxnSp>
+            <p:nvCxnSpPr>
+              <p:cNvPr id="410" name="Straight Connector 409"/>
+              <p:cNvCxnSpPr/>
+              <p:nvPr/>
+            </p:nvCxnSpPr>
+            <p:spPr>
+              <a:xfrm>
+                <a:off x="3951228" y="2752554"/>
+                <a:ext cx="94166" cy="0"/>
+              </a:xfrm>
+              <a:prstGeom prst="line">
+                <a:avLst/>
+              </a:prstGeom>
+              <a:ln>
+                <a:solidFill>
+                  <a:schemeClr val="tx2">
+                    <a:lumMod val="75000"/>
+                  </a:schemeClr>
+                </a:solidFill>
+              </a:ln>
+            </p:spPr>
+            <p:style>
+              <a:lnRef idx="1">
+                <a:schemeClr val="accent1"/>
+              </a:lnRef>
+              <a:fillRef idx="0">
+                <a:schemeClr val="accent1"/>
+              </a:fillRef>
+              <a:effectRef idx="0">
+                <a:schemeClr val="accent1"/>
+              </a:effectRef>
+              <a:fontRef idx="minor">
+                <a:schemeClr val="tx1"/>
+              </a:fontRef>
+            </p:style>
+          </p:cxnSp>
+        </p:grpSp>
+        <p:cxnSp>
+          <p:nvCxnSpPr>
+            <p:cNvPr id="407" name="Straight Connector 406"/>
+            <p:cNvCxnSpPr/>
+            <p:nvPr/>
+          </p:nvCxnSpPr>
+          <p:spPr>
+            <a:xfrm>
+              <a:off x="3951228" y="2738470"/>
+              <a:ext cx="94166" cy="0"/>
+            </a:xfrm>
+            <a:prstGeom prst="line">
+              <a:avLst/>
+            </a:prstGeom>
+            <a:ln>
+              <a:solidFill>
+                <a:schemeClr val="tx2">
+                  <a:lumMod val="75000"/>
+                </a:schemeClr>
+              </a:solidFill>
+            </a:ln>
+          </p:spPr>
+          <p:style>
+            <a:lnRef idx="1">
+              <a:schemeClr val="accent1"/>
+            </a:lnRef>
+            <a:fillRef idx="0">
+              <a:schemeClr val="accent1"/>
+            </a:fillRef>
+            <a:effectRef idx="0">
+              <a:schemeClr val="accent1"/>
+            </a:effectRef>
+            <a:fontRef idx="minor">
+              <a:schemeClr val="tx1"/>
+            </a:fontRef>
+          </p:style>
+        </p:cxnSp>
+        <p:cxnSp>
+          <p:nvCxnSpPr>
+            <p:cNvPr id="408" name="Straight Connector 407"/>
+            <p:cNvCxnSpPr/>
+            <p:nvPr/>
+          </p:nvCxnSpPr>
+          <p:spPr>
+            <a:xfrm>
+              <a:off x="3951228" y="2721040"/>
+              <a:ext cx="94166" cy="0"/>
+            </a:xfrm>
+            <a:prstGeom prst="line">
+              <a:avLst/>
+            </a:prstGeom>
+            <a:ln>
+              <a:solidFill>
+                <a:schemeClr val="tx2">
+                  <a:lumMod val="75000"/>
+                </a:schemeClr>
+              </a:solidFill>
+            </a:ln>
+          </p:spPr>
+          <p:style>
+            <a:lnRef idx="1">
+              <a:schemeClr val="accent1"/>
+            </a:lnRef>
+            <a:fillRef idx="0">
+              <a:schemeClr val="accent1"/>
+            </a:fillRef>
+            <a:effectRef idx="0">
+              <a:schemeClr val="accent1"/>
+            </a:effectRef>
+            <a:fontRef idx="minor">
+              <a:schemeClr val="tx1"/>
+            </a:fontRef>
+          </p:style>
+        </p:cxnSp>
       </p:grpSp>
     </p:spTree>
     <p:extLst>

--- a/assets/images/adventures/silentspire-manor/interior/layout.pptx
+++ b/assets/images/adventures/silentspire-manor/interior/layout.pptx
@@ -3190,52 +3190,6 @@
       </p:sp>
       <p:sp>
         <p:nvSpPr>
-          <p:cNvPr id="10" name="Rectangle 9"/>
-          <p:cNvSpPr/>
-          <p:nvPr/>
-        </p:nvSpPr>
-        <p:spPr>
-          <a:xfrm>
-            <a:off x="5833241" y="2535810"/>
-            <a:ext cx="50450" cy="1463704"/>
-          </a:xfrm>
-          <a:prstGeom prst="rect">
-            <a:avLst/>
-          </a:prstGeom>
-          <a:solidFill>
-            <a:srgbClr val="492207"/>
-          </a:solidFill>
-          <a:ln>
-            <a:noFill/>
-          </a:ln>
-        </p:spPr>
-        <p:style>
-          <a:lnRef idx="2">
-            <a:schemeClr val="accent1">
-              <a:shade val="50000"/>
-            </a:schemeClr>
-          </a:lnRef>
-          <a:fillRef idx="1">
-            <a:schemeClr val="accent1"/>
-          </a:fillRef>
-          <a:effectRef idx="0">
-            <a:schemeClr val="accent1"/>
-          </a:effectRef>
-          <a:fontRef idx="minor">
-            <a:schemeClr val="lt1"/>
-          </a:fontRef>
-        </p:style>
-        <p:txBody>
-          <a:bodyPr rtlCol="0" anchor="ctr"/>
-          <a:lstStyle/>
-          <a:p>
-            <a:pPr algn="ctr"/>
-            <a:endParaRPr lang="en-US"/>
-          </a:p>
-        </p:txBody>
-      </p:sp>
-      <p:sp>
-        <p:nvSpPr>
           <p:cNvPr id="11" name="Rectangle 10"/>
           <p:cNvSpPr/>
           <p:nvPr/>
@@ -4124,7 +4078,7 @@
         </p:nvSpPr>
         <p:spPr>
           <a:xfrm>
-            <a:off x="4543229" y="2573181"/>
+            <a:off x="4972318" y="2572652"/>
             <a:ext cx="1310397" cy="376299"/>
           </a:xfrm>
           <a:prstGeom prst="rect">
@@ -5319,7 +5273,7 @@
         </p:nvGrpSpPr>
         <p:grpSpPr>
           <a:xfrm>
-            <a:off x="1160296" y="1457206"/>
+            <a:off x="1150998" y="314274"/>
             <a:ext cx="281090" cy="281090"/>
             <a:chOff x="2836912" y="3174001"/>
             <a:chExt cx="377756" cy="377756"/>
@@ -6568,8 +6522,8 @@
         </p:nvGrpSpPr>
         <p:grpSpPr>
           <a:xfrm rot="5400000">
-            <a:off x="6194824" y="369276"/>
-            <a:ext cx="1051176" cy="818183"/>
+            <a:off x="6181938" y="322546"/>
+            <a:ext cx="1051176" cy="891585"/>
             <a:chOff x="206032" y="4254498"/>
             <a:chExt cx="1323707" cy="644242"/>
           </a:xfrm>
@@ -10389,7 +10343,7 @@
         </p:nvCxnSpPr>
         <p:spPr>
           <a:xfrm flipV="1">
-            <a:off x="6266040" y="244759"/>
+            <a:off x="6270802" y="244759"/>
             <a:ext cx="0" cy="1562896"/>
           </a:xfrm>
           <a:prstGeom prst="line">
@@ -10494,7 +10448,7 @@
         </p:nvCxnSpPr>
         <p:spPr>
           <a:xfrm flipV="1">
-            <a:off x="6261734" y="2151461"/>
+            <a:off x="6266496" y="2151461"/>
             <a:ext cx="0" cy="405650"/>
           </a:xfrm>
           <a:prstGeom prst="line">
@@ -14150,7 +14104,7 @@
         </p:nvGrpSpPr>
         <p:grpSpPr>
           <a:xfrm>
-            <a:off x="4655738" y="392285"/>
+            <a:off x="4518400" y="358353"/>
             <a:ext cx="166907" cy="152847"/>
             <a:chOff x="3909725" y="2706151"/>
             <a:chExt cx="166907" cy="152847"/>
@@ -14570,6 +14524,112 @@
           </p:style>
         </p:cxnSp>
       </p:grpSp>
+      <p:sp>
+        <p:nvSpPr>
+          <p:cNvPr id="300" name="Oval 299"/>
+          <p:cNvSpPr/>
+          <p:nvPr/>
+        </p:nvSpPr>
+        <p:spPr>
+          <a:xfrm>
+            <a:off x="5860831" y="295986"/>
+            <a:ext cx="45720" cy="45720"/>
+          </a:xfrm>
+          <a:prstGeom prst="ellipse">
+            <a:avLst/>
+          </a:prstGeom>
+          <a:solidFill>
+            <a:schemeClr val="accent1">
+              <a:lumMod val="20000"/>
+              <a:lumOff val="80000"/>
+            </a:schemeClr>
+          </a:solidFill>
+          <a:ln>
+            <a:solidFill>
+              <a:schemeClr val="tx2">
+                <a:lumMod val="40000"/>
+                <a:lumOff val="60000"/>
+              </a:schemeClr>
+            </a:solidFill>
+          </a:ln>
+        </p:spPr>
+        <p:style>
+          <a:lnRef idx="2">
+            <a:schemeClr val="accent1">
+              <a:shade val="50000"/>
+            </a:schemeClr>
+          </a:lnRef>
+          <a:fillRef idx="1">
+            <a:schemeClr val="accent1"/>
+          </a:fillRef>
+          <a:effectRef idx="0">
+            <a:schemeClr val="accent1"/>
+          </a:effectRef>
+          <a:fontRef idx="minor">
+            <a:schemeClr val="lt1"/>
+          </a:fontRef>
+        </p:style>
+        <p:txBody>
+          <a:bodyPr rtlCol="0" anchor="ctr"/>
+          <a:lstStyle/>
+          <a:p>
+            <a:pPr algn="ctr"/>
+            <a:endParaRPr lang="en-US" dirty="0"/>
+          </a:p>
+        </p:txBody>
+      </p:sp>
+      <p:sp>
+        <p:nvSpPr>
+          <p:cNvPr id="301" name="Oval 300"/>
+          <p:cNvSpPr/>
+          <p:nvPr/>
+        </p:nvSpPr>
+        <p:spPr>
+          <a:xfrm>
+            <a:off x="4712897" y="446205"/>
+            <a:ext cx="45719" cy="45719"/>
+          </a:xfrm>
+          <a:prstGeom prst="ellipse">
+            <a:avLst/>
+          </a:prstGeom>
+          <a:solidFill>
+            <a:schemeClr val="bg2">
+              <a:lumMod val="10000"/>
+            </a:schemeClr>
+          </a:solidFill>
+          <a:ln w="19050">
+            <a:solidFill>
+              <a:schemeClr val="tx2">
+                <a:lumMod val="75000"/>
+              </a:schemeClr>
+            </a:solidFill>
+          </a:ln>
+        </p:spPr>
+        <p:style>
+          <a:lnRef idx="2">
+            <a:schemeClr val="accent1">
+              <a:shade val="50000"/>
+            </a:schemeClr>
+          </a:lnRef>
+          <a:fillRef idx="1">
+            <a:schemeClr val="accent1"/>
+          </a:fillRef>
+          <a:effectRef idx="0">
+            <a:schemeClr val="accent1"/>
+          </a:effectRef>
+          <a:fontRef idx="minor">
+            <a:schemeClr val="lt1"/>
+          </a:fontRef>
+        </p:style>
+        <p:txBody>
+          <a:bodyPr rtlCol="0" anchor="ctr"/>
+          <a:lstStyle/>
+          <a:p>
+            <a:pPr algn="ctr"/>
+            <a:endParaRPr lang="en-US"/>
+          </a:p>
+        </p:txBody>
+      </p:sp>
     </p:spTree>
     <p:extLst>
       <p:ext uri="{BB962C8B-B14F-4D97-AF65-F5344CB8AC3E}">

--- a/assets/images/adventures/silentspire-manor/interior/layout.pptx
+++ b/assets/images/adventures/silentspire-manor/interior/layout.pptx
@@ -6,6 +6,7 @@
   </p:sldMasterIdLst>
   <p:sldIdLst>
     <p:sldId id="256" r:id="rId2"/>
+    <p:sldId id="257" r:id="rId3"/>
   </p:sldIdLst>
   <p:sldSz cx="9144000" cy="5143500" type="screen16x9"/>
   <p:notesSz cx="6858000" cy="9144000"/>
@@ -14650,6 +14651,5216 @@
 </p:sld>
 </file>
 
+<file path=ppt/slides/slide2.xml><?xml version="1.0" encoding="utf-8"?>
+<p:sld xmlns:a="http://schemas.openxmlformats.org/drawingml/2006/main" xmlns:r="http://schemas.openxmlformats.org/officeDocument/2006/relationships" xmlns:p="http://schemas.openxmlformats.org/presentationml/2006/main">
+  <p:cSld>
+    <p:spTree>
+      <p:nvGrpSpPr>
+        <p:cNvPr id="1" name=""/>
+        <p:cNvGrpSpPr/>
+        <p:nvPr/>
+      </p:nvGrpSpPr>
+      <p:grpSpPr>
+        <a:xfrm>
+          <a:off x="0" y="0"/>
+          <a:ext cx="0" cy="0"/>
+          <a:chOff x="0" y="0"/>
+          <a:chExt cx="0" cy="0"/>
+        </a:xfrm>
+      </p:grpSpPr>
+      <p:grpSp>
+        <p:nvGrpSpPr>
+          <p:cNvPr id="290" name="Group 289"/>
+          <p:cNvGrpSpPr/>
+          <p:nvPr/>
+        </p:nvGrpSpPr>
+        <p:grpSpPr>
+          <a:xfrm>
+            <a:off x="0" y="0"/>
+            <a:ext cx="9144000" cy="5143500"/>
+            <a:chOff x="0" y="0"/>
+            <a:chExt cx="9144000" cy="5143500"/>
+          </a:xfrm>
+        </p:grpSpPr>
+        <p:grpSp>
+          <p:nvGrpSpPr>
+            <p:cNvPr id="288" name="Group 287"/>
+            <p:cNvGrpSpPr/>
+            <p:nvPr/>
+          </p:nvGrpSpPr>
+          <p:grpSpPr>
+            <a:xfrm>
+              <a:off x="0" y="0"/>
+              <a:ext cx="9144000" cy="5143500"/>
+              <a:chOff x="0" y="0"/>
+              <a:chExt cx="9144000" cy="5143500"/>
+            </a:xfrm>
+          </p:grpSpPr>
+          <p:sp>
+            <p:nvSpPr>
+              <p:cNvPr id="6" name="Rectangle 5"/>
+              <p:cNvSpPr/>
+              <p:nvPr/>
+            </p:nvSpPr>
+            <p:spPr>
+              <a:xfrm>
+                <a:off x="0" y="0"/>
+                <a:ext cx="9144000" cy="5143500"/>
+              </a:xfrm>
+              <a:prstGeom prst="rect">
+                <a:avLst/>
+              </a:prstGeom>
+              <a:solidFill>
+                <a:schemeClr val="tx1">
+                  <a:lumMod val="50000"/>
+                  <a:lumOff val="50000"/>
+                </a:schemeClr>
+              </a:solidFill>
+              <a:ln>
+                <a:noFill/>
+              </a:ln>
+            </p:spPr>
+            <p:style>
+              <a:lnRef idx="2">
+                <a:schemeClr val="accent1">
+                  <a:shade val="50000"/>
+                </a:schemeClr>
+              </a:lnRef>
+              <a:fillRef idx="1">
+                <a:schemeClr val="accent1"/>
+              </a:fillRef>
+              <a:effectRef idx="0">
+                <a:schemeClr val="accent1"/>
+              </a:effectRef>
+              <a:fontRef idx="minor">
+                <a:schemeClr val="lt1"/>
+              </a:fontRef>
+            </p:style>
+            <p:txBody>
+              <a:bodyPr rtlCol="0" anchor="ctr"/>
+              <a:lstStyle/>
+              <a:p>
+                <a:pPr algn="ctr"/>
+                <a:endParaRPr lang="en-US"/>
+              </a:p>
+            </p:txBody>
+          </p:sp>
+          <p:sp>
+            <p:nvSpPr>
+              <p:cNvPr id="287" name="Rectangle 286"/>
+              <p:cNvSpPr/>
+              <p:nvPr/>
+            </p:nvSpPr>
+            <p:spPr>
+              <a:xfrm>
+                <a:off x="209889" y="245553"/>
+                <a:ext cx="8652116" cy="4660330"/>
+              </a:xfrm>
+              <a:prstGeom prst="rect">
+                <a:avLst/>
+              </a:prstGeom>
+              <a:solidFill>
+                <a:schemeClr val="bg2"/>
+              </a:solidFill>
+              <a:ln>
+                <a:noFill/>
+              </a:ln>
+            </p:spPr>
+            <p:style>
+              <a:lnRef idx="2">
+                <a:schemeClr val="accent1">
+                  <a:shade val="50000"/>
+                </a:schemeClr>
+              </a:lnRef>
+              <a:fillRef idx="1">
+                <a:schemeClr val="accent1"/>
+              </a:fillRef>
+              <a:effectRef idx="0">
+                <a:schemeClr val="accent1"/>
+              </a:effectRef>
+              <a:fontRef idx="minor">
+                <a:schemeClr val="lt1"/>
+              </a:fontRef>
+            </p:style>
+            <p:txBody>
+              <a:bodyPr rtlCol="0" anchor="ctr"/>
+              <a:lstStyle/>
+              <a:p>
+                <a:pPr algn="ctr"/>
+                <a:endParaRPr lang="en-US"/>
+              </a:p>
+            </p:txBody>
+          </p:sp>
+        </p:grpSp>
+        <p:pic>
+          <p:nvPicPr>
+            <p:cNvPr id="289" name="Picture 288"/>
+            <p:cNvPicPr>
+              <a:picLocks noChangeAspect="1"/>
+            </p:cNvPicPr>
+            <p:nvPr/>
+          </p:nvPicPr>
+          <p:blipFill>
+            <a:blip r:embed="rId2">
+              <a:extLst>
+                <a:ext uri="{28A0092B-C50C-407E-A947-70E740481C1C}">
+                  <a14:useLocalDpi xmlns:a14="http://schemas.microsoft.com/office/drawing/2010/main" val="0"/>
+                </a:ext>
+              </a:extLst>
+            </a:blip>
+            <a:stretch>
+              <a:fillRect/>
+            </a:stretch>
+          </p:blipFill>
+          <p:spPr>
+            <a:xfrm>
+              <a:off x="207182" y="244969"/>
+              <a:ext cx="8650151" cy="4653562"/>
+            </a:xfrm>
+            <a:prstGeom prst="rect">
+              <a:avLst/>
+            </a:prstGeom>
+          </p:spPr>
+        </p:pic>
+      </p:grpSp>
+      <p:sp>
+        <p:nvSpPr>
+          <p:cNvPr id="5" name="Rectangle 4"/>
+          <p:cNvSpPr/>
+          <p:nvPr/>
+        </p:nvSpPr>
+        <p:spPr>
+          <a:xfrm>
+            <a:off x="4110038" y="4904432"/>
+            <a:ext cx="1283232" cy="239068"/>
+          </a:xfrm>
+          <a:prstGeom prst="rect">
+            <a:avLst/>
+          </a:prstGeom>
+          <a:solidFill>
+            <a:schemeClr val="bg2"/>
+          </a:solidFill>
+          <a:ln>
+            <a:noFill/>
+          </a:ln>
+        </p:spPr>
+        <p:style>
+          <a:lnRef idx="2">
+            <a:schemeClr val="accent1">
+              <a:shade val="50000"/>
+            </a:schemeClr>
+          </a:lnRef>
+          <a:fillRef idx="1">
+            <a:schemeClr val="accent1"/>
+          </a:fillRef>
+          <a:effectRef idx="0">
+            <a:schemeClr val="accent1"/>
+          </a:effectRef>
+          <a:fontRef idx="minor">
+            <a:schemeClr val="lt1"/>
+          </a:fontRef>
+        </p:style>
+        <p:txBody>
+          <a:bodyPr rtlCol="0" anchor="ctr"/>
+          <a:lstStyle/>
+          <a:p>
+            <a:pPr algn="ctr"/>
+            <a:r>
+              <a:rPr lang="ro-RO" sz="1200" smtClean="0">
+                <a:solidFill>
+                  <a:schemeClr val="tx1"/>
+                </a:solidFill>
+                <a:latin typeface="Libre Baskerville" panose="02000000000000000000" pitchFamily="2" charset="0"/>
+              </a:rPr>
+              <a:t>Foyer</a:t>
+            </a:r>
+            <a:endParaRPr lang="en-US" sz="1200" dirty="0">
+              <a:solidFill>
+                <a:schemeClr val="tx1"/>
+              </a:solidFill>
+              <a:latin typeface="Libre Baskerville" panose="02000000000000000000" pitchFamily="2" charset="0"/>
+            </a:endParaRPr>
+          </a:p>
+        </p:txBody>
+      </p:sp>
+      <p:sp>
+        <p:nvSpPr>
+          <p:cNvPr id="11" name="Rectangle 10"/>
+          <p:cNvSpPr/>
+          <p:nvPr/>
+        </p:nvSpPr>
+        <p:spPr>
+          <a:xfrm>
+            <a:off x="3280196" y="2575312"/>
+            <a:ext cx="807917" cy="376299"/>
+          </a:xfrm>
+          <a:prstGeom prst="rect">
+            <a:avLst/>
+          </a:prstGeom>
+          <a:solidFill>
+            <a:schemeClr val="bg2">
+              <a:lumMod val="50000"/>
+            </a:schemeClr>
+          </a:solidFill>
+          <a:ln>
+            <a:noFill/>
+          </a:ln>
+        </p:spPr>
+        <p:style>
+          <a:lnRef idx="2">
+            <a:schemeClr val="accent1">
+              <a:shade val="50000"/>
+            </a:schemeClr>
+          </a:lnRef>
+          <a:fillRef idx="1">
+            <a:schemeClr val="accent1"/>
+          </a:fillRef>
+          <a:effectRef idx="0">
+            <a:schemeClr val="accent1"/>
+          </a:effectRef>
+          <a:fontRef idx="minor">
+            <a:schemeClr val="lt1"/>
+          </a:fontRef>
+        </p:style>
+        <p:txBody>
+          <a:bodyPr rtlCol="0" anchor="ctr"/>
+          <a:lstStyle/>
+          <a:p>
+            <a:pPr algn="ctr"/>
+            <a:endParaRPr lang="en-US" dirty="0">
+              <a:solidFill>
+                <a:schemeClr val="tx1"/>
+              </a:solidFill>
+            </a:endParaRPr>
+          </a:p>
+        </p:txBody>
+      </p:sp>
+      <p:sp>
+        <p:nvSpPr>
+          <p:cNvPr id="47" name="Arc 46"/>
+          <p:cNvSpPr/>
+          <p:nvPr/>
+        </p:nvSpPr>
+        <p:spPr>
+          <a:xfrm rot="5400000">
+            <a:off x="1117216" y="1760812"/>
+            <a:ext cx="767470" cy="860231"/>
+          </a:xfrm>
+          <a:prstGeom prst="arc">
+            <a:avLst/>
+          </a:prstGeom>
+          <a:ln w="28575">
+            <a:solidFill>
+              <a:schemeClr val="bg2">
+                <a:lumMod val="50000"/>
+              </a:schemeClr>
+            </a:solidFill>
+          </a:ln>
+        </p:spPr>
+        <p:style>
+          <a:lnRef idx="1">
+            <a:schemeClr val="accent1"/>
+          </a:lnRef>
+          <a:fillRef idx="0">
+            <a:schemeClr val="accent1"/>
+          </a:fillRef>
+          <a:effectRef idx="0">
+            <a:schemeClr val="accent1"/>
+          </a:effectRef>
+          <a:fontRef idx="minor">
+            <a:schemeClr val="tx1"/>
+          </a:fontRef>
+        </p:style>
+        <p:txBody>
+          <a:bodyPr rtlCol="0" anchor="ctr"/>
+          <a:lstStyle/>
+          <a:p>
+            <a:pPr algn="ctr"/>
+            <a:endParaRPr lang="en-US"/>
+          </a:p>
+        </p:txBody>
+      </p:sp>
+      <p:sp>
+        <p:nvSpPr>
+          <p:cNvPr id="51" name="Arc 50"/>
+          <p:cNvSpPr/>
+          <p:nvPr/>
+        </p:nvSpPr>
+        <p:spPr>
+          <a:xfrm>
+            <a:off x="209888" y="1429631"/>
+            <a:ext cx="893339" cy="728991"/>
+          </a:xfrm>
+          <a:prstGeom prst="arc">
+            <a:avLst/>
+          </a:prstGeom>
+          <a:ln w="28575">
+            <a:solidFill>
+              <a:schemeClr val="bg2">
+                <a:lumMod val="50000"/>
+              </a:schemeClr>
+            </a:solidFill>
+          </a:ln>
+        </p:spPr>
+        <p:style>
+          <a:lnRef idx="1">
+            <a:schemeClr val="accent1"/>
+          </a:lnRef>
+          <a:fillRef idx="0">
+            <a:schemeClr val="accent1"/>
+          </a:fillRef>
+          <a:effectRef idx="0">
+            <a:schemeClr val="accent1"/>
+          </a:effectRef>
+          <a:fontRef idx="minor">
+            <a:schemeClr val="tx1"/>
+          </a:fontRef>
+        </p:style>
+        <p:txBody>
+          <a:bodyPr rtlCol="0" anchor="ctr"/>
+          <a:lstStyle/>
+          <a:p>
+            <a:pPr algn="ctr"/>
+            <a:endParaRPr lang="en-US"/>
+          </a:p>
+        </p:txBody>
+      </p:sp>
+      <p:sp>
+        <p:nvSpPr>
+          <p:cNvPr id="61" name="Rectangle 60"/>
+          <p:cNvSpPr/>
+          <p:nvPr/>
+        </p:nvSpPr>
+        <p:spPr>
+          <a:xfrm>
+            <a:off x="4972318" y="2572652"/>
+            <a:ext cx="1310397" cy="376299"/>
+          </a:xfrm>
+          <a:prstGeom prst="rect">
+            <a:avLst/>
+          </a:prstGeom>
+          <a:solidFill>
+            <a:schemeClr val="bg2">
+              <a:lumMod val="50000"/>
+            </a:schemeClr>
+          </a:solidFill>
+          <a:ln>
+            <a:noFill/>
+          </a:ln>
+        </p:spPr>
+        <p:style>
+          <a:lnRef idx="2">
+            <a:schemeClr val="accent1">
+              <a:shade val="50000"/>
+            </a:schemeClr>
+          </a:lnRef>
+          <a:fillRef idx="1">
+            <a:schemeClr val="accent1"/>
+          </a:fillRef>
+          <a:effectRef idx="0">
+            <a:schemeClr val="accent1"/>
+          </a:effectRef>
+          <a:fontRef idx="minor">
+            <a:schemeClr val="lt1"/>
+          </a:fontRef>
+        </p:style>
+        <p:txBody>
+          <a:bodyPr rtlCol="0" anchor="ctr"/>
+          <a:lstStyle/>
+          <a:p>
+            <a:pPr algn="ctr"/>
+            <a:r>
+              <a:rPr lang="ro-RO" dirty="0" smtClean="0">
+                <a:solidFill>
+                  <a:schemeClr val="tx1"/>
+                </a:solidFill>
+                <a:latin typeface="Libre Baskerville" panose="02000000000000000000" pitchFamily="2" charset="0"/>
+              </a:rPr>
+              <a:t>Bookcase</a:t>
+            </a:r>
+            <a:endParaRPr lang="en-US" dirty="0">
+              <a:solidFill>
+                <a:schemeClr val="tx1"/>
+              </a:solidFill>
+              <a:latin typeface="Libre Baskerville" panose="02000000000000000000" pitchFamily="2" charset="0"/>
+            </a:endParaRPr>
+          </a:p>
+        </p:txBody>
+      </p:sp>
+      <p:sp>
+        <p:nvSpPr>
+          <p:cNvPr id="63" name="TextBox 62"/>
+          <p:cNvSpPr txBox="1"/>
+          <p:nvPr/>
+        </p:nvSpPr>
+        <p:spPr>
+          <a:xfrm>
+            <a:off x="395895" y="911753"/>
+            <a:ext cx="944299" cy="276999"/>
+          </a:xfrm>
+          <a:prstGeom prst="rect">
+            <a:avLst/>
+          </a:prstGeom>
+          <a:noFill/>
+        </p:spPr>
+        <p:txBody>
+          <a:bodyPr wrap="square" rtlCol="0">
+            <a:spAutoFit/>
+          </a:bodyPr>
+          <a:lstStyle/>
+          <a:p>
+            <a:r>
+              <a:rPr lang="ro-RO" sz="1200" dirty="0" smtClean="0">
+                <a:latin typeface="Libre Baskerville" panose="02000000000000000000" pitchFamily="2" charset="0"/>
+              </a:rPr>
+              <a:t>Kitchen</a:t>
+            </a:r>
+            <a:endParaRPr lang="en-US" sz="1200" dirty="0">
+              <a:latin typeface="Libre Baskerville" panose="02000000000000000000" pitchFamily="2" charset="0"/>
+            </a:endParaRPr>
+          </a:p>
+        </p:txBody>
+      </p:sp>
+      <p:sp>
+        <p:nvSpPr>
+          <p:cNvPr id="127" name="Rectangle 126"/>
+          <p:cNvSpPr/>
+          <p:nvPr/>
+        </p:nvSpPr>
+        <p:spPr>
+          <a:xfrm>
+            <a:off x="1956573" y="3344733"/>
+            <a:ext cx="850256" cy="353257"/>
+          </a:xfrm>
+          <a:prstGeom prst="rect">
+            <a:avLst/>
+          </a:prstGeom>
+          <a:solidFill>
+            <a:srgbClr val="7F7F7F"/>
+          </a:solidFill>
+          <a:ln>
+            <a:noFill/>
+          </a:ln>
+        </p:spPr>
+        <p:style>
+          <a:lnRef idx="2">
+            <a:schemeClr val="accent1">
+              <a:shade val="50000"/>
+            </a:schemeClr>
+          </a:lnRef>
+          <a:fillRef idx="1">
+            <a:schemeClr val="accent1"/>
+          </a:fillRef>
+          <a:effectRef idx="0">
+            <a:schemeClr val="accent1"/>
+          </a:effectRef>
+          <a:fontRef idx="minor">
+            <a:schemeClr val="lt1"/>
+          </a:fontRef>
+        </p:style>
+        <p:txBody>
+          <a:bodyPr rtlCol="0" anchor="ctr"/>
+          <a:lstStyle/>
+          <a:p>
+            <a:pPr algn="ctr"/>
+            <a:r>
+              <a:rPr lang="ro-RO" dirty="0" smtClean="0">
+                <a:solidFill>
+                  <a:schemeClr val="tx1"/>
+                </a:solidFill>
+                <a:latin typeface="Libre Baskerville" panose="02000000000000000000" pitchFamily="2" charset="0"/>
+              </a:rPr>
+              <a:t>Hearth</a:t>
+            </a:r>
+            <a:endParaRPr lang="en-US" dirty="0">
+              <a:solidFill>
+                <a:schemeClr val="tx1"/>
+              </a:solidFill>
+              <a:latin typeface="Libre Baskerville" panose="02000000000000000000" pitchFamily="2" charset="0"/>
+            </a:endParaRPr>
+          </a:p>
+        </p:txBody>
+      </p:sp>
+      <p:sp>
+        <p:nvSpPr>
+          <p:cNvPr id="130" name="Arc 129"/>
+          <p:cNvSpPr/>
+          <p:nvPr/>
+        </p:nvSpPr>
+        <p:spPr>
+          <a:xfrm rot="10800000">
+            <a:off x="5844500" y="1439794"/>
+            <a:ext cx="861100" cy="726985"/>
+          </a:xfrm>
+          <a:prstGeom prst="arc">
+            <a:avLst/>
+          </a:prstGeom>
+          <a:ln w="28575">
+            <a:solidFill>
+              <a:schemeClr val="bg2">
+                <a:lumMod val="50000"/>
+              </a:schemeClr>
+            </a:solidFill>
+          </a:ln>
+        </p:spPr>
+        <p:style>
+          <a:lnRef idx="1">
+            <a:schemeClr val="accent1"/>
+          </a:lnRef>
+          <a:fillRef idx="0">
+            <a:schemeClr val="accent1"/>
+          </a:fillRef>
+          <a:effectRef idx="0">
+            <a:schemeClr val="accent1"/>
+          </a:effectRef>
+          <a:fontRef idx="minor">
+            <a:schemeClr val="tx1"/>
+          </a:fontRef>
+        </p:style>
+        <p:txBody>
+          <a:bodyPr rtlCol="0" anchor="ctr"/>
+          <a:lstStyle/>
+          <a:p>
+            <a:pPr algn="ctr"/>
+            <a:endParaRPr lang="en-US"/>
+          </a:p>
+        </p:txBody>
+      </p:sp>
+      <p:sp>
+        <p:nvSpPr>
+          <p:cNvPr id="131" name="TextBox 130"/>
+          <p:cNvSpPr txBox="1"/>
+          <p:nvPr/>
+        </p:nvSpPr>
+        <p:spPr>
+          <a:xfrm>
+            <a:off x="4254128" y="1533316"/>
+            <a:ext cx="944299" cy="461665"/>
+          </a:xfrm>
+          <a:prstGeom prst="rect">
+            <a:avLst/>
+          </a:prstGeom>
+          <a:noFill/>
+        </p:spPr>
+        <p:txBody>
+          <a:bodyPr wrap="square" rtlCol="0">
+            <a:spAutoFit/>
+          </a:bodyPr>
+          <a:lstStyle/>
+          <a:p>
+            <a:r>
+              <a:rPr lang="ro-RO" sz="1200" dirty="0" smtClean="0">
+                <a:latin typeface="Libre Baskerville" panose="02000000000000000000" pitchFamily="2" charset="0"/>
+              </a:rPr>
+              <a:t>Large Bedroom</a:t>
+            </a:r>
+            <a:endParaRPr lang="en-US" sz="1200" dirty="0">
+              <a:latin typeface="Libre Baskerville" panose="02000000000000000000" pitchFamily="2" charset="0"/>
+            </a:endParaRPr>
+          </a:p>
+        </p:txBody>
+      </p:sp>
+      <p:grpSp>
+        <p:nvGrpSpPr>
+          <p:cNvPr id="60" name="Group 59"/>
+          <p:cNvGrpSpPr/>
+          <p:nvPr/>
+        </p:nvGrpSpPr>
+        <p:grpSpPr>
+          <a:xfrm>
+            <a:off x="5015145" y="268748"/>
+            <a:ext cx="791983" cy="750490"/>
+            <a:chOff x="4446420" y="349588"/>
+            <a:chExt cx="1297188" cy="1229227"/>
+          </a:xfrm>
+        </p:grpSpPr>
+        <p:grpSp>
+          <p:nvGrpSpPr>
+            <p:cNvPr id="134" name="Group 133"/>
+            <p:cNvGrpSpPr/>
+            <p:nvPr/>
+          </p:nvGrpSpPr>
+          <p:grpSpPr>
+            <a:xfrm>
+              <a:off x="4446420" y="349588"/>
+              <a:ext cx="1297188" cy="1229227"/>
+              <a:chOff x="4446420" y="349588"/>
+              <a:chExt cx="1297188" cy="1229227"/>
+            </a:xfrm>
+          </p:grpSpPr>
+          <p:sp>
+            <p:nvSpPr>
+              <p:cNvPr id="132" name="Rectangle 131"/>
+              <p:cNvSpPr/>
+              <p:nvPr/>
+            </p:nvSpPr>
+            <p:spPr>
+              <a:xfrm>
+                <a:off x="4446420" y="349588"/>
+                <a:ext cx="1297188" cy="1229227"/>
+              </a:xfrm>
+              <a:prstGeom prst="rect">
+                <a:avLst/>
+              </a:prstGeom>
+              <a:solidFill>
+                <a:schemeClr val="bg2">
+                  <a:lumMod val="50000"/>
+                </a:schemeClr>
+              </a:solidFill>
+              <a:ln>
+                <a:noFill/>
+              </a:ln>
+            </p:spPr>
+            <p:style>
+              <a:lnRef idx="2">
+                <a:schemeClr val="accent1">
+                  <a:shade val="50000"/>
+                </a:schemeClr>
+              </a:lnRef>
+              <a:fillRef idx="1">
+                <a:schemeClr val="accent1"/>
+              </a:fillRef>
+              <a:effectRef idx="0">
+                <a:schemeClr val="accent1"/>
+              </a:effectRef>
+              <a:fontRef idx="minor">
+                <a:schemeClr val="lt1"/>
+              </a:fontRef>
+            </p:style>
+            <p:txBody>
+              <a:bodyPr rtlCol="0" anchor="ctr"/>
+              <a:lstStyle/>
+              <a:p>
+                <a:pPr algn="ctr"/>
+                <a:endParaRPr lang="en-US"/>
+              </a:p>
+            </p:txBody>
+          </p:sp>
+          <p:sp>
+            <p:nvSpPr>
+              <p:cNvPr id="133" name="Rectangle 132"/>
+              <p:cNvSpPr/>
+              <p:nvPr/>
+            </p:nvSpPr>
+            <p:spPr>
+              <a:xfrm>
+                <a:off x="4488130" y="397914"/>
+                <a:ext cx="1205532" cy="1125182"/>
+              </a:xfrm>
+              <a:prstGeom prst="rect">
+                <a:avLst/>
+              </a:prstGeom>
+              <a:solidFill>
+                <a:schemeClr val="bg2">
+                  <a:lumMod val="50000"/>
+                </a:schemeClr>
+              </a:solidFill>
+              <a:ln>
+                <a:noFill/>
+              </a:ln>
+            </p:spPr>
+            <p:style>
+              <a:lnRef idx="2">
+                <a:schemeClr val="accent1">
+                  <a:shade val="50000"/>
+                </a:schemeClr>
+              </a:lnRef>
+              <a:fillRef idx="1">
+                <a:schemeClr val="accent1"/>
+              </a:fillRef>
+              <a:effectRef idx="0">
+                <a:schemeClr val="accent1"/>
+              </a:effectRef>
+              <a:fontRef idx="minor">
+                <a:schemeClr val="lt1"/>
+              </a:fontRef>
+            </p:style>
+            <p:txBody>
+              <a:bodyPr rtlCol="0" anchor="ctr"/>
+              <a:lstStyle/>
+              <a:p>
+                <a:pPr algn="ctr"/>
+                <a:endParaRPr lang="en-US"/>
+              </a:p>
+            </p:txBody>
+          </p:sp>
+        </p:grpSp>
+        <p:sp>
+          <p:nvSpPr>
+            <p:cNvPr id="135" name="Rounded Rectangle 134"/>
+            <p:cNvSpPr/>
+            <p:nvPr/>
+          </p:nvSpPr>
+          <p:spPr>
+            <a:xfrm>
+              <a:off x="4547852" y="455883"/>
+              <a:ext cx="517900" cy="309798"/>
+            </a:xfrm>
+            <a:prstGeom prst="roundRect">
+              <a:avLst/>
+            </a:prstGeom>
+            <a:solidFill>
+              <a:schemeClr val="bg1">
+                <a:lumMod val="85000"/>
+              </a:schemeClr>
+            </a:solidFill>
+            <a:ln>
+              <a:noFill/>
+            </a:ln>
+          </p:spPr>
+          <p:style>
+            <a:lnRef idx="2">
+              <a:schemeClr val="accent1">
+                <a:shade val="50000"/>
+              </a:schemeClr>
+            </a:lnRef>
+            <a:fillRef idx="1">
+              <a:schemeClr val="accent1"/>
+            </a:fillRef>
+            <a:effectRef idx="0">
+              <a:schemeClr val="accent1"/>
+            </a:effectRef>
+            <a:fontRef idx="minor">
+              <a:schemeClr val="lt1"/>
+            </a:fontRef>
+          </p:style>
+          <p:txBody>
+            <a:bodyPr rtlCol="0" anchor="ctr"/>
+            <a:lstStyle/>
+            <a:p>
+              <a:pPr algn="ctr"/>
+              <a:endParaRPr lang="en-US"/>
+            </a:p>
+          </p:txBody>
+        </p:sp>
+        <p:sp>
+          <p:nvSpPr>
+            <p:cNvPr id="137" name="Rounded Rectangle 136"/>
+            <p:cNvSpPr/>
+            <p:nvPr/>
+          </p:nvSpPr>
+          <p:spPr>
+            <a:xfrm>
+              <a:off x="5124686" y="455883"/>
+              <a:ext cx="517900" cy="309798"/>
+            </a:xfrm>
+            <a:prstGeom prst="roundRect">
+              <a:avLst/>
+            </a:prstGeom>
+            <a:solidFill>
+              <a:schemeClr val="bg1">
+                <a:lumMod val="85000"/>
+              </a:schemeClr>
+            </a:solidFill>
+            <a:ln>
+              <a:noFill/>
+            </a:ln>
+          </p:spPr>
+          <p:style>
+            <a:lnRef idx="2">
+              <a:schemeClr val="accent1">
+                <a:shade val="50000"/>
+              </a:schemeClr>
+            </a:lnRef>
+            <a:fillRef idx="1">
+              <a:schemeClr val="accent1"/>
+            </a:fillRef>
+            <a:effectRef idx="0">
+              <a:schemeClr val="accent1"/>
+            </a:effectRef>
+            <a:fontRef idx="minor">
+              <a:schemeClr val="lt1"/>
+            </a:fontRef>
+          </p:style>
+          <p:txBody>
+            <a:bodyPr rtlCol="0" anchor="ctr"/>
+            <a:lstStyle/>
+            <a:p>
+              <a:pPr algn="ctr"/>
+              <a:endParaRPr lang="en-US"/>
+            </a:p>
+          </p:txBody>
+        </p:sp>
+        <p:sp>
+          <p:nvSpPr>
+            <p:cNvPr id="138" name="Rectangle 137"/>
+            <p:cNvSpPr/>
+            <p:nvPr/>
+          </p:nvSpPr>
+          <p:spPr>
+            <a:xfrm>
+              <a:off x="4488130" y="806717"/>
+              <a:ext cx="1205532" cy="716379"/>
+            </a:xfrm>
+            <a:prstGeom prst="rect">
+              <a:avLst/>
+            </a:prstGeom>
+            <a:solidFill>
+              <a:schemeClr val="bg1">
+                <a:lumMod val="85000"/>
+              </a:schemeClr>
+            </a:solidFill>
+            <a:ln>
+              <a:noFill/>
+            </a:ln>
+          </p:spPr>
+          <p:style>
+            <a:lnRef idx="2">
+              <a:schemeClr val="accent1">
+                <a:shade val="50000"/>
+              </a:schemeClr>
+            </a:lnRef>
+            <a:fillRef idx="1">
+              <a:schemeClr val="accent1"/>
+            </a:fillRef>
+            <a:effectRef idx="0">
+              <a:schemeClr val="accent1"/>
+            </a:effectRef>
+            <a:fontRef idx="minor">
+              <a:schemeClr val="lt1"/>
+            </a:fontRef>
+          </p:style>
+          <p:txBody>
+            <a:bodyPr rtlCol="0" anchor="ctr"/>
+            <a:lstStyle/>
+            <a:p>
+              <a:pPr algn="ctr"/>
+              <a:endParaRPr lang="en-US"/>
+            </a:p>
+          </p:txBody>
+        </p:sp>
+      </p:grpSp>
+      <p:sp>
+        <p:nvSpPr>
+          <p:cNvPr id="139" name="Rectangle 138"/>
+          <p:cNvSpPr/>
+          <p:nvPr/>
+        </p:nvSpPr>
+        <p:spPr>
+          <a:xfrm rot="16200000">
+            <a:off x="2919732" y="1779975"/>
+            <a:ext cx="1107173" cy="376299"/>
+          </a:xfrm>
+          <a:prstGeom prst="rect">
+            <a:avLst/>
+          </a:prstGeom>
+          <a:solidFill>
+            <a:schemeClr val="bg2">
+              <a:lumMod val="50000"/>
+            </a:schemeClr>
+          </a:solidFill>
+          <a:ln>
+            <a:noFill/>
+          </a:ln>
+        </p:spPr>
+        <p:style>
+          <a:lnRef idx="2">
+            <a:schemeClr val="accent1">
+              <a:shade val="50000"/>
+            </a:schemeClr>
+          </a:lnRef>
+          <a:fillRef idx="1">
+            <a:schemeClr val="accent1"/>
+          </a:fillRef>
+          <a:effectRef idx="0">
+            <a:schemeClr val="accent1"/>
+          </a:effectRef>
+          <a:fontRef idx="minor">
+            <a:schemeClr val="lt1"/>
+          </a:fontRef>
+        </p:style>
+        <p:txBody>
+          <a:bodyPr rtlCol="0" anchor="ctr"/>
+          <a:lstStyle/>
+          <a:p>
+            <a:pPr algn="ctr"/>
+            <a:r>
+              <a:rPr lang="ro-RO" dirty="0" smtClean="0">
+                <a:solidFill>
+                  <a:schemeClr val="tx1"/>
+                </a:solidFill>
+                <a:latin typeface="Libre Baskerville" panose="02000000000000000000" pitchFamily="2" charset="0"/>
+              </a:rPr>
+              <a:t>Wardrobe</a:t>
+            </a:r>
+            <a:endParaRPr lang="en-US" dirty="0">
+              <a:solidFill>
+                <a:schemeClr val="tx1"/>
+              </a:solidFill>
+              <a:latin typeface="Libre Baskerville" panose="02000000000000000000" pitchFamily="2" charset="0"/>
+            </a:endParaRPr>
+          </a:p>
+        </p:txBody>
+      </p:sp>
+      <p:sp>
+        <p:nvSpPr>
+          <p:cNvPr id="140" name="Rectangle 139"/>
+          <p:cNvSpPr/>
+          <p:nvPr/>
+        </p:nvSpPr>
+        <p:spPr>
+          <a:xfrm rot="16200000">
+            <a:off x="3102062" y="442218"/>
+            <a:ext cx="739842" cy="382798"/>
+          </a:xfrm>
+          <a:prstGeom prst="rect">
+            <a:avLst/>
+          </a:prstGeom>
+          <a:solidFill>
+            <a:srgbClr val="7F7F7F"/>
+          </a:solidFill>
+          <a:ln>
+            <a:noFill/>
+          </a:ln>
+        </p:spPr>
+        <p:style>
+          <a:lnRef idx="2">
+            <a:schemeClr val="accent1">
+              <a:shade val="50000"/>
+            </a:schemeClr>
+          </a:lnRef>
+          <a:fillRef idx="1">
+            <a:schemeClr val="accent1"/>
+          </a:fillRef>
+          <a:effectRef idx="0">
+            <a:schemeClr val="accent1"/>
+          </a:effectRef>
+          <a:fontRef idx="minor">
+            <a:schemeClr val="lt1"/>
+          </a:fontRef>
+        </p:style>
+        <p:txBody>
+          <a:bodyPr rtlCol="0" anchor="ctr"/>
+          <a:lstStyle/>
+          <a:p>
+            <a:pPr algn="ctr"/>
+            <a:r>
+              <a:rPr lang="ro-RO" sz="1200" dirty="0" smtClean="0">
+                <a:solidFill>
+                  <a:schemeClr val="tx1"/>
+                </a:solidFill>
+                <a:latin typeface="Libre Baskerville" panose="02000000000000000000" pitchFamily="2" charset="0"/>
+              </a:rPr>
+              <a:t>Hearth</a:t>
+            </a:r>
+            <a:endParaRPr lang="en-US" sz="1200" dirty="0">
+              <a:solidFill>
+                <a:schemeClr val="tx1"/>
+              </a:solidFill>
+              <a:latin typeface="Libre Baskerville" panose="02000000000000000000" pitchFamily="2" charset="0"/>
+            </a:endParaRPr>
+          </a:p>
+        </p:txBody>
+      </p:sp>
+      <p:grpSp>
+        <p:nvGrpSpPr>
+          <p:cNvPr id="146" name="Group 145"/>
+          <p:cNvGrpSpPr/>
+          <p:nvPr/>
+        </p:nvGrpSpPr>
+        <p:grpSpPr>
+          <a:xfrm>
+            <a:off x="1255595" y="679876"/>
+            <a:ext cx="229766" cy="717513"/>
+            <a:chOff x="2873773" y="858073"/>
+            <a:chExt cx="367513" cy="2710004"/>
+          </a:xfrm>
+          <a:solidFill>
+            <a:schemeClr val="bg2">
+              <a:lumMod val="50000"/>
+            </a:schemeClr>
+          </a:solidFill>
+        </p:grpSpPr>
+        <p:sp>
+          <p:nvSpPr>
+            <p:cNvPr id="126" name="Rectangle 125"/>
+            <p:cNvSpPr/>
+            <p:nvPr/>
+          </p:nvSpPr>
+          <p:spPr>
+            <a:xfrm>
+              <a:off x="2873773" y="858073"/>
+              <a:ext cx="361311" cy="2710004"/>
+            </a:xfrm>
+            <a:prstGeom prst="rect">
+              <a:avLst/>
+            </a:prstGeom>
+            <a:grpFill/>
+            <a:ln>
+              <a:noFill/>
+            </a:ln>
+          </p:spPr>
+          <p:style>
+            <a:lnRef idx="2">
+              <a:schemeClr val="accent1">
+                <a:shade val="50000"/>
+              </a:schemeClr>
+            </a:lnRef>
+            <a:fillRef idx="1">
+              <a:schemeClr val="accent1"/>
+            </a:fillRef>
+            <a:effectRef idx="0">
+              <a:schemeClr val="accent1"/>
+            </a:effectRef>
+            <a:fontRef idx="minor">
+              <a:schemeClr val="lt1"/>
+            </a:fontRef>
+          </p:style>
+          <p:txBody>
+            <a:bodyPr rtlCol="0" anchor="ctr"/>
+            <a:lstStyle/>
+            <a:p>
+              <a:pPr algn="ctr"/>
+              <a:endParaRPr lang="en-US" dirty="0">
+                <a:solidFill>
+                  <a:schemeClr val="tx1"/>
+                </a:solidFill>
+              </a:endParaRPr>
+            </a:p>
+          </p:txBody>
+        </p:sp>
+        <p:sp>
+          <p:nvSpPr>
+            <p:cNvPr id="141" name="Rectangle 140"/>
+            <p:cNvSpPr/>
+            <p:nvPr/>
+          </p:nvSpPr>
+          <p:spPr>
+            <a:xfrm>
+              <a:off x="3096246" y="858073"/>
+              <a:ext cx="145040" cy="2710004"/>
+            </a:xfrm>
+            <a:prstGeom prst="rect">
+              <a:avLst/>
+            </a:prstGeom>
+            <a:grpFill/>
+            <a:ln>
+              <a:noFill/>
+            </a:ln>
+          </p:spPr>
+          <p:style>
+            <a:lnRef idx="2">
+              <a:schemeClr val="accent1">
+                <a:shade val="50000"/>
+              </a:schemeClr>
+            </a:lnRef>
+            <a:fillRef idx="1">
+              <a:schemeClr val="accent1"/>
+            </a:fillRef>
+            <a:effectRef idx="0">
+              <a:schemeClr val="accent1"/>
+            </a:effectRef>
+            <a:fontRef idx="minor">
+              <a:schemeClr val="lt1"/>
+            </a:fontRef>
+          </p:style>
+          <p:txBody>
+            <a:bodyPr rtlCol="0" anchor="ctr"/>
+            <a:lstStyle/>
+            <a:p>
+              <a:pPr algn="ctr"/>
+              <a:endParaRPr lang="en-US" dirty="0">
+                <a:solidFill>
+                  <a:schemeClr val="tx1"/>
+                </a:solidFill>
+              </a:endParaRPr>
+            </a:p>
+          </p:txBody>
+        </p:sp>
+      </p:grpSp>
+      <p:sp>
+        <p:nvSpPr>
+          <p:cNvPr id="144" name="Arc 143"/>
+          <p:cNvSpPr/>
+          <p:nvPr/>
+        </p:nvSpPr>
+        <p:spPr>
+          <a:xfrm rot="5400000">
+            <a:off x="6770284" y="3701762"/>
+            <a:ext cx="751283" cy="828264"/>
+          </a:xfrm>
+          <a:prstGeom prst="arc">
+            <a:avLst/>
+          </a:prstGeom>
+          <a:ln w="28575">
+            <a:solidFill>
+              <a:schemeClr val="bg2">
+                <a:lumMod val="50000"/>
+              </a:schemeClr>
+            </a:solidFill>
+          </a:ln>
+        </p:spPr>
+        <p:style>
+          <a:lnRef idx="1">
+            <a:schemeClr val="accent1"/>
+          </a:lnRef>
+          <a:fillRef idx="0">
+            <a:schemeClr val="accent1"/>
+          </a:fillRef>
+          <a:effectRef idx="0">
+            <a:schemeClr val="accent1"/>
+          </a:effectRef>
+          <a:fontRef idx="minor">
+            <a:schemeClr val="tx1"/>
+          </a:fontRef>
+        </p:style>
+        <p:txBody>
+          <a:bodyPr rtlCol="0" anchor="ctr"/>
+          <a:lstStyle/>
+          <a:p>
+            <a:pPr algn="ctr"/>
+            <a:endParaRPr lang="en-US"/>
+          </a:p>
+        </p:txBody>
+      </p:sp>
+      <p:grpSp>
+        <p:nvGrpSpPr>
+          <p:cNvPr id="149" name="Group 148"/>
+          <p:cNvGrpSpPr/>
+          <p:nvPr/>
+        </p:nvGrpSpPr>
+        <p:grpSpPr>
+          <a:xfrm>
+            <a:off x="1150998" y="314274"/>
+            <a:ext cx="281090" cy="281090"/>
+            <a:chOff x="2836912" y="3174001"/>
+            <a:chExt cx="377756" cy="377756"/>
+          </a:xfrm>
+          <a:solidFill>
+            <a:schemeClr val="bg2">
+              <a:lumMod val="50000"/>
+            </a:schemeClr>
+          </a:solidFill>
+        </p:grpSpPr>
+        <p:sp>
+          <p:nvSpPr>
+            <p:cNvPr id="147" name="Oval 146"/>
+            <p:cNvSpPr/>
+            <p:nvPr/>
+          </p:nvSpPr>
+          <p:spPr>
+            <a:xfrm>
+              <a:off x="2836912" y="3174001"/>
+              <a:ext cx="377756" cy="377756"/>
+            </a:xfrm>
+            <a:prstGeom prst="ellipse">
+              <a:avLst/>
+            </a:prstGeom>
+            <a:grpFill/>
+            <a:ln w="57150">
+              <a:solidFill>
+                <a:srgbClr val="000000">
+                  <a:alpha val="30196"/>
+                </a:srgbClr>
+              </a:solidFill>
+            </a:ln>
+          </p:spPr>
+          <p:style>
+            <a:lnRef idx="2">
+              <a:schemeClr val="accent1">
+                <a:shade val="50000"/>
+              </a:schemeClr>
+            </a:lnRef>
+            <a:fillRef idx="1">
+              <a:schemeClr val="accent1"/>
+            </a:fillRef>
+            <a:effectRef idx="0">
+              <a:schemeClr val="accent1"/>
+            </a:effectRef>
+            <a:fontRef idx="minor">
+              <a:schemeClr val="lt1"/>
+            </a:fontRef>
+          </p:style>
+          <p:txBody>
+            <a:bodyPr rtlCol="0" anchor="ctr"/>
+            <a:lstStyle/>
+            <a:p>
+              <a:pPr algn="ctr"/>
+              <a:endParaRPr lang="en-US" dirty="0">
+                <a:solidFill>
+                  <a:schemeClr val="tx1"/>
+                </a:solidFill>
+              </a:endParaRPr>
+            </a:p>
+          </p:txBody>
+        </p:sp>
+        <p:sp>
+          <p:nvSpPr>
+            <p:cNvPr id="148" name="Oval 147"/>
+            <p:cNvSpPr/>
+            <p:nvPr/>
+          </p:nvSpPr>
+          <p:spPr>
+            <a:xfrm>
+              <a:off x="2924781" y="3280114"/>
+              <a:ext cx="45720" cy="45720"/>
+            </a:xfrm>
+            <a:prstGeom prst="ellipse">
+              <a:avLst/>
+            </a:prstGeom>
+            <a:grpFill/>
+            <a:ln>
+              <a:noFill/>
+            </a:ln>
+          </p:spPr>
+          <p:style>
+            <a:lnRef idx="2">
+              <a:schemeClr val="accent1">
+                <a:shade val="50000"/>
+              </a:schemeClr>
+            </a:lnRef>
+            <a:fillRef idx="1">
+              <a:schemeClr val="accent1"/>
+            </a:fillRef>
+            <a:effectRef idx="0">
+              <a:schemeClr val="accent1"/>
+            </a:effectRef>
+            <a:fontRef idx="minor">
+              <a:schemeClr val="lt1"/>
+            </a:fontRef>
+          </p:style>
+          <p:txBody>
+            <a:bodyPr rtlCol="0" anchor="ctr"/>
+            <a:lstStyle/>
+            <a:p>
+              <a:pPr algn="ctr"/>
+              <a:endParaRPr lang="en-US" dirty="0">
+                <a:solidFill>
+                  <a:schemeClr val="tx1"/>
+                </a:solidFill>
+              </a:endParaRPr>
+            </a:p>
+          </p:txBody>
+        </p:sp>
+      </p:grpSp>
+      <p:sp>
+        <p:nvSpPr>
+          <p:cNvPr id="150" name="Rectangle 149"/>
+          <p:cNvSpPr/>
+          <p:nvPr/>
+        </p:nvSpPr>
+        <p:spPr>
+          <a:xfrm>
+            <a:off x="7540308" y="263645"/>
+            <a:ext cx="1310397" cy="376299"/>
+          </a:xfrm>
+          <a:prstGeom prst="rect">
+            <a:avLst/>
+          </a:prstGeom>
+          <a:solidFill>
+            <a:schemeClr val="bg2">
+              <a:lumMod val="50000"/>
+            </a:schemeClr>
+          </a:solidFill>
+          <a:ln>
+            <a:noFill/>
+          </a:ln>
+        </p:spPr>
+        <p:style>
+          <a:lnRef idx="2">
+            <a:schemeClr val="accent1">
+              <a:shade val="50000"/>
+            </a:schemeClr>
+          </a:lnRef>
+          <a:fillRef idx="1">
+            <a:schemeClr val="accent1"/>
+          </a:fillRef>
+          <a:effectRef idx="0">
+            <a:schemeClr val="accent1"/>
+          </a:effectRef>
+          <a:fontRef idx="minor">
+            <a:schemeClr val="lt1"/>
+          </a:fontRef>
+        </p:style>
+        <p:txBody>
+          <a:bodyPr rtlCol="0" anchor="ctr"/>
+          <a:lstStyle/>
+          <a:p>
+            <a:pPr algn="ctr"/>
+            <a:r>
+              <a:rPr lang="ro-RO" dirty="0" smtClean="0">
+                <a:solidFill>
+                  <a:schemeClr val="tx1"/>
+                </a:solidFill>
+                <a:latin typeface="Libre Baskerville" panose="02000000000000000000" pitchFamily="2" charset="0"/>
+              </a:rPr>
+              <a:t>Bookcase</a:t>
+            </a:r>
+            <a:endParaRPr lang="en-US" dirty="0">
+              <a:solidFill>
+                <a:schemeClr val="tx1"/>
+              </a:solidFill>
+              <a:latin typeface="Libre Baskerville" panose="02000000000000000000" pitchFamily="2" charset="0"/>
+            </a:endParaRPr>
+          </a:p>
+        </p:txBody>
+      </p:sp>
+      <p:sp>
+        <p:nvSpPr>
+          <p:cNvPr id="151" name="Rectangle 150"/>
+          <p:cNvSpPr/>
+          <p:nvPr/>
+        </p:nvSpPr>
+        <p:spPr>
+          <a:xfrm>
+            <a:off x="7551608" y="1036028"/>
+            <a:ext cx="1310397" cy="376299"/>
+          </a:xfrm>
+          <a:prstGeom prst="rect">
+            <a:avLst/>
+          </a:prstGeom>
+          <a:solidFill>
+            <a:schemeClr val="bg2">
+              <a:lumMod val="50000"/>
+            </a:schemeClr>
+          </a:solidFill>
+          <a:ln>
+            <a:noFill/>
+          </a:ln>
+        </p:spPr>
+        <p:style>
+          <a:lnRef idx="2">
+            <a:schemeClr val="accent1">
+              <a:shade val="50000"/>
+            </a:schemeClr>
+          </a:lnRef>
+          <a:fillRef idx="1">
+            <a:schemeClr val="accent1"/>
+          </a:fillRef>
+          <a:effectRef idx="0">
+            <a:schemeClr val="accent1"/>
+          </a:effectRef>
+          <a:fontRef idx="minor">
+            <a:schemeClr val="lt1"/>
+          </a:fontRef>
+        </p:style>
+        <p:txBody>
+          <a:bodyPr rtlCol="0" anchor="ctr"/>
+          <a:lstStyle/>
+          <a:p>
+            <a:pPr algn="ctr"/>
+            <a:r>
+              <a:rPr lang="ro-RO" dirty="0" smtClean="0">
+                <a:solidFill>
+                  <a:schemeClr val="tx1"/>
+                </a:solidFill>
+                <a:latin typeface="Libre Baskerville" panose="02000000000000000000" pitchFamily="2" charset="0"/>
+              </a:rPr>
+              <a:t>Bookcase</a:t>
+            </a:r>
+            <a:endParaRPr lang="en-US" dirty="0">
+              <a:solidFill>
+                <a:schemeClr val="tx1"/>
+              </a:solidFill>
+              <a:latin typeface="Libre Baskerville" panose="02000000000000000000" pitchFamily="2" charset="0"/>
+            </a:endParaRPr>
+          </a:p>
+        </p:txBody>
+      </p:sp>
+      <p:sp>
+        <p:nvSpPr>
+          <p:cNvPr id="152" name="Rectangle 151"/>
+          <p:cNvSpPr/>
+          <p:nvPr/>
+        </p:nvSpPr>
+        <p:spPr>
+          <a:xfrm>
+            <a:off x="7540309" y="1804648"/>
+            <a:ext cx="1310397" cy="376299"/>
+          </a:xfrm>
+          <a:prstGeom prst="rect">
+            <a:avLst/>
+          </a:prstGeom>
+          <a:solidFill>
+            <a:schemeClr val="bg2">
+              <a:lumMod val="50000"/>
+            </a:schemeClr>
+          </a:solidFill>
+          <a:ln>
+            <a:noFill/>
+          </a:ln>
+        </p:spPr>
+        <p:style>
+          <a:lnRef idx="2">
+            <a:schemeClr val="accent1">
+              <a:shade val="50000"/>
+            </a:schemeClr>
+          </a:lnRef>
+          <a:fillRef idx="1">
+            <a:schemeClr val="accent1"/>
+          </a:fillRef>
+          <a:effectRef idx="0">
+            <a:schemeClr val="accent1"/>
+          </a:effectRef>
+          <a:fontRef idx="minor">
+            <a:schemeClr val="lt1"/>
+          </a:fontRef>
+        </p:style>
+        <p:txBody>
+          <a:bodyPr rtlCol="0" anchor="ctr"/>
+          <a:lstStyle/>
+          <a:p>
+            <a:pPr algn="ctr"/>
+            <a:r>
+              <a:rPr lang="ro-RO" dirty="0" smtClean="0">
+                <a:solidFill>
+                  <a:schemeClr val="tx1"/>
+                </a:solidFill>
+                <a:latin typeface="Libre Baskerville" panose="02000000000000000000" pitchFamily="2" charset="0"/>
+              </a:rPr>
+              <a:t>Bookcase</a:t>
+            </a:r>
+            <a:endParaRPr lang="en-US" dirty="0">
+              <a:solidFill>
+                <a:schemeClr val="tx1"/>
+              </a:solidFill>
+              <a:latin typeface="Libre Baskerville" panose="02000000000000000000" pitchFamily="2" charset="0"/>
+            </a:endParaRPr>
+          </a:p>
+        </p:txBody>
+      </p:sp>
+      <p:sp>
+        <p:nvSpPr>
+          <p:cNvPr id="153" name="Rectangle 152"/>
+          <p:cNvSpPr/>
+          <p:nvPr/>
+        </p:nvSpPr>
+        <p:spPr>
+          <a:xfrm>
+            <a:off x="7540309" y="2576492"/>
+            <a:ext cx="1310397" cy="376299"/>
+          </a:xfrm>
+          <a:prstGeom prst="rect">
+            <a:avLst/>
+          </a:prstGeom>
+          <a:solidFill>
+            <a:schemeClr val="bg2">
+              <a:lumMod val="50000"/>
+            </a:schemeClr>
+          </a:solidFill>
+          <a:ln>
+            <a:noFill/>
+          </a:ln>
+        </p:spPr>
+        <p:style>
+          <a:lnRef idx="2">
+            <a:schemeClr val="accent1">
+              <a:shade val="50000"/>
+            </a:schemeClr>
+          </a:lnRef>
+          <a:fillRef idx="1">
+            <a:schemeClr val="accent1"/>
+          </a:fillRef>
+          <a:effectRef idx="0">
+            <a:schemeClr val="accent1"/>
+          </a:effectRef>
+          <a:fontRef idx="minor">
+            <a:schemeClr val="lt1"/>
+          </a:fontRef>
+        </p:style>
+        <p:txBody>
+          <a:bodyPr rtlCol="0" anchor="ctr"/>
+          <a:lstStyle/>
+          <a:p>
+            <a:pPr algn="ctr"/>
+            <a:r>
+              <a:rPr lang="ro-RO" dirty="0" smtClean="0">
+                <a:solidFill>
+                  <a:schemeClr val="tx1"/>
+                </a:solidFill>
+                <a:latin typeface="Libre Baskerville" panose="02000000000000000000" pitchFamily="2" charset="0"/>
+              </a:rPr>
+              <a:t>Bookcase</a:t>
+            </a:r>
+            <a:endParaRPr lang="en-US" dirty="0">
+              <a:solidFill>
+                <a:schemeClr val="tx1"/>
+              </a:solidFill>
+              <a:latin typeface="Libre Baskerville" panose="02000000000000000000" pitchFamily="2" charset="0"/>
+            </a:endParaRPr>
+          </a:p>
+        </p:txBody>
+      </p:sp>
+      <p:sp>
+        <p:nvSpPr>
+          <p:cNvPr id="154" name="Rectangle 153"/>
+          <p:cNvSpPr/>
+          <p:nvPr/>
+        </p:nvSpPr>
+        <p:spPr>
+          <a:xfrm>
+            <a:off x="7542734" y="3351755"/>
+            <a:ext cx="1310397" cy="376299"/>
+          </a:xfrm>
+          <a:prstGeom prst="rect">
+            <a:avLst/>
+          </a:prstGeom>
+          <a:solidFill>
+            <a:schemeClr val="bg2">
+              <a:lumMod val="50000"/>
+            </a:schemeClr>
+          </a:solidFill>
+          <a:ln>
+            <a:noFill/>
+          </a:ln>
+        </p:spPr>
+        <p:style>
+          <a:lnRef idx="2">
+            <a:schemeClr val="accent1">
+              <a:shade val="50000"/>
+            </a:schemeClr>
+          </a:lnRef>
+          <a:fillRef idx="1">
+            <a:schemeClr val="accent1"/>
+          </a:fillRef>
+          <a:effectRef idx="0">
+            <a:schemeClr val="accent1"/>
+          </a:effectRef>
+          <a:fontRef idx="minor">
+            <a:schemeClr val="lt1"/>
+          </a:fontRef>
+        </p:style>
+        <p:txBody>
+          <a:bodyPr rtlCol="0" anchor="ctr"/>
+          <a:lstStyle/>
+          <a:p>
+            <a:pPr algn="ctr"/>
+            <a:r>
+              <a:rPr lang="ro-RO" dirty="0" smtClean="0">
+                <a:solidFill>
+                  <a:schemeClr val="tx1"/>
+                </a:solidFill>
+                <a:latin typeface="Libre Baskerville" panose="02000000000000000000" pitchFamily="2" charset="0"/>
+              </a:rPr>
+              <a:t>Bookcase</a:t>
+            </a:r>
+            <a:endParaRPr lang="en-US" dirty="0">
+              <a:solidFill>
+                <a:schemeClr val="tx1"/>
+              </a:solidFill>
+              <a:latin typeface="Libre Baskerville" panose="02000000000000000000" pitchFamily="2" charset="0"/>
+            </a:endParaRPr>
+          </a:p>
+        </p:txBody>
+      </p:sp>
+      <p:sp>
+        <p:nvSpPr>
+          <p:cNvPr id="156" name="Rectangle 155"/>
+          <p:cNvSpPr/>
+          <p:nvPr/>
+        </p:nvSpPr>
+        <p:spPr>
+          <a:xfrm>
+            <a:off x="8433661" y="3920073"/>
+            <a:ext cx="404620" cy="959122"/>
+          </a:xfrm>
+          <a:prstGeom prst="rect">
+            <a:avLst/>
+          </a:prstGeom>
+          <a:solidFill>
+            <a:schemeClr val="bg2">
+              <a:lumMod val="50000"/>
+            </a:schemeClr>
+          </a:solidFill>
+          <a:ln>
+            <a:noFill/>
+          </a:ln>
+        </p:spPr>
+        <p:style>
+          <a:lnRef idx="2">
+            <a:schemeClr val="accent1">
+              <a:shade val="50000"/>
+            </a:schemeClr>
+          </a:lnRef>
+          <a:fillRef idx="1">
+            <a:schemeClr val="accent1"/>
+          </a:fillRef>
+          <a:effectRef idx="0">
+            <a:schemeClr val="accent1"/>
+          </a:effectRef>
+          <a:fontRef idx="minor">
+            <a:schemeClr val="lt1"/>
+          </a:fontRef>
+        </p:style>
+        <p:txBody>
+          <a:bodyPr rtlCol="0" anchor="ctr"/>
+          <a:lstStyle/>
+          <a:p>
+            <a:pPr algn="ctr"/>
+            <a:endParaRPr lang="en-US" dirty="0">
+              <a:solidFill>
+                <a:schemeClr val="tx1"/>
+              </a:solidFill>
+            </a:endParaRPr>
+          </a:p>
+        </p:txBody>
+      </p:sp>
+      <p:sp>
+        <p:nvSpPr>
+          <p:cNvPr id="172" name="TextBox 171"/>
+          <p:cNvSpPr txBox="1"/>
+          <p:nvPr/>
+        </p:nvSpPr>
+        <p:spPr>
+          <a:xfrm>
+            <a:off x="7380376" y="4591029"/>
+            <a:ext cx="944299" cy="276999"/>
+          </a:xfrm>
+          <a:prstGeom prst="rect">
+            <a:avLst/>
+          </a:prstGeom>
+          <a:noFill/>
+        </p:spPr>
+        <p:txBody>
+          <a:bodyPr wrap="square" rtlCol="0">
+            <a:spAutoFit/>
+          </a:bodyPr>
+          <a:lstStyle/>
+          <a:p>
+            <a:r>
+              <a:rPr lang="ro-RO" sz="1200" dirty="0" smtClean="0">
+                <a:latin typeface="Libre Baskerville" panose="02000000000000000000" pitchFamily="2" charset="0"/>
+              </a:rPr>
+              <a:t>Library</a:t>
+            </a:r>
+            <a:endParaRPr lang="en-US" sz="1200" dirty="0">
+              <a:latin typeface="Libre Baskerville" panose="02000000000000000000" pitchFamily="2" charset="0"/>
+            </a:endParaRPr>
+          </a:p>
+        </p:txBody>
+      </p:sp>
+      <p:sp>
+        <p:nvSpPr>
+          <p:cNvPr id="180" name="Rectangle 179"/>
+          <p:cNvSpPr/>
+          <p:nvPr/>
+        </p:nvSpPr>
+        <p:spPr>
+          <a:xfrm>
+            <a:off x="234348" y="268748"/>
+            <a:ext cx="836488" cy="369814"/>
+          </a:xfrm>
+          <a:prstGeom prst="rect">
+            <a:avLst/>
+          </a:prstGeom>
+          <a:solidFill>
+            <a:srgbClr val="7F7F7F"/>
+          </a:solidFill>
+          <a:ln>
+            <a:noFill/>
+          </a:ln>
+        </p:spPr>
+        <p:style>
+          <a:lnRef idx="2">
+            <a:schemeClr val="accent1">
+              <a:shade val="50000"/>
+            </a:schemeClr>
+          </a:lnRef>
+          <a:fillRef idx="1">
+            <a:schemeClr val="accent1"/>
+          </a:fillRef>
+          <a:effectRef idx="0">
+            <a:schemeClr val="accent1"/>
+          </a:effectRef>
+          <a:fontRef idx="minor">
+            <a:schemeClr val="lt1"/>
+          </a:fontRef>
+        </p:style>
+        <p:txBody>
+          <a:bodyPr rtlCol="0" anchor="ctr"/>
+          <a:lstStyle/>
+          <a:p>
+            <a:pPr algn="ctr"/>
+            <a:r>
+              <a:rPr lang="ro-RO" dirty="0" smtClean="0">
+                <a:solidFill>
+                  <a:schemeClr val="tx1"/>
+                </a:solidFill>
+                <a:latin typeface="Libre Baskerville" panose="02000000000000000000" pitchFamily="2" charset="0"/>
+              </a:rPr>
+              <a:t>Hearth</a:t>
+            </a:r>
+            <a:endParaRPr lang="en-US" dirty="0">
+              <a:solidFill>
+                <a:schemeClr val="tx1"/>
+              </a:solidFill>
+              <a:latin typeface="Libre Baskerville" panose="02000000000000000000" pitchFamily="2" charset="0"/>
+            </a:endParaRPr>
+          </a:p>
+        </p:txBody>
+      </p:sp>
+      <p:grpSp>
+        <p:nvGrpSpPr>
+          <p:cNvPr id="391" name="Group 390"/>
+          <p:cNvGrpSpPr/>
+          <p:nvPr/>
+        </p:nvGrpSpPr>
+        <p:grpSpPr>
+          <a:xfrm>
+            <a:off x="1504412" y="327573"/>
+            <a:ext cx="1310540" cy="323038"/>
+            <a:chOff x="1600145" y="344364"/>
+            <a:chExt cx="1310540" cy="323038"/>
+          </a:xfrm>
+          <a:solidFill>
+            <a:schemeClr val="bg2">
+              <a:lumMod val="50000"/>
+            </a:schemeClr>
+          </a:solidFill>
+        </p:grpSpPr>
+        <p:sp>
+          <p:nvSpPr>
+            <p:cNvPr id="182" name="Rectangle 181"/>
+            <p:cNvSpPr/>
+            <p:nvPr/>
+          </p:nvSpPr>
+          <p:spPr>
+            <a:xfrm flipH="1">
+              <a:off x="2861180" y="344364"/>
+              <a:ext cx="49402" cy="100860"/>
+            </a:xfrm>
+            <a:prstGeom prst="rect">
+              <a:avLst/>
+            </a:prstGeom>
+            <a:grpFill/>
+            <a:ln>
+              <a:noFill/>
+            </a:ln>
+          </p:spPr>
+          <p:style>
+            <a:lnRef idx="2">
+              <a:schemeClr val="accent1">
+                <a:shade val="50000"/>
+              </a:schemeClr>
+            </a:lnRef>
+            <a:fillRef idx="1">
+              <a:schemeClr val="accent1"/>
+            </a:fillRef>
+            <a:effectRef idx="0">
+              <a:schemeClr val="accent1"/>
+            </a:effectRef>
+            <a:fontRef idx="minor">
+              <a:schemeClr val="lt1"/>
+            </a:fontRef>
+          </p:style>
+          <p:txBody>
+            <a:bodyPr rtlCol="0" anchor="ctr"/>
+            <a:lstStyle/>
+            <a:p>
+              <a:pPr algn="ctr"/>
+              <a:endParaRPr lang="en-US">
+                <a:solidFill>
+                  <a:schemeClr val="tx1"/>
+                </a:solidFill>
+              </a:endParaRPr>
+            </a:p>
+          </p:txBody>
+        </p:sp>
+        <p:grpSp>
+          <p:nvGrpSpPr>
+            <p:cNvPr id="2" name="Group 1"/>
+            <p:cNvGrpSpPr/>
+            <p:nvPr/>
+          </p:nvGrpSpPr>
+          <p:grpSpPr>
+            <a:xfrm>
+              <a:off x="1600145" y="435595"/>
+              <a:ext cx="1310540" cy="231807"/>
+              <a:chOff x="1600145" y="435595"/>
+              <a:chExt cx="1310540" cy="231807"/>
+            </a:xfrm>
+            <a:grpFill/>
+          </p:grpSpPr>
+          <p:sp>
+            <p:nvSpPr>
+              <p:cNvPr id="181" name="Rectangle 180"/>
+              <p:cNvSpPr/>
+              <p:nvPr/>
+            </p:nvSpPr>
+            <p:spPr>
+              <a:xfrm>
+                <a:off x="1600288" y="435595"/>
+                <a:ext cx="1310397" cy="231807"/>
+              </a:xfrm>
+              <a:prstGeom prst="rect">
+                <a:avLst/>
+              </a:prstGeom>
+              <a:grpFill/>
+              <a:ln>
+                <a:noFill/>
+              </a:ln>
+            </p:spPr>
+            <p:style>
+              <a:lnRef idx="2">
+                <a:schemeClr val="accent1">
+                  <a:shade val="50000"/>
+                </a:schemeClr>
+              </a:lnRef>
+              <a:fillRef idx="1">
+                <a:schemeClr val="accent1"/>
+              </a:fillRef>
+              <a:effectRef idx="0">
+                <a:schemeClr val="accent1"/>
+              </a:effectRef>
+              <a:fontRef idx="minor">
+                <a:schemeClr val="lt1"/>
+              </a:fontRef>
+            </p:style>
+            <p:txBody>
+              <a:bodyPr rtlCol="0" anchor="ctr"/>
+              <a:lstStyle/>
+              <a:p>
+                <a:pPr algn="ctr"/>
+                <a:r>
+                  <a:rPr lang="ro-RO" dirty="0" smtClean="0">
+                    <a:solidFill>
+                      <a:schemeClr val="tx1"/>
+                    </a:solidFill>
+                    <a:latin typeface="Libre Baskerville" panose="02000000000000000000" pitchFamily="2" charset="0"/>
+                  </a:rPr>
+                  <a:t>Bar</a:t>
+                </a:r>
+                <a:endParaRPr lang="en-US" dirty="0">
+                  <a:solidFill>
+                    <a:schemeClr val="tx1"/>
+                  </a:solidFill>
+                  <a:latin typeface="Libre Baskerville" panose="02000000000000000000" pitchFamily="2" charset="0"/>
+                </a:endParaRPr>
+              </a:p>
+            </p:txBody>
+          </p:sp>
+          <p:sp>
+            <p:nvSpPr>
+              <p:cNvPr id="183" name="Rectangle 182"/>
+              <p:cNvSpPr/>
+              <p:nvPr/>
+            </p:nvSpPr>
+            <p:spPr>
+              <a:xfrm>
+                <a:off x="1600145" y="581981"/>
+                <a:ext cx="1304717" cy="85421"/>
+              </a:xfrm>
+              <a:prstGeom prst="rect">
+                <a:avLst/>
+              </a:prstGeom>
+              <a:solidFill>
+                <a:srgbClr val="000000">
+                  <a:alpha val="50196"/>
+                </a:srgbClr>
+              </a:solidFill>
+              <a:ln>
+                <a:noFill/>
+              </a:ln>
+            </p:spPr>
+            <p:style>
+              <a:lnRef idx="2">
+                <a:schemeClr val="accent1">
+                  <a:shade val="50000"/>
+                </a:schemeClr>
+              </a:lnRef>
+              <a:fillRef idx="1">
+                <a:schemeClr val="accent1"/>
+              </a:fillRef>
+              <a:effectRef idx="0">
+                <a:schemeClr val="accent1"/>
+              </a:effectRef>
+              <a:fontRef idx="minor">
+                <a:schemeClr val="lt1"/>
+              </a:fontRef>
+            </p:style>
+            <p:txBody>
+              <a:bodyPr rtlCol="0" anchor="ctr"/>
+              <a:lstStyle/>
+              <a:p>
+                <a:pPr algn="ctr"/>
+                <a:endParaRPr lang="en-US" dirty="0">
+                  <a:solidFill>
+                    <a:schemeClr val="tx1"/>
+                  </a:solidFill>
+                </a:endParaRPr>
+              </a:p>
+            </p:txBody>
+          </p:sp>
+        </p:grpSp>
+      </p:grpSp>
+      <p:grpSp>
+        <p:nvGrpSpPr>
+          <p:cNvPr id="392" name="Group 391"/>
+          <p:cNvGrpSpPr/>
+          <p:nvPr/>
+        </p:nvGrpSpPr>
+        <p:grpSpPr>
+          <a:xfrm>
+            <a:off x="1620273" y="695295"/>
+            <a:ext cx="1117712" cy="166866"/>
+            <a:chOff x="1620273" y="695295"/>
+            <a:chExt cx="1117712" cy="166866"/>
+          </a:xfrm>
+          <a:solidFill>
+            <a:schemeClr val="bg2">
+              <a:lumMod val="50000"/>
+            </a:schemeClr>
+          </a:solidFill>
+        </p:grpSpPr>
+        <p:sp>
+          <p:nvSpPr>
+            <p:cNvPr id="196" name="Oval 195"/>
+            <p:cNvSpPr/>
+            <p:nvPr/>
+          </p:nvSpPr>
+          <p:spPr>
+            <a:xfrm>
+              <a:off x="1620273" y="698651"/>
+              <a:ext cx="109410" cy="109410"/>
+            </a:xfrm>
+            <a:prstGeom prst="ellipse">
+              <a:avLst/>
+            </a:prstGeom>
+            <a:grpFill/>
+            <a:ln w="57150">
+              <a:solidFill>
+                <a:srgbClr val="000000">
+                  <a:alpha val="30196"/>
+                </a:srgbClr>
+              </a:solidFill>
+            </a:ln>
+          </p:spPr>
+          <p:style>
+            <a:lnRef idx="2">
+              <a:schemeClr val="accent1">
+                <a:shade val="50000"/>
+              </a:schemeClr>
+            </a:lnRef>
+            <a:fillRef idx="1">
+              <a:schemeClr val="accent1"/>
+            </a:fillRef>
+            <a:effectRef idx="0">
+              <a:schemeClr val="accent1"/>
+            </a:effectRef>
+            <a:fontRef idx="minor">
+              <a:schemeClr val="lt1"/>
+            </a:fontRef>
+          </p:style>
+          <p:txBody>
+            <a:bodyPr rtlCol="0" anchor="ctr"/>
+            <a:lstStyle/>
+            <a:p>
+              <a:pPr algn="ctr"/>
+              <a:endParaRPr lang="en-US" dirty="0">
+                <a:solidFill>
+                  <a:schemeClr val="tx1"/>
+                </a:solidFill>
+              </a:endParaRPr>
+            </a:p>
+          </p:txBody>
+        </p:sp>
+        <p:sp>
+          <p:nvSpPr>
+            <p:cNvPr id="198" name="Oval 197"/>
+            <p:cNvSpPr/>
+            <p:nvPr/>
+          </p:nvSpPr>
+          <p:spPr>
+            <a:xfrm>
+              <a:off x="1798819" y="707371"/>
+              <a:ext cx="109410" cy="109410"/>
+            </a:xfrm>
+            <a:prstGeom prst="ellipse">
+              <a:avLst/>
+            </a:prstGeom>
+            <a:grpFill/>
+            <a:ln w="57150">
+              <a:solidFill>
+                <a:srgbClr val="000000">
+                  <a:alpha val="30196"/>
+                </a:srgbClr>
+              </a:solidFill>
+            </a:ln>
+          </p:spPr>
+          <p:style>
+            <a:lnRef idx="2">
+              <a:schemeClr val="accent1">
+                <a:shade val="50000"/>
+              </a:schemeClr>
+            </a:lnRef>
+            <a:fillRef idx="1">
+              <a:schemeClr val="accent1"/>
+            </a:fillRef>
+            <a:effectRef idx="0">
+              <a:schemeClr val="accent1"/>
+            </a:effectRef>
+            <a:fontRef idx="minor">
+              <a:schemeClr val="lt1"/>
+            </a:fontRef>
+          </p:style>
+          <p:txBody>
+            <a:bodyPr rtlCol="0" anchor="ctr"/>
+            <a:lstStyle/>
+            <a:p>
+              <a:pPr algn="ctr"/>
+              <a:endParaRPr lang="en-US" dirty="0">
+                <a:solidFill>
+                  <a:schemeClr val="tx1"/>
+                </a:solidFill>
+              </a:endParaRPr>
+            </a:p>
+          </p:txBody>
+        </p:sp>
+        <p:sp>
+          <p:nvSpPr>
+            <p:cNvPr id="199" name="Oval 198"/>
+            <p:cNvSpPr/>
+            <p:nvPr/>
+          </p:nvSpPr>
+          <p:spPr>
+            <a:xfrm>
+              <a:off x="2011903" y="752751"/>
+              <a:ext cx="109410" cy="109410"/>
+            </a:xfrm>
+            <a:prstGeom prst="ellipse">
+              <a:avLst/>
+            </a:prstGeom>
+            <a:grpFill/>
+            <a:ln w="57150">
+              <a:solidFill>
+                <a:srgbClr val="000000">
+                  <a:alpha val="30196"/>
+                </a:srgbClr>
+              </a:solidFill>
+            </a:ln>
+          </p:spPr>
+          <p:style>
+            <a:lnRef idx="2">
+              <a:schemeClr val="accent1">
+                <a:shade val="50000"/>
+              </a:schemeClr>
+            </a:lnRef>
+            <a:fillRef idx="1">
+              <a:schemeClr val="accent1"/>
+            </a:fillRef>
+            <a:effectRef idx="0">
+              <a:schemeClr val="accent1"/>
+            </a:effectRef>
+            <a:fontRef idx="minor">
+              <a:schemeClr val="lt1"/>
+            </a:fontRef>
+          </p:style>
+          <p:txBody>
+            <a:bodyPr rtlCol="0" anchor="ctr"/>
+            <a:lstStyle/>
+            <a:p>
+              <a:pPr algn="ctr"/>
+              <a:endParaRPr lang="en-US" dirty="0">
+                <a:solidFill>
+                  <a:schemeClr val="tx1"/>
+                </a:solidFill>
+              </a:endParaRPr>
+            </a:p>
+          </p:txBody>
+        </p:sp>
+        <p:sp>
+          <p:nvSpPr>
+            <p:cNvPr id="200" name="Oval 199"/>
+            <p:cNvSpPr/>
+            <p:nvPr/>
+          </p:nvSpPr>
+          <p:spPr>
+            <a:xfrm>
+              <a:off x="2220568" y="695295"/>
+              <a:ext cx="109410" cy="109410"/>
+            </a:xfrm>
+            <a:prstGeom prst="ellipse">
+              <a:avLst/>
+            </a:prstGeom>
+            <a:grpFill/>
+            <a:ln w="57150">
+              <a:solidFill>
+                <a:srgbClr val="000000">
+                  <a:alpha val="30196"/>
+                </a:srgbClr>
+              </a:solidFill>
+            </a:ln>
+          </p:spPr>
+          <p:style>
+            <a:lnRef idx="2">
+              <a:schemeClr val="accent1">
+                <a:shade val="50000"/>
+              </a:schemeClr>
+            </a:lnRef>
+            <a:fillRef idx="1">
+              <a:schemeClr val="accent1"/>
+            </a:fillRef>
+            <a:effectRef idx="0">
+              <a:schemeClr val="accent1"/>
+            </a:effectRef>
+            <a:fontRef idx="minor">
+              <a:schemeClr val="lt1"/>
+            </a:fontRef>
+          </p:style>
+          <p:txBody>
+            <a:bodyPr rtlCol="0" anchor="ctr"/>
+            <a:lstStyle/>
+            <a:p>
+              <a:pPr algn="ctr"/>
+              <a:endParaRPr lang="en-US" dirty="0">
+                <a:solidFill>
+                  <a:schemeClr val="tx1"/>
+                </a:solidFill>
+              </a:endParaRPr>
+            </a:p>
+          </p:txBody>
+        </p:sp>
+        <p:sp>
+          <p:nvSpPr>
+            <p:cNvPr id="201" name="Oval 200"/>
+            <p:cNvSpPr/>
+            <p:nvPr/>
+          </p:nvSpPr>
+          <p:spPr>
+            <a:xfrm>
+              <a:off x="2419910" y="710441"/>
+              <a:ext cx="109410" cy="109410"/>
+            </a:xfrm>
+            <a:prstGeom prst="ellipse">
+              <a:avLst/>
+            </a:prstGeom>
+            <a:grpFill/>
+            <a:ln w="57150">
+              <a:solidFill>
+                <a:srgbClr val="000000">
+                  <a:alpha val="30196"/>
+                </a:srgbClr>
+              </a:solidFill>
+            </a:ln>
+          </p:spPr>
+          <p:style>
+            <a:lnRef idx="2">
+              <a:schemeClr val="accent1">
+                <a:shade val="50000"/>
+              </a:schemeClr>
+            </a:lnRef>
+            <a:fillRef idx="1">
+              <a:schemeClr val="accent1"/>
+            </a:fillRef>
+            <a:effectRef idx="0">
+              <a:schemeClr val="accent1"/>
+            </a:effectRef>
+            <a:fontRef idx="minor">
+              <a:schemeClr val="lt1"/>
+            </a:fontRef>
+          </p:style>
+          <p:txBody>
+            <a:bodyPr rtlCol="0" anchor="ctr"/>
+            <a:lstStyle/>
+            <a:p>
+              <a:pPr algn="ctr"/>
+              <a:endParaRPr lang="en-US" dirty="0">
+                <a:solidFill>
+                  <a:schemeClr val="tx1"/>
+                </a:solidFill>
+              </a:endParaRPr>
+            </a:p>
+          </p:txBody>
+        </p:sp>
+        <p:sp>
+          <p:nvSpPr>
+            <p:cNvPr id="202" name="Oval 201"/>
+            <p:cNvSpPr/>
+            <p:nvPr/>
+          </p:nvSpPr>
+          <p:spPr>
+            <a:xfrm>
+              <a:off x="2628575" y="710441"/>
+              <a:ext cx="109410" cy="109410"/>
+            </a:xfrm>
+            <a:prstGeom prst="ellipse">
+              <a:avLst/>
+            </a:prstGeom>
+            <a:grpFill/>
+            <a:ln w="57150">
+              <a:solidFill>
+                <a:srgbClr val="000000">
+                  <a:alpha val="30196"/>
+                </a:srgbClr>
+              </a:solidFill>
+            </a:ln>
+          </p:spPr>
+          <p:style>
+            <a:lnRef idx="2">
+              <a:schemeClr val="accent1">
+                <a:shade val="50000"/>
+              </a:schemeClr>
+            </a:lnRef>
+            <a:fillRef idx="1">
+              <a:schemeClr val="accent1"/>
+            </a:fillRef>
+            <a:effectRef idx="0">
+              <a:schemeClr val="accent1"/>
+            </a:effectRef>
+            <a:fontRef idx="minor">
+              <a:schemeClr val="lt1"/>
+            </a:fontRef>
+          </p:style>
+          <p:txBody>
+            <a:bodyPr rtlCol="0" anchor="ctr"/>
+            <a:lstStyle/>
+            <a:p>
+              <a:pPr algn="ctr"/>
+              <a:endParaRPr lang="en-US" dirty="0">
+                <a:solidFill>
+                  <a:schemeClr val="tx1"/>
+                </a:solidFill>
+              </a:endParaRPr>
+            </a:p>
+          </p:txBody>
+        </p:sp>
+      </p:grpSp>
+      <p:grpSp>
+        <p:nvGrpSpPr>
+          <p:cNvPr id="208" name="Group 207"/>
+          <p:cNvGrpSpPr/>
+          <p:nvPr/>
+        </p:nvGrpSpPr>
+        <p:grpSpPr>
+          <a:xfrm>
+            <a:off x="2863680" y="2215757"/>
+            <a:ext cx="345447" cy="722055"/>
+            <a:chOff x="2840255" y="1727778"/>
+            <a:chExt cx="375115" cy="784067"/>
+          </a:xfrm>
+        </p:grpSpPr>
+        <p:sp>
+          <p:nvSpPr>
+            <p:cNvPr id="209" name="Rounded Rectangle 208"/>
+            <p:cNvSpPr/>
+            <p:nvPr/>
+          </p:nvSpPr>
+          <p:spPr>
+            <a:xfrm>
+              <a:off x="2840255" y="1727778"/>
+              <a:ext cx="375115" cy="784067"/>
+            </a:xfrm>
+            <a:prstGeom prst="roundRect">
+              <a:avLst/>
+            </a:prstGeom>
+            <a:solidFill>
+              <a:schemeClr val="bg2">
+                <a:lumMod val="50000"/>
+              </a:schemeClr>
+            </a:solidFill>
+            <a:ln>
+              <a:noFill/>
+            </a:ln>
+          </p:spPr>
+          <p:style>
+            <a:lnRef idx="2">
+              <a:schemeClr val="accent1">
+                <a:shade val="50000"/>
+              </a:schemeClr>
+            </a:lnRef>
+            <a:fillRef idx="1">
+              <a:schemeClr val="accent1"/>
+            </a:fillRef>
+            <a:effectRef idx="0">
+              <a:schemeClr val="accent1"/>
+            </a:effectRef>
+            <a:fontRef idx="minor">
+              <a:schemeClr val="lt1"/>
+            </a:fontRef>
+          </p:style>
+          <p:txBody>
+            <a:bodyPr rtlCol="0" anchor="ctr"/>
+            <a:lstStyle/>
+            <a:p>
+              <a:pPr algn="ctr"/>
+              <a:endParaRPr lang="en-US"/>
+            </a:p>
+          </p:txBody>
+        </p:sp>
+        <p:sp>
+          <p:nvSpPr>
+            <p:cNvPr id="210" name="Rounded Rectangle 209"/>
+            <p:cNvSpPr/>
+            <p:nvPr/>
+          </p:nvSpPr>
+          <p:spPr>
+            <a:xfrm>
+              <a:off x="3005234" y="1790663"/>
+              <a:ext cx="169472" cy="317138"/>
+            </a:xfrm>
+            <a:prstGeom prst="roundRect">
+              <a:avLst/>
+            </a:prstGeom>
+            <a:solidFill>
+              <a:srgbClr val="000000">
+                <a:alpha val="30196"/>
+              </a:srgbClr>
+            </a:solidFill>
+            <a:ln>
+              <a:noFill/>
+            </a:ln>
+          </p:spPr>
+          <p:style>
+            <a:lnRef idx="2">
+              <a:schemeClr val="accent1">
+                <a:shade val="50000"/>
+              </a:schemeClr>
+            </a:lnRef>
+            <a:fillRef idx="1">
+              <a:schemeClr val="accent1"/>
+            </a:fillRef>
+            <a:effectRef idx="0">
+              <a:schemeClr val="accent1"/>
+            </a:effectRef>
+            <a:fontRef idx="minor">
+              <a:schemeClr val="lt1"/>
+            </a:fontRef>
+          </p:style>
+          <p:txBody>
+            <a:bodyPr rtlCol="0" anchor="ctr"/>
+            <a:lstStyle/>
+            <a:p>
+              <a:pPr algn="ctr"/>
+              <a:endParaRPr lang="en-US"/>
+            </a:p>
+          </p:txBody>
+        </p:sp>
+        <p:sp>
+          <p:nvSpPr>
+            <p:cNvPr id="211" name="Rounded Rectangle 210"/>
+            <p:cNvSpPr/>
+            <p:nvPr/>
+          </p:nvSpPr>
+          <p:spPr>
+            <a:xfrm>
+              <a:off x="3005234" y="2126935"/>
+              <a:ext cx="169472" cy="317138"/>
+            </a:xfrm>
+            <a:prstGeom prst="roundRect">
+              <a:avLst/>
+            </a:prstGeom>
+            <a:solidFill>
+              <a:srgbClr val="000000">
+                <a:alpha val="30196"/>
+              </a:srgbClr>
+            </a:solidFill>
+            <a:ln>
+              <a:noFill/>
+            </a:ln>
+          </p:spPr>
+          <p:style>
+            <a:lnRef idx="2">
+              <a:schemeClr val="accent1">
+                <a:shade val="50000"/>
+              </a:schemeClr>
+            </a:lnRef>
+            <a:fillRef idx="1">
+              <a:schemeClr val="accent1"/>
+            </a:fillRef>
+            <a:effectRef idx="0">
+              <a:schemeClr val="accent1"/>
+            </a:effectRef>
+            <a:fontRef idx="minor">
+              <a:schemeClr val="lt1"/>
+            </a:fontRef>
+          </p:style>
+          <p:txBody>
+            <a:bodyPr rtlCol="0" anchor="ctr"/>
+            <a:lstStyle/>
+            <a:p>
+              <a:pPr algn="ctr"/>
+              <a:endParaRPr lang="en-US"/>
+            </a:p>
+          </p:txBody>
+        </p:sp>
+        <p:sp>
+          <p:nvSpPr>
+            <p:cNvPr id="212" name="Rounded Rectangle 211"/>
+            <p:cNvSpPr/>
+            <p:nvPr/>
+          </p:nvSpPr>
+          <p:spPr>
+            <a:xfrm>
+              <a:off x="2876197" y="2455912"/>
+              <a:ext cx="311241" cy="45719"/>
+            </a:xfrm>
+            <a:prstGeom prst="roundRect">
+              <a:avLst/>
+            </a:prstGeom>
+            <a:solidFill>
+              <a:srgbClr val="000000">
+                <a:alpha val="30196"/>
+              </a:srgbClr>
+            </a:solidFill>
+            <a:ln>
+              <a:noFill/>
+            </a:ln>
+          </p:spPr>
+          <p:style>
+            <a:lnRef idx="2">
+              <a:schemeClr val="accent1">
+                <a:shade val="50000"/>
+              </a:schemeClr>
+            </a:lnRef>
+            <a:fillRef idx="1">
+              <a:schemeClr val="accent1"/>
+            </a:fillRef>
+            <a:effectRef idx="0">
+              <a:schemeClr val="accent1"/>
+            </a:effectRef>
+            <a:fontRef idx="minor">
+              <a:schemeClr val="lt1"/>
+            </a:fontRef>
+          </p:style>
+          <p:txBody>
+            <a:bodyPr rtlCol="0" anchor="ctr"/>
+            <a:lstStyle/>
+            <a:p>
+              <a:pPr algn="ctr"/>
+              <a:endParaRPr lang="en-US"/>
+            </a:p>
+          </p:txBody>
+        </p:sp>
+        <p:sp>
+          <p:nvSpPr>
+            <p:cNvPr id="213" name="Rounded Rectangle 212"/>
+            <p:cNvSpPr/>
+            <p:nvPr/>
+          </p:nvSpPr>
+          <p:spPr>
+            <a:xfrm>
+              <a:off x="2869623" y="1736815"/>
+              <a:ext cx="311241" cy="45719"/>
+            </a:xfrm>
+            <a:prstGeom prst="roundRect">
+              <a:avLst/>
+            </a:prstGeom>
+            <a:solidFill>
+              <a:srgbClr val="000000">
+                <a:alpha val="30196"/>
+              </a:srgbClr>
+            </a:solidFill>
+            <a:ln>
+              <a:noFill/>
+            </a:ln>
+          </p:spPr>
+          <p:style>
+            <a:lnRef idx="2">
+              <a:schemeClr val="accent1">
+                <a:shade val="50000"/>
+              </a:schemeClr>
+            </a:lnRef>
+            <a:fillRef idx="1">
+              <a:schemeClr val="accent1"/>
+            </a:fillRef>
+            <a:effectRef idx="0">
+              <a:schemeClr val="accent1"/>
+            </a:effectRef>
+            <a:fontRef idx="minor">
+              <a:schemeClr val="lt1"/>
+            </a:fontRef>
+          </p:style>
+          <p:txBody>
+            <a:bodyPr rtlCol="0" anchor="ctr"/>
+            <a:lstStyle/>
+            <a:p>
+              <a:pPr algn="ctr"/>
+              <a:endParaRPr lang="en-US"/>
+            </a:p>
+          </p:txBody>
+        </p:sp>
+      </p:grpSp>
+      <p:sp>
+        <p:nvSpPr>
+          <p:cNvPr id="214" name="Rectangle 213"/>
+          <p:cNvSpPr/>
+          <p:nvPr/>
+        </p:nvSpPr>
+        <p:spPr>
+          <a:xfrm>
+            <a:off x="2848243" y="1055103"/>
+            <a:ext cx="359731" cy="326532"/>
+          </a:xfrm>
+          <a:prstGeom prst="rect">
+            <a:avLst/>
+          </a:prstGeom>
+          <a:solidFill>
+            <a:schemeClr val="bg2">
+              <a:lumMod val="50000"/>
+            </a:schemeClr>
+          </a:solidFill>
+          <a:ln>
+            <a:noFill/>
+          </a:ln>
+        </p:spPr>
+        <p:style>
+          <a:lnRef idx="2">
+            <a:schemeClr val="accent1">
+              <a:shade val="50000"/>
+            </a:schemeClr>
+          </a:lnRef>
+          <a:fillRef idx="1">
+            <a:schemeClr val="accent1"/>
+          </a:fillRef>
+          <a:effectRef idx="0">
+            <a:schemeClr val="accent1"/>
+          </a:effectRef>
+          <a:fontRef idx="minor">
+            <a:schemeClr val="lt1"/>
+          </a:fontRef>
+        </p:style>
+        <p:txBody>
+          <a:bodyPr rtlCol="0" anchor="ctr"/>
+          <a:lstStyle/>
+          <a:p>
+            <a:pPr algn="ctr"/>
+            <a:endParaRPr lang="en-US" dirty="0">
+              <a:solidFill>
+                <a:schemeClr val="tx1"/>
+              </a:solidFill>
+            </a:endParaRPr>
+          </a:p>
+        </p:txBody>
+      </p:sp>
+      <p:grpSp>
+        <p:nvGrpSpPr>
+          <p:cNvPr id="216" name="Group 215"/>
+          <p:cNvGrpSpPr/>
+          <p:nvPr/>
+        </p:nvGrpSpPr>
+        <p:grpSpPr>
+          <a:xfrm rot="9900000">
+            <a:off x="2876233" y="3388887"/>
+            <a:ext cx="281090" cy="281090"/>
+            <a:chOff x="2836912" y="3174001"/>
+            <a:chExt cx="377756" cy="377756"/>
+          </a:xfrm>
+          <a:solidFill>
+            <a:schemeClr val="bg2">
+              <a:lumMod val="50000"/>
+            </a:schemeClr>
+          </a:solidFill>
+        </p:grpSpPr>
+        <p:sp>
+          <p:nvSpPr>
+            <p:cNvPr id="217" name="Oval 216"/>
+            <p:cNvSpPr/>
+            <p:nvPr/>
+          </p:nvSpPr>
+          <p:spPr>
+            <a:xfrm>
+              <a:off x="2836912" y="3174001"/>
+              <a:ext cx="377756" cy="377756"/>
+            </a:xfrm>
+            <a:prstGeom prst="ellipse">
+              <a:avLst/>
+            </a:prstGeom>
+            <a:grpFill/>
+            <a:ln w="57150">
+              <a:solidFill>
+                <a:srgbClr val="000000">
+                  <a:alpha val="30196"/>
+                </a:srgbClr>
+              </a:solidFill>
+            </a:ln>
+          </p:spPr>
+          <p:style>
+            <a:lnRef idx="2">
+              <a:schemeClr val="accent1">
+                <a:shade val="50000"/>
+              </a:schemeClr>
+            </a:lnRef>
+            <a:fillRef idx="1">
+              <a:schemeClr val="accent1"/>
+            </a:fillRef>
+            <a:effectRef idx="0">
+              <a:schemeClr val="accent1"/>
+            </a:effectRef>
+            <a:fontRef idx="minor">
+              <a:schemeClr val="lt1"/>
+            </a:fontRef>
+          </p:style>
+          <p:txBody>
+            <a:bodyPr rtlCol="0" anchor="ctr"/>
+            <a:lstStyle/>
+            <a:p>
+              <a:pPr algn="ctr"/>
+              <a:endParaRPr lang="en-US" dirty="0">
+                <a:solidFill>
+                  <a:schemeClr val="tx1"/>
+                </a:solidFill>
+              </a:endParaRPr>
+            </a:p>
+          </p:txBody>
+        </p:sp>
+        <p:sp>
+          <p:nvSpPr>
+            <p:cNvPr id="218" name="Oval 217"/>
+            <p:cNvSpPr/>
+            <p:nvPr/>
+          </p:nvSpPr>
+          <p:spPr>
+            <a:xfrm>
+              <a:off x="2924781" y="3280114"/>
+              <a:ext cx="45720" cy="45720"/>
+            </a:xfrm>
+            <a:prstGeom prst="ellipse">
+              <a:avLst/>
+            </a:prstGeom>
+            <a:grpFill/>
+            <a:ln>
+              <a:noFill/>
+            </a:ln>
+          </p:spPr>
+          <p:style>
+            <a:lnRef idx="2">
+              <a:schemeClr val="accent1">
+                <a:shade val="50000"/>
+              </a:schemeClr>
+            </a:lnRef>
+            <a:fillRef idx="1">
+              <a:schemeClr val="accent1"/>
+            </a:fillRef>
+            <a:effectRef idx="0">
+              <a:schemeClr val="accent1"/>
+            </a:effectRef>
+            <a:fontRef idx="minor">
+              <a:schemeClr val="lt1"/>
+            </a:fontRef>
+          </p:style>
+          <p:txBody>
+            <a:bodyPr rtlCol="0" anchor="ctr"/>
+            <a:lstStyle/>
+            <a:p>
+              <a:pPr algn="ctr"/>
+              <a:endParaRPr lang="en-US" dirty="0">
+                <a:solidFill>
+                  <a:schemeClr val="tx1"/>
+                </a:solidFill>
+              </a:endParaRPr>
+            </a:p>
+          </p:txBody>
+        </p:sp>
+      </p:grpSp>
+      <p:sp>
+        <p:nvSpPr>
+          <p:cNvPr id="232" name="Rectangle 231"/>
+          <p:cNvSpPr/>
+          <p:nvPr/>
+        </p:nvSpPr>
+        <p:spPr>
+          <a:xfrm>
+            <a:off x="1503994" y="247472"/>
+            <a:ext cx="1249671" cy="68429"/>
+          </a:xfrm>
+          <a:prstGeom prst="rect">
+            <a:avLst/>
+          </a:prstGeom>
+          <a:solidFill>
+            <a:schemeClr val="bg2">
+              <a:lumMod val="50000"/>
+            </a:schemeClr>
+          </a:solidFill>
+          <a:ln>
+            <a:noFill/>
+          </a:ln>
+        </p:spPr>
+        <p:style>
+          <a:lnRef idx="2">
+            <a:schemeClr val="accent1">
+              <a:shade val="50000"/>
+            </a:schemeClr>
+          </a:lnRef>
+          <a:fillRef idx="1">
+            <a:schemeClr val="accent1"/>
+          </a:fillRef>
+          <a:effectRef idx="0">
+            <a:schemeClr val="accent1"/>
+          </a:effectRef>
+          <a:fontRef idx="minor">
+            <a:schemeClr val="lt1"/>
+          </a:fontRef>
+        </p:style>
+        <p:txBody>
+          <a:bodyPr rtlCol="0" anchor="ctr"/>
+          <a:lstStyle/>
+          <a:p>
+            <a:pPr algn="ctr"/>
+            <a:endParaRPr lang="en-US" dirty="0"/>
+          </a:p>
+        </p:txBody>
+      </p:sp>
+      <p:sp>
+        <p:nvSpPr>
+          <p:cNvPr id="62" name="TextBox 61"/>
+          <p:cNvSpPr txBox="1"/>
+          <p:nvPr/>
+        </p:nvSpPr>
+        <p:spPr>
+          <a:xfrm>
+            <a:off x="1833705" y="2590351"/>
+            <a:ext cx="944299" cy="461665"/>
+          </a:xfrm>
+          <a:prstGeom prst="rect">
+            <a:avLst/>
+          </a:prstGeom>
+          <a:noFill/>
+        </p:spPr>
+        <p:txBody>
+          <a:bodyPr wrap="square" rtlCol="0">
+            <a:spAutoFit/>
+          </a:bodyPr>
+          <a:lstStyle/>
+          <a:p>
+            <a:r>
+              <a:rPr lang="ro-RO" sz="1200" dirty="0" smtClean="0">
+                <a:latin typeface="Libre Baskerville" panose="02000000000000000000" pitchFamily="2" charset="0"/>
+              </a:rPr>
+              <a:t>Drawing Room</a:t>
+            </a:r>
+            <a:endParaRPr lang="en-US" sz="1200" dirty="0">
+              <a:latin typeface="Libre Baskerville" panose="02000000000000000000" pitchFamily="2" charset="0"/>
+            </a:endParaRPr>
+          </a:p>
+        </p:txBody>
+      </p:sp>
+      <p:grpSp>
+        <p:nvGrpSpPr>
+          <p:cNvPr id="263" name="Group 262"/>
+          <p:cNvGrpSpPr/>
+          <p:nvPr/>
+        </p:nvGrpSpPr>
+        <p:grpSpPr>
+          <a:xfrm rot="16200000">
+            <a:off x="1141902" y="1810620"/>
+            <a:ext cx="294854" cy="368561"/>
+            <a:chOff x="2840254" y="2042961"/>
+            <a:chExt cx="375115" cy="468886"/>
+          </a:xfrm>
+        </p:grpSpPr>
+        <p:sp>
+          <p:nvSpPr>
+            <p:cNvPr id="265" name="Rounded Rectangle 264"/>
+            <p:cNvSpPr/>
+            <p:nvPr/>
+          </p:nvSpPr>
+          <p:spPr>
+            <a:xfrm>
+              <a:off x="2840254" y="2042961"/>
+              <a:ext cx="375115" cy="468886"/>
+            </a:xfrm>
+            <a:prstGeom prst="roundRect">
+              <a:avLst/>
+            </a:prstGeom>
+            <a:solidFill>
+              <a:schemeClr val="bg2">
+                <a:lumMod val="50000"/>
+              </a:schemeClr>
+            </a:solidFill>
+            <a:ln>
+              <a:noFill/>
+            </a:ln>
+          </p:spPr>
+          <p:style>
+            <a:lnRef idx="2">
+              <a:schemeClr val="accent1">
+                <a:shade val="50000"/>
+              </a:schemeClr>
+            </a:lnRef>
+            <a:fillRef idx="1">
+              <a:schemeClr val="accent1"/>
+            </a:fillRef>
+            <a:effectRef idx="0">
+              <a:schemeClr val="accent1"/>
+            </a:effectRef>
+            <a:fontRef idx="minor">
+              <a:schemeClr val="lt1"/>
+            </a:fontRef>
+          </p:style>
+          <p:txBody>
+            <a:bodyPr rtlCol="0" anchor="ctr"/>
+            <a:lstStyle/>
+            <a:p>
+              <a:pPr algn="ctr"/>
+              <a:endParaRPr lang="en-US"/>
+            </a:p>
+          </p:txBody>
+        </p:sp>
+        <p:sp>
+          <p:nvSpPr>
+            <p:cNvPr id="268" name="Rounded Rectangle 267"/>
+            <p:cNvSpPr/>
+            <p:nvPr/>
+          </p:nvSpPr>
+          <p:spPr>
+            <a:xfrm>
+              <a:off x="3016430" y="2120404"/>
+              <a:ext cx="169472" cy="317138"/>
+            </a:xfrm>
+            <a:prstGeom prst="roundRect">
+              <a:avLst/>
+            </a:prstGeom>
+            <a:solidFill>
+              <a:srgbClr val="000000">
+                <a:alpha val="30196"/>
+              </a:srgbClr>
+            </a:solidFill>
+            <a:ln>
+              <a:noFill/>
+            </a:ln>
+          </p:spPr>
+          <p:style>
+            <a:lnRef idx="2">
+              <a:schemeClr val="accent1">
+                <a:shade val="50000"/>
+              </a:schemeClr>
+            </a:lnRef>
+            <a:fillRef idx="1">
+              <a:schemeClr val="accent1"/>
+            </a:fillRef>
+            <a:effectRef idx="0">
+              <a:schemeClr val="accent1"/>
+            </a:effectRef>
+            <a:fontRef idx="minor">
+              <a:schemeClr val="lt1"/>
+            </a:fontRef>
+          </p:style>
+          <p:txBody>
+            <a:bodyPr rtlCol="0" anchor="ctr"/>
+            <a:lstStyle/>
+            <a:p>
+              <a:pPr algn="ctr"/>
+              <a:endParaRPr lang="en-US"/>
+            </a:p>
+          </p:txBody>
+        </p:sp>
+        <p:sp>
+          <p:nvSpPr>
+            <p:cNvPr id="269" name="Rounded Rectangle 268"/>
+            <p:cNvSpPr/>
+            <p:nvPr/>
+          </p:nvSpPr>
+          <p:spPr>
+            <a:xfrm>
+              <a:off x="2876197" y="2455912"/>
+              <a:ext cx="311241" cy="45719"/>
+            </a:xfrm>
+            <a:prstGeom prst="roundRect">
+              <a:avLst/>
+            </a:prstGeom>
+            <a:solidFill>
+              <a:srgbClr val="000000">
+                <a:alpha val="30196"/>
+              </a:srgbClr>
+            </a:solidFill>
+            <a:ln>
+              <a:noFill/>
+            </a:ln>
+          </p:spPr>
+          <p:style>
+            <a:lnRef idx="2">
+              <a:schemeClr val="accent1">
+                <a:shade val="50000"/>
+              </a:schemeClr>
+            </a:lnRef>
+            <a:fillRef idx="1">
+              <a:schemeClr val="accent1"/>
+            </a:fillRef>
+            <a:effectRef idx="0">
+              <a:schemeClr val="accent1"/>
+            </a:effectRef>
+            <a:fontRef idx="minor">
+              <a:schemeClr val="lt1"/>
+            </a:fontRef>
+          </p:style>
+          <p:txBody>
+            <a:bodyPr rtlCol="0" anchor="ctr"/>
+            <a:lstStyle/>
+            <a:p>
+              <a:pPr algn="ctr"/>
+              <a:endParaRPr lang="en-US"/>
+            </a:p>
+          </p:txBody>
+        </p:sp>
+        <p:sp>
+          <p:nvSpPr>
+            <p:cNvPr id="270" name="Rounded Rectangle 269"/>
+            <p:cNvSpPr/>
+            <p:nvPr/>
+          </p:nvSpPr>
+          <p:spPr>
+            <a:xfrm>
+              <a:off x="2869622" y="2056432"/>
+              <a:ext cx="311241" cy="45719"/>
+            </a:xfrm>
+            <a:prstGeom prst="roundRect">
+              <a:avLst/>
+            </a:prstGeom>
+            <a:solidFill>
+              <a:srgbClr val="000000">
+                <a:alpha val="30196"/>
+              </a:srgbClr>
+            </a:solidFill>
+            <a:ln>
+              <a:noFill/>
+            </a:ln>
+          </p:spPr>
+          <p:style>
+            <a:lnRef idx="2">
+              <a:schemeClr val="accent1">
+                <a:shade val="50000"/>
+              </a:schemeClr>
+            </a:lnRef>
+            <a:fillRef idx="1">
+              <a:schemeClr val="accent1"/>
+            </a:fillRef>
+            <a:effectRef idx="0">
+              <a:schemeClr val="accent1"/>
+            </a:effectRef>
+            <a:fontRef idx="minor">
+              <a:schemeClr val="lt1"/>
+            </a:fontRef>
+          </p:style>
+          <p:txBody>
+            <a:bodyPr rtlCol="0" anchor="ctr"/>
+            <a:lstStyle/>
+            <a:p>
+              <a:pPr algn="ctr"/>
+              <a:endParaRPr lang="en-US"/>
+            </a:p>
+          </p:txBody>
+        </p:sp>
+      </p:grpSp>
+      <p:cxnSp>
+        <p:nvCxnSpPr>
+          <p:cNvPr id="77" name="Straight Connector 76"/>
+          <p:cNvCxnSpPr/>
+          <p:nvPr/>
+        </p:nvCxnSpPr>
+        <p:spPr>
+          <a:xfrm>
+            <a:off x="5833241" y="1800633"/>
+            <a:ext cx="453259" cy="0"/>
+          </a:xfrm>
+          <a:prstGeom prst="line">
+            <a:avLst/>
+          </a:prstGeom>
+          <a:ln w="38100">
+            <a:solidFill>
+              <a:schemeClr val="bg2">
+                <a:lumMod val="50000"/>
+              </a:schemeClr>
+            </a:solidFill>
+          </a:ln>
+        </p:spPr>
+        <p:style>
+          <a:lnRef idx="1">
+            <a:schemeClr val="accent1"/>
+          </a:lnRef>
+          <a:fillRef idx="0">
+            <a:schemeClr val="accent1"/>
+          </a:fillRef>
+          <a:effectRef idx="0">
+            <a:schemeClr val="accent1"/>
+          </a:effectRef>
+          <a:fontRef idx="minor">
+            <a:schemeClr val="tx1"/>
+          </a:fontRef>
+        </p:style>
+      </p:cxnSp>
+      <p:cxnSp>
+        <p:nvCxnSpPr>
+          <p:cNvPr id="197" name="Straight Connector 196"/>
+          <p:cNvCxnSpPr/>
+          <p:nvPr/>
+        </p:nvCxnSpPr>
+        <p:spPr>
+          <a:xfrm>
+            <a:off x="7153319" y="4107270"/>
+            <a:ext cx="406739" cy="0"/>
+          </a:xfrm>
+          <a:prstGeom prst="line">
+            <a:avLst/>
+          </a:prstGeom>
+          <a:ln w="38100">
+            <a:solidFill>
+              <a:schemeClr val="bg2">
+                <a:lumMod val="50000"/>
+              </a:schemeClr>
+            </a:solidFill>
+          </a:ln>
+        </p:spPr>
+        <p:style>
+          <a:lnRef idx="1">
+            <a:schemeClr val="accent1"/>
+          </a:lnRef>
+          <a:fillRef idx="0">
+            <a:schemeClr val="accent1"/>
+          </a:fillRef>
+          <a:effectRef idx="0">
+            <a:schemeClr val="accent1"/>
+          </a:effectRef>
+          <a:fontRef idx="minor">
+            <a:schemeClr val="tx1"/>
+          </a:fontRef>
+        </p:style>
+      </p:cxnSp>
+      <p:cxnSp>
+        <p:nvCxnSpPr>
+          <p:cNvPr id="276" name="Straight Connector 275"/>
+          <p:cNvCxnSpPr/>
+          <p:nvPr/>
+        </p:nvCxnSpPr>
+        <p:spPr>
+          <a:xfrm flipV="1">
+            <a:off x="6266496" y="2151461"/>
+            <a:ext cx="0" cy="405650"/>
+          </a:xfrm>
+          <a:prstGeom prst="line">
+            <a:avLst/>
+          </a:prstGeom>
+          <a:ln w="38100">
+            <a:solidFill>
+              <a:schemeClr val="bg2">
+                <a:lumMod val="50000"/>
+              </a:schemeClr>
+            </a:solidFill>
+          </a:ln>
+        </p:spPr>
+        <p:style>
+          <a:lnRef idx="1">
+            <a:schemeClr val="accent1"/>
+          </a:lnRef>
+          <a:fillRef idx="0">
+            <a:schemeClr val="accent1"/>
+          </a:fillRef>
+          <a:effectRef idx="0">
+            <a:schemeClr val="accent1"/>
+          </a:effectRef>
+          <a:fontRef idx="minor">
+            <a:schemeClr val="tx1"/>
+          </a:fontRef>
+        </p:style>
+      </p:cxnSp>
+      <p:cxnSp>
+        <p:nvCxnSpPr>
+          <p:cNvPr id="279" name="Straight Connector 278"/>
+          <p:cNvCxnSpPr/>
+          <p:nvPr/>
+        </p:nvCxnSpPr>
+        <p:spPr>
+          <a:xfrm flipV="1">
+            <a:off x="3262313" y="2555138"/>
+            <a:ext cx="3024187" cy="1973"/>
+          </a:xfrm>
+          <a:prstGeom prst="line">
+            <a:avLst/>
+          </a:prstGeom>
+          <a:ln w="38100">
+            <a:solidFill>
+              <a:schemeClr val="bg2">
+                <a:lumMod val="50000"/>
+              </a:schemeClr>
+            </a:solidFill>
+          </a:ln>
+        </p:spPr>
+        <p:style>
+          <a:lnRef idx="1">
+            <a:schemeClr val="accent1"/>
+          </a:lnRef>
+          <a:fillRef idx="0">
+            <a:schemeClr val="accent1"/>
+          </a:fillRef>
+          <a:effectRef idx="0">
+            <a:schemeClr val="accent1"/>
+          </a:effectRef>
+          <a:fontRef idx="minor">
+            <a:schemeClr val="tx1"/>
+          </a:fontRef>
+        </p:style>
+      </p:cxnSp>
+      <p:cxnSp>
+        <p:nvCxnSpPr>
+          <p:cNvPr id="282" name="Straight Connector 281"/>
+          <p:cNvCxnSpPr/>
+          <p:nvPr/>
+        </p:nvCxnSpPr>
+        <p:spPr>
+          <a:xfrm flipH="1" flipV="1">
+            <a:off x="3260903" y="252780"/>
+            <a:ext cx="1410" cy="3475274"/>
+          </a:xfrm>
+          <a:prstGeom prst="line">
+            <a:avLst/>
+          </a:prstGeom>
+          <a:ln w="38100">
+            <a:solidFill>
+              <a:schemeClr val="bg2">
+                <a:lumMod val="50000"/>
+              </a:schemeClr>
+            </a:solidFill>
+          </a:ln>
+        </p:spPr>
+        <p:style>
+          <a:lnRef idx="1">
+            <a:schemeClr val="accent1"/>
+          </a:lnRef>
+          <a:fillRef idx="0">
+            <a:schemeClr val="accent1"/>
+          </a:fillRef>
+          <a:effectRef idx="0">
+            <a:schemeClr val="accent1"/>
+          </a:effectRef>
+          <a:fontRef idx="minor">
+            <a:schemeClr val="tx1"/>
+          </a:fontRef>
+        </p:style>
+      </p:cxnSp>
+      <p:cxnSp>
+        <p:nvCxnSpPr>
+          <p:cNvPr id="291" name="Straight Connector 290"/>
+          <p:cNvCxnSpPr/>
+          <p:nvPr/>
+        </p:nvCxnSpPr>
+        <p:spPr>
+          <a:xfrm flipH="1" flipV="1">
+            <a:off x="7126167" y="4473545"/>
+            <a:ext cx="3334" cy="430094"/>
+          </a:xfrm>
+          <a:prstGeom prst="line">
+            <a:avLst/>
+          </a:prstGeom>
+          <a:ln w="38100">
+            <a:solidFill>
+              <a:schemeClr val="bg2">
+                <a:lumMod val="50000"/>
+              </a:schemeClr>
+            </a:solidFill>
+          </a:ln>
+        </p:spPr>
+        <p:style>
+          <a:lnRef idx="1">
+            <a:schemeClr val="accent1"/>
+          </a:lnRef>
+          <a:fillRef idx="0">
+            <a:schemeClr val="accent1"/>
+          </a:fillRef>
+          <a:effectRef idx="0">
+            <a:schemeClr val="accent1"/>
+          </a:effectRef>
+          <a:fontRef idx="minor">
+            <a:schemeClr val="tx1"/>
+          </a:fontRef>
+        </p:style>
+      </p:cxnSp>
+      <p:sp>
+        <p:nvSpPr>
+          <p:cNvPr id="293" name="Rectangle 292"/>
+          <p:cNvSpPr/>
+          <p:nvPr/>
+        </p:nvSpPr>
+        <p:spPr>
+          <a:xfrm>
+            <a:off x="5823757" y="257209"/>
+            <a:ext cx="425902" cy="188996"/>
+          </a:xfrm>
+          <a:prstGeom prst="rect">
+            <a:avLst/>
+          </a:prstGeom>
+          <a:solidFill>
+            <a:schemeClr val="bg2">
+              <a:lumMod val="50000"/>
+            </a:schemeClr>
+          </a:solidFill>
+          <a:ln>
+            <a:noFill/>
+          </a:ln>
+        </p:spPr>
+        <p:style>
+          <a:lnRef idx="2">
+            <a:schemeClr val="accent1">
+              <a:shade val="50000"/>
+            </a:schemeClr>
+          </a:lnRef>
+          <a:fillRef idx="1">
+            <a:schemeClr val="accent1"/>
+          </a:fillRef>
+          <a:effectRef idx="0">
+            <a:schemeClr val="accent1"/>
+          </a:effectRef>
+          <a:fontRef idx="minor">
+            <a:schemeClr val="lt1"/>
+          </a:fontRef>
+        </p:style>
+        <p:txBody>
+          <a:bodyPr rtlCol="0" anchor="ctr"/>
+          <a:lstStyle/>
+          <a:p>
+            <a:pPr algn="ctr"/>
+            <a:endParaRPr lang="en-US" sz="400" dirty="0">
+              <a:solidFill>
+                <a:schemeClr val="tx1"/>
+              </a:solidFill>
+              <a:latin typeface="Libre Baskerville" panose="02000000000000000000" pitchFamily="2" charset="0"/>
+            </a:endParaRPr>
+          </a:p>
+        </p:txBody>
+      </p:sp>
+      <p:grpSp>
+        <p:nvGrpSpPr>
+          <p:cNvPr id="294" name="Group 293"/>
+          <p:cNvGrpSpPr/>
+          <p:nvPr/>
+        </p:nvGrpSpPr>
+        <p:grpSpPr>
+          <a:xfrm>
+            <a:off x="2854588" y="1439605"/>
+            <a:ext cx="345447" cy="722055"/>
+            <a:chOff x="2840255" y="1727778"/>
+            <a:chExt cx="375115" cy="784067"/>
+          </a:xfrm>
+        </p:grpSpPr>
+        <p:sp>
+          <p:nvSpPr>
+            <p:cNvPr id="295" name="Rounded Rectangle 294"/>
+            <p:cNvSpPr/>
+            <p:nvPr/>
+          </p:nvSpPr>
+          <p:spPr>
+            <a:xfrm>
+              <a:off x="2840255" y="1727778"/>
+              <a:ext cx="375115" cy="784067"/>
+            </a:xfrm>
+            <a:prstGeom prst="roundRect">
+              <a:avLst/>
+            </a:prstGeom>
+            <a:solidFill>
+              <a:schemeClr val="bg2">
+                <a:lumMod val="50000"/>
+              </a:schemeClr>
+            </a:solidFill>
+            <a:ln>
+              <a:noFill/>
+            </a:ln>
+          </p:spPr>
+          <p:style>
+            <a:lnRef idx="2">
+              <a:schemeClr val="accent1">
+                <a:shade val="50000"/>
+              </a:schemeClr>
+            </a:lnRef>
+            <a:fillRef idx="1">
+              <a:schemeClr val="accent1"/>
+            </a:fillRef>
+            <a:effectRef idx="0">
+              <a:schemeClr val="accent1"/>
+            </a:effectRef>
+            <a:fontRef idx="minor">
+              <a:schemeClr val="lt1"/>
+            </a:fontRef>
+          </p:style>
+          <p:txBody>
+            <a:bodyPr rtlCol="0" anchor="ctr"/>
+            <a:lstStyle/>
+            <a:p>
+              <a:pPr algn="ctr"/>
+              <a:endParaRPr lang="en-US"/>
+            </a:p>
+          </p:txBody>
+        </p:sp>
+        <p:sp>
+          <p:nvSpPr>
+            <p:cNvPr id="296" name="Rounded Rectangle 295"/>
+            <p:cNvSpPr/>
+            <p:nvPr/>
+          </p:nvSpPr>
+          <p:spPr>
+            <a:xfrm>
+              <a:off x="3005234" y="1790663"/>
+              <a:ext cx="169472" cy="317138"/>
+            </a:xfrm>
+            <a:prstGeom prst="roundRect">
+              <a:avLst/>
+            </a:prstGeom>
+            <a:solidFill>
+              <a:srgbClr val="000000">
+                <a:alpha val="30196"/>
+              </a:srgbClr>
+            </a:solidFill>
+            <a:ln>
+              <a:noFill/>
+            </a:ln>
+          </p:spPr>
+          <p:style>
+            <a:lnRef idx="2">
+              <a:schemeClr val="accent1">
+                <a:shade val="50000"/>
+              </a:schemeClr>
+            </a:lnRef>
+            <a:fillRef idx="1">
+              <a:schemeClr val="accent1"/>
+            </a:fillRef>
+            <a:effectRef idx="0">
+              <a:schemeClr val="accent1"/>
+            </a:effectRef>
+            <a:fontRef idx="minor">
+              <a:schemeClr val="lt1"/>
+            </a:fontRef>
+          </p:style>
+          <p:txBody>
+            <a:bodyPr rtlCol="0" anchor="ctr"/>
+            <a:lstStyle/>
+            <a:p>
+              <a:pPr algn="ctr"/>
+              <a:endParaRPr lang="en-US"/>
+            </a:p>
+          </p:txBody>
+        </p:sp>
+        <p:sp>
+          <p:nvSpPr>
+            <p:cNvPr id="297" name="Rounded Rectangle 296"/>
+            <p:cNvSpPr/>
+            <p:nvPr/>
+          </p:nvSpPr>
+          <p:spPr>
+            <a:xfrm>
+              <a:off x="3005234" y="2126935"/>
+              <a:ext cx="169472" cy="317138"/>
+            </a:xfrm>
+            <a:prstGeom prst="roundRect">
+              <a:avLst/>
+            </a:prstGeom>
+            <a:solidFill>
+              <a:srgbClr val="000000">
+                <a:alpha val="30196"/>
+              </a:srgbClr>
+            </a:solidFill>
+            <a:ln>
+              <a:noFill/>
+            </a:ln>
+          </p:spPr>
+          <p:style>
+            <a:lnRef idx="2">
+              <a:schemeClr val="accent1">
+                <a:shade val="50000"/>
+              </a:schemeClr>
+            </a:lnRef>
+            <a:fillRef idx="1">
+              <a:schemeClr val="accent1"/>
+            </a:fillRef>
+            <a:effectRef idx="0">
+              <a:schemeClr val="accent1"/>
+            </a:effectRef>
+            <a:fontRef idx="minor">
+              <a:schemeClr val="lt1"/>
+            </a:fontRef>
+          </p:style>
+          <p:txBody>
+            <a:bodyPr rtlCol="0" anchor="ctr"/>
+            <a:lstStyle/>
+            <a:p>
+              <a:pPr algn="ctr"/>
+              <a:endParaRPr lang="en-US"/>
+            </a:p>
+          </p:txBody>
+        </p:sp>
+        <p:sp>
+          <p:nvSpPr>
+            <p:cNvPr id="298" name="Rounded Rectangle 297"/>
+            <p:cNvSpPr/>
+            <p:nvPr/>
+          </p:nvSpPr>
+          <p:spPr>
+            <a:xfrm>
+              <a:off x="2876197" y="2455912"/>
+              <a:ext cx="311241" cy="45719"/>
+            </a:xfrm>
+            <a:prstGeom prst="roundRect">
+              <a:avLst/>
+            </a:prstGeom>
+            <a:solidFill>
+              <a:srgbClr val="000000">
+                <a:alpha val="30196"/>
+              </a:srgbClr>
+            </a:solidFill>
+            <a:ln>
+              <a:noFill/>
+            </a:ln>
+          </p:spPr>
+          <p:style>
+            <a:lnRef idx="2">
+              <a:schemeClr val="accent1">
+                <a:shade val="50000"/>
+              </a:schemeClr>
+            </a:lnRef>
+            <a:fillRef idx="1">
+              <a:schemeClr val="accent1"/>
+            </a:fillRef>
+            <a:effectRef idx="0">
+              <a:schemeClr val="accent1"/>
+            </a:effectRef>
+            <a:fontRef idx="minor">
+              <a:schemeClr val="lt1"/>
+            </a:fontRef>
+          </p:style>
+          <p:txBody>
+            <a:bodyPr rtlCol="0" anchor="ctr"/>
+            <a:lstStyle/>
+            <a:p>
+              <a:pPr algn="ctr"/>
+              <a:endParaRPr lang="en-US"/>
+            </a:p>
+          </p:txBody>
+        </p:sp>
+        <p:sp>
+          <p:nvSpPr>
+            <p:cNvPr id="299" name="Rounded Rectangle 298"/>
+            <p:cNvSpPr/>
+            <p:nvPr/>
+          </p:nvSpPr>
+          <p:spPr>
+            <a:xfrm>
+              <a:off x="2869623" y="1736815"/>
+              <a:ext cx="311241" cy="45719"/>
+            </a:xfrm>
+            <a:prstGeom prst="roundRect">
+              <a:avLst/>
+            </a:prstGeom>
+            <a:solidFill>
+              <a:srgbClr val="000000">
+                <a:alpha val="30196"/>
+              </a:srgbClr>
+            </a:solidFill>
+            <a:ln>
+              <a:noFill/>
+            </a:ln>
+          </p:spPr>
+          <p:style>
+            <a:lnRef idx="2">
+              <a:schemeClr val="accent1">
+                <a:shade val="50000"/>
+              </a:schemeClr>
+            </a:lnRef>
+            <a:fillRef idx="1">
+              <a:schemeClr val="accent1"/>
+            </a:fillRef>
+            <a:effectRef idx="0">
+              <a:schemeClr val="accent1"/>
+            </a:effectRef>
+            <a:fontRef idx="minor">
+              <a:schemeClr val="lt1"/>
+            </a:fontRef>
+          </p:style>
+          <p:txBody>
+            <a:bodyPr rtlCol="0" anchor="ctr"/>
+            <a:lstStyle/>
+            <a:p>
+              <a:pPr algn="ctr"/>
+              <a:endParaRPr lang="en-US"/>
+            </a:p>
+          </p:txBody>
+        </p:sp>
+      </p:grpSp>
+      <p:cxnSp>
+        <p:nvCxnSpPr>
+          <p:cNvPr id="304" name="Straight Connector 303"/>
+          <p:cNvCxnSpPr/>
+          <p:nvPr/>
+        </p:nvCxnSpPr>
+        <p:spPr>
+          <a:xfrm>
+            <a:off x="1520827" y="3734212"/>
+            <a:ext cx="1755926" cy="1"/>
+          </a:xfrm>
+          <a:prstGeom prst="line">
+            <a:avLst/>
+          </a:prstGeom>
+          <a:ln w="38100">
+            <a:solidFill>
+              <a:schemeClr val="bg2">
+                <a:lumMod val="50000"/>
+              </a:schemeClr>
+            </a:solidFill>
+          </a:ln>
+        </p:spPr>
+        <p:style>
+          <a:lnRef idx="1">
+            <a:schemeClr val="accent1"/>
+          </a:lnRef>
+          <a:fillRef idx="0">
+            <a:schemeClr val="accent1"/>
+          </a:fillRef>
+          <a:effectRef idx="0">
+            <a:schemeClr val="accent1"/>
+          </a:effectRef>
+          <a:fontRef idx="minor">
+            <a:schemeClr val="tx1"/>
+          </a:fontRef>
+        </p:style>
+      </p:cxnSp>
+      <p:cxnSp>
+        <p:nvCxnSpPr>
+          <p:cNvPr id="308" name="Straight Connector 307"/>
+          <p:cNvCxnSpPr/>
+          <p:nvPr/>
+        </p:nvCxnSpPr>
+        <p:spPr>
+          <a:xfrm flipV="1">
+            <a:off x="1517228" y="2583345"/>
+            <a:ext cx="0" cy="1155574"/>
+          </a:xfrm>
+          <a:prstGeom prst="line">
+            <a:avLst/>
+          </a:prstGeom>
+          <a:ln w="38100">
+            <a:solidFill>
+              <a:schemeClr val="bg2">
+                <a:lumMod val="50000"/>
+              </a:schemeClr>
+            </a:solidFill>
+          </a:ln>
+        </p:spPr>
+        <p:style>
+          <a:lnRef idx="1">
+            <a:schemeClr val="accent1"/>
+          </a:lnRef>
+          <a:fillRef idx="0">
+            <a:schemeClr val="accent1"/>
+          </a:fillRef>
+          <a:effectRef idx="0">
+            <a:schemeClr val="accent1"/>
+          </a:effectRef>
+          <a:fontRef idx="minor">
+            <a:schemeClr val="tx1"/>
+          </a:fontRef>
+        </p:style>
+      </p:cxnSp>
+      <p:cxnSp>
+        <p:nvCxnSpPr>
+          <p:cNvPr id="312" name="Straight Connector 311"/>
+          <p:cNvCxnSpPr/>
+          <p:nvPr/>
+        </p:nvCxnSpPr>
+        <p:spPr>
+          <a:xfrm flipV="1">
+            <a:off x="1517228" y="244759"/>
+            <a:ext cx="0" cy="1943318"/>
+          </a:xfrm>
+          <a:prstGeom prst="line">
+            <a:avLst/>
+          </a:prstGeom>
+          <a:ln w="38100">
+            <a:solidFill>
+              <a:schemeClr val="bg2">
+                <a:lumMod val="50000"/>
+              </a:schemeClr>
+            </a:solidFill>
+          </a:ln>
+        </p:spPr>
+        <p:style>
+          <a:lnRef idx="1">
+            <a:schemeClr val="accent1"/>
+          </a:lnRef>
+          <a:fillRef idx="0">
+            <a:schemeClr val="accent1"/>
+          </a:fillRef>
+          <a:effectRef idx="0">
+            <a:schemeClr val="accent1"/>
+          </a:effectRef>
+          <a:fontRef idx="minor">
+            <a:schemeClr val="tx1"/>
+          </a:fontRef>
+        </p:style>
+      </p:cxnSp>
+      <p:cxnSp>
+        <p:nvCxnSpPr>
+          <p:cNvPr id="314" name="Straight Connector 313"/>
+          <p:cNvCxnSpPr/>
+          <p:nvPr/>
+        </p:nvCxnSpPr>
+        <p:spPr>
+          <a:xfrm>
+            <a:off x="1496024" y="2188077"/>
+            <a:ext cx="453259" cy="0"/>
+          </a:xfrm>
+          <a:prstGeom prst="line">
+            <a:avLst/>
+          </a:prstGeom>
+          <a:ln w="38100">
+            <a:solidFill>
+              <a:schemeClr val="bg2">
+                <a:lumMod val="50000"/>
+              </a:schemeClr>
+            </a:solidFill>
+          </a:ln>
+        </p:spPr>
+        <p:style>
+          <a:lnRef idx="1">
+            <a:schemeClr val="accent1"/>
+          </a:lnRef>
+          <a:fillRef idx="0">
+            <a:schemeClr val="accent1"/>
+          </a:fillRef>
+          <a:effectRef idx="0">
+            <a:schemeClr val="accent1"/>
+          </a:effectRef>
+          <a:fontRef idx="minor">
+            <a:schemeClr val="tx1"/>
+          </a:fontRef>
+        </p:style>
+      </p:cxnSp>
+      <p:cxnSp>
+        <p:nvCxnSpPr>
+          <p:cNvPr id="315" name="Straight Connector 314"/>
+          <p:cNvCxnSpPr/>
+          <p:nvPr/>
+        </p:nvCxnSpPr>
+        <p:spPr>
+          <a:xfrm>
+            <a:off x="1090038" y="1807192"/>
+            <a:ext cx="420033" cy="0"/>
+          </a:xfrm>
+          <a:prstGeom prst="line">
+            <a:avLst/>
+          </a:prstGeom>
+          <a:ln w="38100">
+            <a:solidFill>
+              <a:schemeClr val="bg2">
+                <a:lumMod val="50000"/>
+              </a:schemeClr>
+            </a:solidFill>
+          </a:ln>
+        </p:spPr>
+        <p:style>
+          <a:lnRef idx="1">
+            <a:schemeClr val="accent1"/>
+          </a:lnRef>
+          <a:fillRef idx="0">
+            <a:schemeClr val="accent1"/>
+          </a:fillRef>
+          <a:effectRef idx="0">
+            <a:schemeClr val="accent1"/>
+          </a:effectRef>
+          <a:fontRef idx="minor">
+            <a:schemeClr val="tx1"/>
+          </a:fontRef>
+        </p:style>
+      </p:cxnSp>
+      <p:cxnSp>
+        <p:nvCxnSpPr>
+          <p:cNvPr id="317" name="Straight Connector 316"/>
+          <p:cNvCxnSpPr/>
+          <p:nvPr/>
+        </p:nvCxnSpPr>
+        <p:spPr>
+          <a:xfrm>
+            <a:off x="212922" y="1807192"/>
+            <a:ext cx="444719" cy="0"/>
+          </a:xfrm>
+          <a:prstGeom prst="line">
+            <a:avLst/>
+          </a:prstGeom>
+          <a:ln w="38100">
+            <a:solidFill>
+              <a:schemeClr val="bg2">
+                <a:lumMod val="50000"/>
+              </a:schemeClr>
+            </a:solidFill>
+          </a:ln>
+        </p:spPr>
+        <p:style>
+          <a:lnRef idx="1">
+            <a:schemeClr val="accent1"/>
+          </a:lnRef>
+          <a:fillRef idx="0">
+            <a:schemeClr val="accent1"/>
+          </a:fillRef>
+          <a:effectRef idx="0">
+            <a:schemeClr val="accent1"/>
+          </a:effectRef>
+          <a:fontRef idx="minor">
+            <a:schemeClr val="tx1"/>
+          </a:fontRef>
+        </p:style>
+      </p:cxnSp>
+      <p:cxnSp>
+        <p:nvCxnSpPr>
+          <p:cNvPr id="322" name="Straight Connector 321"/>
+          <p:cNvCxnSpPr/>
+          <p:nvPr/>
+        </p:nvCxnSpPr>
+        <p:spPr>
+          <a:xfrm>
+            <a:off x="642319" y="1417464"/>
+            <a:ext cx="4519" cy="400652"/>
+          </a:xfrm>
+          <a:prstGeom prst="line">
+            <a:avLst/>
+          </a:prstGeom>
+          <a:ln w="38100">
+            <a:solidFill>
+              <a:schemeClr val="bg2">
+                <a:lumMod val="50000"/>
+              </a:schemeClr>
+            </a:solidFill>
+          </a:ln>
+        </p:spPr>
+        <p:style>
+          <a:lnRef idx="1">
+            <a:schemeClr val="accent1"/>
+          </a:lnRef>
+          <a:fillRef idx="0">
+            <a:schemeClr val="accent1"/>
+          </a:fillRef>
+          <a:effectRef idx="0">
+            <a:schemeClr val="accent1"/>
+          </a:effectRef>
+          <a:fontRef idx="minor">
+            <a:schemeClr val="tx1"/>
+          </a:fontRef>
+        </p:style>
+      </p:cxnSp>
+      <p:grpSp>
+        <p:nvGrpSpPr>
+          <p:cNvPr id="327" name="Group 326"/>
+          <p:cNvGrpSpPr/>
+          <p:nvPr/>
+        </p:nvGrpSpPr>
+        <p:grpSpPr>
+          <a:xfrm rot="4599317">
+            <a:off x="1594958" y="3388850"/>
+            <a:ext cx="281090" cy="281090"/>
+            <a:chOff x="2836912" y="3174001"/>
+            <a:chExt cx="377756" cy="377756"/>
+          </a:xfrm>
+          <a:solidFill>
+            <a:schemeClr val="bg2">
+              <a:lumMod val="50000"/>
+            </a:schemeClr>
+          </a:solidFill>
+        </p:grpSpPr>
+        <p:sp>
+          <p:nvSpPr>
+            <p:cNvPr id="328" name="Oval 327"/>
+            <p:cNvSpPr/>
+            <p:nvPr/>
+          </p:nvSpPr>
+          <p:spPr>
+            <a:xfrm>
+              <a:off x="2836912" y="3174001"/>
+              <a:ext cx="377756" cy="377756"/>
+            </a:xfrm>
+            <a:prstGeom prst="ellipse">
+              <a:avLst/>
+            </a:prstGeom>
+            <a:grpFill/>
+            <a:ln w="57150">
+              <a:solidFill>
+                <a:srgbClr val="000000">
+                  <a:alpha val="30196"/>
+                </a:srgbClr>
+              </a:solidFill>
+            </a:ln>
+          </p:spPr>
+          <p:style>
+            <a:lnRef idx="2">
+              <a:schemeClr val="accent1">
+                <a:shade val="50000"/>
+              </a:schemeClr>
+            </a:lnRef>
+            <a:fillRef idx="1">
+              <a:schemeClr val="accent1"/>
+            </a:fillRef>
+            <a:effectRef idx="0">
+              <a:schemeClr val="accent1"/>
+            </a:effectRef>
+            <a:fontRef idx="minor">
+              <a:schemeClr val="lt1"/>
+            </a:fontRef>
+          </p:style>
+          <p:txBody>
+            <a:bodyPr rtlCol="0" anchor="ctr"/>
+            <a:lstStyle/>
+            <a:p>
+              <a:pPr algn="ctr"/>
+              <a:endParaRPr lang="en-US" dirty="0">
+                <a:solidFill>
+                  <a:schemeClr val="tx1"/>
+                </a:solidFill>
+              </a:endParaRPr>
+            </a:p>
+          </p:txBody>
+        </p:sp>
+        <p:sp>
+          <p:nvSpPr>
+            <p:cNvPr id="329" name="Oval 328"/>
+            <p:cNvSpPr/>
+            <p:nvPr/>
+          </p:nvSpPr>
+          <p:spPr>
+            <a:xfrm>
+              <a:off x="2924781" y="3280114"/>
+              <a:ext cx="45720" cy="45720"/>
+            </a:xfrm>
+            <a:prstGeom prst="ellipse">
+              <a:avLst/>
+            </a:prstGeom>
+            <a:grpFill/>
+            <a:ln>
+              <a:noFill/>
+            </a:ln>
+          </p:spPr>
+          <p:style>
+            <a:lnRef idx="2">
+              <a:schemeClr val="accent1">
+                <a:shade val="50000"/>
+              </a:schemeClr>
+            </a:lnRef>
+            <a:fillRef idx="1">
+              <a:schemeClr val="accent1"/>
+            </a:fillRef>
+            <a:effectRef idx="0">
+              <a:schemeClr val="accent1"/>
+            </a:effectRef>
+            <a:fontRef idx="minor">
+              <a:schemeClr val="lt1"/>
+            </a:fontRef>
+          </p:style>
+          <p:txBody>
+            <a:bodyPr rtlCol="0" anchor="ctr"/>
+            <a:lstStyle/>
+            <a:p>
+              <a:pPr algn="ctr"/>
+              <a:endParaRPr lang="en-US" dirty="0">
+                <a:solidFill>
+                  <a:schemeClr val="tx1"/>
+                </a:solidFill>
+              </a:endParaRPr>
+            </a:p>
+          </p:txBody>
+        </p:sp>
+      </p:grpSp>
+      <p:sp>
+        <p:nvSpPr>
+          <p:cNvPr id="389" name="Rectangle 388"/>
+          <p:cNvSpPr/>
+          <p:nvPr/>
+        </p:nvSpPr>
+        <p:spPr>
+          <a:xfrm rot="16200000">
+            <a:off x="-536218" y="2729599"/>
+            <a:ext cx="1283232" cy="206032"/>
+          </a:xfrm>
+          <a:prstGeom prst="rect">
+            <a:avLst/>
+          </a:prstGeom>
+          <a:solidFill>
+            <a:schemeClr val="bg2"/>
+          </a:solidFill>
+          <a:ln>
+            <a:noFill/>
+          </a:ln>
+        </p:spPr>
+        <p:style>
+          <a:lnRef idx="2">
+            <a:schemeClr val="accent1">
+              <a:shade val="50000"/>
+            </a:schemeClr>
+          </a:lnRef>
+          <a:fillRef idx="1">
+            <a:schemeClr val="accent1"/>
+          </a:fillRef>
+          <a:effectRef idx="0">
+            <a:schemeClr val="accent1"/>
+          </a:effectRef>
+          <a:fontRef idx="minor">
+            <a:schemeClr val="lt1"/>
+          </a:fontRef>
+        </p:style>
+        <p:txBody>
+          <a:bodyPr rtlCol="0" anchor="ctr"/>
+          <a:lstStyle/>
+          <a:p>
+            <a:pPr algn="ctr"/>
+            <a:r>
+              <a:rPr lang="ro-RO" sz="1200" dirty="0" smtClean="0">
+                <a:solidFill>
+                  <a:schemeClr val="tx1"/>
+                </a:solidFill>
+                <a:latin typeface="Libre Baskerville" panose="02000000000000000000" pitchFamily="2" charset="0"/>
+              </a:rPr>
+              <a:t>Dining Area</a:t>
+            </a:r>
+            <a:endParaRPr lang="en-US" sz="1200" dirty="0">
+              <a:solidFill>
+                <a:schemeClr val="tx1"/>
+              </a:solidFill>
+              <a:latin typeface="Libre Baskerville" panose="02000000000000000000" pitchFamily="2" charset="0"/>
+            </a:endParaRPr>
+          </a:p>
+        </p:txBody>
+      </p:sp>
+      <p:grpSp>
+        <p:nvGrpSpPr>
+          <p:cNvPr id="393" name="Group 392"/>
+          <p:cNvGrpSpPr/>
+          <p:nvPr/>
+        </p:nvGrpSpPr>
+        <p:grpSpPr>
+          <a:xfrm rot="16200000">
+            <a:off x="278286" y="1826476"/>
+            <a:ext cx="294854" cy="368561"/>
+            <a:chOff x="2840254" y="2042961"/>
+            <a:chExt cx="375115" cy="468886"/>
+          </a:xfrm>
+        </p:grpSpPr>
+        <p:sp>
+          <p:nvSpPr>
+            <p:cNvPr id="394" name="Rounded Rectangle 393"/>
+            <p:cNvSpPr/>
+            <p:nvPr/>
+          </p:nvSpPr>
+          <p:spPr>
+            <a:xfrm>
+              <a:off x="2840254" y="2042961"/>
+              <a:ext cx="375115" cy="468886"/>
+            </a:xfrm>
+            <a:prstGeom prst="roundRect">
+              <a:avLst/>
+            </a:prstGeom>
+            <a:solidFill>
+              <a:schemeClr val="bg2">
+                <a:lumMod val="50000"/>
+              </a:schemeClr>
+            </a:solidFill>
+            <a:ln>
+              <a:noFill/>
+            </a:ln>
+          </p:spPr>
+          <p:style>
+            <a:lnRef idx="2">
+              <a:schemeClr val="accent1">
+                <a:shade val="50000"/>
+              </a:schemeClr>
+            </a:lnRef>
+            <a:fillRef idx="1">
+              <a:schemeClr val="accent1"/>
+            </a:fillRef>
+            <a:effectRef idx="0">
+              <a:schemeClr val="accent1"/>
+            </a:effectRef>
+            <a:fontRef idx="minor">
+              <a:schemeClr val="lt1"/>
+            </a:fontRef>
+          </p:style>
+          <p:txBody>
+            <a:bodyPr rtlCol="0" anchor="ctr"/>
+            <a:lstStyle/>
+            <a:p>
+              <a:pPr algn="ctr"/>
+              <a:endParaRPr lang="en-US"/>
+            </a:p>
+          </p:txBody>
+        </p:sp>
+        <p:sp>
+          <p:nvSpPr>
+            <p:cNvPr id="395" name="Rounded Rectangle 394"/>
+            <p:cNvSpPr/>
+            <p:nvPr/>
+          </p:nvSpPr>
+          <p:spPr>
+            <a:xfrm>
+              <a:off x="3016430" y="2120404"/>
+              <a:ext cx="169472" cy="317138"/>
+            </a:xfrm>
+            <a:prstGeom prst="roundRect">
+              <a:avLst/>
+            </a:prstGeom>
+            <a:solidFill>
+              <a:srgbClr val="000000">
+                <a:alpha val="30196"/>
+              </a:srgbClr>
+            </a:solidFill>
+            <a:ln>
+              <a:noFill/>
+            </a:ln>
+          </p:spPr>
+          <p:style>
+            <a:lnRef idx="2">
+              <a:schemeClr val="accent1">
+                <a:shade val="50000"/>
+              </a:schemeClr>
+            </a:lnRef>
+            <a:fillRef idx="1">
+              <a:schemeClr val="accent1"/>
+            </a:fillRef>
+            <a:effectRef idx="0">
+              <a:schemeClr val="accent1"/>
+            </a:effectRef>
+            <a:fontRef idx="minor">
+              <a:schemeClr val="lt1"/>
+            </a:fontRef>
+          </p:style>
+          <p:txBody>
+            <a:bodyPr rtlCol="0" anchor="ctr"/>
+            <a:lstStyle/>
+            <a:p>
+              <a:pPr algn="ctr"/>
+              <a:endParaRPr lang="en-US"/>
+            </a:p>
+          </p:txBody>
+        </p:sp>
+        <p:sp>
+          <p:nvSpPr>
+            <p:cNvPr id="396" name="Rounded Rectangle 395"/>
+            <p:cNvSpPr/>
+            <p:nvPr/>
+          </p:nvSpPr>
+          <p:spPr>
+            <a:xfrm>
+              <a:off x="2876197" y="2455912"/>
+              <a:ext cx="311241" cy="45719"/>
+            </a:xfrm>
+            <a:prstGeom prst="roundRect">
+              <a:avLst/>
+            </a:prstGeom>
+            <a:solidFill>
+              <a:srgbClr val="000000">
+                <a:alpha val="30196"/>
+              </a:srgbClr>
+            </a:solidFill>
+            <a:ln>
+              <a:noFill/>
+            </a:ln>
+          </p:spPr>
+          <p:style>
+            <a:lnRef idx="2">
+              <a:schemeClr val="accent1">
+                <a:shade val="50000"/>
+              </a:schemeClr>
+            </a:lnRef>
+            <a:fillRef idx="1">
+              <a:schemeClr val="accent1"/>
+            </a:fillRef>
+            <a:effectRef idx="0">
+              <a:schemeClr val="accent1"/>
+            </a:effectRef>
+            <a:fontRef idx="minor">
+              <a:schemeClr val="lt1"/>
+            </a:fontRef>
+          </p:style>
+          <p:txBody>
+            <a:bodyPr rtlCol="0" anchor="ctr"/>
+            <a:lstStyle/>
+            <a:p>
+              <a:pPr algn="ctr"/>
+              <a:endParaRPr lang="en-US"/>
+            </a:p>
+          </p:txBody>
+        </p:sp>
+        <p:sp>
+          <p:nvSpPr>
+            <p:cNvPr id="397" name="Rounded Rectangle 396"/>
+            <p:cNvSpPr/>
+            <p:nvPr/>
+          </p:nvSpPr>
+          <p:spPr>
+            <a:xfrm>
+              <a:off x="2869622" y="2056432"/>
+              <a:ext cx="311241" cy="45719"/>
+            </a:xfrm>
+            <a:prstGeom prst="roundRect">
+              <a:avLst/>
+            </a:prstGeom>
+            <a:solidFill>
+              <a:srgbClr val="000000">
+                <a:alpha val="30196"/>
+              </a:srgbClr>
+            </a:solidFill>
+            <a:ln>
+              <a:noFill/>
+            </a:ln>
+          </p:spPr>
+          <p:style>
+            <a:lnRef idx="2">
+              <a:schemeClr val="accent1">
+                <a:shade val="50000"/>
+              </a:schemeClr>
+            </a:lnRef>
+            <a:fillRef idx="1">
+              <a:schemeClr val="accent1"/>
+            </a:fillRef>
+            <a:effectRef idx="0">
+              <a:schemeClr val="accent1"/>
+            </a:effectRef>
+            <a:fontRef idx="minor">
+              <a:schemeClr val="lt1"/>
+            </a:fontRef>
+          </p:style>
+          <p:txBody>
+            <a:bodyPr rtlCol="0" anchor="ctr"/>
+            <a:lstStyle/>
+            <a:p>
+              <a:pPr algn="ctr"/>
+              <a:endParaRPr lang="en-US"/>
+            </a:p>
+          </p:txBody>
+        </p:sp>
+      </p:grpSp>
+      <p:sp>
+        <p:nvSpPr>
+          <p:cNvPr id="292" name="Rectangle 291"/>
+          <p:cNvSpPr/>
+          <p:nvPr/>
+        </p:nvSpPr>
+        <p:spPr>
+          <a:xfrm>
+            <a:off x="207322" y="4140772"/>
+            <a:ext cx="1288702" cy="771886"/>
+          </a:xfrm>
+          <a:prstGeom prst="rect">
+            <a:avLst/>
+          </a:prstGeom>
+          <a:solidFill>
+            <a:schemeClr val="bg2">
+              <a:lumMod val="50000"/>
+            </a:schemeClr>
+          </a:solidFill>
+          <a:ln>
+            <a:noFill/>
+          </a:ln>
+        </p:spPr>
+        <p:style>
+          <a:lnRef idx="2">
+            <a:schemeClr val="accent1">
+              <a:shade val="50000"/>
+            </a:schemeClr>
+          </a:lnRef>
+          <a:fillRef idx="1">
+            <a:schemeClr val="accent1"/>
+          </a:fillRef>
+          <a:effectRef idx="0">
+            <a:schemeClr val="accent1"/>
+          </a:effectRef>
+          <a:fontRef idx="minor">
+            <a:schemeClr val="lt1"/>
+          </a:fontRef>
+        </p:style>
+        <p:txBody>
+          <a:bodyPr rtlCol="0" anchor="ctr"/>
+          <a:lstStyle/>
+          <a:p>
+            <a:pPr algn="ctr"/>
+            <a:endParaRPr lang="en-US" dirty="0"/>
+          </a:p>
+        </p:txBody>
+      </p:sp>
+      <p:sp>
+        <p:nvSpPr>
+          <p:cNvPr id="398" name="Rectangle 397"/>
+          <p:cNvSpPr/>
+          <p:nvPr/>
+        </p:nvSpPr>
+        <p:spPr>
+          <a:xfrm>
+            <a:off x="4116171" y="263645"/>
+            <a:ext cx="846978" cy="376299"/>
+          </a:xfrm>
+          <a:prstGeom prst="rect">
+            <a:avLst/>
+          </a:prstGeom>
+          <a:solidFill>
+            <a:schemeClr val="bg2">
+              <a:lumMod val="50000"/>
+            </a:schemeClr>
+          </a:solidFill>
+          <a:ln>
+            <a:noFill/>
+          </a:ln>
+        </p:spPr>
+        <p:style>
+          <a:lnRef idx="2">
+            <a:schemeClr val="accent1">
+              <a:shade val="50000"/>
+            </a:schemeClr>
+          </a:lnRef>
+          <a:fillRef idx="1">
+            <a:schemeClr val="accent1"/>
+          </a:fillRef>
+          <a:effectRef idx="0">
+            <a:schemeClr val="accent1"/>
+          </a:effectRef>
+          <a:fontRef idx="minor">
+            <a:schemeClr val="lt1"/>
+          </a:fontRef>
+        </p:style>
+        <p:txBody>
+          <a:bodyPr rtlCol="0" anchor="ctr"/>
+          <a:lstStyle/>
+          <a:p>
+            <a:pPr algn="ctr"/>
+            <a:endParaRPr lang="en-US" dirty="0">
+              <a:solidFill>
+                <a:schemeClr val="tx1"/>
+              </a:solidFill>
+            </a:endParaRPr>
+          </a:p>
+        </p:txBody>
+      </p:sp>
+      <p:grpSp>
+        <p:nvGrpSpPr>
+          <p:cNvPr id="123" name="Group 122"/>
+          <p:cNvGrpSpPr/>
+          <p:nvPr/>
+        </p:nvGrpSpPr>
+        <p:grpSpPr>
+          <a:xfrm>
+            <a:off x="202508" y="4133901"/>
+            <a:ext cx="1304039" cy="773312"/>
+            <a:chOff x="206032" y="4254500"/>
+            <a:chExt cx="1323707" cy="644240"/>
+          </a:xfrm>
+        </p:grpSpPr>
+        <p:grpSp>
+          <p:nvGrpSpPr>
+            <p:cNvPr id="58" name="Group 57"/>
+            <p:cNvGrpSpPr/>
+            <p:nvPr/>
+          </p:nvGrpSpPr>
+          <p:grpSpPr>
+            <a:xfrm>
+              <a:off x="206032" y="4254500"/>
+              <a:ext cx="1323707" cy="644240"/>
+              <a:chOff x="238393" y="4254500"/>
+              <a:chExt cx="1323707" cy="644240"/>
+            </a:xfrm>
+          </p:grpSpPr>
+          <p:sp>
+            <p:nvSpPr>
+              <p:cNvPr id="52" name="Rectangle 51"/>
+              <p:cNvSpPr/>
+              <p:nvPr/>
+            </p:nvSpPr>
+            <p:spPr>
+              <a:xfrm>
+                <a:off x="243972" y="4254500"/>
+                <a:ext cx="1318128" cy="644240"/>
+              </a:xfrm>
+              <a:prstGeom prst="rect">
+                <a:avLst/>
+              </a:prstGeom>
+              <a:solidFill>
+                <a:srgbClr val="000000">
+                  <a:alpha val="14902"/>
+                </a:srgbClr>
+              </a:solidFill>
+              <a:ln>
+                <a:noFill/>
+              </a:ln>
+            </p:spPr>
+            <p:style>
+              <a:lnRef idx="2">
+                <a:schemeClr val="accent1">
+                  <a:shade val="50000"/>
+                </a:schemeClr>
+              </a:lnRef>
+              <a:fillRef idx="1">
+                <a:schemeClr val="accent1"/>
+              </a:fillRef>
+              <a:effectRef idx="0">
+                <a:schemeClr val="accent1"/>
+              </a:effectRef>
+              <a:fontRef idx="minor">
+                <a:schemeClr val="lt1"/>
+              </a:fontRef>
+            </p:style>
+            <p:txBody>
+              <a:bodyPr rtlCol="0" anchor="ctr"/>
+              <a:lstStyle/>
+              <a:p>
+                <a:pPr algn="ctr"/>
+                <a:endParaRPr lang="en-US"/>
+              </a:p>
+            </p:txBody>
+          </p:sp>
+          <p:sp>
+            <p:nvSpPr>
+              <p:cNvPr id="53" name="Rectangle 52"/>
+              <p:cNvSpPr/>
+              <p:nvPr/>
+            </p:nvSpPr>
+            <p:spPr>
+              <a:xfrm>
+                <a:off x="243972" y="4254500"/>
+                <a:ext cx="1207583" cy="644240"/>
+              </a:xfrm>
+              <a:prstGeom prst="rect">
+                <a:avLst/>
+              </a:prstGeom>
+              <a:solidFill>
+                <a:srgbClr val="000000">
+                  <a:alpha val="14902"/>
+                </a:srgbClr>
+              </a:solidFill>
+              <a:ln>
+                <a:noFill/>
+              </a:ln>
+            </p:spPr>
+            <p:style>
+              <a:lnRef idx="2">
+                <a:schemeClr val="accent1">
+                  <a:shade val="50000"/>
+                </a:schemeClr>
+              </a:lnRef>
+              <a:fillRef idx="1">
+                <a:schemeClr val="accent1"/>
+              </a:fillRef>
+              <a:effectRef idx="0">
+                <a:schemeClr val="accent1"/>
+              </a:effectRef>
+              <a:fontRef idx="minor">
+                <a:schemeClr val="lt1"/>
+              </a:fontRef>
+            </p:style>
+            <p:txBody>
+              <a:bodyPr rtlCol="0" anchor="ctr"/>
+              <a:lstStyle/>
+              <a:p>
+                <a:pPr algn="ctr"/>
+                <a:endParaRPr lang="en-US"/>
+              </a:p>
+            </p:txBody>
+          </p:sp>
+          <p:sp>
+            <p:nvSpPr>
+              <p:cNvPr id="54" name="Rectangle 53"/>
+              <p:cNvSpPr/>
+              <p:nvPr/>
+            </p:nvSpPr>
+            <p:spPr>
+              <a:xfrm>
+                <a:off x="243972" y="4254500"/>
+                <a:ext cx="1108578" cy="644240"/>
+              </a:xfrm>
+              <a:prstGeom prst="rect">
+                <a:avLst/>
+              </a:prstGeom>
+              <a:solidFill>
+                <a:srgbClr val="000000">
+                  <a:alpha val="14902"/>
+                </a:srgbClr>
+              </a:solidFill>
+              <a:ln>
+                <a:noFill/>
+              </a:ln>
+            </p:spPr>
+            <p:style>
+              <a:lnRef idx="2">
+                <a:schemeClr val="accent1">
+                  <a:shade val="50000"/>
+                </a:schemeClr>
+              </a:lnRef>
+              <a:fillRef idx="1">
+                <a:schemeClr val="accent1"/>
+              </a:fillRef>
+              <a:effectRef idx="0">
+                <a:schemeClr val="accent1"/>
+              </a:effectRef>
+              <a:fontRef idx="minor">
+                <a:schemeClr val="lt1"/>
+              </a:fontRef>
+            </p:style>
+            <p:txBody>
+              <a:bodyPr rtlCol="0" anchor="ctr"/>
+              <a:lstStyle/>
+              <a:p>
+                <a:pPr algn="ctr"/>
+                <a:endParaRPr lang="en-US"/>
+              </a:p>
+            </p:txBody>
+          </p:sp>
+          <p:sp>
+            <p:nvSpPr>
+              <p:cNvPr id="55" name="Rectangle 54"/>
+              <p:cNvSpPr/>
+              <p:nvPr/>
+            </p:nvSpPr>
+            <p:spPr>
+              <a:xfrm>
+                <a:off x="252076" y="4254500"/>
+                <a:ext cx="986174" cy="644240"/>
+              </a:xfrm>
+              <a:prstGeom prst="rect">
+                <a:avLst/>
+              </a:prstGeom>
+              <a:solidFill>
+                <a:srgbClr val="000000">
+                  <a:alpha val="14902"/>
+                </a:srgbClr>
+              </a:solidFill>
+              <a:ln>
+                <a:noFill/>
+              </a:ln>
+            </p:spPr>
+            <p:style>
+              <a:lnRef idx="2">
+                <a:schemeClr val="accent1">
+                  <a:shade val="50000"/>
+                </a:schemeClr>
+              </a:lnRef>
+              <a:fillRef idx="1">
+                <a:schemeClr val="accent1"/>
+              </a:fillRef>
+              <a:effectRef idx="0">
+                <a:schemeClr val="accent1"/>
+              </a:effectRef>
+              <a:fontRef idx="minor">
+                <a:schemeClr val="lt1"/>
+              </a:fontRef>
+            </p:style>
+            <p:txBody>
+              <a:bodyPr rtlCol="0" anchor="ctr"/>
+              <a:lstStyle/>
+              <a:p>
+                <a:pPr algn="ctr"/>
+                <a:endParaRPr lang="en-US"/>
+              </a:p>
+            </p:txBody>
+          </p:sp>
+          <p:sp>
+            <p:nvSpPr>
+              <p:cNvPr id="56" name="Rectangle 55"/>
+              <p:cNvSpPr/>
+              <p:nvPr/>
+            </p:nvSpPr>
+            <p:spPr>
+              <a:xfrm>
+                <a:off x="240607" y="4254500"/>
+                <a:ext cx="909030" cy="644240"/>
+              </a:xfrm>
+              <a:prstGeom prst="rect">
+                <a:avLst/>
+              </a:prstGeom>
+              <a:solidFill>
+                <a:srgbClr val="000000">
+                  <a:alpha val="14902"/>
+                </a:srgbClr>
+              </a:solidFill>
+              <a:ln>
+                <a:noFill/>
+              </a:ln>
+            </p:spPr>
+            <p:style>
+              <a:lnRef idx="2">
+                <a:schemeClr val="accent1">
+                  <a:shade val="50000"/>
+                </a:schemeClr>
+              </a:lnRef>
+              <a:fillRef idx="1">
+                <a:schemeClr val="accent1"/>
+              </a:fillRef>
+              <a:effectRef idx="0">
+                <a:schemeClr val="accent1"/>
+              </a:effectRef>
+              <a:fontRef idx="minor">
+                <a:schemeClr val="lt1"/>
+              </a:fontRef>
+            </p:style>
+            <p:txBody>
+              <a:bodyPr rtlCol="0" anchor="ctr"/>
+              <a:lstStyle/>
+              <a:p>
+                <a:pPr algn="ctr"/>
+                <a:endParaRPr lang="en-US"/>
+              </a:p>
+            </p:txBody>
+          </p:sp>
+          <p:sp>
+            <p:nvSpPr>
+              <p:cNvPr id="57" name="Rectangle 56"/>
+              <p:cNvSpPr/>
+              <p:nvPr/>
+            </p:nvSpPr>
+            <p:spPr>
+              <a:xfrm>
+                <a:off x="248058" y="4254500"/>
+                <a:ext cx="799692" cy="644240"/>
+              </a:xfrm>
+              <a:prstGeom prst="rect">
+                <a:avLst/>
+              </a:prstGeom>
+              <a:solidFill>
+                <a:srgbClr val="000000">
+                  <a:alpha val="14902"/>
+                </a:srgbClr>
+              </a:solidFill>
+              <a:ln>
+                <a:noFill/>
+              </a:ln>
+            </p:spPr>
+            <p:style>
+              <a:lnRef idx="2">
+                <a:schemeClr val="accent1">
+                  <a:shade val="50000"/>
+                </a:schemeClr>
+              </a:lnRef>
+              <a:fillRef idx="1">
+                <a:schemeClr val="accent1"/>
+              </a:fillRef>
+              <a:effectRef idx="0">
+                <a:schemeClr val="accent1"/>
+              </a:effectRef>
+              <a:fontRef idx="minor">
+                <a:schemeClr val="lt1"/>
+              </a:fontRef>
+            </p:style>
+            <p:txBody>
+              <a:bodyPr rtlCol="0" anchor="ctr"/>
+              <a:lstStyle/>
+              <a:p>
+                <a:pPr algn="ctr"/>
+                <a:endParaRPr lang="en-US"/>
+              </a:p>
+            </p:txBody>
+          </p:sp>
+          <p:sp>
+            <p:nvSpPr>
+              <p:cNvPr id="59" name="Rectangle 58"/>
+              <p:cNvSpPr/>
+              <p:nvPr/>
+            </p:nvSpPr>
+            <p:spPr>
+              <a:xfrm>
+                <a:off x="238393" y="4254500"/>
+                <a:ext cx="714107" cy="644240"/>
+              </a:xfrm>
+              <a:prstGeom prst="rect">
+                <a:avLst/>
+              </a:prstGeom>
+              <a:solidFill>
+                <a:srgbClr val="000000">
+                  <a:alpha val="14902"/>
+                </a:srgbClr>
+              </a:solidFill>
+              <a:ln>
+                <a:noFill/>
+              </a:ln>
+            </p:spPr>
+            <p:style>
+              <a:lnRef idx="2">
+                <a:schemeClr val="accent1">
+                  <a:shade val="50000"/>
+                </a:schemeClr>
+              </a:lnRef>
+              <a:fillRef idx="1">
+                <a:schemeClr val="accent1"/>
+              </a:fillRef>
+              <a:effectRef idx="0">
+                <a:schemeClr val="accent1"/>
+              </a:effectRef>
+              <a:fontRef idx="minor">
+                <a:schemeClr val="lt1"/>
+              </a:fontRef>
+            </p:style>
+            <p:txBody>
+              <a:bodyPr rtlCol="0" anchor="ctr"/>
+              <a:lstStyle/>
+              <a:p>
+                <a:pPr algn="ctr"/>
+                <a:endParaRPr lang="en-US"/>
+              </a:p>
+            </p:txBody>
+          </p:sp>
+        </p:grpSp>
+        <p:sp>
+          <p:nvSpPr>
+            <p:cNvPr id="122" name="TextBox 121"/>
+            <p:cNvSpPr txBox="1"/>
+            <p:nvPr/>
+          </p:nvSpPr>
+          <p:spPr>
+            <a:xfrm>
+              <a:off x="235250" y="4310828"/>
+              <a:ext cx="1020142" cy="423070"/>
+            </a:xfrm>
+            <a:prstGeom prst="rect">
+              <a:avLst/>
+            </a:prstGeom>
+            <a:noFill/>
+          </p:spPr>
+          <p:txBody>
+            <a:bodyPr wrap="square" rtlCol="0">
+              <a:spAutoFit/>
+            </a:bodyPr>
+            <a:lstStyle/>
+            <a:p>
+              <a:r>
+                <a:rPr lang="ro-RO" dirty="0" smtClean="0">
+                  <a:solidFill>
+                    <a:schemeClr val="bg1"/>
+                  </a:solidFill>
+                  <a:latin typeface="Libre Baskerville" panose="02000000000000000000" pitchFamily="2" charset="0"/>
+                </a:rPr>
+                <a:t>Wine Cellar</a:t>
+              </a:r>
+              <a:endParaRPr lang="en-US" dirty="0">
+                <a:solidFill>
+                  <a:schemeClr val="bg1"/>
+                </a:solidFill>
+                <a:latin typeface="Libre Baskerville" panose="02000000000000000000" pitchFamily="2" charset="0"/>
+              </a:endParaRPr>
+            </a:p>
+          </p:txBody>
+        </p:sp>
+      </p:grpSp>
+      <p:sp>
+        <p:nvSpPr>
+          <p:cNvPr id="302" name="Rectangle 301"/>
+          <p:cNvSpPr/>
+          <p:nvPr/>
+        </p:nvSpPr>
+        <p:spPr>
+          <a:xfrm>
+            <a:off x="6264343" y="244534"/>
+            <a:ext cx="882514" cy="1034156"/>
+          </a:xfrm>
+          <a:prstGeom prst="rect">
+            <a:avLst/>
+          </a:prstGeom>
+          <a:solidFill>
+            <a:schemeClr val="bg2">
+              <a:lumMod val="50000"/>
+            </a:schemeClr>
+          </a:solidFill>
+          <a:ln>
+            <a:noFill/>
+          </a:ln>
+        </p:spPr>
+        <p:style>
+          <a:lnRef idx="2">
+            <a:schemeClr val="accent1">
+              <a:shade val="50000"/>
+            </a:schemeClr>
+          </a:lnRef>
+          <a:fillRef idx="1">
+            <a:schemeClr val="accent1"/>
+          </a:fillRef>
+          <a:effectRef idx="0">
+            <a:schemeClr val="accent1"/>
+          </a:effectRef>
+          <a:fontRef idx="minor">
+            <a:schemeClr val="lt1"/>
+          </a:fontRef>
+        </p:style>
+        <p:txBody>
+          <a:bodyPr rtlCol="0" anchor="ctr"/>
+          <a:lstStyle/>
+          <a:p>
+            <a:pPr algn="ctr"/>
+            <a:endParaRPr lang="en-US" dirty="0"/>
+          </a:p>
+        </p:txBody>
+      </p:sp>
+      <p:grpSp>
+        <p:nvGrpSpPr>
+          <p:cNvPr id="184" name="Group 183"/>
+          <p:cNvGrpSpPr/>
+          <p:nvPr/>
+        </p:nvGrpSpPr>
+        <p:grpSpPr>
+          <a:xfrm rot="5400000">
+            <a:off x="6179892" y="315181"/>
+            <a:ext cx="1035437" cy="891585"/>
+            <a:chOff x="206032" y="4254498"/>
+            <a:chExt cx="1323707" cy="644242"/>
+          </a:xfrm>
+        </p:grpSpPr>
+        <p:grpSp>
+          <p:nvGrpSpPr>
+            <p:cNvPr id="185" name="Group 184"/>
+            <p:cNvGrpSpPr/>
+            <p:nvPr/>
+          </p:nvGrpSpPr>
+          <p:grpSpPr>
+            <a:xfrm>
+              <a:off x="206032" y="4254498"/>
+              <a:ext cx="1323707" cy="644242"/>
+              <a:chOff x="238393" y="4254498"/>
+              <a:chExt cx="1323707" cy="644242"/>
+            </a:xfrm>
+          </p:grpSpPr>
+          <p:sp>
+            <p:nvSpPr>
+              <p:cNvPr id="187" name="Rectangle 186"/>
+              <p:cNvSpPr/>
+              <p:nvPr/>
+            </p:nvSpPr>
+            <p:spPr>
+              <a:xfrm>
+                <a:off x="243972" y="4254500"/>
+                <a:ext cx="1318128" cy="644240"/>
+              </a:xfrm>
+              <a:prstGeom prst="rect">
+                <a:avLst/>
+              </a:prstGeom>
+              <a:solidFill>
+                <a:srgbClr val="000000">
+                  <a:alpha val="14902"/>
+                </a:srgbClr>
+              </a:solidFill>
+              <a:ln>
+                <a:noFill/>
+              </a:ln>
+            </p:spPr>
+            <p:style>
+              <a:lnRef idx="2">
+                <a:schemeClr val="accent1">
+                  <a:shade val="50000"/>
+                </a:schemeClr>
+              </a:lnRef>
+              <a:fillRef idx="1">
+                <a:schemeClr val="accent1"/>
+              </a:fillRef>
+              <a:effectRef idx="0">
+                <a:schemeClr val="accent1"/>
+              </a:effectRef>
+              <a:fontRef idx="minor">
+                <a:schemeClr val="lt1"/>
+              </a:fontRef>
+            </p:style>
+            <p:txBody>
+              <a:bodyPr rtlCol="0" anchor="ctr"/>
+              <a:lstStyle/>
+              <a:p>
+                <a:pPr algn="ctr"/>
+                <a:endParaRPr lang="en-US"/>
+              </a:p>
+            </p:txBody>
+          </p:sp>
+          <p:sp>
+            <p:nvSpPr>
+              <p:cNvPr id="188" name="Rectangle 187"/>
+              <p:cNvSpPr/>
+              <p:nvPr/>
+            </p:nvSpPr>
+            <p:spPr>
+              <a:xfrm>
+                <a:off x="243972" y="4254500"/>
+                <a:ext cx="1207583" cy="644240"/>
+              </a:xfrm>
+              <a:prstGeom prst="rect">
+                <a:avLst/>
+              </a:prstGeom>
+              <a:solidFill>
+                <a:srgbClr val="000000">
+                  <a:alpha val="14902"/>
+                </a:srgbClr>
+              </a:solidFill>
+              <a:ln>
+                <a:noFill/>
+              </a:ln>
+            </p:spPr>
+            <p:style>
+              <a:lnRef idx="2">
+                <a:schemeClr val="accent1">
+                  <a:shade val="50000"/>
+                </a:schemeClr>
+              </a:lnRef>
+              <a:fillRef idx="1">
+                <a:schemeClr val="accent1"/>
+              </a:fillRef>
+              <a:effectRef idx="0">
+                <a:schemeClr val="accent1"/>
+              </a:effectRef>
+              <a:fontRef idx="minor">
+                <a:schemeClr val="lt1"/>
+              </a:fontRef>
+            </p:style>
+            <p:txBody>
+              <a:bodyPr rtlCol="0" anchor="ctr"/>
+              <a:lstStyle/>
+              <a:p>
+                <a:pPr algn="ctr"/>
+                <a:endParaRPr lang="en-US"/>
+              </a:p>
+            </p:txBody>
+          </p:sp>
+          <p:sp>
+            <p:nvSpPr>
+              <p:cNvPr id="189" name="Rectangle 188"/>
+              <p:cNvSpPr/>
+              <p:nvPr/>
+            </p:nvSpPr>
+            <p:spPr>
+              <a:xfrm>
+                <a:off x="243972" y="4254500"/>
+                <a:ext cx="1108578" cy="644240"/>
+              </a:xfrm>
+              <a:prstGeom prst="rect">
+                <a:avLst/>
+              </a:prstGeom>
+              <a:solidFill>
+                <a:srgbClr val="000000">
+                  <a:alpha val="14902"/>
+                </a:srgbClr>
+              </a:solidFill>
+              <a:ln>
+                <a:noFill/>
+              </a:ln>
+            </p:spPr>
+            <p:style>
+              <a:lnRef idx="2">
+                <a:schemeClr val="accent1">
+                  <a:shade val="50000"/>
+                </a:schemeClr>
+              </a:lnRef>
+              <a:fillRef idx="1">
+                <a:schemeClr val="accent1"/>
+              </a:fillRef>
+              <a:effectRef idx="0">
+                <a:schemeClr val="accent1"/>
+              </a:effectRef>
+              <a:fontRef idx="minor">
+                <a:schemeClr val="lt1"/>
+              </a:fontRef>
+            </p:style>
+            <p:txBody>
+              <a:bodyPr rtlCol="0" anchor="ctr"/>
+              <a:lstStyle/>
+              <a:p>
+                <a:pPr algn="ctr"/>
+                <a:endParaRPr lang="en-US"/>
+              </a:p>
+            </p:txBody>
+          </p:sp>
+          <p:sp>
+            <p:nvSpPr>
+              <p:cNvPr id="190" name="Rectangle 189"/>
+              <p:cNvSpPr/>
+              <p:nvPr/>
+            </p:nvSpPr>
+            <p:spPr>
+              <a:xfrm>
+                <a:off x="252076" y="4254500"/>
+                <a:ext cx="986174" cy="644240"/>
+              </a:xfrm>
+              <a:prstGeom prst="rect">
+                <a:avLst/>
+              </a:prstGeom>
+              <a:solidFill>
+                <a:srgbClr val="000000">
+                  <a:alpha val="14902"/>
+                </a:srgbClr>
+              </a:solidFill>
+              <a:ln>
+                <a:noFill/>
+              </a:ln>
+            </p:spPr>
+            <p:style>
+              <a:lnRef idx="2">
+                <a:schemeClr val="accent1">
+                  <a:shade val="50000"/>
+                </a:schemeClr>
+              </a:lnRef>
+              <a:fillRef idx="1">
+                <a:schemeClr val="accent1"/>
+              </a:fillRef>
+              <a:effectRef idx="0">
+                <a:schemeClr val="accent1"/>
+              </a:effectRef>
+              <a:fontRef idx="minor">
+                <a:schemeClr val="lt1"/>
+              </a:fontRef>
+            </p:style>
+            <p:txBody>
+              <a:bodyPr rtlCol="0" anchor="ctr"/>
+              <a:lstStyle/>
+              <a:p>
+                <a:pPr algn="ctr"/>
+                <a:endParaRPr lang="en-US"/>
+              </a:p>
+            </p:txBody>
+          </p:sp>
+          <p:sp>
+            <p:nvSpPr>
+              <p:cNvPr id="191" name="Rectangle 190"/>
+              <p:cNvSpPr/>
+              <p:nvPr/>
+            </p:nvSpPr>
+            <p:spPr>
+              <a:xfrm>
+                <a:off x="240608" y="4254498"/>
+                <a:ext cx="909030" cy="644240"/>
+              </a:xfrm>
+              <a:prstGeom prst="rect">
+                <a:avLst/>
+              </a:prstGeom>
+              <a:solidFill>
+                <a:srgbClr val="000000">
+                  <a:alpha val="14902"/>
+                </a:srgbClr>
+              </a:solidFill>
+              <a:ln>
+                <a:noFill/>
+              </a:ln>
+            </p:spPr>
+            <p:style>
+              <a:lnRef idx="2">
+                <a:schemeClr val="accent1">
+                  <a:shade val="50000"/>
+                </a:schemeClr>
+              </a:lnRef>
+              <a:fillRef idx="1">
+                <a:schemeClr val="accent1"/>
+              </a:fillRef>
+              <a:effectRef idx="0">
+                <a:schemeClr val="accent1"/>
+              </a:effectRef>
+              <a:fontRef idx="minor">
+                <a:schemeClr val="lt1"/>
+              </a:fontRef>
+            </p:style>
+            <p:txBody>
+              <a:bodyPr rtlCol="0" anchor="ctr"/>
+              <a:lstStyle/>
+              <a:p>
+                <a:pPr algn="ctr"/>
+                <a:endParaRPr lang="en-US"/>
+              </a:p>
+            </p:txBody>
+          </p:sp>
+          <p:sp>
+            <p:nvSpPr>
+              <p:cNvPr id="192" name="Rectangle 191"/>
+              <p:cNvSpPr/>
+              <p:nvPr/>
+            </p:nvSpPr>
+            <p:spPr>
+              <a:xfrm>
+                <a:off x="248058" y="4254500"/>
+                <a:ext cx="799692" cy="644240"/>
+              </a:xfrm>
+              <a:prstGeom prst="rect">
+                <a:avLst/>
+              </a:prstGeom>
+              <a:solidFill>
+                <a:srgbClr val="000000">
+                  <a:alpha val="14902"/>
+                </a:srgbClr>
+              </a:solidFill>
+              <a:ln>
+                <a:noFill/>
+              </a:ln>
+            </p:spPr>
+            <p:style>
+              <a:lnRef idx="2">
+                <a:schemeClr val="accent1">
+                  <a:shade val="50000"/>
+                </a:schemeClr>
+              </a:lnRef>
+              <a:fillRef idx="1">
+                <a:schemeClr val="accent1"/>
+              </a:fillRef>
+              <a:effectRef idx="0">
+                <a:schemeClr val="accent1"/>
+              </a:effectRef>
+              <a:fontRef idx="minor">
+                <a:schemeClr val="lt1"/>
+              </a:fontRef>
+            </p:style>
+            <p:txBody>
+              <a:bodyPr rtlCol="0" anchor="ctr"/>
+              <a:lstStyle/>
+              <a:p>
+                <a:pPr algn="ctr"/>
+                <a:endParaRPr lang="en-US"/>
+              </a:p>
+            </p:txBody>
+          </p:sp>
+          <p:sp>
+            <p:nvSpPr>
+              <p:cNvPr id="193" name="Rectangle 192"/>
+              <p:cNvSpPr/>
+              <p:nvPr/>
+            </p:nvSpPr>
+            <p:spPr>
+              <a:xfrm>
+                <a:off x="238393" y="4254500"/>
+                <a:ext cx="714107" cy="644240"/>
+              </a:xfrm>
+              <a:prstGeom prst="rect">
+                <a:avLst/>
+              </a:prstGeom>
+              <a:solidFill>
+                <a:srgbClr val="000000">
+                  <a:alpha val="14902"/>
+                </a:srgbClr>
+              </a:solidFill>
+              <a:ln>
+                <a:noFill/>
+              </a:ln>
+            </p:spPr>
+            <p:style>
+              <a:lnRef idx="2">
+                <a:schemeClr val="accent1">
+                  <a:shade val="50000"/>
+                </a:schemeClr>
+              </a:lnRef>
+              <a:fillRef idx="1">
+                <a:schemeClr val="accent1"/>
+              </a:fillRef>
+              <a:effectRef idx="0">
+                <a:schemeClr val="accent1"/>
+              </a:effectRef>
+              <a:fontRef idx="minor">
+                <a:schemeClr val="lt1"/>
+              </a:fontRef>
+            </p:style>
+            <p:txBody>
+              <a:bodyPr rtlCol="0" anchor="ctr"/>
+              <a:lstStyle/>
+              <a:p>
+                <a:pPr algn="ctr"/>
+                <a:endParaRPr lang="en-US"/>
+              </a:p>
+            </p:txBody>
+          </p:sp>
+        </p:grpSp>
+        <p:sp>
+          <p:nvSpPr>
+            <p:cNvPr id="186" name="TextBox 185"/>
+            <p:cNvSpPr txBox="1"/>
+            <p:nvPr/>
+          </p:nvSpPr>
+          <p:spPr>
+            <a:xfrm rot="16200000">
+              <a:off x="293841" y="4297485"/>
+              <a:ext cx="537884" cy="523221"/>
+            </a:xfrm>
+            <a:prstGeom prst="rect">
+              <a:avLst/>
+            </a:prstGeom>
+            <a:noFill/>
+          </p:spPr>
+          <p:txBody>
+            <a:bodyPr wrap="square" rtlCol="0">
+              <a:spAutoFit/>
+            </a:bodyPr>
+            <a:lstStyle/>
+            <a:p>
+              <a:r>
+                <a:rPr lang="ro-RO" sz="1000" dirty="0" smtClean="0">
+                  <a:solidFill>
+                    <a:schemeClr val="bg1"/>
+                  </a:solidFill>
+                  <a:latin typeface="Libre Baskerville" panose="02000000000000000000" pitchFamily="2" charset="0"/>
+                </a:rPr>
+                <a:t>Second Floor</a:t>
+              </a:r>
+              <a:endParaRPr lang="en-US" sz="1000" dirty="0">
+                <a:solidFill>
+                  <a:schemeClr val="bg1"/>
+                </a:solidFill>
+                <a:latin typeface="Libre Baskerville" panose="02000000000000000000" pitchFamily="2" charset="0"/>
+              </a:endParaRPr>
+            </a:p>
+          </p:txBody>
+        </p:sp>
+      </p:grpSp>
+      <p:cxnSp>
+        <p:nvCxnSpPr>
+          <p:cNvPr id="273" name="Straight Connector 272"/>
+          <p:cNvCxnSpPr/>
+          <p:nvPr/>
+        </p:nvCxnSpPr>
+        <p:spPr>
+          <a:xfrm flipV="1">
+            <a:off x="7153319" y="244759"/>
+            <a:ext cx="0" cy="3862511"/>
+          </a:xfrm>
+          <a:prstGeom prst="line">
+            <a:avLst/>
+          </a:prstGeom>
+          <a:ln w="38100">
+            <a:solidFill>
+              <a:schemeClr val="bg2">
+                <a:lumMod val="50000"/>
+              </a:schemeClr>
+            </a:solidFill>
+          </a:ln>
+        </p:spPr>
+        <p:style>
+          <a:lnRef idx="1">
+            <a:schemeClr val="accent1"/>
+          </a:lnRef>
+          <a:fillRef idx="0">
+            <a:schemeClr val="accent1"/>
+          </a:fillRef>
+          <a:effectRef idx="0">
+            <a:schemeClr val="accent1"/>
+          </a:effectRef>
+          <a:fontRef idx="minor">
+            <a:schemeClr val="tx1"/>
+          </a:fontRef>
+        </p:style>
+      </p:cxnSp>
+      <p:cxnSp>
+        <p:nvCxnSpPr>
+          <p:cNvPr id="93" name="Straight Connector 92"/>
+          <p:cNvCxnSpPr/>
+          <p:nvPr/>
+        </p:nvCxnSpPr>
+        <p:spPr>
+          <a:xfrm flipV="1">
+            <a:off x="6270802" y="244759"/>
+            <a:ext cx="0" cy="1562896"/>
+          </a:xfrm>
+          <a:prstGeom prst="line">
+            <a:avLst/>
+          </a:prstGeom>
+          <a:ln w="38100">
+            <a:solidFill>
+              <a:schemeClr val="bg2">
+                <a:lumMod val="50000"/>
+              </a:schemeClr>
+            </a:solidFill>
+          </a:ln>
+        </p:spPr>
+        <p:style>
+          <a:lnRef idx="1">
+            <a:schemeClr val="accent1"/>
+          </a:lnRef>
+          <a:fillRef idx="0">
+            <a:schemeClr val="accent1"/>
+          </a:fillRef>
+          <a:effectRef idx="0">
+            <a:schemeClr val="accent1"/>
+          </a:effectRef>
+          <a:fontRef idx="minor">
+            <a:schemeClr val="tx1"/>
+          </a:fontRef>
+        </p:style>
+      </p:cxnSp>
+    </p:spTree>
+    <p:extLst>
+      <p:ext uri="{BB962C8B-B14F-4D97-AF65-F5344CB8AC3E}">
+        <p14:creationId xmlns:p14="http://schemas.microsoft.com/office/powerpoint/2010/main" val="1492778102"/>
+      </p:ext>
+    </p:extLst>
+  </p:cSld>
+  <p:clrMapOvr>
+    <a:masterClrMapping/>
+  </p:clrMapOvr>
+  <p:timing>
+    <p:tnLst>
+      <p:par>
+        <p:cTn id="1" dur="indefinite" restart="never" nodeType="tmRoot"/>
+      </p:par>
+    </p:tnLst>
+  </p:timing>
+</p:sld>
+</file>
+
 <file path=ppt/theme/theme1.xml><?xml version="1.0" encoding="utf-8"?>
 <a:theme xmlns:a="http://schemas.openxmlformats.org/drawingml/2006/main" name="Office Theme">
   <a:themeElements>
